--- a/modules/module-01-industrial-demand-generation/delivery-pack/slide-decks/exports/lesson-04-moin-map-of-informational-needs.pptx
+++ b/modules/module-01-industrial-demand-generation/delivery-pack/slide-decks/exports/lesson-04-moin-map-of-informational-needs.pptx
@@ -2,27 +2,27 @@
 <file path=ppt/presentation.xml><?xml version="1.0" encoding="utf-8"?>
 <p:presentation xmlns:p="http://schemas.openxmlformats.org/presentationml/2006/main">
   <p:sldMasterIdLst>
-    <p:sldMasterId xmlns:r="http://schemas.openxmlformats.org/officeDocument/2006/relationships" id="2147483648" r:id="Re0518bbd2a2647d7"/>
+    <p:sldMasterId xmlns:r="http://schemas.openxmlformats.org/officeDocument/2006/relationships" id="2147483648" r:id="R69caa995920e4ea7"/>
   </p:sldMasterIdLst>
   <p:notesMasterIdLst>
-    <p:notesMasterId xmlns:r="http://schemas.openxmlformats.org/officeDocument/2006/relationships" r:id="R429ef8a55d7f4e32"/>
+    <p:notesMasterId xmlns:r="http://schemas.openxmlformats.org/officeDocument/2006/relationships" r:id="R2ce002be6c6b49c2"/>
   </p:notesMasterIdLst>
   <p:sldIdLst>
-    <p:sldId xmlns:r="http://schemas.openxmlformats.org/officeDocument/2006/relationships" id="256" r:id="R805e0865e67444dc"/>
-    <p:sldId xmlns:r="http://schemas.openxmlformats.org/officeDocument/2006/relationships" id="257" r:id="Rca567ae2f4cc4c11"/>
-    <p:sldId xmlns:r="http://schemas.openxmlformats.org/officeDocument/2006/relationships" id="258" r:id="R5b2d9218f3104bd9"/>
-    <p:sldId xmlns:r="http://schemas.openxmlformats.org/officeDocument/2006/relationships" id="259" r:id="R3721cb8dc3d74d90"/>
-    <p:sldId xmlns:r="http://schemas.openxmlformats.org/officeDocument/2006/relationships" id="260" r:id="R027b34f0cdae4c6c"/>
-    <p:sldId xmlns:r="http://schemas.openxmlformats.org/officeDocument/2006/relationships" id="261" r:id="R9a591c9e7f50460d"/>
-    <p:sldId xmlns:r="http://schemas.openxmlformats.org/officeDocument/2006/relationships" id="262" r:id="Rb1cd819b43344c4d"/>
-    <p:sldId xmlns:r="http://schemas.openxmlformats.org/officeDocument/2006/relationships" id="263" r:id="R0849f7c953df468d"/>
-    <p:sldId xmlns:r="http://schemas.openxmlformats.org/officeDocument/2006/relationships" id="264" r:id="Rcc1c9b4797a640a1"/>
-    <p:sldId xmlns:r="http://schemas.openxmlformats.org/officeDocument/2006/relationships" id="265" r:id="Rb92494be0f7a4d3e"/>
-    <p:sldId xmlns:r="http://schemas.openxmlformats.org/officeDocument/2006/relationships" id="266" r:id="R2dc80f6c8bdf41d1"/>
-    <p:sldId xmlns:r="http://schemas.openxmlformats.org/officeDocument/2006/relationships" id="267" r:id="Rce77e1034f3f429c"/>
-    <p:sldId xmlns:r="http://schemas.openxmlformats.org/officeDocument/2006/relationships" id="268" r:id="R73de733327f0429b"/>
-    <p:sldId xmlns:r="http://schemas.openxmlformats.org/officeDocument/2006/relationships" id="269" r:id="R48b0261c4f3c4614"/>
-    <p:sldId xmlns:r="http://schemas.openxmlformats.org/officeDocument/2006/relationships" id="270" r:id="Rd6797f4b823e4c06"/>
+    <p:sldId xmlns:r="http://schemas.openxmlformats.org/officeDocument/2006/relationships" id="256" r:id="R09a0da5a0a47484c"/>
+    <p:sldId xmlns:r="http://schemas.openxmlformats.org/officeDocument/2006/relationships" id="257" r:id="Rdee864c097c64bcd"/>
+    <p:sldId xmlns:r="http://schemas.openxmlformats.org/officeDocument/2006/relationships" id="258" r:id="R659dd63a3d4b43b4"/>
+    <p:sldId xmlns:r="http://schemas.openxmlformats.org/officeDocument/2006/relationships" id="259" r:id="R19af65d813564e84"/>
+    <p:sldId xmlns:r="http://schemas.openxmlformats.org/officeDocument/2006/relationships" id="260" r:id="R93192b0258a64271"/>
+    <p:sldId xmlns:r="http://schemas.openxmlformats.org/officeDocument/2006/relationships" id="261" r:id="Ra4322dd98e714587"/>
+    <p:sldId xmlns:r="http://schemas.openxmlformats.org/officeDocument/2006/relationships" id="262" r:id="Rd4371b1fff834985"/>
+    <p:sldId xmlns:r="http://schemas.openxmlformats.org/officeDocument/2006/relationships" id="263" r:id="R3a517efc346c458c"/>
+    <p:sldId xmlns:r="http://schemas.openxmlformats.org/officeDocument/2006/relationships" id="264" r:id="R251c002cf1054632"/>
+    <p:sldId xmlns:r="http://schemas.openxmlformats.org/officeDocument/2006/relationships" id="265" r:id="R0437f037c0a745e5"/>
+    <p:sldId xmlns:r="http://schemas.openxmlformats.org/officeDocument/2006/relationships" id="266" r:id="R3cab7bb46ecc41dd"/>
+    <p:sldId xmlns:r="http://schemas.openxmlformats.org/officeDocument/2006/relationships" id="267" r:id="R69b28c69a41d490e"/>
+    <p:sldId xmlns:r="http://schemas.openxmlformats.org/officeDocument/2006/relationships" id="268" r:id="R64951821b370400c"/>
+    <p:sldId xmlns:r="http://schemas.openxmlformats.org/officeDocument/2006/relationships" id="269" r:id="R30c43274c6c34415"/>
+    <p:sldId xmlns:r="http://schemas.openxmlformats.org/officeDocument/2006/relationships" id="270" r:id="R77d7fb2cc5d14cfa"/>
   </p:sldIdLst>
   <p:sldSz cx="12192000" cy="6858000"/>
   <p:notesSz cx="6858000" cy="9144000"/>
@@ -1493,7 +1493,7 @@
   </p:cSld>
   <p:clrMap bg1="lt1" tx1="dk1" bg2="lt2" tx2="dk2" accent1="accent1" accent2="accent2" accent3="accent3" accent4="accent4" accent5="accent5" accent6="accent6" hlink="hlink" folHlink="folHlink"/>
   <p:sldLayoutIdLst>
-    <p:sldLayoutId xmlns:r="http://schemas.openxmlformats.org/officeDocument/2006/relationships" id="2147483649" r:id="R0df4ebdacd3e4181"/>
+    <p:sldLayoutId xmlns:r="http://schemas.openxmlformats.org/officeDocument/2006/relationships" id="2147483649" r:id="R7d3d1fc30a7546a8"/>
   </p:sldLayoutIdLst>
   <p:txStyles>
     <p:titleStyle>
@@ -1792,7 +1792,7 @@
           <p:cNvPr id="1" name="">
             <a:extLst xmlns:a="http://schemas.openxmlformats.org/drawingml/2006/main">
               <a:ext uri="{FF2B5EF4-FFF2-40B4-BE49-F238E27FC236}">
-                <a16:creationId xmlns:a16="http://schemas.microsoft.com/office/drawing/2014/main" id="{294A00D9-6205-4D71-84A1-3BD5C22A2C1F}"/>
+                <a16:creationId xmlns:a16="http://schemas.microsoft.com/office/drawing/2014/main" id="{F8248A01-E142-4842-B9C7-734310F60510}"/>
               </a:ext>
             </a:extLst>
           </p:cNvPr>
@@ -1827,7 +1827,7 @@
           <p:cNvPr id="2" name="">
             <a:extLst xmlns:a="http://schemas.openxmlformats.org/drawingml/2006/main">
               <a:ext uri="{FF2B5EF4-FFF2-40B4-BE49-F238E27FC236}">
-                <a16:creationId xmlns:a16="http://schemas.microsoft.com/office/drawing/2014/main" id="{C7C10C6D-2181-46C2-B4B0-ACA327E77393}"/>
+                <a16:creationId xmlns:a16="http://schemas.microsoft.com/office/drawing/2014/main" id="{3B69D588-4454-455E-9B1C-99E6FD2BA029}"/>
               </a:ext>
             </a:extLst>
           </p:cNvPr>
@@ -1862,7 +1862,7 @@
           <p:cNvPr id="3" name="">
             <a:extLst xmlns:a="http://schemas.openxmlformats.org/drawingml/2006/main">
               <a:ext uri="{FF2B5EF4-FFF2-40B4-BE49-F238E27FC236}">
-                <a16:creationId xmlns:a16="http://schemas.microsoft.com/office/drawing/2014/main" id="{ABEDB125-25B1-4FD0-96BF-C80766F60937}"/>
+                <a16:creationId xmlns:a16="http://schemas.microsoft.com/office/drawing/2014/main" id="{94E9D8BE-2EDB-40AD-B16D-13864C03AF9D}"/>
               </a:ext>
             </a:extLst>
           </p:cNvPr>
@@ -1897,7 +1897,7 @@
           <p:cNvPr id="4" name="kicker-04-marker">
             <a:extLst xmlns:a="http://schemas.openxmlformats.org/drawingml/2006/main">
               <a:ext uri="{FF2B5EF4-FFF2-40B4-BE49-F238E27FC236}">
-                <a16:creationId xmlns:a16="http://schemas.microsoft.com/office/drawing/2014/main" id="{39891FBD-5B4F-4670-9F63-5815DA1AA755}"/>
+                <a16:creationId xmlns:a16="http://schemas.microsoft.com/office/drawing/2014/main" id="{1B3BD460-14C1-46B5-8D1C-B4C91C24E19F}"/>
               </a:ext>
             </a:extLst>
           </p:cNvPr>
@@ -1932,7 +1932,7 @@
           <p:cNvPr id="5" name="kicker-04-label">
             <a:extLst xmlns:a="http://schemas.openxmlformats.org/drawingml/2006/main">
               <a:ext uri="{FF2B5EF4-FFF2-40B4-BE49-F238E27FC236}">
-                <a16:creationId xmlns:a16="http://schemas.microsoft.com/office/drawing/2014/main" id="{E706A309-B95C-42EB-BE40-32FAF056AD3C}"/>
+                <a16:creationId xmlns:a16="http://schemas.microsoft.com/office/drawing/2014/main" id="{E6A05A16-C5B2-4A42-A7A0-5CDDE2965CB0}"/>
               </a:ext>
             </a:extLst>
           </p:cNvPr>
@@ -1996,7 +1996,7 @@
           <p:cNvPr id="6" name="">
             <a:extLst xmlns:a="http://schemas.openxmlformats.org/drawingml/2006/main">
               <a:ext uri="{FF2B5EF4-FFF2-40B4-BE49-F238E27FC236}">
-                <a16:creationId xmlns:a16="http://schemas.microsoft.com/office/drawing/2014/main" id="{7D2FDB63-C474-483D-ADD9-8C9B3F54D24C}"/>
+                <a16:creationId xmlns:a16="http://schemas.microsoft.com/office/drawing/2014/main" id="{0A57E066-204C-4602-8CEB-2FE810348825}"/>
               </a:ext>
             </a:extLst>
           </p:cNvPr>
@@ -2060,7 +2060,7 @@
           <p:cNvPr id="7" name="">
             <a:extLst xmlns:a="http://schemas.openxmlformats.org/drawingml/2006/main">
               <a:ext uri="{FF2B5EF4-FFF2-40B4-BE49-F238E27FC236}">
-                <a16:creationId xmlns:a16="http://schemas.microsoft.com/office/drawing/2014/main" id="{53394E3D-D953-48C8-BDFB-FA1B69A1F25E}"/>
+                <a16:creationId xmlns:a16="http://schemas.microsoft.com/office/drawing/2014/main" id="{64A4C38F-0A84-4F85-9876-5197984A9FAF}"/>
               </a:ext>
             </a:extLst>
           </p:cNvPr>
@@ -2124,7 +2124,7 @@
           <p:cNvPr id="8" name="">
             <a:extLst xmlns:a="http://schemas.openxmlformats.org/drawingml/2006/main">
               <a:ext uri="{FF2B5EF4-FFF2-40B4-BE49-F238E27FC236}">
-                <a16:creationId xmlns:a16="http://schemas.microsoft.com/office/drawing/2014/main" id="{9CBD7412-1144-4C37-8F6C-AF4BDD96789F}"/>
+                <a16:creationId xmlns:a16="http://schemas.microsoft.com/office/drawing/2014/main" id="{7E573E17-E4BB-4F8D-B61A-D39DB381A2FA}"/>
               </a:ext>
             </a:extLst>
           </p:cNvPr>
@@ -2157,7 +2157,7 @@
           <p:cNvPr id="9" name="">
             <a:extLst xmlns:a="http://schemas.openxmlformats.org/drawingml/2006/main">
               <a:ext uri="{FF2B5EF4-FFF2-40B4-BE49-F238E27FC236}">
-                <a16:creationId xmlns:a16="http://schemas.microsoft.com/office/drawing/2014/main" id="{D8204087-C97B-4D19-9752-4291B5641A0B}"/>
+                <a16:creationId xmlns:a16="http://schemas.microsoft.com/office/drawing/2014/main" id="{71319A97-9915-47A2-A98A-DDD579075BBE}"/>
               </a:ext>
             </a:extLst>
           </p:cNvPr>
@@ -2221,7 +2221,7 @@
           <p:cNvPr id="10" name="">
             <a:extLst xmlns:a="http://schemas.openxmlformats.org/drawingml/2006/main">
               <a:ext uri="{FF2B5EF4-FFF2-40B4-BE49-F238E27FC236}">
-                <a16:creationId xmlns:a16="http://schemas.microsoft.com/office/drawing/2014/main" id="{08206C81-71D1-43C3-97B9-C0A1B39C280E}"/>
+                <a16:creationId xmlns:a16="http://schemas.microsoft.com/office/drawing/2014/main" id="{F0553AF1-CC36-47AA-9F8C-394F04A80ED7}"/>
               </a:ext>
             </a:extLst>
           </p:cNvPr>
@@ -2254,7 +2254,7 @@
           <p:cNvPr id="11" name="">
             <a:extLst xmlns:a="http://schemas.openxmlformats.org/drawingml/2006/main">
               <a:ext uri="{FF2B5EF4-FFF2-40B4-BE49-F238E27FC236}">
-                <a16:creationId xmlns:a16="http://schemas.microsoft.com/office/drawing/2014/main" id="{FF13869D-DA25-47A4-9AD9-B170C1D3BEBB}"/>
+                <a16:creationId xmlns:a16="http://schemas.microsoft.com/office/drawing/2014/main" id="{2BF25CD1-E9A8-43B1-AAA3-30A83140F68A}"/>
               </a:ext>
             </a:extLst>
           </p:cNvPr>
@@ -2318,7 +2318,7 @@
           <p:cNvPr id="12" name="">
             <a:extLst xmlns:a="http://schemas.openxmlformats.org/drawingml/2006/main">
               <a:ext uri="{FF2B5EF4-FFF2-40B4-BE49-F238E27FC236}">
-                <a16:creationId xmlns:a16="http://schemas.microsoft.com/office/drawing/2014/main" id="{341BDF63-7740-4AC3-8145-1A415FB7EEC7}"/>
+                <a16:creationId xmlns:a16="http://schemas.microsoft.com/office/drawing/2014/main" id="{A3F16188-DA7C-4BC2-BD55-6C717D8E162A}"/>
               </a:ext>
             </a:extLst>
           </p:cNvPr>
@@ -2351,7 +2351,7 @@
           <p:cNvPr id="13" name="">
             <a:extLst xmlns:a="http://schemas.openxmlformats.org/drawingml/2006/main">
               <a:ext uri="{FF2B5EF4-FFF2-40B4-BE49-F238E27FC236}">
-                <a16:creationId xmlns:a16="http://schemas.microsoft.com/office/drawing/2014/main" id="{5D24F3E2-6DF7-4604-A8F9-BEAACB5BBEDC}"/>
+                <a16:creationId xmlns:a16="http://schemas.microsoft.com/office/drawing/2014/main" id="{AFC0DE95-1B8F-4569-A8B4-3B6241AB1667}"/>
               </a:ext>
             </a:extLst>
           </p:cNvPr>
@@ -2415,7 +2415,7 @@
           <p:cNvPr id="14" name="">
             <a:extLst xmlns:a="http://schemas.openxmlformats.org/drawingml/2006/main">
               <a:ext uri="{FF2B5EF4-FFF2-40B4-BE49-F238E27FC236}">
-                <a16:creationId xmlns:a16="http://schemas.microsoft.com/office/drawing/2014/main" id="{7E28792B-0B46-4D3F-AF1B-102C5A0BC8E4}"/>
+                <a16:creationId xmlns:a16="http://schemas.microsoft.com/office/drawing/2014/main" id="{A5D3A4F7-78B4-40C3-A114-3E97321EA869}"/>
               </a:ext>
             </a:extLst>
           </p:cNvPr>
@@ -2448,7 +2448,7 @@
           <p:cNvPr id="15" name="">
             <a:extLst xmlns:a="http://schemas.openxmlformats.org/drawingml/2006/main">
               <a:ext uri="{FF2B5EF4-FFF2-40B4-BE49-F238E27FC236}">
-                <a16:creationId xmlns:a16="http://schemas.microsoft.com/office/drawing/2014/main" id="{6335BBCA-3CAA-4226-8BE3-1E1782E0C9AD}"/>
+                <a16:creationId xmlns:a16="http://schemas.microsoft.com/office/drawing/2014/main" id="{A2123B8F-8A68-420D-90A0-BFFE5A56823D}"/>
               </a:ext>
             </a:extLst>
           </p:cNvPr>
@@ -2483,7 +2483,7 @@
           <p:cNvPr id="16" name="">
             <a:extLst xmlns:a="http://schemas.openxmlformats.org/drawingml/2006/main">
               <a:ext uri="{FF2B5EF4-FFF2-40B4-BE49-F238E27FC236}">
-                <a16:creationId xmlns:a16="http://schemas.microsoft.com/office/drawing/2014/main" id="{F31C268E-B88E-45F2-BF78-3AFD2DB64DF5}"/>
+                <a16:creationId xmlns:a16="http://schemas.microsoft.com/office/drawing/2014/main" id="{396562FD-42D5-4652-93BA-4A1EBC0E6EFE}"/>
               </a:ext>
             </a:extLst>
           </p:cNvPr>
@@ -2547,7 +2547,7 @@
           <p:cNvPr id="17" name="">
             <a:extLst xmlns:a="http://schemas.openxmlformats.org/drawingml/2006/main">
               <a:ext uri="{FF2B5EF4-FFF2-40B4-BE49-F238E27FC236}">
-                <a16:creationId xmlns:a16="http://schemas.microsoft.com/office/drawing/2014/main" id="{9EE6493F-91A9-4BAE-95C1-DE01ED067BE4}"/>
+                <a16:creationId xmlns:a16="http://schemas.microsoft.com/office/drawing/2014/main" id="{A7B7FFBE-BBEC-43BB-A8E3-908B966EBE67}"/>
               </a:ext>
             </a:extLst>
           </p:cNvPr>
@@ -2611,7 +2611,7 @@
           <p:cNvPr id="18" name="">
             <a:extLst xmlns:a="http://schemas.openxmlformats.org/drawingml/2006/main">
               <a:ext uri="{FF2B5EF4-FFF2-40B4-BE49-F238E27FC236}">
-                <a16:creationId xmlns:a16="http://schemas.microsoft.com/office/drawing/2014/main" id="{5BE0232E-9B27-4716-B44F-AB6248726902}"/>
+                <a16:creationId xmlns:a16="http://schemas.microsoft.com/office/drawing/2014/main" id="{5F000C2F-8D43-434E-A05D-5C12A88B91FF}"/>
               </a:ext>
             </a:extLst>
           </p:cNvPr>
@@ -2646,7 +2646,7 @@
           <p:cNvPr id="19" name="">
             <a:extLst xmlns:a="http://schemas.openxmlformats.org/drawingml/2006/main">
               <a:ext uri="{FF2B5EF4-FFF2-40B4-BE49-F238E27FC236}">
-                <a16:creationId xmlns:a16="http://schemas.microsoft.com/office/drawing/2014/main" id="{9DF537B5-32A7-4D49-B2FB-168DB31CFDBA}"/>
+                <a16:creationId xmlns:a16="http://schemas.microsoft.com/office/drawing/2014/main" id="{87DCC1D3-78E8-4DD0-90C8-129B63246864}"/>
               </a:ext>
             </a:extLst>
           </p:cNvPr>
@@ -2710,7 +2710,7 @@
           <p:cNvPr id="20" name="">
             <a:extLst xmlns:a="http://schemas.openxmlformats.org/drawingml/2006/main">
               <a:ext uri="{FF2B5EF4-FFF2-40B4-BE49-F238E27FC236}">
-                <a16:creationId xmlns:a16="http://schemas.microsoft.com/office/drawing/2014/main" id="{836AD9A6-752E-4DE2-8CE7-B4EBBCC57E4A}"/>
+                <a16:creationId xmlns:a16="http://schemas.microsoft.com/office/drawing/2014/main" id="{2635B2C9-4072-472E-8B95-699E09634EE0}"/>
               </a:ext>
             </a:extLst>
           </p:cNvPr>
@@ -2764,7 +2764,7 @@
                 <a:ea typeface="Aptos"/>
                 <a:cs typeface="Aptos"/>
               </a:rPr>
-              <a:t>Teach the operating decision, run the diagnostic, then force a usable artifact. The slide is a prompt, not the handout.</a:t>
+              <a:t>Teach the operating decision, run the diagnostic, then force a usable artifact. The slide is a teaching cue, not the handout.</a:t>
             </a:r>
           </a:p>
         </p:txBody>
@@ -2774,7 +2774,7 @@
           <p:cNvPr id="21" name="">
             <a:extLst xmlns:a="http://schemas.openxmlformats.org/drawingml/2006/main">
               <a:ext uri="{FF2B5EF4-FFF2-40B4-BE49-F238E27FC236}">
-                <a16:creationId xmlns:a16="http://schemas.microsoft.com/office/drawing/2014/main" id="{C31C841B-6EBD-4A57-BB61-D237F1F6F205}"/>
+                <a16:creationId xmlns:a16="http://schemas.microsoft.com/office/drawing/2014/main" id="{6A94D8E9-2158-4F8A-B734-0664455718F3}"/>
               </a:ext>
             </a:extLst>
           </p:cNvPr>
@@ -2809,7 +2809,7 @@
           <p:cNvPr id="22" name="">
             <a:extLst xmlns:a="http://schemas.openxmlformats.org/drawingml/2006/main">
               <a:ext uri="{FF2B5EF4-FFF2-40B4-BE49-F238E27FC236}">
-                <a16:creationId xmlns:a16="http://schemas.microsoft.com/office/drawing/2014/main" id="{B6FB61A1-290A-4829-81B3-95FBDE678C70}"/>
+                <a16:creationId xmlns:a16="http://schemas.microsoft.com/office/drawing/2014/main" id="{62369731-16BD-4FF4-8CE9-DBD025164D26}"/>
               </a:ext>
             </a:extLst>
           </p:cNvPr>
@@ -2873,7 +2873,7 @@
           <p:cNvPr id="23" name="">
             <a:extLst xmlns:a="http://schemas.openxmlformats.org/drawingml/2006/main">
               <a:ext uri="{FF2B5EF4-FFF2-40B4-BE49-F238E27FC236}">
-                <a16:creationId xmlns:a16="http://schemas.microsoft.com/office/drawing/2014/main" id="{2303FC33-6CD3-4F2A-94FF-890EF39F7FED}"/>
+                <a16:creationId xmlns:a16="http://schemas.microsoft.com/office/drawing/2014/main" id="{00B4057B-8B4F-4DBD-BB9F-8228C0439E95}"/>
               </a:ext>
             </a:extLst>
           </p:cNvPr>
@@ -2937,7 +2937,7 @@
           <p:cNvPr id="24" name="">
             <a:extLst xmlns:a="http://schemas.openxmlformats.org/drawingml/2006/main">
               <a:ext uri="{FF2B5EF4-FFF2-40B4-BE49-F238E27FC236}">
-                <a16:creationId xmlns:a16="http://schemas.microsoft.com/office/drawing/2014/main" id="{111D5F2D-ADD8-4AF7-96BD-4BE7048C7865}"/>
+                <a16:creationId xmlns:a16="http://schemas.microsoft.com/office/drawing/2014/main" id="{C6FD5E7F-42D3-48DD-8891-E6EA799D76C1}"/>
               </a:ext>
             </a:extLst>
           </p:cNvPr>
@@ -2972,7 +2972,7 @@
           <p:cNvPr id="25" name="">
             <a:extLst xmlns:a="http://schemas.openxmlformats.org/drawingml/2006/main">
               <a:ext uri="{FF2B5EF4-FFF2-40B4-BE49-F238E27FC236}">
-                <a16:creationId xmlns:a16="http://schemas.microsoft.com/office/drawing/2014/main" id="{D43F4D8B-50F3-4187-B5F0-399D46021BFD}"/>
+                <a16:creationId xmlns:a16="http://schemas.microsoft.com/office/drawing/2014/main" id="{970C9579-04B9-4374-B0EA-D639EECEC64C}"/>
               </a:ext>
             </a:extLst>
           </p:cNvPr>
@@ -3036,7 +3036,7 @@
           <p:cNvPr id="26" name="">
             <a:extLst xmlns:a="http://schemas.openxmlformats.org/drawingml/2006/main">
               <a:ext uri="{FF2B5EF4-FFF2-40B4-BE49-F238E27FC236}">
-                <a16:creationId xmlns:a16="http://schemas.microsoft.com/office/drawing/2014/main" id="{2EB35A81-3E84-4F40-AA1A-FE2FB0860130}"/>
+                <a16:creationId xmlns:a16="http://schemas.microsoft.com/office/drawing/2014/main" id="{2549E1BB-0067-48E3-8C6D-A051AB3C2264}"/>
               </a:ext>
             </a:extLst>
           </p:cNvPr>
@@ -3100,7 +3100,7 @@
           <p:cNvPr id="27" name="">
             <a:extLst xmlns:a="http://schemas.openxmlformats.org/drawingml/2006/main">
               <a:ext uri="{FF2B5EF4-FFF2-40B4-BE49-F238E27FC236}">
-                <a16:creationId xmlns:a16="http://schemas.microsoft.com/office/drawing/2014/main" id="{C39C6BD3-60ED-4A6D-8989-71BF89307043}"/>
+                <a16:creationId xmlns:a16="http://schemas.microsoft.com/office/drawing/2014/main" id="{561831E4-DCB8-43C6-8548-5986DB9D45B1}"/>
               </a:ext>
             </a:extLst>
           </p:cNvPr>
@@ -3162,7 +3162,7 @@
     </p:spTree>
     <p:extLst>
       <p:ext uri="{BB962C8B-B14F-4D97-AF65-F5344CB8AC3E}">
-        <p14:creationId xmlns:p14="http://schemas.microsoft.com/office/powerpoint/2010/main" val="1868171555"/>
+        <p14:creationId xmlns:p14="http://schemas.microsoft.com/office/powerpoint/2010/main" val="1517801770"/>
       </p:ext>
     </p:extLst>
   </p:cSld>
@@ -3186,7 +3186,7 @@
           <p:cNvPr id="1" name="">
             <a:extLst xmlns:a="http://schemas.openxmlformats.org/drawingml/2006/main">
               <a:ext uri="{FF2B5EF4-FFF2-40B4-BE49-F238E27FC236}">
-                <a16:creationId xmlns:a16="http://schemas.microsoft.com/office/drawing/2014/main" id="{1F0C56D0-EEA3-4AF7-BFEC-2851BBB618AD}"/>
+                <a16:creationId xmlns:a16="http://schemas.microsoft.com/office/drawing/2014/main" id="{63901812-C586-417A-85A8-4F64FC2ADF6B}"/>
               </a:ext>
             </a:extLst>
           </p:cNvPr>
@@ -3221,7 +3221,7 @@
           <p:cNvPr id="2" name="">
             <a:extLst xmlns:a="http://schemas.openxmlformats.org/drawingml/2006/main">
               <a:ext uri="{FF2B5EF4-FFF2-40B4-BE49-F238E27FC236}">
-                <a16:creationId xmlns:a16="http://schemas.microsoft.com/office/drawing/2014/main" id="{A8C2D8D6-BC2D-4DF3-882F-B54E85DEAC31}"/>
+                <a16:creationId xmlns:a16="http://schemas.microsoft.com/office/drawing/2014/main" id="{1018C475-316E-4C0D-AE4C-1FA2ECC8B53F}"/>
               </a:ext>
             </a:extLst>
           </p:cNvPr>
@@ -3256,7 +3256,7 @@
           <p:cNvPr id="3" name="">
             <a:extLst xmlns:a="http://schemas.openxmlformats.org/drawingml/2006/main">
               <a:ext uri="{FF2B5EF4-FFF2-40B4-BE49-F238E27FC236}">
-                <a16:creationId xmlns:a16="http://schemas.microsoft.com/office/drawing/2014/main" id="{5CBE87BC-0CEF-4F7B-8A5C-F7156A1AB864}"/>
+                <a16:creationId xmlns:a16="http://schemas.microsoft.com/office/drawing/2014/main" id="{617DA996-8CDD-4F91-B55B-B752BA90D3DE}"/>
               </a:ext>
             </a:extLst>
           </p:cNvPr>
@@ -3291,7 +3291,7 @@
           <p:cNvPr id="4" name="kicker-04-marker">
             <a:extLst xmlns:a="http://schemas.openxmlformats.org/drawingml/2006/main">
               <a:ext uri="{FF2B5EF4-FFF2-40B4-BE49-F238E27FC236}">
-                <a16:creationId xmlns:a16="http://schemas.microsoft.com/office/drawing/2014/main" id="{B04A39DE-9D6A-4844-85E6-8322FFBAF68C}"/>
+                <a16:creationId xmlns:a16="http://schemas.microsoft.com/office/drawing/2014/main" id="{4644DE1B-147D-4243-9867-EA7540D0A231}"/>
               </a:ext>
             </a:extLst>
           </p:cNvPr>
@@ -3326,7 +3326,7 @@
           <p:cNvPr id="5" name="kicker-04-label">
             <a:extLst xmlns:a="http://schemas.openxmlformats.org/drawingml/2006/main">
               <a:ext uri="{FF2B5EF4-FFF2-40B4-BE49-F238E27FC236}">
-                <a16:creationId xmlns:a16="http://schemas.microsoft.com/office/drawing/2014/main" id="{EE260C20-588A-4599-BFC0-611602A5B4A4}"/>
+                <a16:creationId xmlns:a16="http://schemas.microsoft.com/office/drawing/2014/main" id="{34AD3BBF-5203-4797-AA8B-A2D218A8BA03}"/>
               </a:ext>
             </a:extLst>
           </p:cNvPr>
@@ -3380,7 +3380,7 @@
                 <a:ea typeface="Aptos"/>
                 <a:cs typeface="Aptos"/>
               </a:rPr>
-              <a:t>MODULE 1 / LESSON 04 / AI-ASSISTED EXERCISE</a:t>
+              <a:t>MODULE 1 / LESSON 04 / STRUCTURED DRAFTING DRILL</a:t>
             </a:r>
           </a:p>
         </p:txBody>
@@ -3390,7 +3390,7 @@
           <p:cNvPr id="6" name="">
             <a:extLst xmlns:a="http://schemas.openxmlformats.org/drawingml/2006/main">
               <a:ext uri="{FF2B5EF4-FFF2-40B4-BE49-F238E27FC236}">
-                <a16:creationId xmlns:a16="http://schemas.microsoft.com/office/drawing/2014/main" id="{F8153CA1-4922-43C6-BFFB-95A992A07539}"/>
+                <a16:creationId xmlns:a16="http://schemas.microsoft.com/office/drawing/2014/main" id="{5CC56474-AD9B-460F-B777-33F633E97269}"/>
               </a:ext>
             </a:extLst>
           </p:cNvPr>
@@ -3444,7 +3444,7 @@
                 <a:ea typeface="Aptos Display"/>
                 <a:cs typeface="Aptos Display"/>
               </a:rPr>
-              <a:t>Use AI to structure the attempt, then make humans responsible for judgment.</a:t>
+              <a:t>Structure the first draft before the room critiques it.</a:t>
             </a:r>
           </a:p>
         </p:txBody>
@@ -3454,7 +3454,7 @@
           <p:cNvPr id="7" name="">
             <a:extLst xmlns:a="http://schemas.openxmlformats.org/drawingml/2006/main">
               <a:ext uri="{FF2B5EF4-FFF2-40B4-BE49-F238E27FC236}">
-                <a16:creationId xmlns:a16="http://schemas.microsoft.com/office/drawing/2014/main" id="{8EE8822B-5A8B-4CDC-977A-2113F4FADEF8}"/>
+                <a16:creationId xmlns:a16="http://schemas.microsoft.com/office/drawing/2014/main" id="{9D4823BC-F326-4192-A44B-E3E32C651744}"/>
               </a:ext>
             </a:extLst>
           </p:cNvPr>
@@ -3508,7 +3508,7 @@
                 <a:ea typeface="Aptos"/>
                 <a:cs typeface="Aptos"/>
               </a:rPr>
-              <a:t>The prompt is constrained by source, assumptions, output standard, and human validation.</a:t>
+              <a:t>The brief is constrained by source evidence, assumptions, output standard, and validation.</a:t>
             </a:r>
           </a:p>
         </p:txBody>
@@ -3518,7 +3518,7 @@
           <p:cNvPr id="8" name="">
             <a:extLst xmlns:a="http://schemas.openxmlformats.org/drawingml/2006/main">
               <a:ext uri="{FF2B5EF4-FFF2-40B4-BE49-F238E27FC236}">
-                <a16:creationId xmlns:a16="http://schemas.microsoft.com/office/drawing/2014/main" id="{47532F3A-21D6-4395-B73E-B8D8382ADA98}"/>
+                <a16:creationId xmlns:a16="http://schemas.microsoft.com/office/drawing/2014/main" id="{D4896BED-2528-48A1-9639-B93BC628E06B}"/>
               </a:ext>
             </a:extLst>
           </p:cNvPr>
@@ -3553,7 +3553,7 @@
           <p:cNvPr id="9" name="">
             <a:extLst xmlns:a="http://schemas.openxmlformats.org/drawingml/2006/main">
               <a:ext uri="{FF2B5EF4-FFF2-40B4-BE49-F238E27FC236}">
-                <a16:creationId xmlns:a16="http://schemas.microsoft.com/office/drawing/2014/main" id="{E36B01C8-77BF-41FD-A9F3-57C20859F951}"/>
+                <a16:creationId xmlns:a16="http://schemas.microsoft.com/office/drawing/2014/main" id="{D25D92B4-27D3-4A04-B1EB-4D1F49082342}"/>
               </a:ext>
             </a:extLst>
           </p:cNvPr>
@@ -3617,7 +3617,7 @@
           <p:cNvPr id="10" name="">
             <a:extLst xmlns:a="http://schemas.openxmlformats.org/drawingml/2006/main">
               <a:ext uri="{FF2B5EF4-FFF2-40B4-BE49-F238E27FC236}">
-                <a16:creationId xmlns:a16="http://schemas.microsoft.com/office/drawing/2014/main" id="{90B111F4-7683-4D56-8590-7BC585B33E55}"/>
+                <a16:creationId xmlns:a16="http://schemas.microsoft.com/office/drawing/2014/main" id="{F5AA4DFE-0AA3-47BC-B64F-A2F4110BB64C}"/>
               </a:ext>
             </a:extLst>
           </p:cNvPr>
@@ -3681,7 +3681,7 @@
           <p:cNvPr id="11" name="">
             <a:extLst xmlns:a="http://schemas.openxmlformats.org/drawingml/2006/main">
               <a:ext uri="{FF2B5EF4-FFF2-40B4-BE49-F238E27FC236}">
-                <a16:creationId xmlns:a16="http://schemas.microsoft.com/office/drawing/2014/main" id="{78B7ECA5-6AFD-4130-A5AE-7240D078C963}"/>
+                <a16:creationId xmlns:a16="http://schemas.microsoft.com/office/drawing/2014/main" id="{1CC787ED-E66C-444C-8A21-51920DA7063C}"/>
               </a:ext>
             </a:extLst>
           </p:cNvPr>
@@ -3745,19 +3745,19 @@
           <p:cNvPr id="12" name="">
             <a:extLst xmlns:a="http://schemas.openxmlformats.org/drawingml/2006/main">
               <a:ext uri="{FF2B5EF4-FFF2-40B4-BE49-F238E27FC236}">
-                <a16:creationId xmlns:a16="http://schemas.microsoft.com/office/drawing/2014/main" id="{3716860E-9F98-469F-B02C-671AB1806ED6}"/>
-              </a:ext>
-            </a:extLst>
-          </p:cNvPr>
-          <p:cNvSpPr>
-            <a:spLocks xmlns:a="http://schemas.openxmlformats.org/drawingml/2006/main" noGrp="1"/>
-          </p:cNvSpPr>
-          <p:nvPr/>
-        </p:nvSpPr>
-        <p:spPr>
-          <a:xfrm xmlns:a="http://schemas.openxmlformats.org/drawingml/2006/main">
-            <a:off x="228600" y="1809750"/>
-            <a:ext cx="11963400" cy="4591050"/>
+                <a16:creationId xmlns:a16="http://schemas.microsoft.com/office/drawing/2014/main" id="{397C29FC-6F8B-4CB3-8245-A5502BC95F80}"/>
+              </a:ext>
+            </a:extLst>
+          </p:cNvPr>
+          <p:cNvSpPr>
+            <a:spLocks xmlns:a="http://schemas.openxmlformats.org/drawingml/2006/main" noGrp="1"/>
+          </p:cNvSpPr>
+          <p:nvPr/>
+        </p:nvSpPr>
+        <p:spPr>
+          <a:xfrm xmlns:a="http://schemas.openxmlformats.org/drawingml/2006/main">
+            <a:off x="0" y="1809750"/>
+            <a:ext cx="12192000" cy="4591050"/>
           </a:xfrm>
           <a:prstGeom xmlns:a="http://schemas.openxmlformats.org/drawingml/2006/main" prst="rect">
             <a:avLst/>
@@ -3765,11 +3765,9 @@
           <a:solidFill xmlns:a="http://schemas.openxmlformats.org/drawingml/2006/main">
             <a:srgbClr val="F5F6F2"/>
           </a:solidFill>
-          <a:ln xmlns:a="http://schemas.openxmlformats.org/drawingml/2006/main" w="0">
-            <a:solidFill>
-              <a:srgbClr val="000000">
-                <a:alpha val="0"/>
-              </a:srgbClr>
+          <a:ln xmlns:a="http://schemas.openxmlformats.org/drawingml/2006/main" w="9525">
+            <a:solidFill>
+              <a:srgbClr val="F5F6F2"/>
             </a:solidFill>
             <a:prstDash val="solid"/>
           </a:ln>
@@ -3780,29 +3778,29 @@
           <p:cNvPr id="13" name="">
             <a:extLst xmlns:a="http://schemas.openxmlformats.org/drawingml/2006/main">
               <a:ext uri="{FF2B5EF4-FFF2-40B4-BE49-F238E27FC236}">
-                <a16:creationId xmlns:a16="http://schemas.microsoft.com/office/drawing/2014/main" id="{F6F059C9-8DDE-4C06-AF63-9E9CFD02CB54}"/>
-              </a:ext>
-            </a:extLst>
-          </p:cNvPr>
-          <p:cNvSpPr>
-            <a:spLocks xmlns:a="http://schemas.openxmlformats.org/drawingml/2006/main" noGrp="1"/>
-          </p:cNvSpPr>
-          <p:nvPr/>
-        </p:nvSpPr>
-        <p:spPr>
-          <a:xfrm xmlns:a="http://schemas.openxmlformats.org/drawingml/2006/main">
-            <a:off x="228600" y="1809750"/>
-            <a:ext cx="6096000" cy="4591050"/>
-          </a:xfrm>
-          <a:prstGeom xmlns:a="http://schemas.openxmlformats.org/drawingml/2006/main" prst="rect">
-            <a:avLst/>
-          </a:prstGeom>
-          <a:solidFill xmlns:a="http://schemas.openxmlformats.org/drawingml/2006/main">
-            <a:srgbClr val="12232B"/>
+                <a16:creationId xmlns:a16="http://schemas.microsoft.com/office/drawing/2014/main" id="{8DD10A17-BC82-45B5-9B3A-7111579EF5D2}"/>
+              </a:ext>
+            </a:extLst>
+          </p:cNvPr>
+          <p:cNvSpPr>
+            <a:spLocks xmlns:a="http://schemas.openxmlformats.org/drawingml/2006/main" noGrp="1"/>
+          </p:cNvSpPr>
+          <p:nvPr/>
+        </p:nvSpPr>
+        <p:spPr>
+          <a:xfrm xmlns:a="http://schemas.openxmlformats.org/drawingml/2006/main">
+            <a:off x="514350" y="2038350"/>
+            <a:ext cx="5619750" cy="3181350"/>
+          </a:xfrm>
+          <a:prstGeom xmlns:a="http://schemas.openxmlformats.org/drawingml/2006/main" prst="rect">
+            <a:avLst/>
+          </a:prstGeom>
+          <a:solidFill xmlns:a="http://schemas.openxmlformats.org/drawingml/2006/main">
+            <a:srgbClr val="FFFFFF"/>
           </a:solidFill>
           <a:ln xmlns:a="http://schemas.openxmlformats.org/drawingml/2006/main" w="9525">
             <a:solidFill>
-              <a:srgbClr val="12232B"/>
+              <a:srgbClr val="D9DDD6"/>
             </a:solidFill>
             <a:prstDash val="solid"/>
           </a:ln>
@@ -3813,25 +3811,25 @@
           <p:cNvPr id="14" name="">
             <a:extLst xmlns:a="http://schemas.openxmlformats.org/drawingml/2006/main">
               <a:ext uri="{FF2B5EF4-FFF2-40B4-BE49-F238E27FC236}">
-                <a16:creationId xmlns:a16="http://schemas.microsoft.com/office/drawing/2014/main" id="{E76F2673-B903-4ACD-823A-3327B80B9A63}"/>
-              </a:ext>
-            </a:extLst>
-          </p:cNvPr>
-          <p:cNvSpPr>
-            <a:spLocks xmlns:a="http://schemas.openxmlformats.org/drawingml/2006/main" noGrp="1"/>
-          </p:cNvSpPr>
-          <p:nvPr/>
-        </p:nvSpPr>
-        <p:spPr>
-          <a:xfrm xmlns:a="http://schemas.openxmlformats.org/drawingml/2006/main">
-            <a:off x="609600" y="2266950"/>
+                <a16:creationId xmlns:a16="http://schemas.microsoft.com/office/drawing/2014/main" id="{365C8F58-AAA0-4164-9A2F-AC671FCDC021}"/>
+              </a:ext>
+            </a:extLst>
+          </p:cNvPr>
+          <p:cNvSpPr>
+            <a:spLocks xmlns:a="http://schemas.openxmlformats.org/drawingml/2006/main" noGrp="1"/>
+          </p:cNvSpPr>
+          <p:nvPr/>
+        </p:nvSpPr>
+        <p:spPr>
+          <a:xfrm xmlns:a="http://schemas.openxmlformats.org/drawingml/2006/main">
+            <a:off x="819150" y="2419350"/>
             <a:ext cx="266700" cy="19050"/>
           </a:xfrm>
           <a:prstGeom xmlns:a="http://schemas.openxmlformats.org/drawingml/2006/main" prst="rect">
             <a:avLst/>
           </a:prstGeom>
           <a:solidFill xmlns:a="http://schemas.openxmlformats.org/drawingml/2006/main">
-            <a:srgbClr val="B7953B"/>
+            <a:srgbClr val="A85D2A"/>
           </a:solidFill>
           <a:ln xmlns:a="http://schemas.openxmlformats.org/drawingml/2006/main" w="0">
             <a:solidFill>
@@ -3848,18 +3846,18 @@
           <p:cNvPr id="15" name="">
             <a:extLst xmlns:a="http://schemas.openxmlformats.org/drawingml/2006/main">
               <a:ext uri="{FF2B5EF4-FFF2-40B4-BE49-F238E27FC236}">
-                <a16:creationId xmlns:a16="http://schemas.microsoft.com/office/drawing/2014/main" id="{B91ADFE8-73F1-4E6E-AF04-065A0FB7C280}"/>
-              </a:ext>
-            </a:extLst>
-          </p:cNvPr>
-          <p:cNvSpPr>
-            <a:spLocks xmlns:a="http://schemas.openxmlformats.org/drawingml/2006/main" noGrp="1"/>
-          </p:cNvSpPr>
-          <p:nvPr/>
-        </p:nvSpPr>
-        <p:spPr>
-          <a:xfrm xmlns:a="http://schemas.openxmlformats.org/drawingml/2006/main">
-            <a:off x="971550" y="2190750"/>
+                <a16:creationId xmlns:a16="http://schemas.microsoft.com/office/drawing/2014/main" id="{7798EB58-E7DB-4526-9A48-CE581183E02F}"/>
+              </a:ext>
+            </a:extLst>
+          </p:cNvPr>
+          <p:cNvSpPr>
+            <a:spLocks xmlns:a="http://schemas.openxmlformats.org/drawingml/2006/main" noGrp="1"/>
+          </p:cNvSpPr>
+          <p:nvPr/>
+        </p:nvSpPr>
+        <p:spPr>
+          <a:xfrm xmlns:a="http://schemas.openxmlformats.org/drawingml/2006/main">
+            <a:off x="1181100" y="2343150"/>
             <a:ext cx="2476500" cy="171450"/>
           </a:xfrm>
           <a:prstGeom xmlns:a="http://schemas.openxmlformats.org/drawingml/2006/main" prst="rect">
@@ -3902,7 +3900,7 @@
                 <a:ea typeface="Aptos"/>
                 <a:cs typeface="Aptos"/>
               </a:rPr>
-              <a:t>PROMPT TO GIVE AI</a:t>
+              <a:t>DRAFTING BRIEF</a:t>
             </a:r>
           </a:p>
         </p:txBody>
@@ -3912,19 +3910,19 @@
           <p:cNvPr id="16" name="">
             <a:extLst xmlns:a="http://schemas.openxmlformats.org/drawingml/2006/main">
               <a:ext uri="{FF2B5EF4-FFF2-40B4-BE49-F238E27FC236}">
-                <a16:creationId xmlns:a16="http://schemas.microsoft.com/office/drawing/2014/main" id="{B649C641-CAA6-496C-A3F4-940A70DCEA91}"/>
-              </a:ext>
-            </a:extLst>
-          </p:cNvPr>
-          <p:cNvSpPr>
-            <a:spLocks xmlns:a="http://schemas.openxmlformats.org/drawingml/2006/main" noGrp="1"/>
-          </p:cNvSpPr>
-          <p:nvPr/>
-        </p:nvSpPr>
-        <p:spPr>
-          <a:xfrm xmlns:a="http://schemas.openxmlformats.org/drawingml/2006/main">
-            <a:off x="609600" y="2647950"/>
-            <a:ext cx="5048250" cy="2190750"/>
+                <a16:creationId xmlns:a16="http://schemas.microsoft.com/office/drawing/2014/main" id="{3AE14486-FD93-4247-88BA-633A2C9D099F}"/>
+              </a:ext>
+            </a:extLst>
+          </p:cNvPr>
+          <p:cNvSpPr>
+            <a:spLocks xmlns:a="http://schemas.openxmlformats.org/drawingml/2006/main" noGrp="1"/>
+          </p:cNvSpPr>
+          <p:nvPr/>
+        </p:nvSpPr>
+        <p:spPr>
+          <a:xfrm xmlns:a="http://schemas.openxmlformats.org/drawingml/2006/main">
+            <a:off x="819150" y="2762250"/>
+            <a:ext cx="4610100" cy="1752600"/>
           </a:xfrm>
           <a:prstGeom xmlns:a="http://schemas.openxmlformats.org/drawingml/2006/main" prst="rect">
             <a:avLst/>
@@ -3948,9 +3946,240 @@
           <a:lstStyle xmlns:a="http://schemas.openxmlformats.org/drawingml/2006/main"/>
           <a:p xmlns:a="http://schemas.openxmlformats.org/drawingml/2006/main">
             <a:pPr algn="l">
+              <a:defRPr sz="1200" b="0">
+                <a:solidFill>
+                  <a:srgbClr val="172026"/>
+                </a:solidFill>
+                <a:latin typeface="Aptos"/>
+                <a:ea typeface="Aptos"/>
+                <a:cs typeface="Aptos"/>
+              </a:defRPr>
+            </a:pPr>
+            <a:r>
+              <a:rPr sz="1200" b="0">
+                <a:solidFill>
+                  <a:srgbClr val="172026"/>
+                </a:solidFill>
+                <a:latin typeface="Aptos"/>
+                <a:ea typeface="Aptos"/>
+                <a:cs typeface="Aptos"/>
+              </a:rPr>
+              <a:t>Draft or repair a MOIN grid for the selected ICP. Separate buyer questions by role and demand state. Recommend assets, sales use, RevOps signal meaning, assumptions, and field-validation questions. Avoid generic content topics and vendor-demand claims before buyer belief exists.</a:t>
+            </a:r>
+          </a:p>
+        </p:txBody>
+      </p:sp>
+      <p:sp>
+        <p:nvSpPr>
+          <p:cNvPr id="17" name="">
+            <a:extLst xmlns:a="http://schemas.openxmlformats.org/drawingml/2006/main">
+              <a:ext uri="{FF2B5EF4-FFF2-40B4-BE49-F238E27FC236}">
+                <a16:creationId xmlns:a16="http://schemas.microsoft.com/office/drawing/2014/main" id="{A171BD77-DF29-47A6-8707-E83A2B3B6DBB}"/>
+              </a:ext>
+            </a:extLst>
+          </p:cNvPr>
+          <p:cNvSpPr>
+            <a:spLocks xmlns:a="http://schemas.openxmlformats.org/drawingml/2006/main" noGrp="1"/>
+          </p:cNvSpPr>
+          <p:nvPr/>
+        </p:nvSpPr>
+        <p:spPr>
+          <a:xfrm xmlns:a="http://schemas.openxmlformats.org/drawingml/2006/main">
+            <a:off x="6496050" y="2038350"/>
+            <a:ext cx="4933950" cy="3181350"/>
+          </a:xfrm>
+          <a:prstGeom xmlns:a="http://schemas.openxmlformats.org/drawingml/2006/main" prst="rect">
+            <a:avLst/>
+          </a:prstGeom>
+          <a:solidFill xmlns:a="http://schemas.openxmlformats.org/drawingml/2006/main">
+            <a:srgbClr val="F9FAF7"/>
+          </a:solidFill>
+          <a:ln xmlns:a="http://schemas.openxmlformats.org/drawingml/2006/main" w="9525">
+            <a:solidFill>
+              <a:srgbClr val="D9DDD6"/>
+            </a:solidFill>
+            <a:prstDash val="solid"/>
+          </a:ln>
+        </p:spPr>
+      </p:sp>
+      <p:sp>
+        <p:nvSpPr>
+          <p:cNvPr id="18" name="">
+            <a:extLst xmlns:a="http://schemas.openxmlformats.org/drawingml/2006/main">
+              <a:ext uri="{FF2B5EF4-FFF2-40B4-BE49-F238E27FC236}">
+                <a16:creationId xmlns:a16="http://schemas.microsoft.com/office/drawing/2014/main" id="{BCAC7AE3-14C8-441B-B671-74AEDC1F64DA}"/>
+              </a:ext>
+            </a:extLst>
+          </p:cNvPr>
+          <p:cNvSpPr>
+            <a:spLocks xmlns:a="http://schemas.openxmlformats.org/drawingml/2006/main" noGrp="1"/>
+          </p:cNvSpPr>
+          <p:nvPr/>
+        </p:nvSpPr>
+        <p:spPr>
+          <a:xfrm xmlns:a="http://schemas.openxmlformats.org/drawingml/2006/main">
+            <a:off x="6819900" y="2419350"/>
+            <a:ext cx="266700" cy="19050"/>
+          </a:xfrm>
+          <a:prstGeom xmlns:a="http://schemas.openxmlformats.org/drawingml/2006/main" prst="rect">
+            <a:avLst/>
+          </a:prstGeom>
+          <a:solidFill xmlns:a="http://schemas.openxmlformats.org/drawingml/2006/main">
+            <a:srgbClr val="1D6072"/>
+          </a:solidFill>
+          <a:ln xmlns:a="http://schemas.openxmlformats.org/drawingml/2006/main" w="0">
+            <a:solidFill>
+              <a:srgbClr val="000000">
+                <a:alpha val="0"/>
+              </a:srgbClr>
+            </a:solidFill>
+            <a:prstDash val="solid"/>
+          </a:ln>
+        </p:spPr>
+      </p:sp>
+      <p:sp>
+        <p:nvSpPr>
+          <p:cNvPr id="19" name="">
+            <a:extLst xmlns:a="http://schemas.openxmlformats.org/drawingml/2006/main">
+              <a:ext uri="{FF2B5EF4-FFF2-40B4-BE49-F238E27FC236}">
+                <a16:creationId xmlns:a16="http://schemas.microsoft.com/office/drawing/2014/main" id="{67CDF347-C9E7-4CA6-87F8-F293F6A5A563}"/>
+              </a:ext>
+            </a:extLst>
+          </p:cNvPr>
+          <p:cNvSpPr>
+            <a:spLocks xmlns:a="http://schemas.openxmlformats.org/drawingml/2006/main" noGrp="1"/>
+          </p:cNvSpPr>
+          <p:nvPr/>
+        </p:nvSpPr>
+        <p:spPr>
+          <a:xfrm xmlns:a="http://schemas.openxmlformats.org/drawingml/2006/main">
+            <a:off x="7181850" y="2343150"/>
+            <a:ext cx="2476500" cy="171450"/>
+          </a:xfrm>
+          <a:prstGeom xmlns:a="http://schemas.openxmlformats.org/drawingml/2006/main" prst="rect">
+            <a:avLst/>
+          </a:prstGeom>
+          <a:solidFill xmlns:a="http://schemas.openxmlformats.org/drawingml/2006/main">
+            <a:srgbClr val="000000">
+              <a:alpha val="0"/>
+            </a:srgbClr>
+          </a:solidFill>
+          <a:ln xmlns:a="http://schemas.openxmlformats.org/drawingml/2006/main" w="0">
+            <a:solidFill>
+              <a:srgbClr val="000000">
+                <a:alpha val="0"/>
+              </a:srgbClr>
+            </a:solidFill>
+            <a:prstDash val="solid"/>
+          </a:ln>
+        </p:spPr>
+        <p:txBody>
+          <a:bodyPr xmlns:a="http://schemas.openxmlformats.org/drawingml/2006/main" lIns="0" tIns="0" rIns="0" bIns="0" anchor="t"/>
+          <a:lstStyle xmlns:a="http://schemas.openxmlformats.org/drawingml/2006/main"/>
+          <a:p xmlns:a="http://schemas.openxmlformats.org/drawingml/2006/main">
+            <a:pPr algn="l">
+              <a:defRPr sz="750" b="1">
+                <a:solidFill>
+                  <a:srgbClr val="59646A"/>
+                </a:solidFill>
+                <a:latin typeface="Aptos"/>
+                <a:ea typeface="Aptos"/>
+                <a:cs typeface="Aptos"/>
+              </a:defRPr>
+            </a:pPr>
+            <a:r>
+              <a:rPr sz="750" b="1">
+                <a:solidFill>
+                  <a:srgbClr val="59646A"/>
+                </a:solidFill>
+                <a:latin typeface="Aptos"/>
+                <a:ea typeface="Aptos"/>
+                <a:cs typeface="Aptos"/>
+              </a:rPr>
+              <a:t>REQUIRED OUTPUT STANDARD</a:t>
+            </a:r>
+          </a:p>
+        </p:txBody>
+      </p:sp>
+      <p:sp>
+        <p:nvSpPr>
+          <p:cNvPr id="20" name="">
+            <a:extLst xmlns:a="http://schemas.openxmlformats.org/drawingml/2006/main">
+              <a:ext uri="{FF2B5EF4-FFF2-40B4-BE49-F238E27FC236}">
+                <a16:creationId xmlns:a16="http://schemas.microsoft.com/office/drawing/2014/main" id="{A648FA3A-6B3C-4B0D-BFA1-D5B7CCE85668}"/>
+              </a:ext>
+            </a:extLst>
+          </p:cNvPr>
+          <p:cNvSpPr>
+            <a:spLocks xmlns:a="http://schemas.openxmlformats.org/drawingml/2006/main" noGrp="1"/>
+          </p:cNvSpPr>
+          <p:nvPr/>
+        </p:nvSpPr>
+        <p:spPr>
+          <a:xfrm xmlns:a="http://schemas.openxmlformats.org/drawingml/2006/main">
+            <a:off x="6819900" y="2847975"/>
+            <a:ext cx="57150" cy="57150"/>
+          </a:xfrm>
+          <a:prstGeom xmlns:a="http://schemas.openxmlformats.org/drawingml/2006/main" prst="rect">
+            <a:avLst/>
+          </a:prstGeom>
+          <a:solidFill xmlns:a="http://schemas.openxmlformats.org/drawingml/2006/main">
+            <a:srgbClr val="1D6072"/>
+          </a:solidFill>
+          <a:ln xmlns:a="http://schemas.openxmlformats.org/drawingml/2006/main" w="0">
+            <a:solidFill>
+              <a:srgbClr val="000000">
+                <a:alpha val="0"/>
+              </a:srgbClr>
+            </a:solidFill>
+            <a:prstDash val="solid"/>
+          </a:ln>
+        </p:spPr>
+      </p:sp>
+      <p:sp>
+        <p:nvSpPr>
+          <p:cNvPr id="21" name="">
+            <a:extLst xmlns:a="http://schemas.openxmlformats.org/drawingml/2006/main">
+              <a:ext uri="{FF2B5EF4-FFF2-40B4-BE49-F238E27FC236}">
+                <a16:creationId xmlns:a16="http://schemas.microsoft.com/office/drawing/2014/main" id="{988FD94F-BA0F-40D9-BC00-BE3F35890B4C}"/>
+              </a:ext>
+            </a:extLst>
+          </p:cNvPr>
+          <p:cNvSpPr>
+            <a:spLocks xmlns:a="http://schemas.openxmlformats.org/drawingml/2006/main" noGrp="1"/>
+          </p:cNvSpPr>
+          <p:nvPr/>
+        </p:nvSpPr>
+        <p:spPr>
+          <a:xfrm xmlns:a="http://schemas.openxmlformats.org/drawingml/2006/main">
+            <a:off x="6991350" y="2781300"/>
+            <a:ext cx="3619500" cy="438150"/>
+          </a:xfrm>
+          <a:prstGeom xmlns:a="http://schemas.openxmlformats.org/drawingml/2006/main" prst="rect">
+            <a:avLst/>
+          </a:prstGeom>
+          <a:solidFill xmlns:a="http://schemas.openxmlformats.org/drawingml/2006/main">
+            <a:srgbClr val="000000">
+              <a:alpha val="0"/>
+            </a:srgbClr>
+          </a:solidFill>
+          <a:ln xmlns:a="http://schemas.openxmlformats.org/drawingml/2006/main" w="0">
+            <a:solidFill>
+              <a:srgbClr val="000000">
+                <a:alpha val="0"/>
+              </a:srgbClr>
+            </a:solidFill>
+            <a:prstDash val="solid"/>
+          </a:ln>
+        </p:spPr>
+        <p:txBody>
+          <a:bodyPr xmlns:a="http://schemas.openxmlformats.org/drawingml/2006/main" lIns="0" tIns="0" rIns="0" bIns="0" anchor="t"/>
+          <a:lstStyle xmlns:a="http://schemas.openxmlformats.org/drawingml/2006/main"/>
+          <a:p xmlns:a="http://schemas.openxmlformats.org/drawingml/2006/main">
+            <a:pPr algn="l">
               <a:defRPr sz="1125" b="0">
                 <a:solidFill>
-                  <a:srgbClr val="FFFFFF"/>
+                  <a:srgbClr val="172026"/>
                 </a:solidFill>
                 <a:latin typeface="Aptos"/>
                 <a:ea typeface="Aptos"/>
@@ -3960,68 +4189,35 @@
             <a:r>
               <a:rPr sz="1125" b="0">
                 <a:solidFill>
-                  <a:srgbClr val="FFFFFF"/>
+                  <a:srgbClr val="172026"/>
                 </a:solidFill>
                 <a:latin typeface="Aptos"/>
                 <a:ea typeface="Aptos"/>
                 <a:cs typeface="Aptos"/>
               </a:rPr>
-              <a:t>Create or repair a MOIN grid for the selected ICP. Separate buyer questions by role and demand state. Recommend assets, sales use, RevOps signal meaning, assumptions, and human validation questions. Avoid generic content topics and vendor-demand claims before buyer belief exists.</a:t>
+              <a:t>Questions separated by role and demand state</a:t>
             </a:r>
           </a:p>
         </p:txBody>
       </p:sp>
       <p:sp>
         <p:nvSpPr>
-          <p:cNvPr id="17" name="">
-            <a:extLst xmlns:a="http://schemas.openxmlformats.org/drawingml/2006/main">
-              <a:ext uri="{FF2B5EF4-FFF2-40B4-BE49-F238E27FC236}">
-                <a16:creationId xmlns:a16="http://schemas.microsoft.com/office/drawing/2014/main" id="{A296E271-B4CA-4F6C-BCF7-4DAD49A40093}"/>
-              </a:ext>
-            </a:extLst>
-          </p:cNvPr>
-          <p:cNvSpPr>
-            <a:spLocks xmlns:a="http://schemas.openxmlformats.org/drawingml/2006/main" noGrp="1"/>
-          </p:cNvSpPr>
-          <p:nvPr/>
-        </p:nvSpPr>
-        <p:spPr>
-          <a:xfrm xmlns:a="http://schemas.openxmlformats.org/drawingml/2006/main">
-            <a:off x="6324600" y="1809750"/>
-            <a:ext cx="5867400" cy="4591050"/>
-          </a:xfrm>
-          <a:prstGeom xmlns:a="http://schemas.openxmlformats.org/drawingml/2006/main" prst="rect">
-            <a:avLst/>
-          </a:prstGeom>
-          <a:solidFill xmlns:a="http://schemas.openxmlformats.org/drawingml/2006/main">
-            <a:srgbClr val="FFFFFF"/>
-          </a:solidFill>
-          <a:ln xmlns:a="http://schemas.openxmlformats.org/drawingml/2006/main" w="9525">
-            <a:solidFill>
-              <a:srgbClr val="D9DDD6"/>
-            </a:solidFill>
-            <a:prstDash val="solid"/>
-          </a:ln>
-        </p:spPr>
-      </p:sp>
-      <p:sp>
-        <p:nvSpPr>
-          <p:cNvPr id="18" name="">
-            <a:extLst xmlns:a="http://schemas.openxmlformats.org/drawingml/2006/main">
-              <a:ext uri="{FF2B5EF4-FFF2-40B4-BE49-F238E27FC236}">
-                <a16:creationId xmlns:a16="http://schemas.microsoft.com/office/drawing/2014/main" id="{3F632B92-4894-4D0A-A4FD-A4C5E7799ADB}"/>
-              </a:ext>
-            </a:extLst>
-          </p:cNvPr>
-          <p:cNvSpPr>
-            <a:spLocks xmlns:a="http://schemas.openxmlformats.org/drawingml/2006/main" noGrp="1"/>
-          </p:cNvSpPr>
-          <p:nvPr/>
-        </p:nvSpPr>
-        <p:spPr>
-          <a:xfrm xmlns:a="http://schemas.openxmlformats.org/drawingml/2006/main">
-            <a:off x="6705600" y="2266950"/>
-            <a:ext cx="266700" cy="19050"/>
+          <p:cNvPr id="22" name="">
+            <a:extLst xmlns:a="http://schemas.openxmlformats.org/drawingml/2006/main">
+              <a:ext uri="{FF2B5EF4-FFF2-40B4-BE49-F238E27FC236}">
+                <a16:creationId xmlns:a16="http://schemas.microsoft.com/office/drawing/2014/main" id="{2349BD52-6406-4F0E-BF89-42753D76B23F}"/>
+              </a:ext>
+            </a:extLst>
+          </p:cNvPr>
+          <p:cNvSpPr>
+            <a:spLocks xmlns:a="http://schemas.openxmlformats.org/drawingml/2006/main" noGrp="1"/>
+          </p:cNvSpPr>
+          <p:nvPr/>
+        </p:nvSpPr>
+        <p:spPr>
+          <a:xfrm xmlns:a="http://schemas.openxmlformats.org/drawingml/2006/main">
+            <a:off x="6819900" y="3324225"/>
+            <a:ext cx="57150" cy="57150"/>
           </a:xfrm>
           <a:prstGeom xmlns:a="http://schemas.openxmlformats.org/drawingml/2006/main" prst="rect">
             <a:avLst/>
@@ -4041,22 +4237,22 @@
       </p:sp>
       <p:sp>
         <p:nvSpPr>
-          <p:cNvPr id="19" name="">
-            <a:extLst xmlns:a="http://schemas.openxmlformats.org/drawingml/2006/main">
-              <a:ext uri="{FF2B5EF4-FFF2-40B4-BE49-F238E27FC236}">
-                <a16:creationId xmlns:a16="http://schemas.microsoft.com/office/drawing/2014/main" id="{A6B66230-163C-4E0F-B8E5-EFF7AA5961FB}"/>
-              </a:ext>
-            </a:extLst>
-          </p:cNvPr>
-          <p:cNvSpPr>
-            <a:spLocks xmlns:a="http://schemas.openxmlformats.org/drawingml/2006/main" noGrp="1"/>
-          </p:cNvSpPr>
-          <p:nvPr/>
-        </p:nvSpPr>
-        <p:spPr>
-          <a:xfrm xmlns:a="http://schemas.openxmlformats.org/drawingml/2006/main">
-            <a:off x="7067550" y="2190750"/>
-            <a:ext cx="2476500" cy="171450"/>
+          <p:cNvPr id="23" name="">
+            <a:extLst xmlns:a="http://schemas.openxmlformats.org/drawingml/2006/main">
+              <a:ext uri="{FF2B5EF4-FFF2-40B4-BE49-F238E27FC236}">
+                <a16:creationId xmlns:a16="http://schemas.microsoft.com/office/drawing/2014/main" id="{11179F60-9357-4A5D-A9AB-C9744DDBF21C}"/>
+              </a:ext>
+            </a:extLst>
+          </p:cNvPr>
+          <p:cNvSpPr>
+            <a:spLocks xmlns:a="http://schemas.openxmlformats.org/drawingml/2006/main" noGrp="1"/>
+          </p:cNvSpPr>
+          <p:nvPr/>
+        </p:nvSpPr>
+        <p:spPr>
+          <a:xfrm xmlns:a="http://schemas.openxmlformats.org/drawingml/2006/main">
+            <a:off x="6991350" y="3257550"/>
+            <a:ext cx="3619500" cy="438150"/>
           </a:xfrm>
           <a:prstGeom xmlns:a="http://schemas.openxmlformats.org/drawingml/2006/main" prst="rect">
             <a:avLst/>
@@ -4077,6 +4273,734 @@
         </p:spPr>
         <p:txBody>
           <a:bodyPr xmlns:a="http://schemas.openxmlformats.org/drawingml/2006/main" lIns="0" tIns="0" rIns="0" bIns="0" anchor="t"/>
+          <a:lstStyle xmlns:a="http://schemas.openxmlformats.org/drawingml/2006/main"/>
+          <a:p xmlns:a="http://schemas.openxmlformats.org/drawingml/2006/main">
+            <a:pPr algn="l">
+              <a:defRPr sz="1125" b="0">
+                <a:solidFill>
+                  <a:srgbClr val="172026"/>
+                </a:solidFill>
+                <a:latin typeface="Aptos"/>
+                <a:ea typeface="Aptos"/>
+                <a:cs typeface="Aptos"/>
+              </a:defRPr>
+            </a:pPr>
+            <a:r>
+              <a:rPr sz="1125" b="0">
+                <a:solidFill>
+                  <a:srgbClr val="172026"/>
+                </a:solidFill>
+                <a:latin typeface="Aptos"/>
+                <a:ea typeface="Aptos"/>
+                <a:cs typeface="Aptos"/>
+              </a:rPr>
+              <a:t>One asset per critical question or proof gap</a:t>
+            </a:r>
+          </a:p>
+        </p:txBody>
+      </p:sp>
+      <p:sp>
+        <p:nvSpPr>
+          <p:cNvPr id="24" name="">
+            <a:extLst xmlns:a="http://schemas.openxmlformats.org/drawingml/2006/main">
+              <a:ext uri="{FF2B5EF4-FFF2-40B4-BE49-F238E27FC236}">
+                <a16:creationId xmlns:a16="http://schemas.microsoft.com/office/drawing/2014/main" id="{6CFCC613-8C08-4FC8-B61D-BF7607D085C6}"/>
+              </a:ext>
+            </a:extLst>
+          </p:cNvPr>
+          <p:cNvSpPr>
+            <a:spLocks xmlns:a="http://schemas.openxmlformats.org/drawingml/2006/main" noGrp="1"/>
+          </p:cNvSpPr>
+          <p:nvPr/>
+        </p:nvSpPr>
+        <p:spPr>
+          <a:xfrm xmlns:a="http://schemas.openxmlformats.org/drawingml/2006/main">
+            <a:off x="6819900" y="3800475"/>
+            <a:ext cx="57150" cy="57150"/>
+          </a:xfrm>
+          <a:prstGeom xmlns:a="http://schemas.openxmlformats.org/drawingml/2006/main" prst="rect">
+            <a:avLst/>
+          </a:prstGeom>
+          <a:solidFill xmlns:a="http://schemas.openxmlformats.org/drawingml/2006/main">
+            <a:srgbClr val="1D6072"/>
+          </a:solidFill>
+          <a:ln xmlns:a="http://schemas.openxmlformats.org/drawingml/2006/main" w="0">
+            <a:solidFill>
+              <a:srgbClr val="000000">
+                <a:alpha val="0"/>
+              </a:srgbClr>
+            </a:solidFill>
+            <a:prstDash val="solid"/>
+          </a:ln>
+        </p:spPr>
+      </p:sp>
+      <p:sp>
+        <p:nvSpPr>
+          <p:cNvPr id="25" name="">
+            <a:extLst xmlns:a="http://schemas.openxmlformats.org/drawingml/2006/main">
+              <a:ext uri="{FF2B5EF4-FFF2-40B4-BE49-F238E27FC236}">
+                <a16:creationId xmlns:a16="http://schemas.microsoft.com/office/drawing/2014/main" id="{3DEFF81F-E9D7-4FA9-9C78-82030C8BE2E3}"/>
+              </a:ext>
+            </a:extLst>
+          </p:cNvPr>
+          <p:cNvSpPr>
+            <a:spLocks xmlns:a="http://schemas.openxmlformats.org/drawingml/2006/main" noGrp="1"/>
+          </p:cNvSpPr>
+          <p:nvPr/>
+        </p:nvSpPr>
+        <p:spPr>
+          <a:xfrm xmlns:a="http://schemas.openxmlformats.org/drawingml/2006/main">
+            <a:off x="6991350" y="3733800"/>
+            <a:ext cx="3619500" cy="438150"/>
+          </a:xfrm>
+          <a:prstGeom xmlns:a="http://schemas.openxmlformats.org/drawingml/2006/main" prst="rect">
+            <a:avLst/>
+          </a:prstGeom>
+          <a:solidFill xmlns:a="http://schemas.openxmlformats.org/drawingml/2006/main">
+            <a:srgbClr val="000000">
+              <a:alpha val="0"/>
+            </a:srgbClr>
+          </a:solidFill>
+          <a:ln xmlns:a="http://schemas.openxmlformats.org/drawingml/2006/main" w="0">
+            <a:solidFill>
+              <a:srgbClr val="000000">
+                <a:alpha val="0"/>
+              </a:srgbClr>
+            </a:solidFill>
+            <a:prstDash val="solid"/>
+          </a:ln>
+        </p:spPr>
+        <p:txBody>
+          <a:bodyPr xmlns:a="http://schemas.openxmlformats.org/drawingml/2006/main" lIns="0" tIns="0" rIns="0" bIns="0" anchor="t"/>
+          <a:lstStyle xmlns:a="http://schemas.openxmlformats.org/drawingml/2006/main"/>
+          <a:p xmlns:a="http://schemas.openxmlformats.org/drawingml/2006/main">
+            <a:pPr algn="l">
+              <a:defRPr sz="1125" b="0">
+                <a:solidFill>
+                  <a:srgbClr val="172026"/>
+                </a:solidFill>
+                <a:latin typeface="Aptos"/>
+                <a:ea typeface="Aptos"/>
+                <a:cs typeface="Aptos"/>
+              </a:defRPr>
+            </a:pPr>
+            <a:r>
+              <a:rPr sz="1125" b="0">
+                <a:solidFill>
+                  <a:srgbClr val="172026"/>
+                </a:solidFill>
+                <a:latin typeface="Aptos"/>
+                <a:ea typeface="Aptos"/>
+                <a:cs typeface="Aptos"/>
+              </a:rPr>
+              <a:t>Sales use without pitching too early</a:t>
+            </a:r>
+          </a:p>
+        </p:txBody>
+      </p:sp>
+      <p:sp>
+        <p:nvSpPr>
+          <p:cNvPr id="26" name="">
+            <a:extLst xmlns:a="http://schemas.openxmlformats.org/drawingml/2006/main">
+              <a:ext uri="{FF2B5EF4-FFF2-40B4-BE49-F238E27FC236}">
+                <a16:creationId xmlns:a16="http://schemas.microsoft.com/office/drawing/2014/main" id="{7A08FEAB-7419-47AB-BF55-4BAB64FB40B8}"/>
+              </a:ext>
+            </a:extLst>
+          </p:cNvPr>
+          <p:cNvSpPr>
+            <a:spLocks xmlns:a="http://schemas.openxmlformats.org/drawingml/2006/main" noGrp="1"/>
+          </p:cNvSpPr>
+          <p:nvPr/>
+        </p:nvSpPr>
+        <p:spPr>
+          <a:xfrm xmlns:a="http://schemas.openxmlformats.org/drawingml/2006/main">
+            <a:off x="6819900" y="4276725"/>
+            <a:ext cx="57150" cy="57150"/>
+          </a:xfrm>
+          <a:prstGeom xmlns:a="http://schemas.openxmlformats.org/drawingml/2006/main" prst="rect">
+            <a:avLst/>
+          </a:prstGeom>
+          <a:solidFill xmlns:a="http://schemas.openxmlformats.org/drawingml/2006/main">
+            <a:srgbClr val="1D6072"/>
+          </a:solidFill>
+          <a:ln xmlns:a="http://schemas.openxmlformats.org/drawingml/2006/main" w="0">
+            <a:solidFill>
+              <a:srgbClr val="000000">
+                <a:alpha val="0"/>
+              </a:srgbClr>
+            </a:solidFill>
+            <a:prstDash val="solid"/>
+          </a:ln>
+        </p:spPr>
+      </p:sp>
+      <p:sp>
+        <p:nvSpPr>
+          <p:cNvPr id="27" name="">
+            <a:extLst xmlns:a="http://schemas.openxmlformats.org/drawingml/2006/main">
+              <a:ext uri="{FF2B5EF4-FFF2-40B4-BE49-F238E27FC236}">
+                <a16:creationId xmlns:a16="http://schemas.microsoft.com/office/drawing/2014/main" id="{1D7B6721-379C-47D3-A3AA-BED9F258278F}"/>
+              </a:ext>
+            </a:extLst>
+          </p:cNvPr>
+          <p:cNvSpPr>
+            <a:spLocks xmlns:a="http://schemas.openxmlformats.org/drawingml/2006/main" noGrp="1"/>
+          </p:cNvSpPr>
+          <p:nvPr/>
+        </p:nvSpPr>
+        <p:spPr>
+          <a:xfrm xmlns:a="http://schemas.openxmlformats.org/drawingml/2006/main">
+            <a:off x="6991350" y="4210050"/>
+            <a:ext cx="3619500" cy="438150"/>
+          </a:xfrm>
+          <a:prstGeom xmlns:a="http://schemas.openxmlformats.org/drawingml/2006/main" prst="rect">
+            <a:avLst/>
+          </a:prstGeom>
+          <a:solidFill xmlns:a="http://schemas.openxmlformats.org/drawingml/2006/main">
+            <a:srgbClr val="000000">
+              <a:alpha val="0"/>
+            </a:srgbClr>
+          </a:solidFill>
+          <a:ln xmlns:a="http://schemas.openxmlformats.org/drawingml/2006/main" w="0">
+            <a:solidFill>
+              <a:srgbClr val="000000">
+                <a:alpha val="0"/>
+              </a:srgbClr>
+            </a:solidFill>
+            <a:prstDash val="solid"/>
+          </a:ln>
+        </p:spPr>
+        <p:txBody>
+          <a:bodyPr xmlns:a="http://schemas.openxmlformats.org/drawingml/2006/main" lIns="0" tIns="0" rIns="0" bIns="0" anchor="t"/>
+          <a:lstStyle xmlns:a="http://schemas.openxmlformats.org/drawingml/2006/main"/>
+          <a:p xmlns:a="http://schemas.openxmlformats.org/drawingml/2006/main">
+            <a:pPr algn="l">
+              <a:defRPr sz="1125" b="0">
+                <a:solidFill>
+                  <a:srgbClr val="172026"/>
+                </a:solidFill>
+                <a:latin typeface="Aptos"/>
+                <a:ea typeface="Aptos"/>
+                <a:cs typeface="Aptos"/>
+              </a:defRPr>
+            </a:pPr>
+            <a:r>
+              <a:rPr sz="1125" b="0">
+                <a:solidFill>
+                  <a:srgbClr val="172026"/>
+                </a:solidFill>
+                <a:latin typeface="Aptos"/>
+                <a:ea typeface="Aptos"/>
+                <a:cs typeface="Aptos"/>
+              </a:rPr>
+              <a:t>Signal meaning and routing implication</a:t>
+            </a:r>
+          </a:p>
+        </p:txBody>
+      </p:sp>
+      <p:sp>
+        <p:nvSpPr>
+          <p:cNvPr id="28" name="">
+            <a:extLst xmlns:a="http://schemas.openxmlformats.org/drawingml/2006/main">
+              <a:ext uri="{FF2B5EF4-FFF2-40B4-BE49-F238E27FC236}">
+                <a16:creationId xmlns:a16="http://schemas.microsoft.com/office/drawing/2014/main" id="{FE1C96BC-AC34-44E8-8555-D2D1238C6C5E}"/>
+              </a:ext>
+            </a:extLst>
+          </p:cNvPr>
+          <p:cNvSpPr>
+            <a:spLocks xmlns:a="http://schemas.openxmlformats.org/drawingml/2006/main" noGrp="1"/>
+          </p:cNvSpPr>
+          <p:nvPr/>
+        </p:nvSpPr>
+        <p:spPr>
+          <a:xfrm xmlns:a="http://schemas.openxmlformats.org/drawingml/2006/main">
+            <a:off x="6819900" y="4752975"/>
+            <a:ext cx="57150" cy="57150"/>
+          </a:xfrm>
+          <a:prstGeom xmlns:a="http://schemas.openxmlformats.org/drawingml/2006/main" prst="rect">
+            <a:avLst/>
+          </a:prstGeom>
+          <a:solidFill xmlns:a="http://schemas.openxmlformats.org/drawingml/2006/main">
+            <a:srgbClr val="1D6072"/>
+          </a:solidFill>
+          <a:ln xmlns:a="http://schemas.openxmlformats.org/drawingml/2006/main" w="0">
+            <a:solidFill>
+              <a:srgbClr val="000000">
+                <a:alpha val="0"/>
+              </a:srgbClr>
+            </a:solidFill>
+            <a:prstDash val="solid"/>
+          </a:ln>
+        </p:spPr>
+      </p:sp>
+      <p:sp>
+        <p:nvSpPr>
+          <p:cNvPr id="29" name="">
+            <a:extLst xmlns:a="http://schemas.openxmlformats.org/drawingml/2006/main">
+              <a:ext uri="{FF2B5EF4-FFF2-40B4-BE49-F238E27FC236}">
+                <a16:creationId xmlns:a16="http://schemas.microsoft.com/office/drawing/2014/main" id="{73FC31F6-0820-4605-8E6A-18E230D9636F}"/>
+              </a:ext>
+            </a:extLst>
+          </p:cNvPr>
+          <p:cNvSpPr>
+            <a:spLocks xmlns:a="http://schemas.openxmlformats.org/drawingml/2006/main" noGrp="1"/>
+          </p:cNvSpPr>
+          <p:nvPr/>
+        </p:nvSpPr>
+        <p:spPr>
+          <a:xfrm xmlns:a="http://schemas.openxmlformats.org/drawingml/2006/main">
+            <a:off x="6991350" y="4686300"/>
+            <a:ext cx="3619500" cy="438150"/>
+          </a:xfrm>
+          <a:prstGeom xmlns:a="http://schemas.openxmlformats.org/drawingml/2006/main" prst="rect">
+            <a:avLst/>
+          </a:prstGeom>
+          <a:solidFill xmlns:a="http://schemas.openxmlformats.org/drawingml/2006/main">
+            <a:srgbClr val="000000">
+              <a:alpha val="0"/>
+            </a:srgbClr>
+          </a:solidFill>
+          <a:ln xmlns:a="http://schemas.openxmlformats.org/drawingml/2006/main" w="0">
+            <a:solidFill>
+              <a:srgbClr val="000000">
+                <a:alpha val="0"/>
+              </a:srgbClr>
+            </a:solidFill>
+            <a:prstDash val="solid"/>
+          </a:ln>
+        </p:spPr>
+        <p:txBody>
+          <a:bodyPr xmlns:a="http://schemas.openxmlformats.org/drawingml/2006/main" lIns="0" tIns="0" rIns="0" bIns="0" anchor="t"/>
+          <a:lstStyle xmlns:a="http://schemas.openxmlformats.org/drawingml/2006/main"/>
+          <a:p xmlns:a="http://schemas.openxmlformats.org/drawingml/2006/main">
+            <a:pPr algn="l">
+              <a:defRPr sz="1125" b="0">
+                <a:solidFill>
+                  <a:srgbClr val="172026"/>
+                </a:solidFill>
+                <a:latin typeface="Aptos"/>
+                <a:ea typeface="Aptos"/>
+                <a:cs typeface="Aptos"/>
+              </a:defRPr>
+            </a:pPr>
+            <a:r>
+              <a:rPr sz="1125" b="0">
+                <a:solidFill>
+                  <a:srgbClr val="172026"/>
+                </a:solidFill>
+                <a:latin typeface="Aptos"/>
+                <a:ea typeface="Aptos"/>
+                <a:cs typeface="Aptos"/>
+              </a:rPr>
+              <a:t>Assumptions and validation questions</a:t>
+            </a:r>
+          </a:p>
+        </p:txBody>
+      </p:sp>
+      <p:sp>
+        <p:nvSpPr>
+          <p:cNvPr id="30" name="">
+            <a:extLst xmlns:a="http://schemas.openxmlformats.org/drawingml/2006/main">
+              <a:ext uri="{FF2B5EF4-FFF2-40B4-BE49-F238E27FC236}">
+                <a16:creationId xmlns:a16="http://schemas.microsoft.com/office/drawing/2014/main" id="{98BC2029-6C63-488F-B7F9-94E6D87CD30B}"/>
+              </a:ext>
+            </a:extLst>
+          </p:cNvPr>
+          <p:cNvSpPr>
+            <a:spLocks xmlns:a="http://schemas.openxmlformats.org/drawingml/2006/main" noGrp="1"/>
+          </p:cNvSpPr>
+          <p:nvPr/>
+        </p:nvSpPr>
+        <p:spPr>
+          <a:xfrm xmlns:a="http://schemas.openxmlformats.org/drawingml/2006/main">
+            <a:off x="514350" y="6438900"/>
+            <a:ext cx="10915650" cy="9525"/>
+          </a:xfrm>
+          <a:prstGeom xmlns:a="http://schemas.openxmlformats.org/drawingml/2006/main" prst="rect">
+            <a:avLst/>
+          </a:prstGeom>
+          <a:solidFill xmlns:a="http://schemas.openxmlformats.org/drawingml/2006/main">
+            <a:srgbClr val="D9DDD6"/>
+          </a:solidFill>
+          <a:ln xmlns:a="http://schemas.openxmlformats.org/drawingml/2006/main" w="0">
+            <a:solidFill>
+              <a:srgbClr val="000000">
+                <a:alpha val="0"/>
+              </a:srgbClr>
+            </a:solidFill>
+            <a:prstDash val="solid"/>
+          </a:ln>
+        </p:spPr>
+      </p:sp>
+      <p:sp>
+        <p:nvSpPr>
+          <p:cNvPr id="31" name="">
+            <a:extLst xmlns:a="http://schemas.openxmlformats.org/drawingml/2006/main">
+              <a:ext uri="{FF2B5EF4-FFF2-40B4-BE49-F238E27FC236}">
+                <a16:creationId xmlns:a16="http://schemas.microsoft.com/office/drawing/2014/main" id="{45DF1681-EB96-4D5A-9A5E-AEEC9DFF6B2B}"/>
+              </a:ext>
+            </a:extLst>
+          </p:cNvPr>
+          <p:cNvSpPr>
+            <a:spLocks xmlns:a="http://schemas.openxmlformats.org/drawingml/2006/main" noGrp="1"/>
+          </p:cNvSpPr>
+          <p:nvPr/>
+        </p:nvSpPr>
+        <p:spPr>
+          <a:xfrm xmlns:a="http://schemas.openxmlformats.org/drawingml/2006/main">
+            <a:off x="514350" y="6553200"/>
+            <a:ext cx="5905500" cy="171450"/>
+          </a:xfrm>
+          <a:prstGeom xmlns:a="http://schemas.openxmlformats.org/drawingml/2006/main" prst="rect">
+            <a:avLst/>
+          </a:prstGeom>
+          <a:solidFill xmlns:a="http://schemas.openxmlformats.org/drawingml/2006/main">
+            <a:srgbClr val="000000">
+              <a:alpha val="0"/>
+            </a:srgbClr>
+          </a:solidFill>
+          <a:ln xmlns:a="http://schemas.openxmlformats.org/drawingml/2006/main" w="0">
+            <a:solidFill>
+              <a:srgbClr val="000000">
+                <a:alpha val="0"/>
+              </a:srgbClr>
+            </a:solidFill>
+            <a:prstDash val="solid"/>
+          </a:ln>
+        </p:spPr>
+        <p:txBody>
+          <a:bodyPr xmlns:a="http://schemas.openxmlformats.org/drawingml/2006/main" lIns="0" tIns="0" rIns="0" bIns="0" anchor="t"/>
+          <a:lstStyle xmlns:a="http://schemas.openxmlformats.org/drawingml/2006/main"/>
+          <a:p xmlns:a="http://schemas.openxmlformats.org/drawingml/2006/main">
+            <a:pPr algn="l">
+              <a:defRPr sz="675" b="0">
+                <a:solidFill>
+                  <a:srgbClr val="59646A"/>
+                </a:solidFill>
+                <a:latin typeface="Aptos"/>
+                <a:ea typeface="Aptos"/>
+                <a:cs typeface="Aptos"/>
+              </a:defRPr>
+            </a:pPr>
+            <a:r>
+              <a:rPr sz="675" b="0">
+                <a:solidFill>
+                  <a:srgbClr val="59646A"/>
+                </a:solidFill>
+                <a:latin typeface="Aptos"/>
+                <a:ea typeface="Aptos"/>
+                <a:cs typeface="Aptos"/>
+              </a:rPr>
+              <a:t>Lesson 04 - MOIN: Map Of Informational Needs</a:t>
+            </a:r>
+          </a:p>
+        </p:txBody>
+      </p:sp>
+      <p:sp>
+        <p:nvSpPr>
+          <p:cNvPr id="32" name="">
+            <a:extLst xmlns:a="http://schemas.openxmlformats.org/drawingml/2006/main">
+              <a:ext uri="{FF2B5EF4-FFF2-40B4-BE49-F238E27FC236}">
+                <a16:creationId xmlns:a16="http://schemas.microsoft.com/office/drawing/2014/main" id="{008CDD58-4BE5-4C99-8553-66B634008E71}"/>
+              </a:ext>
+            </a:extLst>
+          </p:cNvPr>
+          <p:cNvSpPr>
+            <a:spLocks xmlns:a="http://schemas.openxmlformats.org/drawingml/2006/main" noGrp="1"/>
+          </p:cNvSpPr>
+          <p:nvPr/>
+        </p:nvSpPr>
+        <p:spPr>
+          <a:xfrm xmlns:a="http://schemas.openxmlformats.org/drawingml/2006/main">
+            <a:off x="5334000" y="6553200"/>
+            <a:ext cx="4095750" cy="171450"/>
+          </a:xfrm>
+          <a:prstGeom xmlns:a="http://schemas.openxmlformats.org/drawingml/2006/main" prst="rect">
+            <a:avLst/>
+          </a:prstGeom>
+          <a:solidFill xmlns:a="http://schemas.openxmlformats.org/drawingml/2006/main">
+            <a:srgbClr val="000000">
+              <a:alpha val="0"/>
+            </a:srgbClr>
+          </a:solidFill>
+          <a:ln xmlns:a="http://schemas.openxmlformats.org/drawingml/2006/main" w="0">
+            <a:solidFill>
+              <a:srgbClr val="000000">
+                <a:alpha val="0"/>
+              </a:srgbClr>
+            </a:solidFill>
+            <a:prstDash val="solid"/>
+          </a:ln>
+        </p:spPr>
+        <p:txBody>
+          <a:bodyPr xmlns:a="http://schemas.openxmlformats.org/drawingml/2006/main" lIns="0" tIns="0" rIns="0" bIns="0" anchor="t"/>
+          <a:lstStyle xmlns:a="http://schemas.openxmlformats.org/drawingml/2006/main"/>
+          <a:p xmlns:a="http://schemas.openxmlformats.org/drawingml/2006/main">
+            <a:pPr algn="r">
+              <a:defRPr sz="600" b="0">
+                <a:solidFill>
+                  <a:srgbClr val="59646A"/>
+                </a:solidFill>
+                <a:latin typeface="Aptos"/>
+                <a:ea typeface="Aptos"/>
+                <a:cs typeface="Aptos"/>
+              </a:defRPr>
+            </a:pPr>
+            <a:r>
+              <a:rPr sz="600" b="0">
+                <a:solidFill>
+                  <a:srgbClr val="59646A"/>
+                </a:solidFill>
+                <a:latin typeface="Aptos"/>
+                <a:ea typeface="Aptos"/>
+                <a:cs typeface="Aptos"/>
+              </a:rPr>
+              <a:t>Source: modules/module-01-industrial-demand-generation/lessons/04-moin-map-of-informational-needs.md @ 9e28222</a:t>
+            </a:r>
+          </a:p>
+        </p:txBody>
+      </p:sp>
+      <p:sp>
+        <p:nvSpPr>
+          <p:cNvPr id="33" name="">
+            <a:extLst xmlns:a="http://schemas.openxmlformats.org/drawingml/2006/main">
+              <a:ext uri="{FF2B5EF4-FFF2-40B4-BE49-F238E27FC236}">
+                <a16:creationId xmlns:a16="http://schemas.microsoft.com/office/drawing/2014/main" id="{DE0783EB-E96C-441B-BD2F-179DF3FCD2B8}"/>
+              </a:ext>
+            </a:extLst>
+          </p:cNvPr>
+          <p:cNvSpPr>
+            <a:spLocks xmlns:a="http://schemas.openxmlformats.org/drawingml/2006/main" noGrp="1"/>
+          </p:cNvSpPr>
+          <p:nvPr/>
+        </p:nvSpPr>
+        <p:spPr>
+          <a:xfrm xmlns:a="http://schemas.openxmlformats.org/drawingml/2006/main">
+            <a:off x="10668000" y="6553200"/>
+            <a:ext cx="762000" cy="171450"/>
+          </a:xfrm>
+          <a:prstGeom xmlns:a="http://schemas.openxmlformats.org/drawingml/2006/main" prst="rect">
+            <a:avLst/>
+          </a:prstGeom>
+          <a:solidFill xmlns:a="http://schemas.openxmlformats.org/drawingml/2006/main">
+            <a:srgbClr val="000000">
+              <a:alpha val="0"/>
+            </a:srgbClr>
+          </a:solidFill>
+          <a:ln xmlns:a="http://schemas.openxmlformats.org/drawingml/2006/main" w="0">
+            <a:solidFill>
+              <a:srgbClr val="000000">
+                <a:alpha val="0"/>
+              </a:srgbClr>
+            </a:solidFill>
+            <a:prstDash val="solid"/>
+          </a:ln>
+        </p:spPr>
+        <p:txBody>
+          <a:bodyPr xmlns:a="http://schemas.openxmlformats.org/drawingml/2006/main" lIns="0" tIns="0" rIns="0" bIns="0" anchor="t"/>
+          <a:lstStyle xmlns:a="http://schemas.openxmlformats.org/drawingml/2006/main"/>
+          <a:p xmlns:a="http://schemas.openxmlformats.org/drawingml/2006/main">
+            <a:pPr algn="r">
+              <a:defRPr sz="675" b="0">
+                <a:solidFill>
+                  <a:srgbClr val="59646A"/>
+                </a:solidFill>
+                <a:latin typeface="Aptos"/>
+                <a:ea typeface="Aptos"/>
+                <a:cs typeface="Aptos"/>
+              </a:defRPr>
+            </a:pPr>
+            <a:r>
+              <a:rPr sz="675" b="0">
+                <a:solidFill>
+                  <a:srgbClr val="59646A"/>
+                </a:solidFill>
+                <a:latin typeface="Aptos"/>
+                <a:ea typeface="Aptos"/>
+                <a:cs typeface="Aptos"/>
+              </a:rPr>
+              <a:t>10/15</a:t>
+            </a:r>
+          </a:p>
+        </p:txBody>
+      </p:sp>
+      <p:sp>
+        <p:nvSpPr>
+          <p:cNvPr id="34" name="">
+            <a:extLst xmlns:a="http://schemas.openxmlformats.org/drawingml/2006/main">
+              <a:ext uri="{FF2B5EF4-FFF2-40B4-BE49-F238E27FC236}">
+                <a16:creationId xmlns:a16="http://schemas.microsoft.com/office/drawing/2014/main" id="{F6067AD5-74A8-4A49-A919-E32D0ED1728A}"/>
+              </a:ext>
+            </a:extLst>
+          </p:cNvPr>
+          <p:cNvSpPr>
+            <a:spLocks xmlns:a="http://schemas.openxmlformats.org/drawingml/2006/main" noGrp="1"/>
+          </p:cNvSpPr>
+          <p:nvPr/>
+        </p:nvSpPr>
+        <p:spPr>
+          <a:xfrm xmlns:a="http://schemas.openxmlformats.org/drawingml/2006/main">
+            <a:off x="0" y="0"/>
+            <a:ext cx="12192000" cy="1809750"/>
+          </a:xfrm>
+          <a:prstGeom xmlns:a="http://schemas.openxmlformats.org/drawingml/2006/main" prst="rect">
+            <a:avLst/>
+          </a:prstGeom>
+          <a:solidFill xmlns:a="http://schemas.openxmlformats.org/drawingml/2006/main">
+            <a:srgbClr val="F5F6F2"/>
+          </a:solidFill>
+          <a:ln xmlns:a="http://schemas.openxmlformats.org/drawingml/2006/main" w="0">
+            <a:solidFill>
+              <a:srgbClr val="000000">
+                <a:alpha val="0"/>
+              </a:srgbClr>
+            </a:solidFill>
+            <a:prstDash val="solid"/>
+          </a:ln>
+        </p:spPr>
+      </p:sp>
+      <p:sp>
+        <p:nvSpPr>
+          <p:cNvPr id="35" name="">
+            <a:extLst xmlns:a="http://schemas.openxmlformats.org/drawingml/2006/main">
+              <a:ext uri="{FF2B5EF4-FFF2-40B4-BE49-F238E27FC236}">
+                <a16:creationId xmlns:a16="http://schemas.microsoft.com/office/drawing/2014/main" id="{256BF910-766C-4C89-A37D-BD831093B9CD}"/>
+              </a:ext>
+            </a:extLst>
+          </p:cNvPr>
+          <p:cNvSpPr>
+            <a:spLocks xmlns:a="http://schemas.openxmlformats.org/drawingml/2006/main" noGrp="1"/>
+          </p:cNvSpPr>
+          <p:nvPr/>
+        </p:nvSpPr>
+        <p:spPr>
+          <a:xfrm xmlns:a="http://schemas.openxmlformats.org/drawingml/2006/main">
+            <a:off x="0" y="0"/>
+            <a:ext cx="171450" cy="1809750"/>
+          </a:xfrm>
+          <a:prstGeom xmlns:a="http://schemas.openxmlformats.org/drawingml/2006/main" prst="rect">
+            <a:avLst/>
+          </a:prstGeom>
+          <a:solidFill xmlns:a="http://schemas.openxmlformats.org/drawingml/2006/main">
+            <a:srgbClr val="12232B"/>
+          </a:solidFill>
+          <a:ln xmlns:a="http://schemas.openxmlformats.org/drawingml/2006/main" w="0">
+            <a:solidFill>
+              <a:srgbClr val="000000">
+                <a:alpha val="0"/>
+              </a:srgbClr>
+            </a:solidFill>
+            <a:prstDash val="solid"/>
+          </a:ln>
+        </p:spPr>
+      </p:sp>
+      <p:sp>
+        <p:nvSpPr>
+          <p:cNvPr id="36" name="">
+            <a:extLst xmlns:a="http://schemas.openxmlformats.org/drawingml/2006/main">
+              <a:ext uri="{FF2B5EF4-FFF2-40B4-BE49-F238E27FC236}">
+                <a16:creationId xmlns:a16="http://schemas.microsoft.com/office/drawing/2014/main" id="{9A89DDDD-255B-492A-A4B4-28711BB6B068}"/>
+              </a:ext>
+            </a:extLst>
+          </p:cNvPr>
+          <p:cNvSpPr>
+            <a:spLocks xmlns:a="http://schemas.openxmlformats.org/drawingml/2006/main" noGrp="1"/>
+          </p:cNvSpPr>
+          <p:nvPr/>
+        </p:nvSpPr>
+        <p:spPr>
+          <a:xfrm xmlns:a="http://schemas.openxmlformats.org/drawingml/2006/main">
+            <a:off x="171450" y="0"/>
+            <a:ext cx="57150" cy="1809750"/>
+          </a:xfrm>
+          <a:prstGeom xmlns:a="http://schemas.openxmlformats.org/drawingml/2006/main" prst="rect">
+            <a:avLst/>
+          </a:prstGeom>
+          <a:solidFill xmlns:a="http://schemas.openxmlformats.org/drawingml/2006/main">
+            <a:srgbClr val="A85D2A"/>
+          </a:solidFill>
+          <a:ln xmlns:a="http://schemas.openxmlformats.org/drawingml/2006/main" w="0">
+            <a:solidFill>
+              <a:srgbClr val="000000">
+                <a:alpha val="0"/>
+              </a:srgbClr>
+            </a:solidFill>
+            <a:prstDash val="solid"/>
+          </a:ln>
+        </p:spPr>
+      </p:sp>
+      <p:sp>
+        <p:nvSpPr>
+          <p:cNvPr id="37" name="kicker-04-marker">
+            <a:extLst xmlns:a="http://schemas.openxmlformats.org/drawingml/2006/main">
+              <a:ext uri="{FF2B5EF4-FFF2-40B4-BE49-F238E27FC236}">
+                <a16:creationId xmlns:a16="http://schemas.microsoft.com/office/drawing/2014/main" id="{67DE8C14-E94F-4BD8-8027-17B154E77FAA}"/>
+              </a:ext>
+            </a:extLst>
+          </p:cNvPr>
+          <p:cNvSpPr>
+            <a:spLocks xmlns:a="http://schemas.openxmlformats.org/drawingml/2006/main" noGrp="1"/>
+          </p:cNvSpPr>
+          <p:nvPr/>
+        </p:nvSpPr>
+        <p:spPr>
+          <a:xfrm xmlns:a="http://schemas.openxmlformats.org/drawingml/2006/main">
+            <a:off x="514350" y="390525"/>
+            <a:ext cx="76200" cy="76200"/>
+          </a:xfrm>
+          <a:prstGeom xmlns:a="http://schemas.openxmlformats.org/drawingml/2006/main" prst="rect">
+            <a:avLst/>
+          </a:prstGeom>
+          <a:solidFill xmlns:a="http://schemas.openxmlformats.org/drawingml/2006/main">
+            <a:srgbClr val="A85D2A"/>
+          </a:solidFill>
+          <a:ln xmlns:a="http://schemas.openxmlformats.org/drawingml/2006/main" w="0">
+            <a:solidFill>
+              <a:srgbClr val="000000">
+                <a:alpha val="0"/>
+              </a:srgbClr>
+            </a:solidFill>
+            <a:prstDash val="solid"/>
+          </a:ln>
+        </p:spPr>
+      </p:sp>
+      <p:sp>
+        <p:nvSpPr>
+          <p:cNvPr id="38" name="kicker-04-label">
+            <a:extLst xmlns:a="http://schemas.openxmlformats.org/drawingml/2006/main">
+              <a:ext uri="{FF2B5EF4-FFF2-40B4-BE49-F238E27FC236}">
+                <a16:creationId xmlns:a16="http://schemas.microsoft.com/office/drawing/2014/main" id="{616A0892-E710-4118-BCF9-E8DDFA855721}"/>
+              </a:ext>
+            </a:extLst>
+          </p:cNvPr>
+          <p:cNvSpPr>
+            <a:spLocks xmlns:a="http://schemas.openxmlformats.org/drawingml/2006/main" noGrp="1"/>
+          </p:cNvSpPr>
+          <p:nvPr/>
+        </p:nvSpPr>
+        <p:spPr>
+          <a:xfrm xmlns:a="http://schemas.openxmlformats.org/drawingml/2006/main">
+            <a:off x="685800" y="323850"/>
+            <a:ext cx="7524750" cy="228600"/>
+          </a:xfrm>
+          <a:prstGeom xmlns:a="http://schemas.openxmlformats.org/drawingml/2006/main" prst="rect">
+            <a:avLst/>
+          </a:prstGeom>
+          <a:solidFill xmlns:a="http://schemas.openxmlformats.org/drawingml/2006/main">
+            <a:srgbClr val="000000">
+              <a:alpha val="0"/>
+            </a:srgbClr>
+          </a:solidFill>
+          <a:ln xmlns:a="http://schemas.openxmlformats.org/drawingml/2006/main" w="0">
+            <a:solidFill>
+              <a:srgbClr val="000000">
+                <a:alpha val="0"/>
+              </a:srgbClr>
+            </a:solidFill>
+            <a:prstDash val="solid"/>
+          </a:ln>
+        </p:spPr>
+        <p:txBody>
+          <a:bodyPr xmlns:a="http://schemas.openxmlformats.org/drawingml/2006/main" lIns="0" tIns="0" rIns="0" bIns="0" anchor="ctr"/>
           <a:lstStyle xmlns:a="http://schemas.openxmlformats.org/drawingml/2006/main"/>
           <a:p xmlns:a="http://schemas.openxmlformats.org/drawingml/2006/main">
             <a:pPr algn="l">
@@ -4098,943 +5022,17 @@
                 <a:ea typeface="Aptos"/>
                 <a:cs typeface="Aptos"/>
               </a:rPr>
-              <a:t>REQUIRED OUTPUT STANDARD</a:t>
+              <a:t>MODULE 1 / LESSON 04 / STRUCTURED DRAFTING DRILL</a:t>
             </a:r>
           </a:p>
         </p:txBody>
       </p:sp>
       <p:sp>
         <p:nvSpPr>
-          <p:cNvPr id="20" name="">
-            <a:extLst xmlns:a="http://schemas.openxmlformats.org/drawingml/2006/main">
-              <a:ext uri="{FF2B5EF4-FFF2-40B4-BE49-F238E27FC236}">
-                <a16:creationId xmlns:a16="http://schemas.microsoft.com/office/drawing/2014/main" id="{6B778581-7A83-492C-A71A-DD76FD2DBB20}"/>
-              </a:ext>
-            </a:extLst>
-          </p:cNvPr>
-          <p:cNvSpPr>
-            <a:spLocks xmlns:a="http://schemas.openxmlformats.org/drawingml/2006/main" noGrp="1"/>
-          </p:cNvSpPr>
-          <p:nvPr/>
-        </p:nvSpPr>
-        <p:spPr>
-          <a:xfrm xmlns:a="http://schemas.openxmlformats.org/drawingml/2006/main">
-            <a:off x="6705600" y="2714625"/>
-            <a:ext cx="57150" cy="57150"/>
-          </a:xfrm>
-          <a:prstGeom xmlns:a="http://schemas.openxmlformats.org/drawingml/2006/main" prst="rect">
-            <a:avLst/>
-          </a:prstGeom>
-          <a:solidFill xmlns:a="http://schemas.openxmlformats.org/drawingml/2006/main">
-            <a:srgbClr val="1D6072"/>
-          </a:solidFill>
-          <a:ln xmlns:a="http://schemas.openxmlformats.org/drawingml/2006/main" w="0">
-            <a:solidFill>
-              <a:srgbClr val="000000">
-                <a:alpha val="0"/>
-              </a:srgbClr>
-            </a:solidFill>
-            <a:prstDash val="solid"/>
-          </a:ln>
-        </p:spPr>
-      </p:sp>
-      <p:sp>
-        <p:nvSpPr>
-          <p:cNvPr id="21" name="">
-            <a:extLst xmlns:a="http://schemas.openxmlformats.org/drawingml/2006/main">
-              <a:ext uri="{FF2B5EF4-FFF2-40B4-BE49-F238E27FC236}">
-                <a16:creationId xmlns:a16="http://schemas.microsoft.com/office/drawing/2014/main" id="{751C32D7-AF09-4DED-A416-37AD7DAF995F}"/>
-              </a:ext>
-            </a:extLst>
-          </p:cNvPr>
-          <p:cNvSpPr>
-            <a:spLocks xmlns:a="http://schemas.openxmlformats.org/drawingml/2006/main" noGrp="1"/>
-          </p:cNvSpPr>
-          <p:nvPr/>
-        </p:nvSpPr>
-        <p:spPr>
-          <a:xfrm xmlns:a="http://schemas.openxmlformats.org/drawingml/2006/main">
-            <a:off x="6877050" y="2647950"/>
-            <a:ext cx="4210050" cy="438150"/>
-          </a:xfrm>
-          <a:prstGeom xmlns:a="http://schemas.openxmlformats.org/drawingml/2006/main" prst="rect">
-            <a:avLst/>
-          </a:prstGeom>
-          <a:solidFill xmlns:a="http://schemas.openxmlformats.org/drawingml/2006/main">
-            <a:srgbClr val="000000">
-              <a:alpha val="0"/>
-            </a:srgbClr>
-          </a:solidFill>
-          <a:ln xmlns:a="http://schemas.openxmlformats.org/drawingml/2006/main" w="0">
-            <a:solidFill>
-              <a:srgbClr val="000000">
-                <a:alpha val="0"/>
-              </a:srgbClr>
-            </a:solidFill>
-            <a:prstDash val="solid"/>
-          </a:ln>
-        </p:spPr>
-        <p:txBody>
-          <a:bodyPr xmlns:a="http://schemas.openxmlformats.org/drawingml/2006/main" lIns="0" tIns="0" rIns="0" bIns="0" anchor="t"/>
-          <a:lstStyle xmlns:a="http://schemas.openxmlformats.org/drawingml/2006/main"/>
-          <a:p xmlns:a="http://schemas.openxmlformats.org/drawingml/2006/main">
-            <a:pPr algn="l">
-              <a:defRPr sz="1125" b="0">
-                <a:solidFill>
-                  <a:srgbClr val="172026"/>
-                </a:solidFill>
-                <a:latin typeface="Aptos"/>
-                <a:ea typeface="Aptos"/>
-                <a:cs typeface="Aptos"/>
-              </a:defRPr>
-            </a:pPr>
-            <a:r>
-              <a:rPr sz="1125" b="0">
-                <a:solidFill>
-                  <a:srgbClr val="172026"/>
-                </a:solidFill>
-                <a:latin typeface="Aptos"/>
-                <a:ea typeface="Aptos"/>
-                <a:cs typeface="Aptos"/>
-              </a:rPr>
-              <a:t>Questions separated by role and demand state</a:t>
-            </a:r>
-          </a:p>
-        </p:txBody>
-      </p:sp>
-      <p:sp>
-        <p:nvSpPr>
-          <p:cNvPr id="22" name="">
-            <a:extLst xmlns:a="http://schemas.openxmlformats.org/drawingml/2006/main">
-              <a:ext uri="{FF2B5EF4-FFF2-40B4-BE49-F238E27FC236}">
-                <a16:creationId xmlns:a16="http://schemas.microsoft.com/office/drawing/2014/main" id="{46833DF5-F077-4EB9-A7B3-A69E52819143}"/>
-              </a:ext>
-            </a:extLst>
-          </p:cNvPr>
-          <p:cNvSpPr>
-            <a:spLocks xmlns:a="http://schemas.openxmlformats.org/drawingml/2006/main" noGrp="1"/>
-          </p:cNvSpPr>
-          <p:nvPr/>
-        </p:nvSpPr>
-        <p:spPr>
-          <a:xfrm xmlns:a="http://schemas.openxmlformats.org/drawingml/2006/main">
-            <a:off x="6705600" y="3190875"/>
-            <a:ext cx="57150" cy="57150"/>
-          </a:xfrm>
-          <a:prstGeom xmlns:a="http://schemas.openxmlformats.org/drawingml/2006/main" prst="rect">
-            <a:avLst/>
-          </a:prstGeom>
-          <a:solidFill xmlns:a="http://schemas.openxmlformats.org/drawingml/2006/main">
-            <a:srgbClr val="1D6072"/>
-          </a:solidFill>
-          <a:ln xmlns:a="http://schemas.openxmlformats.org/drawingml/2006/main" w="0">
-            <a:solidFill>
-              <a:srgbClr val="000000">
-                <a:alpha val="0"/>
-              </a:srgbClr>
-            </a:solidFill>
-            <a:prstDash val="solid"/>
-          </a:ln>
-        </p:spPr>
-      </p:sp>
-      <p:sp>
-        <p:nvSpPr>
-          <p:cNvPr id="23" name="">
-            <a:extLst xmlns:a="http://schemas.openxmlformats.org/drawingml/2006/main">
-              <a:ext uri="{FF2B5EF4-FFF2-40B4-BE49-F238E27FC236}">
-                <a16:creationId xmlns:a16="http://schemas.microsoft.com/office/drawing/2014/main" id="{2A89DF31-21B5-4361-B8BE-B61ECAF119D1}"/>
-              </a:ext>
-            </a:extLst>
-          </p:cNvPr>
-          <p:cNvSpPr>
-            <a:spLocks xmlns:a="http://schemas.openxmlformats.org/drawingml/2006/main" noGrp="1"/>
-          </p:cNvSpPr>
-          <p:nvPr/>
-        </p:nvSpPr>
-        <p:spPr>
-          <a:xfrm xmlns:a="http://schemas.openxmlformats.org/drawingml/2006/main">
-            <a:off x="6877050" y="3124200"/>
-            <a:ext cx="4210050" cy="438150"/>
-          </a:xfrm>
-          <a:prstGeom xmlns:a="http://schemas.openxmlformats.org/drawingml/2006/main" prst="rect">
-            <a:avLst/>
-          </a:prstGeom>
-          <a:solidFill xmlns:a="http://schemas.openxmlformats.org/drawingml/2006/main">
-            <a:srgbClr val="000000">
-              <a:alpha val="0"/>
-            </a:srgbClr>
-          </a:solidFill>
-          <a:ln xmlns:a="http://schemas.openxmlformats.org/drawingml/2006/main" w="0">
-            <a:solidFill>
-              <a:srgbClr val="000000">
-                <a:alpha val="0"/>
-              </a:srgbClr>
-            </a:solidFill>
-            <a:prstDash val="solid"/>
-          </a:ln>
-        </p:spPr>
-        <p:txBody>
-          <a:bodyPr xmlns:a="http://schemas.openxmlformats.org/drawingml/2006/main" lIns="0" tIns="0" rIns="0" bIns="0" anchor="t"/>
-          <a:lstStyle xmlns:a="http://schemas.openxmlformats.org/drawingml/2006/main"/>
-          <a:p xmlns:a="http://schemas.openxmlformats.org/drawingml/2006/main">
-            <a:pPr algn="l">
-              <a:defRPr sz="1125" b="0">
-                <a:solidFill>
-                  <a:srgbClr val="172026"/>
-                </a:solidFill>
-                <a:latin typeface="Aptos"/>
-                <a:ea typeface="Aptos"/>
-                <a:cs typeface="Aptos"/>
-              </a:defRPr>
-            </a:pPr>
-            <a:r>
-              <a:rPr sz="1125" b="0">
-                <a:solidFill>
-                  <a:srgbClr val="172026"/>
-                </a:solidFill>
-                <a:latin typeface="Aptos"/>
-                <a:ea typeface="Aptos"/>
-                <a:cs typeface="Aptos"/>
-              </a:rPr>
-              <a:t>One asset per critical question or proof gap</a:t>
-            </a:r>
-          </a:p>
-        </p:txBody>
-      </p:sp>
-      <p:sp>
-        <p:nvSpPr>
-          <p:cNvPr id="24" name="">
-            <a:extLst xmlns:a="http://schemas.openxmlformats.org/drawingml/2006/main">
-              <a:ext uri="{FF2B5EF4-FFF2-40B4-BE49-F238E27FC236}">
-                <a16:creationId xmlns:a16="http://schemas.microsoft.com/office/drawing/2014/main" id="{8193C10D-1349-407C-ABAC-F3A1D55460F7}"/>
-              </a:ext>
-            </a:extLst>
-          </p:cNvPr>
-          <p:cNvSpPr>
-            <a:spLocks xmlns:a="http://schemas.openxmlformats.org/drawingml/2006/main" noGrp="1"/>
-          </p:cNvSpPr>
-          <p:nvPr/>
-        </p:nvSpPr>
-        <p:spPr>
-          <a:xfrm xmlns:a="http://schemas.openxmlformats.org/drawingml/2006/main">
-            <a:off x="6705600" y="3667125"/>
-            <a:ext cx="57150" cy="57150"/>
-          </a:xfrm>
-          <a:prstGeom xmlns:a="http://schemas.openxmlformats.org/drawingml/2006/main" prst="rect">
-            <a:avLst/>
-          </a:prstGeom>
-          <a:solidFill xmlns:a="http://schemas.openxmlformats.org/drawingml/2006/main">
-            <a:srgbClr val="1D6072"/>
-          </a:solidFill>
-          <a:ln xmlns:a="http://schemas.openxmlformats.org/drawingml/2006/main" w="0">
-            <a:solidFill>
-              <a:srgbClr val="000000">
-                <a:alpha val="0"/>
-              </a:srgbClr>
-            </a:solidFill>
-            <a:prstDash val="solid"/>
-          </a:ln>
-        </p:spPr>
-      </p:sp>
-      <p:sp>
-        <p:nvSpPr>
-          <p:cNvPr id="25" name="">
-            <a:extLst xmlns:a="http://schemas.openxmlformats.org/drawingml/2006/main">
-              <a:ext uri="{FF2B5EF4-FFF2-40B4-BE49-F238E27FC236}">
-                <a16:creationId xmlns:a16="http://schemas.microsoft.com/office/drawing/2014/main" id="{5DEED09E-C159-4D91-B5CA-C34AA409DAA2}"/>
-              </a:ext>
-            </a:extLst>
-          </p:cNvPr>
-          <p:cNvSpPr>
-            <a:spLocks xmlns:a="http://schemas.openxmlformats.org/drawingml/2006/main" noGrp="1"/>
-          </p:cNvSpPr>
-          <p:nvPr/>
-        </p:nvSpPr>
-        <p:spPr>
-          <a:xfrm xmlns:a="http://schemas.openxmlformats.org/drawingml/2006/main">
-            <a:off x="6877050" y="3600450"/>
-            <a:ext cx="4210050" cy="438150"/>
-          </a:xfrm>
-          <a:prstGeom xmlns:a="http://schemas.openxmlformats.org/drawingml/2006/main" prst="rect">
-            <a:avLst/>
-          </a:prstGeom>
-          <a:solidFill xmlns:a="http://schemas.openxmlformats.org/drawingml/2006/main">
-            <a:srgbClr val="000000">
-              <a:alpha val="0"/>
-            </a:srgbClr>
-          </a:solidFill>
-          <a:ln xmlns:a="http://schemas.openxmlformats.org/drawingml/2006/main" w="0">
-            <a:solidFill>
-              <a:srgbClr val="000000">
-                <a:alpha val="0"/>
-              </a:srgbClr>
-            </a:solidFill>
-            <a:prstDash val="solid"/>
-          </a:ln>
-        </p:spPr>
-        <p:txBody>
-          <a:bodyPr xmlns:a="http://schemas.openxmlformats.org/drawingml/2006/main" lIns="0" tIns="0" rIns="0" bIns="0" anchor="t"/>
-          <a:lstStyle xmlns:a="http://schemas.openxmlformats.org/drawingml/2006/main"/>
-          <a:p xmlns:a="http://schemas.openxmlformats.org/drawingml/2006/main">
-            <a:pPr algn="l">
-              <a:defRPr sz="1125" b="0">
-                <a:solidFill>
-                  <a:srgbClr val="172026"/>
-                </a:solidFill>
-                <a:latin typeface="Aptos"/>
-                <a:ea typeface="Aptos"/>
-                <a:cs typeface="Aptos"/>
-              </a:defRPr>
-            </a:pPr>
-            <a:r>
-              <a:rPr sz="1125" b="0">
-                <a:solidFill>
-                  <a:srgbClr val="172026"/>
-                </a:solidFill>
-                <a:latin typeface="Aptos"/>
-                <a:ea typeface="Aptos"/>
-                <a:cs typeface="Aptos"/>
-              </a:rPr>
-              <a:t>Sales use without pitching too early</a:t>
-            </a:r>
-          </a:p>
-        </p:txBody>
-      </p:sp>
-      <p:sp>
-        <p:nvSpPr>
-          <p:cNvPr id="26" name="">
-            <a:extLst xmlns:a="http://schemas.openxmlformats.org/drawingml/2006/main">
-              <a:ext uri="{FF2B5EF4-FFF2-40B4-BE49-F238E27FC236}">
-                <a16:creationId xmlns:a16="http://schemas.microsoft.com/office/drawing/2014/main" id="{6F7A2C32-532F-40B3-ABCC-DCC28D1D364F}"/>
-              </a:ext>
-            </a:extLst>
-          </p:cNvPr>
-          <p:cNvSpPr>
-            <a:spLocks xmlns:a="http://schemas.openxmlformats.org/drawingml/2006/main" noGrp="1"/>
-          </p:cNvSpPr>
-          <p:nvPr/>
-        </p:nvSpPr>
-        <p:spPr>
-          <a:xfrm xmlns:a="http://schemas.openxmlformats.org/drawingml/2006/main">
-            <a:off x="6705600" y="4143375"/>
-            <a:ext cx="57150" cy="57150"/>
-          </a:xfrm>
-          <a:prstGeom xmlns:a="http://schemas.openxmlformats.org/drawingml/2006/main" prst="rect">
-            <a:avLst/>
-          </a:prstGeom>
-          <a:solidFill xmlns:a="http://schemas.openxmlformats.org/drawingml/2006/main">
-            <a:srgbClr val="1D6072"/>
-          </a:solidFill>
-          <a:ln xmlns:a="http://schemas.openxmlformats.org/drawingml/2006/main" w="0">
-            <a:solidFill>
-              <a:srgbClr val="000000">
-                <a:alpha val="0"/>
-              </a:srgbClr>
-            </a:solidFill>
-            <a:prstDash val="solid"/>
-          </a:ln>
-        </p:spPr>
-      </p:sp>
-      <p:sp>
-        <p:nvSpPr>
-          <p:cNvPr id="27" name="">
-            <a:extLst xmlns:a="http://schemas.openxmlformats.org/drawingml/2006/main">
-              <a:ext uri="{FF2B5EF4-FFF2-40B4-BE49-F238E27FC236}">
-                <a16:creationId xmlns:a16="http://schemas.microsoft.com/office/drawing/2014/main" id="{1738BE6B-64C7-491B-9E4E-19604ED04A98}"/>
-              </a:ext>
-            </a:extLst>
-          </p:cNvPr>
-          <p:cNvSpPr>
-            <a:spLocks xmlns:a="http://schemas.openxmlformats.org/drawingml/2006/main" noGrp="1"/>
-          </p:cNvSpPr>
-          <p:nvPr/>
-        </p:nvSpPr>
-        <p:spPr>
-          <a:xfrm xmlns:a="http://schemas.openxmlformats.org/drawingml/2006/main">
-            <a:off x="6877050" y="4076700"/>
-            <a:ext cx="4210050" cy="438150"/>
-          </a:xfrm>
-          <a:prstGeom xmlns:a="http://schemas.openxmlformats.org/drawingml/2006/main" prst="rect">
-            <a:avLst/>
-          </a:prstGeom>
-          <a:solidFill xmlns:a="http://schemas.openxmlformats.org/drawingml/2006/main">
-            <a:srgbClr val="000000">
-              <a:alpha val="0"/>
-            </a:srgbClr>
-          </a:solidFill>
-          <a:ln xmlns:a="http://schemas.openxmlformats.org/drawingml/2006/main" w="0">
-            <a:solidFill>
-              <a:srgbClr val="000000">
-                <a:alpha val="0"/>
-              </a:srgbClr>
-            </a:solidFill>
-            <a:prstDash val="solid"/>
-          </a:ln>
-        </p:spPr>
-        <p:txBody>
-          <a:bodyPr xmlns:a="http://schemas.openxmlformats.org/drawingml/2006/main" lIns="0" tIns="0" rIns="0" bIns="0" anchor="t"/>
-          <a:lstStyle xmlns:a="http://schemas.openxmlformats.org/drawingml/2006/main"/>
-          <a:p xmlns:a="http://schemas.openxmlformats.org/drawingml/2006/main">
-            <a:pPr algn="l">
-              <a:defRPr sz="1125" b="0">
-                <a:solidFill>
-                  <a:srgbClr val="172026"/>
-                </a:solidFill>
-                <a:latin typeface="Aptos"/>
-                <a:ea typeface="Aptos"/>
-                <a:cs typeface="Aptos"/>
-              </a:defRPr>
-            </a:pPr>
-            <a:r>
-              <a:rPr sz="1125" b="0">
-                <a:solidFill>
-                  <a:srgbClr val="172026"/>
-                </a:solidFill>
-                <a:latin typeface="Aptos"/>
-                <a:ea typeface="Aptos"/>
-                <a:cs typeface="Aptos"/>
-              </a:rPr>
-              <a:t>Signal meaning and routing implication</a:t>
-            </a:r>
-          </a:p>
-        </p:txBody>
-      </p:sp>
-      <p:sp>
-        <p:nvSpPr>
-          <p:cNvPr id="28" name="">
-            <a:extLst xmlns:a="http://schemas.openxmlformats.org/drawingml/2006/main">
-              <a:ext uri="{FF2B5EF4-FFF2-40B4-BE49-F238E27FC236}">
-                <a16:creationId xmlns:a16="http://schemas.microsoft.com/office/drawing/2014/main" id="{59B3518B-DF67-4151-9A4F-11F274A0A7B1}"/>
-              </a:ext>
-            </a:extLst>
-          </p:cNvPr>
-          <p:cNvSpPr>
-            <a:spLocks xmlns:a="http://schemas.openxmlformats.org/drawingml/2006/main" noGrp="1"/>
-          </p:cNvSpPr>
-          <p:nvPr/>
-        </p:nvSpPr>
-        <p:spPr>
-          <a:xfrm xmlns:a="http://schemas.openxmlformats.org/drawingml/2006/main">
-            <a:off x="6705600" y="4619625"/>
-            <a:ext cx="57150" cy="57150"/>
-          </a:xfrm>
-          <a:prstGeom xmlns:a="http://schemas.openxmlformats.org/drawingml/2006/main" prst="rect">
-            <a:avLst/>
-          </a:prstGeom>
-          <a:solidFill xmlns:a="http://schemas.openxmlformats.org/drawingml/2006/main">
-            <a:srgbClr val="1D6072"/>
-          </a:solidFill>
-          <a:ln xmlns:a="http://schemas.openxmlformats.org/drawingml/2006/main" w="0">
-            <a:solidFill>
-              <a:srgbClr val="000000">
-                <a:alpha val="0"/>
-              </a:srgbClr>
-            </a:solidFill>
-            <a:prstDash val="solid"/>
-          </a:ln>
-        </p:spPr>
-      </p:sp>
-      <p:sp>
-        <p:nvSpPr>
-          <p:cNvPr id="29" name="">
-            <a:extLst xmlns:a="http://schemas.openxmlformats.org/drawingml/2006/main">
-              <a:ext uri="{FF2B5EF4-FFF2-40B4-BE49-F238E27FC236}">
-                <a16:creationId xmlns:a16="http://schemas.microsoft.com/office/drawing/2014/main" id="{014B5C07-EECE-4762-A7A1-CF9BD789D01D}"/>
-              </a:ext>
-            </a:extLst>
-          </p:cNvPr>
-          <p:cNvSpPr>
-            <a:spLocks xmlns:a="http://schemas.openxmlformats.org/drawingml/2006/main" noGrp="1"/>
-          </p:cNvSpPr>
-          <p:nvPr/>
-        </p:nvSpPr>
-        <p:spPr>
-          <a:xfrm xmlns:a="http://schemas.openxmlformats.org/drawingml/2006/main">
-            <a:off x="6877050" y="4552950"/>
-            <a:ext cx="4210050" cy="438150"/>
-          </a:xfrm>
-          <a:prstGeom xmlns:a="http://schemas.openxmlformats.org/drawingml/2006/main" prst="rect">
-            <a:avLst/>
-          </a:prstGeom>
-          <a:solidFill xmlns:a="http://schemas.openxmlformats.org/drawingml/2006/main">
-            <a:srgbClr val="000000">
-              <a:alpha val="0"/>
-            </a:srgbClr>
-          </a:solidFill>
-          <a:ln xmlns:a="http://schemas.openxmlformats.org/drawingml/2006/main" w="0">
-            <a:solidFill>
-              <a:srgbClr val="000000">
-                <a:alpha val="0"/>
-              </a:srgbClr>
-            </a:solidFill>
-            <a:prstDash val="solid"/>
-          </a:ln>
-        </p:spPr>
-        <p:txBody>
-          <a:bodyPr xmlns:a="http://schemas.openxmlformats.org/drawingml/2006/main" lIns="0" tIns="0" rIns="0" bIns="0" anchor="t"/>
-          <a:lstStyle xmlns:a="http://schemas.openxmlformats.org/drawingml/2006/main"/>
-          <a:p xmlns:a="http://schemas.openxmlformats.org/drawingml/2006/main">
-            <a:pPr algn="l">
-              <a:defRPr sz="1125" b="0">
-                <a:solidFill>
-                  <a:srgbClr val="172026"/>
-                </a:solidFill>
-                <a:latin typeface="Aptos"/>
-                <a:ea typeface="Aptos"/>
-                <a:cs typeface="Aptos"/>
-              </a:defRPr>
-            </a:pPr>
-            <a:r>
-              <a:rPr sz="1125" b="0">
-                <a:solidFill>
-                  <a:srgbClr val="172026"/>
-                </a:solidFill>
-                <a:latin typeface="Aptos"/>
-                <a:ea typeface="Aptos"/>
-                <a:cs typeface="Aptos"/>
-              </a:rPr>
-              <a:t>Assumptions and human questions</a:t>
-            </a:r>
-          </a:p>
-        </p:txBody>
-      </p:sp>
-      <p:sp>
-        <p:nvSpPr>
-          <p:cNvPr id="30" name="">
-            <a:extLst xmlns:a="http://schemas.openxmlformats.org/drawingml/2006/main">
-              <a:ext uri="{FF2B5EF4-FFF2-40B4-BE49-F238E27FC236}">
-                <a16:creationId xmlns:a16="http://schemas.microsoft.com/office/drawing/2014/main" id="{78E675B5-2005-407E-9839-53439B9D9D41}"/>
-              </a:ext>
-            </a:extLst>
-          </p:cNvPr>
-          <p:cNvSpPr>
-            <a:spLocks xmlns:a="http://schemas.openxmlformats.org/drawingml/2006/main" noGrp="1"/>
-          </p:cNvSpPr>
-          <p:nvPr/>
-        </p:nvSpPr>
-        <p:spPr>
-          <a:xfrm xmlns:a="http://schemas.openxmlformats.org/drawingml/2006/main">
-            <a:off x="514350" y="6438900"/>
-            <a:ext cx="10915650" cy="9525"/>
-          </a:xfrm>
-          <a:prstGeom xmlns:a="http://schemas.openxmlformats.org/drawingml/2006/main" prst="rect">
-            <a:avLst/>
-          </a:prstGeom>
-          <a:solidFill xmlns:a="http://schemas.openxmlformats.org/drawingml/2006/main">
-            <a:srgbClr val="D9DDD6"/>
-          </a:solidFill>
-          <a:ln xmlns:a="http://schemas.openxmlformats.org/drawingml/2006/main" w="0">
-            <a:solidFill>
-              <a:srgbClr val="000000">
-                <a:alpha val="0"/>
-              </a:srgbClr>
-            </a:solidFill>
-            <a:prstDash val="solid"/>
-          </a:ln>
-        </p:spPr>
-      </p:sp>
-      <p:sp>
-        <p:nvSpPr>
-          <p:cNvPr id="31" name="">
-            <a:extLst xmlns:a="http://schemas.openxmlformats.org/drawingml/2006/main">
-              <a:ext uri="{FF2B5EF4-FFF2-40B4-BE49-F238E27FC236}">
-                <a16:creationId xmlns:a16="http://schemas.microsoft.com/office/drawing/2014/main" id="{FD1D6B88-4D43-4E4E-86E1-0CAE873852E1}"/>
-              </a:ext>
-            </a:extLst>
-          </p:cNvPr>
-          <p:cNvSpPr>
-            <a:spLocks xmlns:a="http://schemas.openxmlformats.org/drawingml/2006/main" noGrp="1"/>
-          </p:cNvSpPr>
-          <p:nvPr/>
-        </p:nvSpPr>
-        <p:spPr>
-          <a:xfrm xmlns:a="http://schemas.openxmlformats.org/drawingml/2006/main">
-            <a:off x="514350" y="6553200"/>
-            <a:ext cx="5905500" cy="171450"/>
-          </a:xfrm>
-          <a:prstGeom xmlns:a="http://schemas.openxmlformats.org/drawingml/2006/main" prst="rect">
-            <a:avLst/>
-          </a:prstGeom>
-          <a:solidFill xmlns:a="http://schemas.openxmlformats.org/drawingml/2006/main">
-            <a:srgbClr val="000000">
-              <a:alpha val="0"/>
-            </a:srgbClr>
-          </a:solidFill>
-          <a:ln xmlns:a="http://schemas.openxmlformats.org/drawingml/2006/main" w="0">
-            <a:solidFill>
-              <a:srgbClr val="000000">
-                <a:alpha val="0"/>
-              </a:srgbClr>
-            </a:solidFill>
-            <a:prstDash val="solid"/>
-          </a:ln>
-        </p:spPr>
-        <p:txBody>
-          <a:bodyPr xmlns:a="http://schemas.openxmlformats.org/drawingml/2006/main" lIns="0" tIns="0" rIns="0" bIns="0" anchor="t"/>
-          <a:lstStyle xmlns:a="http://schemas.openxmlformats.org/drawingml/2006/main"/>
-          <a:p xmlns:a="http://schemas.openxmlformats.org/drawingml/2006/main">
-            <a:pPr algn="l">
-              <a:defRPr sz="675" b="0">
-                <a:solidFill>
-                  <a:srgbClr val="59646A"/>
-                </a:solidFill>
-                <a:latin typeface="Aptos"/>
-                <a:ea typeface="Aptos"/>
-                <a:cs typeface="Aptos"/>
-              </a:defRPr>
-            </a:pPr>
-            <a:r>
-              <a:rPr sz="675" b="0">
-                <a:solidFill>
-                  <a:srgbClr val="59646A"/>
-                </a:solidFill>
-                <a:latin typeface="Aptos"/>
-                <a:ea typeface="Aptos"/>
-                <a:cs typeface="Aptos"/>
-              </a:rPr>
-              <a:t>Lesson 04 - MOIN: Map Of Informational Needs</a:t>
-            </a:r>
-          </a:p>
-        </p:txBody>
-      </p:sp>
-      <p:sp>
-        <p:nvSpPr>
-          <p:cNvPr id="32" name="">
-            <a:extLst xmlns:a="http://schemas.openxmlformats.org/drawingml/2006/main">
-              <a:ext uri="{FF2B5EF4-FFF2-40B4-BE49-F238E27FC236}">
-                <a16:creationId xmlns:a16="http://schemas.microsoft.com/office/drawing/2014/main" id="{B3B55E76-06E4-4A61-9C9E-DACD065F41B3}"/>
-              </a:ext>
-            </a:extLst>
-          </p:cNvPr>
-          <p:cNvSpPr>
-            <a:spLocks xmlns:a="http://schemas.openxmlformats.org/drawingml/2006/main" noGrp="1"/>
-          </p:cNvSpPr>
-          <p:nvPr/>
-        </p:nvSpPr>
-        <p:spPr>
-          <a:xfrm xmlns:a="http://schemas.openxmlformats.org/drawingml/2006/main">
-            <a:off x="5334000" y="6553200"/>
-            <a:ext cx="4095750" cy="171450"/>
-          </a:xfrm>
-          <a:prstGeom xmlns:a="http://schemas.openxmlformats.org/drawingml/2006/main" prst="rect">
-            <a:avLst/>
-          </a:prstGeom>
-          <a:solidFill xmlns:a="http://schemas.openxmlformats.org/drawingml/2006/main">
-            <a:srgbClr val="000000">
-              <a:alpha val="0"/>
-            </a:srgbClr>
-          </a:solidFill>
-          <a:ln xmlns:a="http://schemas.openxmlformats.org/drawingml/2006/main" w="0">
-            <a:solidFill>
-              <a:srgbClr val="000000">
-                <a:alpha val="0"/>
-              </a:srgbClr>
-            </a:solidFill>
-            <a:prstDash val="solid"/>
-          </a:ln>
-        </p:spPr>
-        <p:txBody>
-          <a:bodyPr xmlns:a="http://schemas.openxmlformats.org/drawingml/2006/main" lIns="0" tIns="0" rIns="0" bIns="0" anchor="t"/>
-          <a:lstStyle xmlns:a="http://schemas.openxmlformats.org/drawingml/2006/main"/>
-          <a:p xmlns:a="http://schemas.openxmlformats.org/drawingml/2006/main">
-            <a:pPr algn="r">
-              <a:defRPr sz="600" b="0">
-                <a:solidFill>
-                  <a:srgbClr val="59646A"/>
-                </a:solidFill>
-                <a:latin typeface="Aptos"/>
-                <a:ea typeface="Aptos"/>
-                <a:cs typeface="Aptos"/>
-              </a:defRPr>
-            </a:pPr>
-            <a:r>
-              <a:rPr sz="600" b="0">
-                <a:solidFill>
-                  <a:srgbClr val="59646A"/>
-                </a:solidFill>
-                <a:latin typeface="Aptos"/>
-                <a:ea typeface="Aptos"/>
-                <a:cs typeface="Aptos"/>
-              </a:rPr>
-              <a:t>Source: modules/module-01-industrial-demand-generation/lessons/04-moin-map-of-informational-needs.md @ 9e28222</a:t>
-            </a:r>
-          </a:p>
-        </p:txBody>
-      </p:sp>
-      <p:sp>
-        <p:nvSpPr>
-          <p:cNvPr id="33" name="">
-            <a:extLst xmlns:a="http://schemas.openxmlformats.org/drawingml/2006/main">
-              <a:ext uri="{FF2B5EF4-FFF2-40B4-BE49-F238E27FC236}">
-                <a16:creationId xmlns:a16="http://schemas.microsoft.com/office/drawing/2014/main" id="{462DCD65-49A9-48C1-A69A-D805DD5E0F5F}"/>
-              </a:ext>
-            </a:extLst>
-          </p:cNvPr>
-          <p:cNvSpPr>
-            <a:spLocks xmlns:a="http://schemas.openxmlformats.org/drawingml/2006/main" noGrp="1"/>
-          </p:cNvSpPr>
-          <p:nvPr/>
-        </p:nvSpPr>
-        <p:spPr>
-          <a:xfrm xmlns:a="http://schemas.openxmlformats.org/drawingml/2006/main">
-            <a:off x="10668000" y="6553200"/>
-            <a:ext cx="762000" cy="171450"/>
-          </a:xfrm>
-          <a:prstGeom xmlns:a="http://schemas.openxmlformats.org/drawingml/2006/main" prst="rect">
-            <a:avLst/>
-          </a:prstGeom>
-          <a:solidFill xmlns:a="http://schemas.openxmlformats.org/drawingml/2006/main">
-            <a:srgbClr val="000000">
-              <a:alpha val="0"/>
-            </a:srgbClr>
-          </a:solidFill>
-          <a:ln xmlns:a="http://schemas.openxmlformats.org/drawingml/2006/main" w="0">
-            <a:solidFill>
-              <a:srgbClr val="000000">
-                <a:alpha val="0"/>
-              </a:srgbClr>
-            </a:solidFill>
-            <a:prstDash val="solid"/>
-          </a:ln>
-        </p:spPr>
-        <p:txBody>
-          <a:bodyPr xmlns:a="http://schemas.openxmlformats.org/drawingml/2006/main" lIns="0" tIns="0" rIns="0" bIns="0" anchor="t"/>
-          <a:lstStyle xmlns:a="http://schemas.openxmlformats.org/drawingml/2006/main"/>
-          <a:p xmlns:a="http://schemas.openxmlformats.org/drawingml/2006/main">
-            <a:pPr algn="r">
-              <a:defRPr sz="675" b="0">
-                <a:solidFill>
-                  <a:srgbClr val="59646A"/>
-                </a:solidFill>
-                <a:latin typeface="Aptos"/>
-                <a:ea typeface="Aptos"/>
-                <a:cs typeface="Aptos"/>
-              </a:defRPr>
-            </a:pPr>
-            <a:r>
-              <a:rPr sz="675" b="0">
-                <a:solidFill>
-                  <a:srgbClr val="59646A"/>
-                </a:solidFill>
-                <a:latin typeface="Aptos"/>
-                <a:ea typeface="Aptos"/>
-                <a:cs typeface="Aptos"/>
-              </a:rPr>
-              <a:t>10/15</a:t>
-            </a:r>
-          </a:p>
-        </p:txBody>
-      </p:sp>
-      <p:sp>
-        <p:nvSpPr>
-          <p:cNvPr id="34" name="">
-            <a:extLst xmlns:a="http://schemas.openxmlformats.org/drawingml/2006/main">
-              <a:ext uri="{FF2B5EF4-FFF2-40B4-BE49-F238E27FC236}">
-                <a16:creationId xmlns:a16="http://schemas.microsoft.com/office/drawing/2014/main" id="{FEFFA19D-9086-4171-87FF-F7DED6E16CA6}"/>
-              </a:ext>
-            </a:extLst>
-          </p:cNvPr>
-          <p:cNvSpPr>
-            <a:spLocks xmlns:a="http://schemas.openxmlformats.org/drawingml/2006/main" noGrp="1"/>
-          </p:cNvSpPr>
-          <p:nvPr/>
-        </p:nvSpPr>
-        <p:spPr>
-          <a:xfrm xmlns:a="http://schemas.openxmlformats.org/drawingml/2006/main">
-            <a:off x="0" y="0"/>
-            <a:ext cx="12192000" cy="1809750"/>
-          </a:xfrm>
-          <a:prstGeom xmlns:a="http://schemas.openxmlformats.org/drawingml/2006/main" prst="rect">
-            <a:avLst/>
-          </a:prstGeom>
-          <a:solidFill xmlns:a="http://schemas.openxmlformats.org/drawingml/2006/main">
-            <a:srgbClr val="F5F6F2"/>
-          </a:solidFill>
-          <a:ln xmlns:a="http://schemas.openxmlformats.org/drawingml/2006/main" w="0">
-            <a:solidFill>
-              <a:srgbClr val="000000">
-                <a:alpha val="0"/>
-              </a:srgbClr>
-            </a:solidFill>
-            <a:prstDash val="solid"/>
-          </a:ln>
-        </p:spPr>
-      </p:sp>
-      <p:sp>
-        <p:nvSpPr>
-          <p:cNvPr id="35" name="">
-            <a:extLst xmlns:a="http://schemas.openxmlformats.org/drawingml/2006/main">
-              <a:ext uri="{FF2B5EF4-FFF2-40B4-BE49-F238E27FC236}">
-                <a16:creationId xmlns:a16="http://schemas.microsoft.com/office/drawing/2014/main" id="{7EAB74B5-889C-4247-9A8C-98C4BB82E7AC}"/>
-              </a:ext>
-            </a:extLst>
-          </p:cNvPr>
-          <p:cNvSpPr>
-            <a:spLocks xmlns:a="http://schemas.openxmlformats.org/drawingml/2006/main" noGrp="1"/>
-          </p:cNvSpPr>
-          <p:nvPr/>
-        </p:nvSpPr>
-        <p:spPr>
-          <a:xfrm xmlns:a="http://schemas.openxmlformats.org/drawingml/2006/main">
-            <a:off x="0" y="0"/>
-            <a:ext cx="171450" cy="1809750"/>
-          </a:xfrm>
-          <a:prstGeom xmlns:a="http://schemas.openxmlformats.org/drawingml/2006/main" prst="rect">
-            <a:avLst/>
-          </a:prstGeom>
-          <a:solidFill xmlns:a="http://schemas.openxmlformats.org/drawingml/2006/main">
-            <a:srgbClr val="12232B"/>
-          </a:solidFill>
-          <a:ln xmlns:a="http://schemas.openxmlformats.org/drawingml/2006/main" w="0">
-            <a:solidFill>
-              <a:srgbClr val="000000">
-                <a:alpha val="0"/>
-              </a:srgbClr>
-            </a:solidFill>
-            <a:prstDash val="solid"/>
-          </a:ln>
-        </p:spPr>
-      </p:sp>
-      <p:sp>
-        <p:nvSpPr>
-          <p:cNvPr id="36" name="">
-            <a:extLst xmlns:a="http://schemas.openxmlformats.org/drawingml/2006/main">
-              <a:ext uri="{FF2B5EF4-FFF2-40B4-BE49-F238E27FC236}">
-                <a16:creationId xmlns:a16="http://schemas.microsoft.com/office/drawing/2014/main" id="{D5B1F364-E3DB-4134-8A4C-E29325C91D0C}"/>
-              </a:ext>
-            </a:extLst>
-          </p:cNvPr>
-          <p:cNvSpPr>
-            <a:spLocks xmlns:a="http://schemas.openxmlformats.org/drawingml/2006/main" noGrp="1"/>
-          </p:cNvSpPr>
-          <p:nvPr/>
-        </p:nvSpPr>
-        <p:spPr>
-          <a:xfrm xmlns:a="http://schemas.openxmlformats.org/drawingml/2006/main">
-            <a:off x="171450" y="0"/>
-            <a:ext cx="57150" cy="1809750"/>
-          </a:xfrm>
-          <a:prstGeom xmlns:a="http://schemas.openxmlformats.org/drawingml/2006/main" prst="rect">
-            <a:avLst/>
-          </a:prstGeom>
-          <a:solidFill xmlns:a="http://schemas.openxmlformats.org/drawingml/2006/main">
-            <a:srgbClr val="A85D2A"/>
-          </a:solidFill>
-          <a:ln xmlns:a="http://schemas.openxmlformats.org/drawingml/2006/main" w="0">
-            <a:solidFill>
-              <a:srgbClr val="000000">
-                <a:alpha val="0"/>
-              </a:srgbClr>
-            </a:solidFill>
-            <a:prstDash val="solid"/>
-          </a:ln>
-        </p:spPr>
-      </p:sp>
-      <p:sp>
-        <p:nvSpPr>
-          <p:cNvPr id="37" name="kicker-04-marker">
-            <a:extLst xmlns:a="http://schemas.openxmlformats.org/drawingml/2006/main">
-              <a:ext uri="{FF2B5EF4-FFF2-40B4-BE49-F238E27FC236}">
-                <a16:creationId xmlns:a16="http://schemas.microsoft.com/office/drawing/2014/main" id="{ACCD2D48-7971-4017-952C-D28E7F6BDC9A}"/>
-              </a:ext>
-            </a:extLst>
-          </p:cNvPr>
-          <p:cNvSpPr>
-            <a:spLocks xmlns:a="http://schemas.openxmlformats.org/drawingml/2006/main" noGrp="1"/>
-          </p:cNvSpPr>
-          <p:nvPr/>
-        </p:nvSpPr>
-        <p:spPr>
-          <a:xfrm xmlns:a="http://schemas.openxmlformats.org/drawingml/2006/main">
-            <a:off x="514350" y="390525"/>
-            <a:ext cx="76200" cy="76200"/>
-          </a:xfrm>
-          <a:prstGeom xmlns:a="http://schemas.openxmlformats.org/drawingml/2006/main" prst="rect">
-            <a:avLst/>
-          </a:prstGeom>
-          <a:solidFill xmlns:a="http://schemas.openxmlformats.org/drawingml/2006/main">
-            <a:srgbClr val="A85D2A"/>
-          </a:solidFill>
-          <a:ln xmlns:a="http://schemas.openxmlformats.org/drawingml/2006/main" w="0">
-            <a:solidFill>
-              <a:srgbClr val="000000">
-                <a:alpha val="0"/>
-              </a:srgbClr>
-            </a:solidFill>
-            <a:prstDash val="solid"/>
-          </a:ln>
-        </p:spPr>
-      </p:sp>
-      <p:sp>
-        <p:nvSpPr>
-          <p:cNvPr id="38" name="kicker-04-label">
-            <a:extLst xmlns:a="http://schemas.openxmlformats.org/drawingml/2006/main">
-              <a:ext uri="{FF2B5EF4-FFF2-40B4-BE49-F238E27FC236}">
-                <a16:creationId xmlns:a16="http://schemas.microsoft.com/office/drawing/2014/main" id="{DA802C0D-6B87-431F-995B-6F903323BE52}"/>
-              </a:ext>
-            </a:extLst>
-          </p:cNvPr>
-          <p:cNvSpPr>
-            <a:spLocks xmlns:a="http://schemas.openxmlformats.org/drawingml/2006/main" noGrp="1"/>
-          </p:cNvSpPr>
-          <p:nvPr/>
-        </p:nvSpPr>
-        <p:spPr>
-          <a:xfrm xmlns:a="http://schemas.openxmlformats.org/drawingml/2006/main">
-            <a:off x="685800" y="323850"/>
-            <a:ext cx="7524750" cy="228600"/>
-          </a:xfrm>
-          <a:prstGeom xmlns:a="http://schemas.openxmlformats.org/drawingml/2006/main" prst="rect">
-            <a:avLst/>
-          </a:prstGeom>
-          <a:solidFill xmlns:a="http://schemas.openxmlformats.org/drawingml/2006/main">
-            <a:srgbClr val="000000">
-              <a:alpha val="0"/>
-            </a:srgbClr>
-          </a:solidFill>
-          <a:ln xmlns:a="http://schemas.openxmlformats.org/drawingml/2006/main" w="0">
-            <a:solidFill>
-              <a:srgbClr val="000000">
-                <a:alpha val="0"/>
-              </a:srgbClr>
-            </a:solidFill>
-            <a:prstDash val="solid"/>
-          </a:ln>
-        </p:spPr>
-        <p:txBody>
-          <a:bodyPr xmlns:a="http://schemas.openxmlformats.org/drawingml/2006/main" lIns="0" tIns="0" rIns="0" bIns="0" anchor="ctr"/>
-          <a:lstStyle xmlns:a="http://schemas.openxmlformats.org/drawingml/2006/main"/>
-          <a:p xmlns:a="http://schemas.openxmlformats.org/drawingml/2006/main">
-            <a:pPr algn="l">
-              <a:defRPr sz="750" b="1">
-                <a:solidFill>
-                  <a:srgbClr val="59646A"/>
-                </a:solidFill>
-                <a:latin typeface="Aptos"/>
-                <a:ea typeface="Aptos"/>
-                <a:cs typeface="Aptos"/>
-              </a:defRPr>
-            </a:pPr>
-            <a:r>
-              <a:rPr sz="750" b="1">
-                <a:solidFill>
-                  <a:srgbClr val="59646A"/>
-                </a:solidFill>
-                <a:latin typeface="Aptos"/>
-                <a:ea typeface="Aptos"/>
-                <a:cs typeface="Aptos"/>
-              </a:rPr>
-              <a:t>MODULE 1 / LESSON 04 / AI-ASSISTED EXERCISE</a:t>
-            </a:r>
-          </a:p>
-        </p:txBody>
-      </p:sp>
-      <p:sp>
-        <p:nvSpPr>
           <p:cNvPr id="39" name="">
             <a:extLst xmlns:a="http://schemas.openxmlformats.org/drawingml/2006/main">
               <a:ext uri="{FF2B5EF4-FFF2-40B4-BE49-F238E27FC236}">
-                <a16:creationId xmlns:a16="http://schemas.microsoft.com/office/drawing/2014/main" id="{2F5FD37D-82E5-45E6-9A69-A6C316CC42F8}"/>
+                <a16:creationId xmlns:a16="http://schemas.microsoft.com/office/drawing/2014/main" id="{B9B63F27-1FAB-4E43-8B1A-75AB34173AD2}"/>
               </a:ext>
             </a:extLst>
           </p:cNvPr>
@@ -5088,7 +5086,7 @@
                 <a:ea typeface="Aptos Display"/>
                 <a:cs typeface="Aptos Display"/>
               </a:rPr>
-              <a:t>Use AI to structure the attempt, then make humans responsible for judgment.</a:t>
+              <a:t>Structure the first draft before the room critiques it.</a:t>
             </a:r>
           </a:p>
         </p:txBody>
@@ -5098,7 +5096,7 @@
           <p:cNvPr id="40" name="">
             <a:extLst xmlns:a="http://schemas.openxmlformats.org/drawingml/2006/main">
               <a:ext uri="{FF2B5EF4-FFF2-40B4-BE49-F238E27FC236}">
-                <a16:creationId xmlns:a16="http://schemas.microsoft.com/office/drawing/2014/main" id="{91536122-16DE-4D92-A17F-0A12D69116DE}"/>
+                <a16:creationId xmlns:a16="http://schemas.microsoft.com/office/drawing/2014/main" id="{7FFF408C-A637-4C12-ABD3-2D350042D7AC}"/>
               </a:ext>
             </a:extLst>
           </p:cNvPr>
@@ -5152,7 +5150,7 @@
                 <a:ea typeface="Aptos"/>
                 <a:cs typeface="Aptos"/>
               </a:rPr>
-              <a:t>The prompt is constrained by source, assumptions, output standard, and human validation.</a:t>
+              <a:t>The brief is constrained by source evidence, assumptions, output standard, and validation.</a:t>
             </a:r>
           </a:p>
         </p:txBody>
@@ -5162,7 +5160,7 @@
           <p:cNvPr id="41" name="">
             <a:extLst xmlns:a="http://schemas.openxmlformats.org/drawingml/2006/main">
               <a:ext uri="{FF2B5EF4-FFF2-40B4-BE49-F238E27FC236}">
-                <a16:creationId xmlns:a16="http://schemas.microsoft.com/office/drawing/2014/main" id="{A6BDE227-1283-4A46-810D-C0974B833D1A}"/>
+                <a16:creationId xmlns:a16="http://schemas.microsoft.com/office/drawing/2014/main" id="{24F1BE15-FB9F-465B-ACF8-272C6F91CD68}"/>
               </a:ext>
             </a:extLst>
           </p:cNvPr>
@@ -5197,7 +5195,7 @@
           <p:cNvPr id="42" name="">
             <a:extLst xmlns:a="http://schemas.openxmlformats.org/drawingml/2006/main">
               <a:ext uri="{FF2B5EF4-FFF2-40B4-BE49-F238E27FC236}">
-                <a16:creationId xmlns:a16="http://schemas.microsoft.com/office/drawing/2014/main" id="{70024472-35F4-4F24-AFF6-4E240B126802}"/>
+                <a16:creationId xmlns:a16="http://schemas.microsoft.com/office/drawing/2014/main" id="{BD027DAB-F3DF-4F35-AA62-99EF42D18625}"/>
               </a:ext>
             </a:extLst>
           </p:cNvPr>
@@ -5232,7 +5230,7 @@
           <p:cNvPr id="43" name="">
             <a:extLst xmlns:a="http://schemas.openxmlformats.org/drawingml/2006/main">
               <a:ext uri="{FF2B5EF4-FFF2-40B4-BE49-F238E27FC236}">
-                <a16:creationId xmlns:a16="http://schemas.microsoft.com/office/drawing/2014/main" id="{421B8065-572A-4861-A6AF-80CB7252D10E}"/>
+                <a16:creationId xmlns:a16="http://schemas.microsoft.com/office/drawing/2014/main" id="{5812ABFB-EDA6-4549-81F4-962E73DA5D8F}"/>
               </a:ext>
             </a:extLst>
           </p:cNvPr>
@@ -5267,7 +5265,7 @@
           <p:cNvPr id="44" name="">
             <a:extLst xmlns:a="http://schemas.openxmlformats.org/drawingml/2006/main">
               <a:ext uri="{FF2B5EF4-FFF2-40B4-BE49-F238E27FC236}">
-                <a16:creationId xmlns:a16="http://schemas.microsoft.com/office/drawing/2014/main" id="{C0F3ABD7-7412-43B5-8695-F43FBCB32EB7}"/>
+                <a16:creationId xmlns:a16="http://schemas.microsoft.com/office/drawing/2014/main" id="{858BC310-7A93-4CF8-838A-2B534A709006}"/>
               </a:ext>
             </a:extLst>
           </p:cNvPr>
@@ -5302,7 +5300,7 @@
           <p:cNvPr id="45" name="">
             <a:extLst xmlns:a="http://schemas.openxmlformats.org/drawingml/2006/main">
               <a:ext uri="{FF2B5EF4-FFF2-40B4-BE49-F238E27FC236}">
-                <a16:creationId xmlns:a16="http://schemas.microsoft.com/office/drawing/2014/main" id="{8FD8F033-2EA1-4750-BBE2-498598DB1DAC}"/>
+                <a16:creationId xmlns:a16="http://schemas.microsoft.com/office/drawing/2014/main" id="{A2B2CC83-EE7B-40DA-AE2F-0DFF09C47C8B}"/>
               </a:ext>
             </a:extLst>
           </p:cNvPr>
@@ -5366,7 +5364,7 @@
           <p:cNvPr id="46" name="">
             <a:extLst xmlns:a="http://schemas.openxmlformats.org/drawingml/2006/main">
               <a:ext uri="{FF2B5EF4-FFF2-40B4-BE49-F238E27FC236}">
-                <a16:creationId xmlns:a16="http://schemas.microsoft.com/office/drawing/2014/main" id="{AAC1AB91-5932-4FB6-802D-5B9309B7ABA1}"/>
+                <a16:creationId xmlns:a16="http://schemas.microsoft.com/office/drawing/2014/main" id="{7A3DD47D-0337-4DB6-8D11-BCC4DB7EBAB1}"/>
               </a:ext>
             </a:extLst>
           </p:cNvPr>
@@ -5430,7 +5428,7 @@
           <p:cNvPr id="47" name="">
             <a:extLst xmlns:a="http://schemas.openxmlformats.org/drawingml/2006/main">
               <a:ext uri="{FF2B5EF4-FFF2-40B4-BE49-F238E27FC236}">
-                <a16:creationId xmlns:a16="http://schemas.microsoft.com/office/drawing/2014/main" id="{97DDFE91-CDBD-48FA-84BE-E3C1B7B9AACE}"/>
+                <a16:creationId xmlns:a16="http://schemas.microsoft.com/office/drawing/2014/main" id="{8DC6F0D2-AB62-43DF-9A24-95E47DB22AF4}"/>
               </a:ext>
             </a:extLst>
           </p:cNvPr>
@@ -5492,7 +5490,7 @@
     </p:spTree>
     <p:extLst>
       <p:ext uri="{BB962C8B-B14F-4D97-AF65-F5344CB8AC3E}">
-        <p14:creationId xmlns:p14="http://schemas.microsoft.com/office/powerpoint/2010/main" val="1892662831"/>
+        <p14:creationId xmlns:p14="http://schemas.microsoft.com/office/powerpoint/2010/main" val="2142060369"/>
       </p:ext>
     </p:extLst>
   </p:cSld>
@@ -5516,7 +5514,7 @@
           <p:cNvPr id="1" name="">
             <a:extLst xmlns:a="http://schemas.openxmlformats.org/drawingml/2006/main">
               <a:ext uri="{FF2B5EF4-FFF2-40B4-BE49-F238E27FC236}">
-                <a16:creationId xmlns:a16="http://schemas.microsoft.com/office/drawing/2014/main" id="{C2D43CD1-B641-460C-A504-61BA9BBCCD99}"/>
+                <a16:creationId xmlns:a16="http://schemas.microsoft.com/office/drawing/2014/main" id="{65331B3B-97B1-4608-BD03-02ED7E75696C}"/>
               </a:ext>
             </a:extLst>
           </p:cNvPr>
@@ -5551,7 +5549,7 @@
           <p:cNvPr id="2" name="">
             <a:extLst xmlns:a="http://schemas.openxmlformats.org/drawingml/2006/main">
               <a:ext uri="{FF2B5EF4-FFF2-40B4-BE49-F238E27FC236}">
-                <a16:creationId xmlns:a16="http://schemas.microsoft.com/office/drawing/2014/main" id="{02E3569F-2FB9-41FB-AFBA-1FC1C011C5BE}"/>
+                <a16:creationId xmlns:a16="http://schemas.microsoft.com/office/drawing/2014/main" id="{03B93495-1179-4CBF-B6C4-2CD9597E431A}"/>
               </a:ext>
             </a:extLst>
           </p:cNvPr>
@@ -5586,7 +5584,7 @@
           <p:cNvPr id="3" name="">
             <a:extLst xmlns:a="http://schemas.openxmlformats.org/drawingml/2006/main">
               <a:ext uri="{FF2B5EF4-FFF2-40B4-BE49-F238E27FC236}">
-                <a16:creationId xmlns:a16="http://schemas.microsoft.com/office/drawing/2014/main" id="{D595CDF9-A37F-44DF-AD5F-B61C22B6FC0E}"/>
+                <a16:creationId xmlns:a16="http://schemas.microsoft.com/office/drawing/2014/main" id="{98DEFF93-1056-472C-B55F-114C67359040}"/>
               </a:ext>
             </a:extLst>
           </p:cNvPr>
@@ -5621,7 +5619,7 @@
           <p:cNvPr id="4" name="kicker-04-marker">
             <a:extLst xmlns:a="http://schemas.openxmlformats.org/drawingml/2006/main">
               <a:ext uri="{FF2B5EF4-FFF2-40B4-BE49-F238E27FC236}">
-                <a16:creationId xmlns:a16="http://schemas.microsoft.com/office/drawing/2014/main" id="{6318C176-915D-4610-94D7-3B31E791E2E5}"/>
+                <a16:creationId xmlns:a16="http://schemas.microsoft.com/office/drawing/2014/main" id="{40C84BFE-2443-4F1A-922E-A0D40887A2CA}"/>
               </a:ext>
             </a:extLst>
           </p:cNvPr>
@@ -5656,7 +5654,7 @@
           <p:cNvPr id="5" name="kicker-04-label">
             <a:extLst xmlns:a="http://schemas.openxmlformats.org/drawingml/2006/main">
               <a:ext uri="{FF2B5EF4-FFF2-40B4-BE49-F238E27FC236}">
-                <a16:creationId xmlns:a16="http://schemas.microsoft.com/office/drawing/2014/main" id="{C9D02628-A259-4938-8C9D-1FBBFF28F5DD}"/>
+                <a16:creationId xmlns:a16="http://schemas.microsoft.com/office/drawing/2014/main" id="{411065C7-A1CB-447F-A6E2-13B17913A339}"/>
               </a:ext>
             </a:extLst>
           </p:cNvPr>
@@ -5710,7 +5708,7 @@
                 <a:ea typeface="Aptos"/>
                 <a:cs typeface="Aptos"/>
               </a:rPr>
-              <a:t>MODULE 1 / LESSON 04 / HUMAN CORRECTION</a:t>
+              <a:t>MODULE 1 / LESSON 04 / QUALITY CONTROL</a:t>
             </a:r>
           </a:p>
         </p:txBody>
@@ -5720,7 +5718,7 @@
           <p:cNvPr id="6" name="">
             <a:extLst xmlns:a="http://schemas.openxmlformats.org/drawingml/2006/main">
               <a:ext uri="{FF2B5EF4-FFF2-40B4-BE49-F238E27FC236}">
-                <a16:creationId xmlns:a16="http://schemas.microsoft.com/office/drawing/2014/main" id="{E5CD7F92-3DB2-40AA-8178-3281BD6212DA}"/>
+                <a16:creationId xmlns:a16="http://schemas.microsoft.com/office/drawing/2014/main" id="{08454D49-CF05-4ABD-B1F9-FA23FCAF9924}"/>
               </a:ext>
             </a:extLst>
           </p:cNvPr>
@@ -5774,7 +5772,7 @@
                 <a:ea typeface="Aptos Display"/>
                 <a:cs typeface="Aptos Display"/>
               </a:rPr>
-              <a:t>AI can draft structure. Humans must repair industrial reality.</a:t>
+              <a:t>Reject weak artifacts before they become operating practice.</a:t>
             </a:r>
           </a:p>
         </p:txBody>
@@ -5784,7 +5782,7 @@
           <p:cNvPr id="7" name="">
             <a:extLst xmlns:a="http://schemas.openxmlformats.org/drawingml/2006/main">
               <a:ext uri="{FF2B5EF4-FFF2-40B4-BE49-F238E27FC236}">
-                <a16:creationId xmlns:a16="http://schemas.microsoft.com/office/drawing/2014/main" id="{B3BB176F-85B3-4A53-9D15-F763292AA506}"/>
+                <a16:creationId xmlns:a16="http://schemas.microsoft.com/office/drawing/2014/main" id="{708421CF-CAFF-46B6-8111-C1D223B0BC6C}"/>
               </a:ext>
             </a:extLst>
           </p:cNvPr>
@@ -5848,7 +5846,7 @@
           <p:cNvPr id="8" name="">
             <a:extLst xmlns:a="http://schemas.openxmlformats.org/drawingml/2006/main">
               <a:ext uri="{FF2B5EF4-FFF2-40B4-BE49-F238E27FC236}">
-                <a16:creationId xmlns:a16="http://schemas.microsoft.com/office/drawing/2014/main" id="{780D8ED3-9919-473B-8230-4C1DF0CE923F}"/>
+                <a16:creationId xmlns:a16="http://schemas.microsoft.com/office/drawing/2014/main" id="{EB341066-43E8-468A-A5C7-33369CDEC34B}"/>
               </a:ext>
             </a:extLst>
           </p:cNvPr>
@@ -5883,7 +5881,7 @@
           <p:cNvPr id="9" name="">
             <a:extLst xmlns:a="http://schemas.openxmlformats.org/drawingml/2006/main">
               <a:ext uri="{FF2B5EF4-FFF2-40B4-BE49-F238E27FC236}">
-                <a16:creationId xmlns:a16="http://schemas.microsoft.com/office/drawing/2014/main" id="{08201C72-F0B4-4C5F-88BD-39033C15B533}"/>
+                <a16:creationId xmlns:a16="http://schemas.microsoft.com/office/drawing/2014/main" id="{E430462D-D4C7-427A-B62B-4E157603A12E}"/>
               </a:ext>
             </a:extLst>
           </p:cNvPr>
@@ -5947,7 +5945,7 @@
           <p:cNvPr id="10" name="">
             <a:extLst xmlns:a="http://schemas.openxmlformats.org/drawingml/2006/main">
               <a:ext uri="{FF2B5EF4-FFF2-40B4-BE49-F238E27FC236}">
-                <a16:creationId xmlns:a16="http://schemas.microsoft.com/office/drawing/2014/main" id="{F858E3B7-74CE-4246-BEDA-5533A3BEF581}"/>
+                <a16:creationId xmlns:a16="http://schemas.microsoft.com/office/drawing/2014/main" id="{AF5F29FD-17D6-499B-85D1-D7C5593AFEC1}"/>
               </a:ext>
             </a:extLst>
           </p:cNvPr>
@@ -6011,7 +6009,7 @@
           <p:cNvPr id="11" name="">
             <a:extLst xmlns:a="http://schemas.openxmlformats.org/drawingml/2006/main">
               <a:ext uri="{FF2B5EF4-FFF2-40B4-BE49-F238E27FC236}">
-                <a16:creationId xmlns:a16="http://schemas.microsoft.com/office/drawing/2014/main" id="{05AB5012-19A1-410B-BC27-078053B7C513}"/>
+                <a16:creationId xmlns:a16="http://schemas.microsoft.com/office/drawing/2014/main" id="{6DF3F66C-52CF-4D56-AA31-594D1484EC8F}"/>
               </a:ext>
             </a:extLst>
           </p:cNvPr>
@@ -6075,7 +6073,7 @@
           <p:cNvPr id="12" name="">
             <a:extLst xmlns:a="http://schemas.openxmlformats.org/drawingml/2006/main">
               <a:ext uri="{FF2B5EF4-FFF2-40B4-BE49-F238E27FC236}">
-                <a16:creationId xmlns:a16="http://schemas.microsoft.com/office/drawing/2014/main" id="{10F86447-9361-45F0-AEAC-E01C6092D593}"/>
+                <a16:creationId xmlns:a16="http://schemas.microsoft.com/office/drawing/2014/main" id="{040372CF-D215-461C-806C-232C8C999BD1}"/>
               </a:ext>
             </a:extLst>
           </p:cNvPr>
@@ -6110,7 +6108,7 @@
           <p:cNvPr id="13" name="">
             <a:extLst xmlns:a="http://schemas.openxmlformats.org/drawingml/2006/main">
               <a:ext uri="{FF2B5EF4-FFF2-40B4-BE49-F238E27FC236}">
-                <a16:creationId xmlns:a16="http://schemas.microsoft.com/office/drawing/2014/main" id="{68EB16D6-99DE-4491-9433-8AA34AEFA4DA}"/>
+                <a16:creationId xmlns:a16="http://schemas.microsoft.com/office/drawing/2014/main" id="{EA150B6A-13E5-495B-8675-1A5DFCB82921}"/>
               </a:ext>
             </a:extLst>
           </p:cNvPr>
@@ -6143,7 +6141,7 @@
           <p:cNvPr id="14" name="">
             <a:extLst xmlns:a="http://schemas.openxmlformats.org/drawingml/2006/main">
               <a:ext uri="{FF2B5EF4-FFF2-40B4-BE49-F238E27FC236}">
-                <a16:creationId xmlns:a16="http://schemas.microsoft.com/office/drawing/2014/main" id="{88E1198B-16DF-4A6E-A8ED-2DEDF823C59A}"/>
+                <a16:creationId xmlns:a16="http://schemas.microsoft.com/office/drawing/2014/main" id="{D2D79925-304D-4203-91D7-7FA33F0E6EB1}"/>
               </a:ext>
             </a:extLst>
           </p:cNvPr>
@@ -6178,7 +6176,7 @@
           <p:cNvPr id="15" name="">
             <a:extLst xmlns:a="http://schemas.openxmlformats.org/drawingml/2006/main">
               <a:ext uri="{FF2B5EF4-FFF2-40B4-BE49-F238E27FC236}">
-                <a16:creationId xmlns:a16="http://schemas.microsoft.com/office/drawing/2014/main" id="{9D0DE47F-EA92-4DAD-840D-E9A1142DB113}"/>
+                <a16:creationId xmlns:a16="http://schemas.microsoft.com/office/drawing/2014/main" id="{E8D6ABF8-1BBD-4435-9864-68C4891C708D}"/>
               </a:ext>
             </a:extLst>
           </p:cNvPr>
@@ -6232,7 +6230,7 @@
                 <a:ea typeface="Aptos"/>
                 <a:cs typeface="Aptos"/>
               </a:rPr>
-              <a:t>REJECT OR REPAIR WHEN AI OUTPUT...</a:t>
+              <a:t>REJECT OR REPAIR WHEN THE ARTIFACT...</a:t>
             </a:r>
           </a:p>
         </p:txBody>
@@ -6242,7 +6240,7 @@
           <p:cNvPr id="16" name="">
             <a:extLst xmlns:a="http://schemas.openxmlformats.org/drawingml/2006/main">
               <a:ext uri="{FF2B5EF4-FFF2-40B4-BE49-F238E27FC236}">
-                <a16:creationId xmlns:a16="http://schemas.microsoft.com/office/drawing/2014/main" id="{C12EE1E1-4F03-4874-9F07-B702E0D2158A}"/>
+                <a16:creationId xmlns:a16="http://schemas.microsoft.com/office/drawing/2014/main" id="{8E89C9A6-1A2E-4B24-9472-A63639B5E222}"/>
               </a:ext>
             </a:extLst>
           </p:cNvPr>
@@ -6277,7 +6275,7 @@
           <p:cNvPr id="17" name="">
             <a:extLst xmlns:a="http://schemas.openxmlformats.org/drawingml/2006/main">
               <a:ext uri="{FF2B5EF4-FFF2-40B4-BE49-F238E27FC236}">
-                <a16:creationId xmlns:a16="http://schemas.microsoft.com/office/drawing/2014/main" id="{B288D4EC-188A-40A3-9AC5-597869BE3161}"/>
+                <a16:creationId xmlns:a16="http://schemas.microsoft.com/office/drawing/2014/main" id="{B8DA46AF-BA5B-423D-9422-C588BCA6C3A7}"/>
               </a:ext>
             </a:extLst>
           </p:cNvPr>
@@ -6341,7 +6339,7 @@
           <p:cNvPr id="18" name="">
             <a:extLst xmlns:a="http://schemas.openxmlformats.org/drawingml/2006/main">
               <a:ext uri="{FF2B5EF4-FFF2-40B4-BE49-F238E27FC236}">
-                <a16:creationId xmlns:a16="http://schemas.microsoft.com/office/drawing/2014/main" id="{E84DBB6D-0D84-4308-B47C-C577519470B5}"/>
+                <a16:creationId xmlns:a16="http://schemas.microsoft.com/office/drawing/2014/main" id="{F8AF600A-9D4B-45B8-99E4-C04947903777}"/>
               </a:ext>
             </a:extLst>
           </p:cNvPr>
@@ -6376,7 +6374,7 @@
           <p:cNvPr id="19" name="">
             <a:extLst xmlns:a="http://schemas.openxmlformats.org/drawingml/2006/main">
               <a:ext uri="{FF2B5EF4-FFF2-40B4-BE49-F238E27FC236}">
-                <a16:creationId xmlns:a16="http://schemas.microsoft.com/office/drawing/2014/main" id="{88FFB5A5-954F-46C4-8995-91BFF618AD1B}"/>
+                <a16:creationId xmlns:a16="http://schemas.microsoft.com/office/drawing/2014/main" id="{7BD8B5C5-C86A-43D7-A8C8-C2A9FC79BCF1}"/>
               </a:ext>
             </a:extLst>
           </p:cNvPr>
@@ -6440,7 +6438,7 @@
           <p:cNvPr id="20" name="">
             <a:extLst xmlns:a="http://schemas.openxmlformats.org/drawingml/2006/main">
               <a:ext uri="{FF2B5EF4-FFF2-40B4-BE49-F238E27FC236}">
-                <a16:creationId xmlns:a16="http://schemas.microsoft.com/office/drawing/2014/main" id="{E486F7DF-5C05-42E6-A430-2F67F81E521C}"/>
+                <a16:creationId xmlns:a16="http://schemas.microsoft.com/office/drawing/2014/main" id="{2F6BFD6A-33C1-4EBE-AB33-46E6175D2CB4}"/>
               </a:ext>
             </a:extLst>
           </p:cNvPr>
@@ -6475,7 +6473,7 @@
           <p:cNvPr id="21" name="">
             <a:extLst xmlns:a="http://schemas.openxmlformats.org/drawingml/2006/main">
               <a:ext uri="{FF2B5EF4-FFF2-40B4-BE49-F238E27FC236}">
-                <a16:creationId xmlns:a16="http://schemas.microsoft.com/office/drawing/2014/main" id="{AE9E0AFC-5F83-4130-B6E7-AF6177C9F612}"/>
+                <a16:creationId xmlns:a16="http://schemas.microsoft.com/office/drawing/2014/main" id="{35D37DE2-9D70-48D5-A0BB-B788E8AEFB3B}"/>
               </a:ext>
             </a:extLst>
           </p:cNvPr>
@@ -6539,7 +6537,7 @@
           <p:cNvPr id="22" name="">
             <a:extLst xmlns:a="http://schemas.openxmlformats.org/drawingml/2006/main">
               <a:ext uri="{FF2B5EF4-FFF2-40B4-BE49-F238E27FC236}">
-                <a16:creationId xmlns:a16="http://schemas.microsoft.com/office/drawing/2014/main" id="{27204072-1513-44F6-BD05-A25E83DB223E}"/>
+                <a16:creationId xmlns:a16="http://schemas.microsoft.com/office/drawing/2014/main" id="{D72141EF-7B0E-4E34-A76E-6239DE012BBD}"/>
               </a:ext>
             </a:extLst>
           </p:cNvPr>
@@ -6574,7 +6572,7 @@
           <p:cNvPr id="23" name="">
             <a:extLst xmlns:a="http://schemas.openxmlformats.org/drawingml/2006/main">
               <a:ext uri="{FF2B5EF4-FFF2-40B4-BE49-F238E27FC236}">
-                <a16:creationId xmlns:a16="http://schemas.microsoft.com/office/drawing/2014/main" id="{80A1F195-9BD3-4BD8-B658-9DFB9921FD59}"/>
+                <a16:creationId xmlns:a16="http://schemas.microsoft.com/office/drawing/2014/main" id="{3AD8E1EA-05CA-4C22-9012-1B428776FAFC}"/>
               </a:ext>
             </a:extLst>
           </p:cNvPr>
@@ -6638,7 +6636,7 @@
           <p:cNvPr id="24" name="">
             <a:extLst xmlns:a="http://schemas.openxmlformats.org/drawingml/2006/main">
               <a:ext uri="{FF2B5EF4-FFF2-40B4-BE49-F238E27FC236}">
-                <a16:creationId xmlns:a16="http://schemas.microsoft.com/office/drawing/2014/main" id="{31A0F293-9ECC-4700-96FC-435A2BFB2E4A}"/>
+                <a16:creationId xmlns:a16="http://schemas.microsoft.com/office/drawing/2014/main" id="{8EFCC7FF-0CB5-4295-8CF2-33F5AF262E37}"/>
               </a:ext>
             </a:extLst>
           </p:cNvPr>
@@ -6673,7 +6671,7 @@
           <p:cNvPr id="25" name="">
             <a:extLst xmlns:a="http://schemas.openxmlformats.org/drawingml/2006/main">
               <a:ext uri="{FF2B5EF4-FFF2-40B4-BE49-F238E27FC236}">
-                <a16:creationId xmlns:a16="http://schemas.microsoft.com/office/drawing/2014/main" id="{67335351-7A3E-4FF6-8C55-D9A8E73C2755}"/>
+                <a16:creationId xmlns:a16="http://schemas.microsoft.com/office/drawing/2014/main" id="{ED9413EF-05C8-4A29-B25B-10188623ECEA}"/>
               </a:ext>
             </a:extLst>
           </p:cNvPr>
@@ -6737,7 +6735,7 @@
           <p:cNvPr id="26" name="">
             <a:extLst xmlns:a="http://schemas.openxmlformats.org/drawingml/2006/main">
               <a:ext uri="{FF2B5EF4-FFF2-40B4-BE49-F238E27FC236}">
-                <a16:creationId xmlns:a16="http://schemas.microsoft.com/office/drawing/2014/main" id="{C678E098-3664-42D6-A9E2-215B1FE01167}"/>
+                <a16:creationId xmlns:a16="http://schemas.microsoft.com/office/drawing/2014/main" id="{FA2914B0-FD97-47FE-A74D-28E5EF1C42E4}"/>
               </a:ext>
             </a:extLst>
           </p:cNvPr>
@@ -6770,7 +6768,7 @@
           <p:cNvPr id="27" name="">
             <a:extLst xmlns:a="http://schemas.openxmlformats.org/drawingml/2006/main">
               <a:ext uri="{FF2B5EF4-FFF2-40B4-BE49-F238E27FC236}">
-                <a16:creationId xmlns:a16="http://schemas.microsoft.com/office/drawing/2014/main" id="{99183D93-9836-4CBE-B3D9-09E1DECBCE44}"/>
+                <a16:creationId xmlns:a16="http://schemas.microsoft.com/office/drawing/2014/main" id="{5588BC58-F655-43FA-A91E-0C80940A1362}"/>
               </a:ext>
             </a:extLst>
           </p:cNvPr>
@@ -6805,7 +6803,7 @@
           <p:cNvPr id="28" name="">
             <a:extLst xmlns:a="http://schemas.openxmlformats.org/drawingml/2006/main">
               <a:ext uri="{FF2B5EF4-FFF2-40B4-BE49-F238E27FC236}">
-                <a16:creationId xmlns:a16="http://schemas.microsoft.com/office/drawing/2014/main" id="{0FA6FF4D-937D-49AB-BED8-24AA10C644FA}"/>
+                <a16:creationId xmlns:a16="http://schemas.microsoft.com/office/drawing/2014/main" id="{1A1D02B8-ADB7-462A-ADDA-1E83157C1DF7}"/>
               </a:ext>
             </a:extLst>
           </p:cNvPr>
@@ -6869,7 +6867,7 @@
           <p:cNvPr id="29" name="">
             <a:extLst xmlns:a="http://schemas.openxmlformats.org/drawingml/2006/main">
               <a:ext uri="{FF2B5EF4-FFF2-40B4-BE49-F238E27FC236}">
-                <a16:creationId xmlns:a16="http://schemas.microsoft.com/office/drawing/2014/main" id="{9D3CDEA5-6097-4132-8E7B-F8B67B4DBCB5}"/>
+                <a16:creationId xmlns:a16="http://schemas.microsoft.com/office/drawing/2014/main" id="{C6925624-12A3-423E-A556-E005A69D0BA6}"/>
               </a:ext>
             </a:extLst>
           </p:cNvPr>
@@ -6933,7 +6931,7 @@
           <p:cNvPr id="30" name="">
             <a:extLst xmlns:a="http://schemas.openxmlformats.org/drawingml/2006/main">
               <a:ext uri="{FF2B5EF4-FFF2-40B4-BE49-F238E27FC236}">
-                <a16:creationId xmlns:a16="http://schemas.microsoft.com/office/drawing/2014/main" id="{608C68AD-197B-4ED8-985F-06CB5FFC6C9C}"/>
+                <a16:creationId xmlns:a16="http://schemas.microsoft.com/office/drawing/2014/main" id="{2C12BD47-174D-4EF5-8CAF-46F1EAEB1952}"/>
               </a:ext>
             </a:extLst>
           </p:cNvPr>
@@ -6966,7 +6964,7 @@
           <p:cNvPr id="31" name="">
             <a:extLst xmlns:a="http://schemas.openxmlformats.org/drawingml/2006/main">
               <a:ext uri="{FF2B5EF4-FFF2-40B4-BE49-F238E27FC236}">
-                <a16:creationId xmlns:a16="http://schemas.microsoft.com/office/drawing/2014/main" id="{933233BD-4BA7-4BCD-B168-7A231EA4B617}"/>
+                <a16:creationId xmlns:a16="http://schemas.microsoft.com/office/drawing/2014/main" id="{25163B44-0F13-4804-8C34-F51A7F729C30}"/>
               </a:ext>
             </a:extLst>
           </p:cNvPr>
@@ -7030,7 +7028,7 @@
           <p:cNvPr id="32" name="">
             <a:extLst xmlns:a="http://schemas.openxmlformats.org/drawingml/2006/main">
               <a:ext uri="{FF2B5EF4-FFF2-40B4-BE49-F238E27FC236}">
-                <a16:creationId xmlns:a16="http://schemas.microsoft.com/office/drawing/2014/main" id="{22F314FB-4DFD-43FC-897E-DCD3B93CA25E}"/>
+                <a16:creationId xmlns:a16="http://schemas.microsoft.com/office/drawing/2014/main" id="{7F611026-80D8-4FD3-8769-469C4C7F8DED}"/>
               </a:ext>
             </a:extLst>
           </p:cNvPr>
@@ -7084,7 +7082,7 @@
                 <a:ea typeface="Aptos"/>
                 <a:cs typeface="Aptos"/>
               </a:rPr>
-              <a:t>Ask what the AI is guessing.</a:t>
+              <a:t>Ask what the artifact assumes.</a:t>
             </a:r>
           </a:p>
         </p:txBody>
@@ -7094,7 +7092,7 @@
           <p:cNvPr id="33" name="">
             <a:extLst xmlns:a="http://schemas.openxmlformats.org/drawingml/2006/main">
               <a:ext uri="{FF2B5EF4-FFF2-40B4-BE49-F238E27FC236}">
-                <a16:creationId xmlns:a16="http://schemas.microsoft.com/office/drawing/2014/main" id="{8D4D41CC-E58B-41F1-BCD2-21691EFAFC18}"/>
+                <a16:creationId xmlns:a16="http://schemas.microsoft.com/office/drawing/2014/main" id="{31338E98-0DA7-485F-AA7B-B453136DB279}"/>
               </a:ext>
             </a:extLst>
           </p:cNvPr>
@@ -7129,7 +7127,7 @@
           <p:cNvPr id="34" name="">
             <a:extLst xmlns:a="http://schemas.openxmlformats.org/drawingml/2006/main">
               <a:ext uri="{FF2B5EF4-FFF2-40B4-BE49-F238E27FC236}">
-                <a16:creationId xmlns:a16="http://schemas.microsoft.com/office/drawing/2014/main" id="{A1AB3D10-4090-4719-ADE9-B5D8A46E589D}"/>
+                <a16:creationId xmlns:a16="http://schemas.microsoft.com/office/drawing/2014/main" id="{47360D15-A004-437E-9C2D-6DE6DB83521D}"/>
               </a:ext>
             </a:extLst>
           </p:cNvPr>
@@ -7193,7 +7191,7 @@
           <p:cNvPr id="35" name="">
             <a:extLst xmlns:a="http://schemas.openxmlformats.org/drawingml/2006/main">
               <a:ext uri="{FF2B5EF4-FFF2-40B4-BE49-F238E27FC236}">
-                <a16:creationId xmlns:a16="http://schemas.microsoft.com/office/drawing/2014/main" id="{490D90C9-67A9-43ED-AF34-D069DB9A7CA5}"/>
+                <a16:creationId xmlns:a16="http://schemas.microsoft.com/office/drawing/2014/main" id="{196BBCA0-CD02-4004-A9FD-6AD92DD53387}"/>
               </a:ext>
             </a:extLst>
           </p:cNvPr>
@@ -7257,7 +7255,7 @@
           <p:cNvPr id="36" name="">
             <a:extLst xmlns:a="http://schemas.openxmlformats.org/drawingml/2006/main">
               <a:ext uri="{FF2B5EF4-FFF2-40B4-BE49-F238E27FC236}">
-                <a16:creationId xmlns:a16="http://schemas.microsoft.com/office/drawing/2014/main" id="{47E09D0E-3AE9-4A00-98AA-A0F4AAA91F60}"/>
+                <a16:creationId xmlns:a16="http://schemas.microsoft.com/office/drawing/2014/main" id="{DE177DF1-131D-4D96-B674-B5FB5BFD738D}"/>
               </a:ext>
             </a:extLst>
           </p:cNvPr>
@@ -7321,7 +7319,7 @@
           <p:cNvPr id="37" name="">
             <a:extLst xmlns:a="http://schemas.openxmlformats.org/drawingml/2006/main">
               <a:ext uri="{FF2B5EF4-FFF2-40B4-BE49-F238E27FC236}">
-                <a16:creationId xmlns:a16="http://schemas.microsoft.com/office/drawing/2014/main" id="{7EC59190-669E-4BD1-A9ED-2ACDAFAACA1B}"/>
+                <a16:creationId xmlns:a16="http://schemas.microsoft.com/office/drawing/2014/main" id="{FE3BEC60-3691-4E9C-87F6-DBAC32797C3C}"/>
               </a:ext>
             </a:extLst>
           </p:cNvPr>
@@ -7356,7 +7354,7 @@
           <p:cNvPr id="38" name="">
             <a:extLst xmlns:a="http://schemas.openxmlformats.org/drawingml/2006/main">
               <a:ext uri="{FF2B5EF4-FFF2-40B4-BE49-F238E27FC236}">
-                <a16:creationId xmlns:a16="http://schemas.microsoft.com/office/drawing/2014/main" id="{0BF20CAB-E096-4DA6-BE3B-464A2A6CEBAF}"/>
+                <a16:creationId xmlns:a16="http://schemas.microsoft.com/office/drawing/2014/main" id="{B77771E2-F611-4003-BED4-697BE10B0340}"/>
               </a:ext>
             </a:extLst>
           </p:cNvPr>
@@ -7391,7 +7389,7 @@
           <p:cNvPr id="39" name="">
             <a:extLst xmlns:a="http://schemas.openxmlformats.org/drawingml/2006/main">
               <a:ext uri="{FF2B5EF4-FFF2-40B4-BE49-F238E27FC236}">
-                <a16:creationId xmlns:a16="http://schemas.microsoft.com/office/drawing/2014/main" id="{BD51B174-0691-4AE7-9648-158345CC45F5}"/>
+                <a16:creationId xmlns:a16="http://schemas.microsoft.com/office/drawing/2014/main" id="{F52C4B6F-8205-4B96-8156-E0CBD11B5C64}"/>
               </a:ext>
             </a:extLst>
           </p:cNvPr>
@@ -7426,7 +7424,7 @@
           <p:cNvPr id="40" name="kicker-04-marker">
             <a:extLst xmlns:a="http://schemas.openxmlformats.org/drawingml/2006/main">
               <a:ext uri="{FF2B5EF4-FFF2-40B4-BE49-F238E27FC236}">
-                <a16:creationId xmlns:a16="http://schemas.microsoft.com/office/drawing/2014/main" id="{23FEF619-5F72-4BA3-8BD5-8711253C9DEA}"/>
+                <a16:creationId xmlns:a16="http://schemas.microsoft.com/office/drawing/2014/main" id="{AE405275-160F-468D-8374-93D653C122BB}"/>
               </a:ext>
             </a:extLst>
           </p:cNvPr>
@@ -7461,7 +7459,7 @@
           <p:cNvPr id="41" name="kicker-04-label">
             <a:extLst xmlns:a="http://schemas.openxmlformats.org/drawingml/2006/main">
               <a:ext uri="{FF2B5EF4-FFF2-40B4-BE49-F238E27FC236}">
-                <a16:creationId xmlns:a16="http://schemas.microsoft.com/office/drawing/2014/main" id="{60778E5C-ED6E-4C57-8230-4F9D581171F2}"/>
+                <a16:creationId xmlns:a16="http://schemas.microsoft.com/office/drawing/2014/main" id="{16441EBB-E537-4E42-ABCC-B1757FB95833}"/>
               </a:ext>
             </a:extLst>
           </p:cNvPr>
@@ -7515,7 +7513,7 @@
                 <a:ea typeface="Aptos"/>
                 <a:cs typeface="Aptos"/>
               </a:rPr>
-              <a:t>MODULE 1 / LESSON 04 / HUMAN CORRECTION</a:t>
+              <a:t>MODULE 1 / LESSON 04 / QUALITY CONTROL</a:t>
             </a:r>
           </a:p>
         </p:txBody>
@@ -7525,7 +7523,7 @@
           <p:cNvPr id="42" name="">
             <a:extLst xmlns:a="http://schemas.openxmlformats.org/drawingml/2006/main">
               <a:ext uri="{FF2B5EF4-FFF2-40B4-BE49-F238E27FC236}">
-                <a16:creationId xmlns:a16="http://schemas.microsoft.com/office/drawing/2014/main" id="{23814C04-D857-4B91-84D0-B49A6CDBAA12}"/>
+                <a16:creationId xmlns:a16="http://schemas.microsoft.com/office/drawing/2014/main" id="{F5FF6441-688A-4F7B-A465-B4FC8C2FA296}"/>
               </a:ext>
             </a:extLst>
           </p:cNvPr>
@@ -7579,7 +7577,7 @@
                 <a:ea typeface="Aptos Display"/>
                 <a:cs typeface="Aptos Display"/>
               </a:rPr>
-              <a:t>AI can draft structure. Humans must repair industrial reality.</a:t>
+              <a:t>Reject weak artifacts before they become operating practice.</a:t>
             </a:r>
           </a:p>
         </p:txBody>
@@ -7589,7 +7587,7 @@
           <p:cNvPr id="43" name="">
             <a:extLst xmlns:a="http://schemas.openxmlformats.org/drawingml/2006/main">
               <a:ext uri="{FF2B5EF4-FFF2-40B4-BE49-F238E27FC236}">
-                <a16:creationId xmlns:a16="http://schemas.microsoft.com/office/drawing/2014/main" id="{45DFD863-01D4-41F2-9188-07FA09CC236D}"/>
+                <a16:creationId xmlns:a16="http://schemas.microsoft.com/office/drawing/2014/main" id="{106C12F6-4C53-49BF-AB73-F1989F675EE7}"/>
               </a:ext>
             </a:extLst>
           </p:cNvPr>
@@ -7653,7 +7651,7 @@
           <p:cNvPr id="44" name="">
             <a:extLst xmlns:a="http://schemas.openxmlformats.org/drawingml/2006/main">
               <a:ext uri="{FF2B5EF4-FFF2-40B4-BE49-F238E27FC236}">
-                <a16:creationId xmlns:a16="http://schemas.microsoft.com/office/drawing/2014/main" id="{713B7770-644F-4987-9BD4-90C683618162}"/>
+                <a16:creationId xmlns:a16="http://schemas.microsoft.com/office/drawing/2014/main" id="{47B53198-14C0-41F3-9060-E19DCAE05788}"/>
               </a:ext>
             </a:extLst>
           </p:cNvPr>
@@ -7688,7 +7686,7 @@
           <p:cNvPr id="45" name="">
             <a:extLst xmlns:a="http://schemas.openxmlformats.org/drawingml/2006/main">
               <a:ext uri="{FF2B5EF4-FFF2-40B4-BE49-F238E27FC236}">
-                <a16:creationId xmlns:a16="http://schemas.microsoft.com/office/drawing/2014/main" id="{35807779-E078-4A74-9C34-46B982B5BC46}"/>
+                <a16:creationId xmlns:a16="http://schemas.microsoft.com/office/drawing/2014/main" id="{57F7ED9C-234E-4156-AA1F-940F0C7B2911}"/>
               </a:ext>
             </a:extLst>
           </p:cNvPr>
@@ -7723,7 +7721,7 @@
           <p:cNvPr id="46" name="">
             <a:extLst xmlns:a="http://schemas.openxmlformats.org/drawingml/2006/main">
               <a:ext uri="{FF2B5EF4-FFF2-40B4-BE49-F238E27FC236}">
-                <a16:creationId xmlns:a16="http://schemas.microsoft.com/office/drawing/2014/main" id="{B959B801-B493-45F4-938E-12068B5115CC}"/>
+                <a16:creationId xmlns:a16="http://schemas.microsoft.com/office/drawing/2014/main" id="{C6CC682A-2FB7-4139-BA6B-A265CDF8F41D}"/>
               </a:ext>
             </a:extLst>
           </p:cNvPr>
@@ -7758,7 +7756,7 @@
           <p:cNvPr id="47" name="">
             <a:extLst xmlns:a="http://schemas.openxmlformats.org/drawingml/2006/main">
               <a:ext uri="{FF2B5EF4-FFF2-40B4-BE49-F238E27FC236}">
-                <a16:creationId xmlns:a16="http://schemas.microsoft.com/office/drawing/2014/main" id="{62CDABFF-B261-4758-9B02-8F4CDEC1CAEA}"/>
+                <a16:creationId xmlns:a16="http://schemas.microsoft.com/office/drawing/2014/main" id="{F2EA4359-6406-4E16-B9AE-AC21B4E93FD9}"/>
               </a:ext>
             </a:extLst>
           </p:cNvPr>
@@ -7793,7 +7791,7 @@
           <p:cNvPr id="48" name="">
             <a:extLst xmlns:a="http://schemas.openxmlformats.org/drawingml/2006/main">
               <a:ext uri="{FF2B5EF4-FFF2-40B4-BE49-F238E27FC236}">
-                <a16:creationId xmlns:a16="http://schemas.microsoft.com/office/drawing/2014/main" id="{4F50828D-31E3-414A-9267-1E98448BAF4E}"/>
+                <a16:creationId xmlns:a16="http://schemas.microsoft.com/office/drawing/2014/main" id="{0823CE9B-D4B6-4FBF-9B77-45E19D068BDC}"/>
               </a:ext>
             </a:extLst>
           </p:cNvPr>
@@ -7857,7 +7855,7 @@
           <p:cNvPr id="49" name="">
             <a:extLst xmlns:a="http://schemas.openxmlformats.org/drawingml/2006/main">
               <a:ext uri="{FF2B5EF4-FFF2-40B4-BE49-F238E27FC236}">
-                <a16:creationId xmlns:a16="http://schemas.microsoft.com/office/drawing/2014/main" id="{D4F77FD8-42BD-4FA9-89C9-CFA44E9CAE51}"/>
+                <a16:creationId xmlns:a16="http://schemas.microsoft.com/office/drawing/2014/main" id="{C84F6281-D810-47AC-9F3C-26073E0A53C4}"/>
               </a:ext>
             </a:extLst>
           </p:cNvPr>
@@ -7921,7 +7919,7 @@
           <p:cNvPr id="50" name="">
             <a:extLst xmlns:a="http://schemas.openxmlformats.org/drawingml/2006/main">
               <a:ext uri="{FF2B5EF4-FFF2-40B4-BE49-F238E27FC236}">
-                <a16:creationId xmlns:a16="http://schemas.microsoft.com/office/drawing/2014/main" id="{39279954-BBBD-4C81-9706-FFAA37F050E2}"/>
+                <a16:creationId xmlns:a16="http://schemas.microsoft.com/office/drawing/2014/main" id="{7B9906E2-396D-478E-AB8D-17653618911F}"/>
               </a:ext>
             </a:extLst>
           </p:cNvPr>
@@ -7983,7 +7981,7 @@
     </p:spTree>
     <p:extLst>
       <p:ext uri="{BB962C8B-B14F-4D97-AF65-F5344CB8AC3E}">
-        <p14:creationId xmlns:p14="http://schemas.microsoft.com/office/powerpoint/2010/main" val="1390718229"/>
+        <p14:creationId xmlns:p14="http://schemas.microsoft.com/office/powerpoint/2010/main" val="117567464"/>
       </p:ext>
     </p:extLst>
   </p:cSld>
@@ -8007,7 +8005,7 @@
           <p:cNvPr id="1" name="">
             <a:extLst xmlns:a="http://schemas.openxmlformats.org/drawingml/2006/main">
               <a:ext uri="{FF2B5EF4-FFF2-40B4-BE49-F238E27FC236}">
-                <a16:creationId xmlns:a16="http://schemas.microsoft.com/office/drawing/2014/main" id="{8C716B68-42FB-48CD-A8A2-BB8815B7BCE5}"/>
+                <a16:creationId xmlns:a16="http://schemas.microsoft.com/office/drawing/2014/main" id="{41FB8847-8FA4-433B-9E36-BA240C935144}"/>
               </a:ext>
             </a:extLst>
           </p:cNvPr>
@@ -8042,7 +8040,7 @@
           <p:cNvPr id="2" name="">
             <a:extLst xmlns:a="http://schemas.openxmlformats.org/drawingml/2006/main">
               <a:ext uri="{FF2B5EF4-FFF2-40B4-BE49-F238E27FC236}">
-                <a16:creationId xmlns:a16="http://schemas.microsoft.com/office/drawing/2014/main" id="{5BDC2509-64F7-4EDB-B4BB-6A3EA7A42DFE}"/>
+                <a16:creationId xmlns:a16="http://schemas.microsoft.com/office/drawing/2014/main" id="{D38D2939-FC04-4B52-9F2E-25B584FC9691}"/>
               </a:ext>
             </a:extLst>
           </p:cNvPr>
@@ -8077,7 +8075,7 @@
           <p:cNvPr id="3" name="">
             <a:extLst xmlns:a="http://schemas.openxmlformats.org/drawingml/2006/main">
               <a:ext uri="{FF2B5EF4-FFF2-40B4-BE49-F238E27FC236}">
-                <a16:creationId xmlns:a16="http://schemas.microsoft.com/office/drawing/2014/main" id="{B9CDD4E5-E799-472A-BF41-15D27873CADE}"/>
+                <a16:creationId xmlns:a16="http://schemas.microsoft.com/office/drawing/2014/main" id="{E2338FA5-4E73-4BEF-A53C-CC20DDEA1D17}"/>
               </a:ext>
             </a:extLst>
           </p:cNvPr>
@@ -8112,7 +8110,7 @@
           <p:cNvPr id="4" name="kicker-04-marker">
             <a:extLst xmlns:a="http://schemas.openxmlformats.org/drawingml/2006/main">
               <a:ext uri="{FF2B5EF4-FFF2-40B4-BE49-F238E27FC236}">
-                <a16:creationId xmlns:a16="http://schemas.microsoft.com/office/drawing/2014/main" id="{E7722A46-4BEF-4EC8-B7AE-29C49DABE63E}"/>
+                <a16:creationId xmlns:a16="http://schemas.microsoft.com/office/drawing/2014/main" id="{AADE4C73-ECE7-4AFD-8516-D9AD62D7B93F}"/>
               </a:ext>
             </a:extLst>
           </p:cNvPr>
@@ -8147,7 +8145,7 @@
           <p:cNvPr id="5" name="kicker-04-label">
             <a:extLst xmlns:a="http://schemas.openxmlformats.org/drawingml/2006/main">
               <a:ext uri="{FF2B5EF4-FFF2-40B4-BE49-F238E27FC236}">
-                <a16:creationId xmlns:a16="http://schemas.microsoft.com/office/drawing/2014/main" id="{E61A2264-DE51-4868-9E3E-8E75E85587FB}"/>
+                <a16:creationId xmlns:a16="http://schemas.microsoft.com/office/drawing/2014/main" id="{A58D4825-1C10-41EE-AD98-1496BE4D8AA3}"/>
               </a:ext>
             </a:extLst>
           </p:cNvPr>
@@ -8211,7 +8209,7 @@
           <p:cNvPr id="6" name="">
             <a:extLst xmlns:a="http://schemas.openxmlformats.org/drawingml/2006/main">
               <a:ext uri="{FF2B5EF4-FFF2-40B4-BE49-F238E27FC236}">
-                <a16:creationId xmlns:a16="http://schemas.microsoft.com/office/drawing/2014/main" id="{85E2975B-4F68-46C1-8A0E-5354CA6BF62B}"/>
+                <a16:creationId xmlns:a16="http://schemas.microsoft.com/office/drawing/2014/main" id="{6381AA1F-97AB-45D3-AD34-16BD3B2D573B}"/>
               </a:ext>
             </a:extLst>
           </p:cNvPr>
@@ -8275,7 +8273,7 @@
           <p:cNvPr id="7" name="">
             <a:extLst xmlns:a="http://schemas.openxmlformats.org/drawingml/2006/main">
               <a:ext uri="{FF2B5EF4-FFF2-40B4-BE49-F238E27FC236}">
-                <a16:creationId xmlns:a16="http://schemas.microsoft.com/office/drawing/2014/main" id="{AE33BC5B-A4EA-4A91-AC17-32178B470E54}"/>
+                <a16:creationId xmlns:a16="http://schemas.microsoft.com/office/drawing/2014/main" id="{96A17703-839B-489A-AA12-11CD0728BB95}"/>
               </a:ext>
             </a:extLst>
           </p:cNvPr>
@@ -8339,7 +8337,7 @@
           <p:cNvPr id="8" name="">
             <a:extLst xmlns:a="http://schemas.openxmlformats.org/drawingml/2006/main">
               <a:ext uri="{FF2B5EF4-FFF2-40B4-BE49-F238E27FC236}">
-                <a16:creationId xmlns:a16="http://schemas.microsoft.com/office/drawing/2014/main" id="{55D602E5-BB87-44B1-B80A-336E7D4C30B3}"/>
+                <a16:creationId xmlns:a16="http://schemas.microsoft.com/office/drawing/2014/main" id="{9942F91E-57A1-4BBD-A575-D41ED03D5B4B}"/>
               </a:ext>
             </a:extLst>
           </p:cNvPr>
@@ -8374,7 +8372,7 @@
           <p:cNvPr id="9" name="">
             <a:extLst xmlns:a="http://schemas.openxmlformats.org/drawingml/2006/main">
               <a:ext uri="{FF2B5EF4-FFF2-40B4-BE49-F238E27FC236}">
-                <a16:creationId xmlns:a16="http://schemas.microsoft.com/office/drawing/2014/main" id="{EA1112FC-1B62-453A-9997-FB35CD35254F}"/>
+                <a16:creationId xmlns:a16="http://schemas.microsoft.com/office/drawing/2014/main" id="{1E813F14-C5C7-4311-BDD2-34BCBE654A64}"/>
               </a:ext>
             </a:extLst>
           </p:cNvPr>
@@ -8438,7 +8436,7 @@
           <p:cNvPr id="10" name="">
             <a:extLst xmlns:a="http://schemas.openxmlformats.org/drawingml/2006/main">
               <a:ext uri="{FF2B5EF4-FFF2-40B4-BE49-F238E27FC236}">
-                <a16:creationId xmlns:a16="http://schemas.microsoft.com/office/drawing/2014/main" id="{35F09056-81D3-42AC-8EDA-99FC10C0ECA6}"/>
+                <a16:creationId xmlns:a16="http://schemas.microsoft.com/office/drawing/2014/main" id="{BA72D197-26C4-4AE7-916D-03ABFA3A2590}"/>
               </a:ext>
             </a:extLst>
           </p:cNvPr>
@@ -8502,7 +8500,7 @@
           <p:cNvPr id="11" name="">
             <a:extLst xmlns:a="http://schemas.openxmlformats.org/drawingml/2006/main">
               <a:ext uri="{FF2B5EF4-FFF2-40B4-BE49-F238E27FC236}">
-                <a16:creationId xmlns:a16="http://schemas.microsoft.com/office/drawing/2014/main" id="{D1995114-4340-4E9A-9B30-10FAAFA092C6}"/>
+                <a16:creationId xmlns:a16="http://schemas.microsoft.com/office/drawing/2014/main" id="{7B696054-6AAE-415A-BA3F-BF215F7698E5}"/>
               </a:ext>
             </a:extLst>
           </p:cNvPr>
@@ -8566,7 +8564,7 @@
           <p:cNvPr id="12" name="">
             <a:extLst xmlns:a="http://schemas.openxmlformats.org/drawingml/2006/main">
               <a:ext uri="{FF2B5EF4-FFF2-40B4-BE49-F238E27FC236}">
-                <a16:creationId xmlns:a16="http://schemas.microsoft.com/office/drawing/2014/main" id="{B4B131EF-CC23-45E0-8536-135569D13290}"/>
+                <a16:creationId xmlns:a16="http://schemas.microsoft.com/office/drawing/2014/main" id="{EA658D6D-8DF1-4444-8FFD-6CFEA64AE2A5}"/>
               </a:ext>
             </a:extLst>
           </p:cNvPr>
@@ -8599,7 +8597,7 @@
           <p:cNvPr id="13" name="">
             <a:extLst xmlns:a="http://schemas.openxmlformats.org/drawingml/2006/main">
               <a:ext uri="{FF2B5EF4-FFF2-40B4-BE49-F238E27FC236}">
-                <a16:creationId xmlns:a16="http://schemas.microsoft.com/office/drawing/2014/main" id="{88AB88E3-350B-49DA-85B6-C70B2EBC88B7}"/>
+                <a16:creationId xmlns:a16="http://schemas.microsoft.com/office/drawing/2014/main" id="{9A7CD491-7749-4620-8706-ED85D1F796E5}"/>
               </a:ext>
             </a:extLst>
           </p:cNvPr>
@@ -8634,7 +8632,7 @@
           <p:cNvPr id="14" name="">
             <a:extLst xmlns:a="http://schemas.openxmlformats.org/drawingml/2006/main">
               <a:ext uri="{FF2B5EF4-FFF2-40B4-BE49-F238E27FC236}">
-                <a16:creationId xmlns:a16="http://schemas.microsoft.com/office/drawing/2014/main" id="{099DE8EB-DCDA-46FD-8A83-155E8EFC6B00}"/>
+                <a16:creationId xmlns:a16="http://schemas.microsoft.com/office/drawing/2014/main" id="{83B912C9-36D8-4294-81A8-F7A3DE850C70}"/>
               </a:ext>
             </a:extLst>
           </p:cNvPr>
@@ -8698,7 +8696,7 @@
           <p:cNvPr id="15" name="">
             <a:extLst xmlns:a="http://schemas.openxmlformats.org/drawingml/2006/main">
               <a:ext uri="{FF2B5EF4-FFF2-40B4-BE49-F238E27FC236}">
-                <a16:creationId xmlns:a16="http://schemas.microsoft.com/office/drawing/2014/main" id="{14622944-E8AD-4CC2-B96D-D72E12D272D7}"/>
+                <a16:creationId xmlns:a16="http://schemas.microsoft.com/office/drawing/2014/main" id="{FD44B82F-F9EF-40AB-8A0E-BB39A15E6136}"/>
               </a:ext>
             </a:extLst>
           </p:cNvPr>
@@ -8731,7 +8729,7 @@
           <p:cNvPr id="16" name="">
             <a:extLst xmlns:a="http://schemas.openxmlformats.org/drawingml/2006/main">
               <a:ext uri="{FF2B5EF4-FFF2-40B4-BE49-F238E27FC236}">
-                <a16:creationId xmlns:a16="http://schemas.microsoft.com/office/drawing/2014/main" id="{E0DB323C-1BA9-4D14-B6BE-C2D4D0F2E4C3}"/>
+                <a16:creationId xmlns:a16="http://schemas.microsoft.com/office/drawing/2014/main" id="{97FEBA37-6D6A-4E6D-A3D7-EA71949574AA}"/>
               </a:ext>
             </a:extLst>
           </p:cNvPr>
@@ -8766,7 +8764,7 @@
           <p:cNvPr id="17" name="">
             <a:extLst xmlns:a="http://schemas.openxmlformats.org/drawingml/2006/main">
               <a:ext uri="{FF2B5EF4-FFF2-40B4-BE49-F238E27FC236}">
-                <a16:creationId xmlns:a16="http://schemas.microsoft.com/office/drawing/2014/main" id="{A03F5DE7-988F-4E94-8C22-2A12570C9249}"/>
+                <a16:creationId xmlns:a16="http://schemas.microsoft.com/office/drawing/2014/main" id="{CCA1C6EE-CC35-4F50-89F0-851EA96C33AC}"/>
               </a:ext>
             </a:extLst>
           </p:cNvPr>
@@ -8830,7 +8828,7 @@
           <p:cNvPr id="18" name="">
             <a:extLst xmlns:a="http://schemas.openxmlformats.org/drawingml/2006/main">
               <a:ext uri="{FF2B5EF4-FFF2-40B4-BE49-F238E27FC236}">
-                <a16:creationId xmlns:a16="http://schemas.microsoft.com/office/drawing/2014/main" id="{125AC4B0-ABDC-48C4-BC05-437E1EABFDCC}"/>
+                <a16:creationId xmlns:a16="http://schemas.microsoft.com/office/drawing/2014/main" id="{5C4B506A-2FF6-48F9-9D1F-34EB54A0374C}"/>
               </a:ext>
             </a:extLst>
           </p:cNvPr>
@@ -8863,7 +8861,7 @@
           <p:cNvPr id="19" name="">
             <a:extLst xmlns:a="http://schemas.openxmlformats.org/drawingml/2006/main">
               <a:ext uri="{FF2B5EF4-FFF2-40B4-BE49-F238E27FC236}">
-                <a16:creationId xmlns:a16="http://schemas.microsoft.com/office/drawing/2014/main" id="{4DB17BD3-561F-4C58-B76F-97F37649EE49}"/>
+                <a16:creationId xmlns:a16="http://schemas.microsoft.com/office/drawing/2014/main" id="{AE709C3A-52CD-40D8-868C-EE67BC11DB3F}"/>
               </a:ext>
             </a:extLst>
           </p:cNvPr>
@@ -8898,7 +8896,7 @@
           <p:cNvPr id="20" name="">
             <a:extLst xmlns:a="http://schemas.openxmlformats.org/drawingml/2006/main">
               <a:ext uri="{FF2B5EF4-FFF2-40B4-BE49-F238E27FC236}">
-                <a16:creationId xmlns:a16="http://schemas.microsoft.com/office/drawing/2014/main" id="{9461154F-C56F-41EC-BAD3-8D31789F036E}"/>
+                <a16:creationId xmlns:a16="http://schemas.microsoft.com/office/drawing/2014/main" id="{B9AC1B6E-22B0-4DB0-BF6C-2756A7914E1A}"/>
               </a:ext>
             </a:extLst>
           </p:cNvPr>
@@ -8962,7 +8960,7 @@
           <p:cNvPr id="21" name="">
             <a:extLst xmlns:a="http://schemas.openxmlformats.org/drawingml/2006/main">
               <a:ext uri="{FF2B5EF4-FFF2-40B4-BE49-F238E27FC236}">
-                <a16:creationId xmlns:a16="http://schemas.microsoft.com/office/drawing/2014/main" id="{82175A10-56F3-4CE5-A56D-8D98150885DE}"/>
+                <a16:creationId xmlns:a16="http://schemas.microsoft.com/office/drawing/2014/main" id="{3B84564F-8E8A-4234-8902-6273E6AE97B9}"/>
               </a:ext>
             </a:extLst>
           </p:cNvPr>
@@ -8995,7 +8993,7 @@
           <p:cNvPr id="22" name="">
             <a:extLst xmlns:a="http://schemas.openxmlformats.org/drawingml/2006/main">
               <a:ext uri="{FF2B5EF4-FFF2-40B4-BE49-F238E27FC236}">
-                <a16:creationId xmlns:a16="http://schemas.microsoft.com/office/drawing/2014/main" id="{7DFE704F-18DB-4B9C-A8A8-EC6D84FAFCE8}"/>
+                <a16:creationId xmlns:a16="http://schemas.microsoft.com/office/drawing/2014/main" id="{F04129A1-B242-41F8-AA1C-2650AD1A005A}"/>
               </a:ext>
             </a:extLst>
           </p:cNvPr>
@@ -9030,7 +9028,7 @@
           <p:cNvPr id="23" name="">
             <a:extLst xmlns:a="http://schemas.openxmlformats.org/drawingml/2006/main">
               <a:ext uri="{FF2B5EF4-FFF2-40B4-BE49-F238E27FC236}">
-                <a16:creationId xmlns:a16="http://schemas.microsoft.com/office/drawing/2014/main" id="{866672D2-2AC3-45AE-85BF-708E2947E76A}"/>
+                <a16:creationId xmlns:a16="http://schemas.microsoft.com/office/drawing/2014/main" id="{49E46A6C-E1DF-48FC-B8F6-75B5D4BE559C}"/>
               </a:ext>
             </a:extLst>
           </p:cNvPr>
@@ -9094,7 +9092,7 @@
           <p:cNvPr id="24" name="">
             <a:extLst xmlns:a="http://schemas.openxmlformats.org/drawingml/2006/main">
               <a:ext uri="{FF2B5EF4-FFF2-40B4-BE49-F238E27FC236}">
-                <a16:creationId xmlns:a16="http://schemas.microsoft.com/office/drawing/2014/main" id="{22F80FA2-1BD9-4B0C-8A72-75DD69FA70ED}"/>
+                <a16:creationId xmlns:a16="http://schemas.microsoft.com/office/drawing/2014/main" id="{E8FA222B-E89D-45E1-A4CF-D1EFB4FE9C9B}"/>
               </a:ext>
             </a:extLst>
           </p:cNvPr>
@@ -9127,7 +9125,7 @@
           <p:cNvPr id="25" name="">
             <a:extLst xmlns:a="http://schemas.openxmlformats.org/drawingml/2006/main">
               <a:ext uri="{FF2B5EF4-FFF2-40B4-BE49-F238E27FC236}">
-                <a16:creationId xmlns:a16="http://schemas.microsoft.com/office/drawing/2014/main" id="{8F7C128C-5A9C-497C-8247-D227D0143C26}"/>
+                <a16:creationId xmlns:a16="http://schemas.microsoft.com/office/drawing/2014/main" id="{C2DFE730-2411-42BB-AD8F-04EA74CD87B4}"/>
               </a:ext>
             </a:extLst>
           </p:cNvPr>
@@ -9162,7 +9160,7 @@
           <p:cNvPr id="26" name="">
             <a:extLst xmlns:a="http://schemas.openxmlformats.org/drawingml/2006/main">
               <a:ext uri="{FF2B5EF4-FFF2-40B4-BE49-F238E27FC236}">
-                <a16:creationId xmlns:a16="http://schemas.microsoft.com/office/drawing/2014/main" id="{873DEF9B-78DE-4995-A9B7-64244EE5BFF7}"/>
+                <a16:creationId xmlns:a16="http://schemas.microsoft.com/office/drawing/2014/main" id="{D44BE96C-5265-41AF-882D-1D1B18774A83}"/>
               </a:ext>
             </a:extLst>
           </p:cNvPr>
@@ -9226,7 +9224,7 @@
           <p:cNvPr id="27" name="">
             <a:extLst xmlns:a="http://schemas.openxmlformats.org/drawingml/2006/main">
               <a:ext uri="{FF2B5EF4-FFF2-40B4-BE49-F238E27FC236}">
-                <a16:creationId xmlns:a16="http://schemas.microsoft.com/office/drawing/2014/main" id="{A0DA4531-D759-4E92-AB76-177112FD79F1}"/>
+                <a16:creationId xmlns:a16="http://schemas.microsoft.com/office/drawing/2014/main" id="{82B15727-74D9-4C06-902F-75AFD4C7074C}"/>
               </a:ext>
             </a:extLst>
           </p:cNvPr>
@@ -9259,7 +9257,7 @@
           <p:cNvPr id="28" name="">
             <a:extLst xmlns:a="http://schemas.openxmlformats.org/drawingml/2006/main">
               <a:ext uri="{FF2B5EF4-FFF2-40B4-BE49-F238E27FC236}">
-                <a16:creationId xmlns:a16="http://schemas.microsoft.com/office/drawing/2014/main" id="{933B5300-735A-4E3D-89BF-F14E47EC602E}"/>
+                <a16:creationId xmlns:a16="http://schemas.microsoft.com/office/drawing/2014/main" id="{499087B7-C8E9-4DF8-B29E-F13ABB90C550}"/>
               </a:ext>
             </a:extLst>
           </p:cNvPr>
@@ -9294,7 +9292,7 @@
           <p:cNvPr id="29" name="">
             <a:extLst xmlns:a="http://schemas.openxmlformats.org/drawingml/2006/main">
               <a:ext uri="{FF2B5EF4-FFF2-40B4-BE49-F238E27FC236}">
-                <a16:creationId xmlns:a16="http://schemas.microsoft.com/office/drawing/2014/main" id="{2525EAB9-4EB4-4CB5-9CCF-1BA9C649B6B4}"/>
+                <a16:creationId xmlns:a16="http://schemas.microsoft.com/office/drawing/2014/main" id="{109686E2-904D-4DB9-82CF-E4524FA2F8CC}"/>
               </a:ext>
             </a:extLst>
           </p:cNvPr>
@@ -9358,7 +9356,7 @@
           <p:cNvPr id="30" name="">
             <a:extLst xmlns:a="http://schemas.openxmlformats.org/drawingml/2006/main">
               <a:ext uri="{FF2B5EF4-FFF2-40B4-BE49-F238E27FC236}">
-                <a16:creationId xmlns:a16="http://schemas.microsoft.com/office/drawing/2014/main" id="{BC76E356-C5E7-4220-BDDC-E54E31A5C517}"/>
+                <a16:creationId xmlns:a16="http://schemas.microsoft.com/office/drawing/2014/main" id="{D422778A-8B11-4A2C-91DD-60F872C23F7D}"/>
               </a:ext>
             </a:extLst>
           </p:cNvPr>
@@ -9391,7 +9389,7 @@
           <p:cNvPr id="31" name="">
             <a:extLst xmlns:a="http://schemas.openxmlformats.org/drawingml/2006/main">
               <a:ext uri="{FF2B5EF4-FFF2-40B4-BE49-F238E27FC236}">
-                <a16:creationId xmlns:a16="http://schemas.microsoft.com/office/drawing/2014/main" id="{EEFF4E62-3746-4CAF-B337-1864320D0B28}"/>
+                <a16:creationId xmlns:a16="http://schemas.microsoft.com/office/drawing/2014/main" id="{8D915AED-A788-455B-8EDB-D2A7238D4427}"/>
               </a:ext>
             </a:extLst>
           </p:cNvPr>
@@ -9426,7 +9424,7 @@
           <p:cNvPr id="32" name="">
             <a:extLst xmlns:a="http://schemas.openxmlformats.org/drawingml/2006/main">
               <a:ext uri="{FF2B5EF4-FFF2-40B4-BE49-F238E27FC236}">
-                <a16:creationId xmlns:a16="http://schemas.microsoft.com/office/drawing/2014/main" id="{C7CF3C83-4B26-4DA5-85D2-D239918C36DD}"/>
+                <a16:creationId xmlns:a16="http://schemas.microsoft.com/office/drawing/2014/main" id="{88DD8DFD-26D9-418E-BCFA-78F61584209D}"/>
               </a:ext>
             </a:extLst>
           </p:cNvPr>
@@ -9490,7 +9488,7 @@
           <p:cNvPr id="33" name="">
             <a:extLst xmlns:a="http://schemas.openxmlformats.org/drawingml/2006/main">
               <a:ext uri="{FF2B5EF4-FFF2-40B4-BE49-F238E27FC236}">
-                <a16:creationId xmlns:a16="http://schemas.microsoft.com/office/drawing/2014/main" id="{6743AE40-58D3-461E-8A20-8044BB79629D}"/>
+                <a16:creationId xmlns:a16="http://schemas.microsoft.com/office/drawing/2014/main" id="{11748722-D8C3-48BF-B17A-3E8A6E59EF7F}"/>
               </a:ext>
             </a:extLst>
           </p:cNvPr>
@@ -9523,7 +9521,7 @@
           <p:cNvPr id="34" name="">
             <a:extLst xmlns:a="http://schemas.openxmlformats.org/drawingml/2006/main">
               <a:ext uri="{FF2B5EF4-FFF2-40B4-BE49-F238E27FC236}">
-                <a16:creationId xmlns:a16="http://schemas.microsoft.com/office/drawing/2014/main" id="{25F861CD-22F0-47D2-98D6-7663ADE8C68E}"/>
+                <a16:creationId xmlns:a16="http://schemas.microsoft.com/office/drawing/2014/main" id="{5011319D-F7E1-4C05-8FF2-EBF7F35278EC}"/>
               </a:ext>
             </a:extLst>
           </p:cNvPr>
@@ -9587,7 +9585,7 @@
           <p:cNvPr id="35" name="">
             <a:extLst xmlns:a="http://schemas.openxmlformats.org/drawingml/2006/main">
               <a:ext uri="{FF2B5EF4-FFF2-40B4-BE49-F238E27FC236}">
-                <a16:creationId xmlns:a16="http://schemas.microsoft.com/office/drawing/2014/main" id="{A65920A6-3BFB-4140-B6FC-D8DC5298776E}"/>
+                <a16:creationId xmlns:a16="http://schemas.microsoft.com/office/drawing/2014/main" id="{0706B9AC-A0C8-4BD7-AC3F-D90B250EFE43}"/>
               </a:ext>
             </a:extLst>
           </p:cNvPr>
@@ -9651,7 +9649,7 @@
           <p:cNvPr id="36" name="">
             <a:extLst xmlns:a="http://schemas.openxmlformats.org/drawingml/2006/main">
               <a:ext uri="{FF2B5EF4-FFF2-40B4-BE49-F238E27FC236}">
-                <a16:creationId xmlns:a16="http://schemas.microsoft.com/office/drawing/2014/main" id="{5B7BA435-AA4B-4246-911F-DEBBD372B139}"/>
+                <a16:creationId xmlns:a16="http://schemas.microsoft.com/office/drawing/2014/main" id="{0D84BE0D-9368-46C9-9EE9-CD81C908BFCB}"/>
               </a:ext>
             </a:extLst>
           </p:cNvPr>
@@ -9686,7 +9684,7 @@
           <p:cNvPr id="37" name="">
             <a:extLst xmlns:a="http://schemas.openxmlformats.org/drawingml/2006/main">
               <a:ext uri="{FF2B5EF4-FFF2-40B4-BE49-F238E27FC236}">
-                <a16:creationId xmlns:a16="http://schemas.microsoft.com/office/drawing/2014/main" id="{54E0F148-FDF9-43AE-90F1-17D2328F958C}"/>
+                <a16:creationId xmlns:a16="http://schemas.microsoft.com/office/drawing/2014/main" id="{A4C5A2E8-8EBE-4BF1-B2E3-4C0E67506352}"/>
               </a:ext>
             </a:extLst>
           </p:cNvPr>
@@ -9750,7 +9748,7 @@
           <p:cNvPr id="38" name="">
             <a:extLst xmlns:a="http://schemas.openxmlformats.org/drawingml/2006/main">
               <a:ext uri="{FF2B5EF4-FFF2-40B4-BE49-F238E27FC236}">
-                <a16:creationId xmlns:a16="http://schemas.microsoft.com/office/drawing/2014/main" id="{DBA05339-7AC4-4BE7-89BF-B0E867F7727E}"/>
+                <a16:creationId xmlns:a16="http://schemas.microsoft.com/office/drawing/2014/main" id="{2415F2BF-2F46-46D6-AD77-1A33145551F6}"/>
               </a:ext>
             </a:extLst>
           </p:cNvPr>
@@ -9814,7 +9812,7 @@
           <p:cNvPr id="39" name="">
             <a:extLst xmlns:a="http://schemas.openxmlformats.org/drawingml/2006/main">
               <a:ext uri="{FF2B5EF4-FFF2-40B4-BE49-F238E27FC236}">
-                <a16:creationId xmlns:a16="http://schemas.microsoft.com/office/drawing/2014/main" id="{F88CC8C1-52DE-4BB4-80D7-110BD4CA3E68}"/>
+                <a16:creationId xmlns:a16="http://schemas.microsoft.com/office/drawing/2014/main" id="{804F4BEF-5975-4A3C-8FE7-4E8732B37960}"/>
               </a:ext>
             </a:extLst>
           </p:cNvPr>
@@ -9876,7 +9874,7 @@
     </p:spTree>
     <p:extLst>
       <p:ext uri="{BB962C8B-B14F-4D97-AF65-F5344CB8AC3E}">
-        <p14:creationId xmlns:p14="http://schemas.microsoft.com/office/powerpoint/2010/main" val="121823050"/>
+        <p14:creationId xmlns:p14="http://schemas.microsoft.com/office/powerpoint/2010/main" val="1640623666"/>
       </p:ext>
     </p:extLst>
   </p:cSld>
@@ -9900,7 +9898,7 @@
           <p:cNvPr id="1" name="">
             <a:extLst xmlns:a="http://schemas.openxmlformats.org/drawingml/2006/main">
               <a:ext uri="{FF2B5EF4-FFF2-40B4-BE49-F238E27FC236}">
-                <a16:creationId xmlns:a16="http://schemas.microsoft.com/office/drawing/2014/main" id="{33F7AAE5-CB3A-4141-BB36-892A8761C00A}"/>
+                <a16:creationId xmlns:a16="http://schemas.microsoft.com/office/drawing/2014/main" id="{4533CABA-6ADC-48D0-86CD-C7CA4B88E38D}"/>
               </a:ext>
             </a:extLst>
           </p:cNvPr>
@@ -9935,7 +9933,7 @@
           <p:cNvPr id="2" name="">
             <a:extLst xmlns:a="http://schemas.openxmlformats.org/drawingml/2006/main">
               <a:ext uri="{FF2B5EF4-FFF2-40B4-BE49-F238E27FC236}">
-                <a16:creationId xmlns:a16="http://schemas.microsoft.com/office/drawing/2014/main" id="{7D22D7E5-FB44-41FC-9F55-1CBBFFFC9B07}"/>
+                <a16:creationId xmlns:a16="http://schemas.microsoft.com/office/drawing/2014/main" id="{ABD759D0-181B-4ABA-B0A5-8A1F3D9AF0D3}"/>
               </a:ext>
             </a:extLst>
           </p:cNvPr>
@@ -9970,7 +9968,7 @@
           <p:cNvPr id="3" name="">
             <a:extLst xmlns:a="http://schemas.openxmlformats.org/drawingml/2006/main">
               <a:ext uri="{FF2B5EF4-FFF2-40B4-BE49-F238E27FC236}">
-                <a16:creationId xmlns:a16="http://schemas.microsoft.com/office/drawing/2014/main" id="{21037C63-B0EF-406D-AEDD-233DABE00CD8}"/>
+                <a16:creationId xmlns:a16="http://schemas.microsoft.com/office/drawing/2014/main" id="{B624167E-8509-40AE-9D11-8CF1BDAB8D2B}"/>
               </a:ext>
             </a:extLst>
           </p:cNvPr>
@@ -10005,7 +10003,7 @@
           <p:cNvPr id="4" name="kicker-04-marker">
             <a:extLst xmlns:a="http://schemas.openxmlformats.org/drawingml/2006/main">
               <a:ext uri="{FF2B5EF4-FFF2-40B4-BE49-F238E27FC236}">
-                <a16:creationId xmlns:a16="http://schemas.microsoft.com/office/drawing/2014/main" id="{BAAC32A4-85BC-441F-851E-EEB732FED411}"/>
+                <a16:creationId xmlns:a16="http://schemas.microsoft.com/office/drawing/2014/main" id="{9153BAFA-7CE9-4ED7-BAF9-329426DB7646}"/>
               </a:ext>
             </a:extLst>
           </p:cNvPr>
@@ -10040,7 +10038,7 @@
           <p:cNvPr id="5" name="kicker-04-label">
             <a:extLst xmlns:a="http://schemas.openxmlformats.org/drawingml/2006/main">
               <a:ext uri="{FF2B5EF4-FFF2-40B4-BE49-F238E27FC236}">
-                <a16:creationId xmlns:a16="http://schemas.microsoft.com/office/drawing/2014/main" id="{AE5FC194-B5B5-44FF-B79D-ACC923A69F71}"/>
+                <a16:creationId xmlns:a16="http://schemas.microsoft.com/office/drawing/2014/main" id="{03604DCF-66EF-41FA-AFE9-6C0D2720F41E}"/>
               </a:ext>
             </a:extLst>
           </p:cNvPr>
@@ -10104,7 +10102,7 @@
           <p:cNvPr id="6" name="">
             <a:extLst xmlns:a="http://schemas.openxmlformats.org/drawingml/2006/main">
               <a:ext uri="{FF2B5EF4-FFF2-40B4-BE49-F238E27FC236}">
-                <a16:creationId xmlns:a16="http://schemas.microsoft.com/office/drawing/2014/main" id="{2F69364D-5615-4AC2-A8B4-4538F154A4F1}"/>
+                <a16:creationId xmlns:a16="http://schemas.microsoft.com/office/drawing/2014/main" id="{6538029B-A6C4-4BD9-91CA-F754ED9407CE}"/>
               </a:ext>
             </a:extLst>
           </p:cNvPr>
@@ -10168,7 +10166,7 @@
           <p:cNvPr id="7" name="">
             <a:extLst xmlns:a="http://schemas.openxmlformats.org/drawingml/2006/main">
               <a:ext uri="{FF2B5EF4-FFF2-40B4-BE49-F238E27FC236}">
-                <a16:creationId xmlns:a16="http://schemas.microsoft.com/office/drawing/2014/main" id="{7ED9A96F-E1A1-4F93-89C3-1A39274ADCA3}"/>
+                <a16:creationId xmlns:a16="http://schemas.microsoft.com/office/drawing/2014/main" id="{751AFCFB-FAD7-4BB4-81EC-5461C1D11D3F}"/>
               </a:ext>
             </a:extLst>
           </p:cNvPr>
@@ -10232,7 +10230,7 @@
           <p:cNvPr id="8" name="">
             <a:extLst xmlns:a="http://schemas.openxmlformats.org/drawingml/2006/main">
               <a:ext uri="{FF2B5EF4-FFF2-40B4-BE49-F238E27FC236}">
-                <a16:creationId xmlns:a16="http://schemas.microsoft.com/office/drawing/2014/main" id="{4F1FED06-3F8C-41CC-817A-EEE0C80A45A3}"/>
+                <a16:creationId xmlns:a16="http://schemas.microsoft.com/office/drawing/2014/main" id="{AEED2C1D-6B26-4F6F-B420-C57432F41A74}"/>
               </a:ext>
             </a:extLst>
           </p:cNvPr>
@@ -10267,7 +10265,7 @@
           <p:cNvPr id="9" name="">
             <a:extLst xmlns:a="http://schemas.openxmlformats.org/drawingml/2006/main">
               <a:ext uri="{FF2B5EF4-FFF2-40B4-BE49-F238E27FC236}">
-                <a16:creationId xmlns:a16="http://schemas.microsoft.com/office/drawing/2014/main" id="{3143659A-C5BA-4340-8D15-8EE1D42B1640}"/>
+                <a16:creationId xmlns:a16="http://schemas.microsoft.com/office/drawing/2014/main" id="{E1EFA252-3966-4AB9-BC23-CBAE0DC88652}"/>
               </a:ext>
             </a:extLst>
           </p:cNvPr>
@@ -10331,7 +10329,7 @@
           <p:cNvPr id="10" name="">
             <a:extLst xmlns:a="http://schemas.openxmlformats.org/drawingml/2006/main">
               <a:ext uri="{FF2B5EF4-FFF2-40B4-BE49-F238E27FC236}">
-                <a16:creationId xmlns:a16="http://schemas.microsoft.com/office/drawing/2014/main" id="{0ACB438C-F994-4D78-8F9D-F3F03E00ACB9}"/>
+                <a16:creationId xmlns:a16="http://schemas.microsoft.com/office/drawing/2014/main" id="{51069545-C327-45B0-9988-5D5BC267082A}"/>
               </a:ext>
             </a:extLst>
           </p:cNvPr>
@@ -10395,7 +10393,7 @@
           <p:cNvPr id="11" name="">
             <a:extLst xmlns:a="http://schemas.openxmlformats.org/drawingml/2006/main">
               <a:ext uri="{FF2B5EF4-FFF2-40B4-BE49-F238E27FC236}">
-                <a16:creationId xmlns:a16="http://schemas.microsoft.com/office/drawing/2014/main" id="{A30F1658-1FEA-40FF-AF27-20DD58353E0A}"/>
+                <a16:creationId xmlns:a16="http://schemas.microsoft.com/office/drawing/2014/main" id="{FAD27C5F-1EB4-4215-94C8-1239B1F2DD3C}"/>
               </a:ext>
             </a:extLst>
           </p:cNvPr>
@@ -10459,7 +10457,7 @@
           <p:cNvPr id="12" name="">
             <a:extLst xmlns:a="http://schemas.openxmlformats.org/drawingml/2006/main">
               <a:ext uri="{FF2B5EF4-FFF2-40B4-BE49-F238E27FC236}">
-                <a16:creationId xmlns:a16="http://schemas.microsoft.com/office/drawing/2014/main" id="{4B91B9CA-D654-4948-A922-B5943191AEA9}"/>
+                <a16:creationId xmlns:a16="http://schemas.microsoft.com/office/drawing/2014/main" id="{CEE46945-6FDA-4E3F-ADF1-63E1543FD64B}"/>
               </a:ext>
             </a:extLst>
           </p:cNvPr>
@@ -10494,7 +10492,7 @@
           <p:cNvPr id="13" name="">
             <a:extLst xmlns:a="http://schemas.openxmlformats.org/drawingml/2006/main">
               <a:ext uri="{FF2B5EF4-FFF2-40B4-BE49-F238E27FC236}">
-                <a16:creationId xmlns:a16="http://schemas.microsoft.com/office/drawing/2014/main" id="{5EBEF88A-7E0D-4202-B72B-CD894E951820}"/>
+                <a16:creationId xmlns:a16="http://schemas.microsoft.com/office/drawing/2014/main" id="{22A4C0D8-522E-49E1-88DE-3B8475E4C0F8}"/>
               </a:ext>
             </a:extLst>
           </p:cNvPr>
@@ -10527,7 +10525,7 @@
           <p:cNvPr id="14" name="">
             <a:extLst xmlns:a="http://schemas.openxmlformats.org/drawingml/2006/main">
               <a:ext uri="{FF2B5EF4-FFF2-40B4-BE49-F238E27FC236}">
-                <a16:creationId xmlns:a16="http://schemas.microsoft.com/office/drawing/2014/main" id="{7C0DA3B4-45E1-4F64-9C37-94ED4F0CCF5E}"/>
+                <a16:creationId xmlns:a16="http://schemas.microsoft.com/office/drawing/2014/main" id="{7CE4434C-20FF-457E-9B3A-177E98DBFF53}"/>
               </a:ext>
             </a:extLst>
           </p:cNvPr>
@@ -10560,7 +10558,7 @@
           <p:cNvPr id="15" name="">
             <a:extLst xmlns:a="http://schemas.openxmlformats.org/drawingml/2006/main">
               <a:ext uri="{FF2B5EF4-FFF2-40B4-BE49-F238E27FC236}">
-                <a16:creationId xmlns:a16="http://schemas.microsoft.com/office/drawing/2014/main" id="{0FEE0949-AD92-4734-B852-3D49A68AD995}"/>
+                <a16:creationId xmlns:a16="http://schemas.microsoft.com/office/drawing/2014/main" id="{00841E72-410C-46BE-9382-F2B2FB011022}"/>
               </a:ext>
             </a:extLst>
           </p:cNvPr>
@@ -10624,7 +10622,7 @@
           <p:cNvPr id="16" name="">
             <a:extLst xmlns:a="http://schemas.openxmlformats.org/drawingml/2006/main">
               <a:ext uri="{FF2B5EF4-FFF2-40B4-BE49-F238E27FC236}">
-                <a16:creationId xmlns:a16="http://schemas.microsoft.com/office/drawing/2014/main" id="{695BA2B2-6729-4392-9248-E78EDACE2C5F}"/>
+                <a16:creationId xmlns:a16="http://schemas.microsoft.com/office/drawing/2014/main" id="{58BAB0F5-9F75-44F4-BE35-4B007CCB9626}"/>
               </a:ext>
             </a:extLst>
           </p:cNvPr>
@@ -10688,7 +10686,7 @@
           <p:cNvPr id="17" name="">
             <a:extLst xmlns:a="http://schemas.openxmlformats.org/drawingml/2006/main">
               <a:ext uri="{FF2B5EF4-FFF2-40B4-BE49-F238E27FC236}">
-                <a16:creationId xmlns:a16="http://schemas.microsoft.com/office/drawing/2014/main" id="{1428ADF1-EB02-4E8D-A7BE-1652BC841FCB}"/>
+                <a16:creationId xmlns:a16="http://schemas.microsoft.com/office/drawing/2014/main" id="{3105984A-AEC3-41B9-A42D-6262D8E90B31}"/>
               </a:ext>
             </a:extLst>
           </p:cNvPr>
@@ -10752,7 +10750,7 @@
           <p:cNvPr id="18" name="">
             <a:extLst xmlns:a="http://schemas.openxmlformats.org/drawingml/2006/main">
               <a:ext uri="{FF2B5EF4-FFF2-40B4-BE49-F238E27FC236}">
-                <a16:creationId xmlns:a16="http://schemas.microsoft.com/office/drawing/2014/main" id="{44A7E77F-94CE-47A0-9C4D-54D58FBAD45A}"/>
+                <a16:creationId xmlns:a16="http://schemas.microsoft.com/office/drawing/2014/main" id="{C5616DB5-3F5B-4013-8F37-9188A97863E8}"/>
               </a:ext>
             </a:extLst>
           </p:cNvPr>
@@ -10787,7 +10785,7 @@
           <p:cNvPr id="19" name="">
             <a:extLst xmlns:a="http://schemas.openxmlformats.org/drawingml/2006/main">
               <a:ext uri="{FF2B5EF4-FFF2-40B4-BE49-F238E27FC236}">
-                <a16:creationId xmlns:a16="http://schemas.microsoft.com/office/drawing/2014/main" id="{EED3FEC4-6FD8-447A-AAD8-A13EC44100EB}"/>
+                <a16:creationId xmlns:a16="http://schemas.microsoft.com/office/drawing/2014/main" id="{8B7D4485-7F38-41E9-AE13-7738D876CA60}"/>
               </a:ext>
             </a:extLst>
           </p:cNvPr>
@@ -10851,7 +10849,7 @@
           <p:cNvPr id="20" name="">
             <a:extLst xmlns:a="http://schemas.openxmlformats.org/drawingml/2006/main">
               <a:ext uri="{FF2B5EF4-FFF2-40B4-BE49-F238E27FC236}">
-                <a16:creationId xmlns:a16="http://schemas.microsoft.com/office/drawing/2014/main" id="{05698B82-368B-4771-8AFC-66DB21CB8420}"/>
+                <a16:creationId xmlns:a16="http://schemas.microsoft.com/office/drawing/2014/main" id="{0AC62EB8-8A9F-49CE-9E4F-2EF1A91623EE}"/>
               </a:ext>
             </a:extLst>
           </p:cNvPr>
@@ -10915,7 +10913,7 @@
           <p:cNvPr id="21" name="">
             <a:extLst xmlns:a="http://schemas.openxmlformats.org/drawingml/2006/main">
               <a:ext uri="{FF2B5EF4-FFF2-40B4-BE49-F238E27FC236}">
-                <a16:creationId xmlns:a16="http://schemas.microsoft.com/office/drawing/2014/main" id="{4840F202-1524-4A11-8A7C-E3D1D5E8346F}"/>
+                <a16:creationId xmlns:a16="http://schemas.microsoft.com/office/drawing/2014/main" id="{C9B1B53A-6AF2-4AFB-9026-EA65EB24261B}"/>
               </a:ext>
             </a:extLst>
           </p:cNvPr>
@@ -10979,7 +10977,7 @@
           <p:cNvPr id="22" name="">
             <a:extLst xmlns:a="http://schemas.openxmlformats.org/drawingml/2006/main">
               <a:ext uri="{FF2B5EF4-FFF2-40B4-BE49-F238E27FC236}">
-                <a16:creationId xmlns:a16="http://schemas.microsoft.com/office/drawing/2014/main" id="{BB959E1B-B938-4C4A-82F3-8356DC8C8353}"/>
+                <a16:creationId xmlns:a16="http://schemas.microsoft.com/office/drawing/2014/main" id="{8BFF0F67-882C-4AAF-BFBA-B25AEBFDF68F}"/>
               </a:ext>
             </a:extLst>
           </p:cNvPr>
@@ -11014,7 +11012,7 @@
           <p:cNvPr id="23" name="">
             <a:extLst xmlns:a="http://schemas.openxmlformats.org/drawingml/2006/main">
               <a:ext uri="{FF2B5EF4-FFF2-40B4-BE49-F238E27FC236}">
-                <a16:creationId xmlns:a16="http://schemas.microsoft.com/office/drawing/2014/main" id="{337ABA60-C23C-4015-928F-E51D2B0E771B}"/>
+                <a16:creationId xmlns:a16="http://schemas.microsoft.com/office/drawing/2014/main" id="{A0635179-A09A-46E8-9908-644A686951E9}"/>
               </a:ext>
             </a:extLst>
           </p:cNvPr>
@@ -11049,7 +11047,7 @@
           <p:cNvPr id="24" name="">
             <a:extLst xmlns:a="http://schemas.openxmlformats.org/drawingml/2006/main">
               <a:ext uri="{FF2B5EF4-FFF2-40B4-BE49-F238E27FC236}">
-                <a16:creationId xmlns:a16="http://schemas.microsoft.com/office/drawing/2014/main" id="{1C1034A1-0FD8-4651-995D-4DD64E31E480}"/>
+                <a16:creationId xmlns:a16="http://schemas.microsoft.com/office/drawing/2014/main" id="{6EAE51E1-27CB-4275-84BF-8058FB460FD8}"/>
               </a:ext>
             </a:extLst>
           </p:cNvPr>
@@ -11113,7 +11111,7 @@
           <p:cNvPr id="25" name="">
             <a:extLst xmlns:a="http://schemas.openxmlformats.org/drawingml/2006/main">
               <a:ext uri="{FF2B5EF4-FFF2-40B4-BE49-F238E27FC236}">
-                <a16:creationId xmlns:a16="http://schemas.microsoft.com/office/drawing/2014/main" id="{0529F1FD-BF01-43C4-8979-D117FACC9159}"/>
+                <a16:creationId xmlns:a16="http://schemas.microsoft.com/office/drawing/2014/main" id="{87F40852-9C55-41A7-B268-EA1077D5C8AD}"/>
               </a:ext>
             </a:extLst>
           </p:cNvPr>
@@ -11177,7 +11175,7 @@
           <p:cNvPr id="26" name="">
             <a:extLst xmlns:a="http://schemas.openxmlformats.org/drawingml/2006/main">
               <a:ext uri="{FF2B5EF4-FFF2-40B4-BE49-F238E27FC236}">
-                <a16:creationId xmlns:a16="http://schemas.microsoft.com/office/drawing/2014/main" id="{58246BE6-99A5-42F0-AC8B-3BDC41EB52CF}"/>
+                <a16:creationId xmlns:a16="http://schemas.microsoft.com/office/drawing/2014/main" id="{C5121FEB-B6B7-4C6B-8054-D68F3DFF16EB}"/>
               </a:ext>
             </a:extLst>
           </p:cNvPr>
@@ -11241,7 +11239,7 @@
           <p:cNvPr id="27" name="">
             <a:extLst xmlns:a="http://schemas.openxmlformats.org/drawingml/2006/main">
               <a:ext uri="{FF2B5EF4-FFF2-40B4-BE49-F238E27FC236}">
-                <a16:creationId xmlns:a16="http://schemas.microsoft.com/office/drawing/2014/main" id="{21187B9E-D393-46BD-83FA-CC715E23E0B8}"/>
+                <a16:creationId xmlns:a16="http://schemas.microsoft.com/office/drawing/2014/main" id="{0D542823-6635-4E51-98E3-459683628D18}"/>
               </a:ext>
             </a:extLst>
           </p:cNvPr>
@@ -11276,7 +11274,7 @@
           <p:cNvPr id="28" name="">
             <a:extLst xmlns:a="http://schemas.openxmlformats.org/drawingml/2006/main">
               <a:ext uri="{FF2B5EF4-FFF2-40B4-BE49-F238E27FC236}">
-                <a16:creationId xmlns:a16="http://schemas.microsoft.com/office/drawing/2014/main" id="{FE2EDE59-02F6-46F1-83BD-984AE4AFF0C5}"/>
+                <a16:creationId xmlns:a16="http://schemas.microsoft.com/office/drawing/2014/main" id="{D198B084-5335-4224-B055-7150A8C7FDCD}"/>
               </a:ext>
             </a:extLst>
           </p:cNvPr>
@@ -11340,7 +11338,7 @@
           <p:cNvPr id="29" name="">
             <a:extLst xmlns:a="http://schemas.openxmlformats.org/drawingml/2006/main">
               <a:ext uri="{FF2B5EF4-FFF2-40B4-BE49-F238E27FC236}">
-                <a16:creationId xmlns:a16="http://schemas.microsoft.com/office/drawing/2014/main" id="{1285A466-23CE-4D4A-A6A2-8157C4814BF2}"/>
+                <a16:creationId xmlns:a16="http://schemas.microsoft.com/office/drawing/2014/main" id="{56C09E4C-F97B-4F65-8E4F-2F09E54361C0}"/>
               </a:ext>
             </a:extLst>
           </p:cNvPr>
@@ -11404,7 +11402,7 @@
           <p:cNvPr id="30" name="">
             <a:extLst xmlns:a="http://schemas.openxmlformats.org/drawingml/2006/main">
               <a:ext uri="{FF2B5EF4-FFF2-40B4-BE49-F238E27FC236}">
-                <a16:creationId xmlns:a16="http://schemas.microsoft.com/office/drawing/2014/main" id="{4403665E-3D45-44B9-8CE9-A0F344CD8C79}"/>
+                <a16:creationId xmlns:a16="http://schemas.microsoft.com/office/drawing/2014/main" id="{35969B14-56F7-42E2-AA99-CD7D530DD204}"/>
               </a:ext>
             </a:extLst>
           </p:cNvPr>
@@ -11468,7 +11466,7 @@
           <p:cNvPr id="31" name="">
             <a:extLst xmlns:a="http://schemas.openxmlformats.org/drawingml/2006/main">
               <a:ext uri="{FF2B5EF4-FFF2-40B4-BE49-F238E27FC236}">
-                <a16:creationId xmlns:a16="http://schemas.microsoft.com/office/drawing/2014/main" id="{8C66D18A-9100-49B4-B8A8-77A3FCEFAE47}"/>
+                <a16:creationId xmlns:a16="http://schemas.microsoft.com/office/drawing/2014/main" id="{CB6AF170-1AB6-4A3F-BF63-E3C491585ADB}"/>
               </a:ext>
             </a:extLst>
           </p:cNvPr>
@@ -11503,7 +11501,7 @@
           <p:cNvPr id="32" name="">
             <a:extLst xmlns:a="http://schemas.openxmlformats.org/drawingml/2006/main">
               <a:ext uri="{FF2B5EF4-FFF2-40B4-BE49-F238E27FC236}">
-                <a16:creationId xmlns:a16="http://schemas.microsoft.com/office/drawing/2014/main" id="{2DD905BD-D4BC-4F42-874B-90A91AC382C7}"/>
+                <a16:creationId xmlns:a16="http://schemas.microsoft.com/office/drawing/2014/main" id="{BFF23634-BDDC-48EB-B0D2-835B98AB9AC5}"/>
               </a:ext>
             </a:extLst>
           </p:cNvPr>
@@ -11538,7 +11536,7 @@
           <p:cNvPr id="33" name="">
             <a:extLst xmlns:a="http://schemas.openxmlformats.org/drawingml/2006/main">
               <a:ext uri="{FF2B5EF4-FFF2-40B4-BE49-F238E27FC236}">
-                <a16:creationId xmlns:a16="http://schemas.microsoft.com/office/drawing/2014/main" id="{C6245F18-F2D0-4967-98F4-9DEAC5539274}"/>
+                <a16:creationId xmlns:a16="http://schemas.microsoft.com/office/drawing/2014/main" id="{30C4B82E-75C1-48D7-BB72-161DD0BA635C}"/>
               </a:ext>
             </a:extLst>
           </p:cNvPr>
@@ -11602,7 +11600,7 @@
           <p:cNvPr id="34" name="">
             <a:extLst xmlns:a="http://schemas.openxmlformats.org/drawingml/2006/main">
               <a:ext uri="{FF2B5EF4-FFF2-40B4-BE49-F238E27FC236}">
-                <a16:creationId xmlns:a16="http://schemas.microsoft.com/office/drawing/2014/main" id="{22EC4259-7744-40A2-833E-57FBF20C718C}"/>
+                <a16:creationId xmlns:a16="http://schemas.microsoft.com/office/drawing/2014/main" id="{DF7F6971-5208-4E02-9A85-183F6529B1EB}"/>
               </a:ext>
             </a:extLst>
           </p:cNvPr>
@@ -11666,7 +11664,7 @@
           <p:cNvPr id="35" name="">
             <a:extLst xmlns:a="http://schemas.openxmlformats.org/drawingml/2006/main">
               <a:ext uri="{FF2B5EF4-FFF2-40B4-BE49-F238E27FC236}">
-                <a16:creationId xmlns:a16="http://schemas.microsoft.com/office/drawing/2014/main" id="{5A181E61-F61A-41E1-8463-E99475203527}"/>
+                <a16:creationId xmlns:a16="http://schemas.microsoft.com/office/drawing/2014/main" id="{E1C6FA1B-F798-4E63-90CB-9AD7DA91C4CB}"/>
               </a:ext>
             </a:extLst>
           </p:cNvPr>
@@ -11730,7 +11728,7 @@
           <p:cNvPr id="36" name="">
             <a:extLst xmlns:a="http://schemas.openxmlformats.org/drawingml/2006/main">
               <a:ext uri="{FF2B5EF4-FFF2-40B4-BE49-F238E27FC236}">
-                <a16:creationId xmlns:a16="http://schemas.microsoft.com/office/drawing/2014/main" id="{DA2DB04E-DA91-4FCF-8B4B-D2404DABDDD4}"/>
+                <a16:creationId xmlns:a16="http://schemas.microsoft.com/office/drawing/2014/main" id="{455C06D9-C5A5-4D88-BEBE-95A3A874EBEE}"/>
               </a:ext>
             </a:extLst>
           </p:cNvPr>
@@ -11765,7 +11763,7 @@
           <p:cNvPr id="37" name="">
             <a:extLst xmlns:a="http://schemas.openxmlformats.org/drawingml/2006/main">
               <a:ext uri="{FF2B5EF4-FFF2-40B4-BE49-F238E27FC236}">
-                <a16:creationId xmlns:a16="http://schemas.microsoft.com/office/drawing/2014/main" id="{0DC218F3-80ED-4131-8E7E-0D480BFA08CD}"/>
+                <a16:creationId xmlns:a16="http://schemas.microsoft.com/office/drawing/2014/main" id="{E89B764B-19D7-46BA-A396-555A85B6F8BD}"/>
               </a:ext>
             </a:extLst>
           </p:cNvPr>
@@ -11829,7 +11827,7 @@
           <p:cNvPr id="38" name="">
             <a:extLst xmlns:a="http://schemas.openxmlformats.org/drawingml/2006/main">
               <a:ext uri="{FF2B5EF4-FFF2-40B4-BE49-F238E27FC236}">
-                <a16:creationId xmlns:a16="http://schemas.microsoft.com/office/drawing/2014/main" id="{F76723C5-494F-40AB-AF58-78F19F2F2B78}"/>
+                <a16:creationId xmlns:a16="http://schemas.microsoft.com/office/drawing/2014/main" id="{940AD1F8-D28E-4CB1-9E36-301B09D9F185}"/>
               </a:ext>
             </a:extLst>
           </p:cNvPr>
@@ -11893,7 +11891,7 @@
           <p:cNvPr id="39" name="">
             <a:extLst xmlns:a="http://schemas.openxmlformats.org/drawingml/2006/main">
               <a:ext uri="{FF2B5EF4-FFF2-40B4-BE49-F238E27FC236}">
-                <a16:creationId xmlns:a16="http://schemas.microsoft.com/office/drawing/2014/main" id="{6E74AA8E-72E0-4CE5-A4A5-22E56C3DB519}"/>
+                <a16:creationId xmlns:a16="http://schemas.microsoft.com/office/drawing/2014/main" id="{A80BBA89-8F2C-44B7-885B-DB7B4A5F6396}"/>
               </a:ext>
             </a:extLst>
           </p:cNvPr>
@@ -11957,7 +11955,7 @@
           <p:cNvPr id="40" name="">
             <a:extLst xmlns:a="http://schemas.openxmlformats.org/drawingml/2006/main">
               <a:ext uri="{FF2B5EF4-FFF2-40B4-BE49-F238E27FC236}">
-                <a16:creationId xmlns:a16="http://schemas.microsoft.com/office/drawing/2014/main" id="{C18AEEB0-E648-47AE-8887-A7AEF942AF3F}"/>
+                <a16:creationId xmlns:a16="http://schemas.microsoft.com/office/drawing/2014/main" id="{6AB0C741-A055-41A7-9936-3F03532D220B}"/>
               </a:ext>
             </a:extLst>
           </p:cNvPr>
@@ -11992,7 +11990,7 @@
           <p:cNvPr id="41" name="">
             <a:extLst xmlns:a="http://schemas.openxmlformats.org/drawingml/2006/main">
               <a:ext uri="{FF2B5EF4-FFF2-40B4-BE49-F238E27FC236}">
-                <a16:creationId xmlns:a16="http://schemas.microsoft.com/office/drawing/2014/main" id="{0D47AE05-75A8-4935-BFCF-5025CA38C966}"/>
+                <a16:creationId xmlns:a16="http://schemas.microsoft.com/office/drawing/2014/main" id="{0E42C5B1-3B87-47EC-B31E-D0F0722FFB27}"/>
               </a:ext>
             </a:extLst>
           </p:cNvPr>
@@ -12027,7 +12025,7 @@
           <p:cNvPr id="42" name="">
             <a:extLst xmlns:a="http://schemas.openxmlformats.org/drawingml/2006/main">
               <a:ext uri="{FF2B5EF4-FFF2-40B4-BE49-F238E27FC236}">
-                <a16:creationId xmlns:a16="http://schemas.microsoft.com/office/drawing/2014/main" id="{A3C36F46-8030-4E3F-9282-B524938B7EB4}"/>
+                <a16:creationId xmlns:a16="http://schemas.microsoft.com/office/drawing/2014/main" id="{341BD4DF-C268-4682-BF53-86E783A39C87}"/>
               </a:ext>
             </a:extLst>
           </p:cNvPr>
@@ -12062,7 +12060,7 @@
           <p:cNvPr id="43" name="kicker-04-marker">
             <a:extLst xmlns:a="http://schemas.openxmlformats.org/drawingml/2006/main">
               <a:ext uri="{FF2B5EF4-FFF2-40B4-BE49-F238E27FC236}">
-                <a16:creationId xmlns:a16="http://schemas.microsoft.com/office/drawing/2014/main" id="{98E4D501-2C41-463B-A992-F2959F16DD78}"/>
+                <a16:creationId xmlns:a16="http://schemas.microsoft.com/office/drawing/2014/main" id="{EFAAEF47-41F6-42DC-A4CE-F13CED0AFD2F}"/>
               </a:ext>
             </a:extLst>
           </p:cNvPr>
@@ -12097,7 +12095,7 @@
           <p:cNvPr id="44" name="kicker-04-label">
             <a:extLst xmlns:a="http://schemas.openxmlformats.org/drawingml/2006/main">
               <a:ext uri="{FF2B5EF4-FFF2-40B4-BE49-F238E27FC236}">
-                <a16:creationId xmlns:a16="http://schemas.microsoft.com/office/drawing/2014/main" id="{C849B970-0F2B-445B-A09A-79CD85D47695}"/>
+                <a16:creationId xmlns:a16="http://schemas.microsoft.com/office/drawing/2014/main" id="{D6D58A68-2BF2-4FEE-8850-7076A0F0DA58}"/>
               </a:ext>
             </a:extLst>
           </p:cNvPr>
@@ -12161,7 +12159,7 @@
           <p:cNvPr id="45" name="">
             <a:extLst xmlns:a="http://schemas.openxmlformats.org/drawingml/2006/main">
               <a:ext uri="{FF2B5EF4-FFF2-40B4-BE49-F238E27FC236}">
-                <a16:creationId xmlns:a16="http://schemas.microsoft.com/office/drawing/2014/main" id="{11F545CB-20E0-4D3A-8C6D-34EEAC23A3F2}"/>
+                <a16:creationId xmlns:a16="http://schemas.microsoft.com/office/drawing/2014/main" id="{2D68842C-4368-4A45-A913-5D5A448E6AC8}"/>
               </a:ext>
             </a:extLst>
           </p:cNvPr>
@@ -12225,7 +12223,7 @@
           <p:cNvPr id="46" name="">
             <a:extLst xmlns:a="http://schemas.openxmlformats.org/drawingml/2006/main">
               <a:ext uri="{FF2B5EF4-FFF2-40B4-BE49-F238E27FC236}">
-                <a16:creationId xmlns:a16="http://schemas.microsoft.com/office/drawing/2014/main" id="{ABF0EF92-87D2-472B-AF32-002CE22C7D57}"/>
+                <a16:creationId xmlns:a16="http://schemas.microsoft.com/office/drawing/2014/main" id="{08BFC213-1B4D-4C47-89CE-345230CD8C0D}"/>
               </a:ext>
             </a:extLst>
           </p:cNvPr>
@@ -12289,7 +12287,7 @@
           <p:cNvPr id="47" name="">
             <a:extLst xmlns:a="http://schemas.openxmlformats.org/drawingml/2006/main">
               <a:ext uri="{FF2B5EF4-FFF2-40B4-BE49-F238E27FC236}">
-                <a16:creationId xmlns:a16="http://schemas.microsoft.com/office/drawing/2014/main" id="{35B1F808-0260-478C-B8A1-6F1CC8844805}"/>
+                <a16:creationId xmlns:a16="http://schemas.microsoft.com/office/drawing/2014/main" id="{2086ED36-A690-4E01-AF71-764F60B96429}"/>
               </a:ext>
             </a:extLst>
           </p:cNvPr>
@@ -12324,7 +12322,7 @@
           <p:cNvPr id="48" name="">
             <a:extLst xmlns:a="http://schemas.openxmlformats.org/drawingml/2006/main">
               <a:ext uri="{FF2B5EF4-FFF2-40B4-BE49-F238E27FC236}">
-                <a16:creationId xmlns:a16="http://schemas.microsoft.com/office/drawing/2014/main" id="{55163490-7A73-40E5-839C-3342F31ECCDA}"/>
+                <a16:creationId xmlns:a16="http://schemas.microsoft.com/office/drawing/2014/main" id="{C1DACE13-7AD1-49BD-BAB3-AC5515C14ADB}"/>
               </a:ext>
             </a:extLst>
           </p:cNvPr>
@@ -12359,7 +12357,7 @@
           <p:cNvPr id="49" name="">
             <a:extLst xmlns:a="http://schemas.openxmlformats.org/drawingml/2006/main">
               <a:ext uri="{FF2B5EF4-FFF2-40B4-BE49-F238E27FC236}">
-                <a16:creationId xmlns:a16="http://schemas.microsoft.com/office/drawing/2014/main" id="{98FC33E4-7764-42A5-B8B8-4E6D51A63D1A}"/>
+                <a16:creationId xmlns:a16="http://schemas.microsoft.com/office/drawing/2014/main" id="{4B27C19F-89B6-4AE2-AA54-8F518D82227B}"/>
               </a:ext>
             </a:extLst>
           </p:cNvPr>
@@ -12394,7 +12392,7 @@
           <p:cNvPr id="50" name="">
             <a:extLst xmlns:a="http://schemas.openxmlformats.org/drawingml/2006/main">
               <a:ext uri="{FF2B5EF4-FFF2-40B4-BE49-F238E27FC236}">
-                <a16:creationId xmlns:a16="http://schemas.microsoft.com/office/drawing/2014/main" id="{47E236B0-7FC7-4192-98F1-36FB83DC7A2D}"/>
+                <a16:creationId xmlns:a16="http://schemas.microsoft.com/office/drawing/2014/main" id="{F4D94A3D-3FFF-4577-8E8E-53F1472EAA62}"/>
               </a:ext>
             </a:extLst>
           </p:cNvPr>
@@ -12429,7 +12427,7 @@
           <p:cNvPr id="51" name="">
             <a:extLst xmlns:a="http://schemas.openxmlformats.org/drawingml/2006/main">
               <a:ext uri="{FF2B5EF4-FFF2-40B4-BE49-F238E27FC236}">
-                <a16:creationId xmlns:a16="http://schemas.microsoft.com/office/drawing/2014/main" id="{87D8DF6B-DD33-46C6-BAC6-D859A1505ED7}"/>
+                <a16:creationId xmlns:a16="http://schemas.microsoft.com/office/drawing/2014/main" id="{F068628D-768D-4F49-BC36-219F4F21060A}"/>
               </a:ext>
             </a:extLst>
           </p:cNvPr>
@@ -12493,7 +12491,7 @@
           <p:cNvPr id="52" name="">
             <a:extLst xmlns:a="http://schemas.openxmlformats.org/drawingml/2006/main">
               <a:ext uri="{FF2B5EF4-FFF2-40B4-BE49-F238E27FC236}">
-                <a16:creationId xmlns:a16="http://schemas.microsoft.com/office/drawing/2014/main" id="{C376F962-6FD8-4FA2-94DD-59E25D2C923C}"/>
+                <a16:creationId xmlns:a16="http://schemas.microsoft.com/office/drawing/2014/main" id="{18C15491-FB22-493D-B204-1DF51BE0D65B}"/>
               </a:ext>
             </a:extLst>
           </p:cNvPr>
@@ -12557,7 +12555,7 @@
           <p:cNvPr id="53" name="">
             <a:extLst xmlns:a="http://schemas.openxmlformats.org/drawingml/2006/main">
               <a:ext uri="{FF2B5EF4-FFF2-40B4-BE49-F238E27FC236}">
-                <a16:creationId xmlns:a16="http://schemas.microsoft.com/office/drawing/2014/main" id="{48611815-6AD1-4D6C-9D16-05422A0AEA25}"/>
+                <a16:creationId xmlns:a16="http://schemas.microsoft.com/office/drawing/2014/main" id="{8EFD80AC-FF7F-464A-90A3-CA882693DD6E}"/>
               </a:ext>
             </a:extLst>
           </p:cNvPr>
@@ -12619,7 +12617,7 @@
     </p:spTree>
     <p:extLst>
       <p:ext uri="{BB962C8B-B14F-4D97-AF65-F5344CB8AC3E}">
-        <p14:creationId xmlns:p14="http://schemas.microsoft.com/office/powerpoint/2010/main" val="517912470"/>
+        <p14:creationId xmlns:p14="http://schemas.microsoft.com/office/powerpoint/2010/main" val="303280105"/>
       </p:ext>
     </p:extLst>
   </p:cSld>
@@ -12643,7 +12641,7 @@
           <p:cNvPr id="1" name="">
             <a:extLst xmlns:a="http://schemas.openxmlformats.org/drawingml/2006/main">
               <a:ext uri="{FF2B5EF4-FFF2-40B4-BE49-F238E27FC236}">
-                <a16:creationId xmlns:a16="http://schemas.microsoft.com/office/drawing/2014/main" id="{DD509258-831B-4E47-A857-A7BFF2089077}"/>
+                <a16:creationId xmlns:a16="http://schemas.microsoft.com/office/drawing/2014/main" id="{0A817389-860E-436B-8548-3833633E87CD}"/>
               </a:ext>
             </a:extLst>
           </p:cNvPr>
@@ -12678,7 +12676,7 @@
           <p:cNvPr id="2" name="">
             <a:extLst xmlns:a="http://schemas.openxmlformats.org/drawingml/2006/main">
               <a:ext uri="{FF2B5EF4-FFF2-40B4-BE49-F238E27FC236}">
-                <a16:creationId xmlns:a16="http://schemas.microsoft.com/office/drawing/2014/main" id="{06F2797E-E089-44E0-814B-0CC03282FD5C}"/>
+                <a16:creationId xmlns:a16="http://schemas.microsoft.com/office/drawing/2014/main" id="{67E4818C-0EE9-46FD-AC04-6C7505C61C74}"/>
               </a:ext>
             </a:extLst>
           </p:cNvPr>
@@ -12713,7 +12711,7 @@
           <p:cNvPr id="3" name="">
             <a:extLst xmlns:a="http://schemas.openxmlformats.org/drawingml/2006/main">
               <a:ext uri="{FF2B5EF4-FFF2-40B4-BE49-F238E27FC236}">
-                <a16:creationId xmlns:a16="http://schemas.microsoft.com/office/drawing/2014/main" id="{1E39058C-183A-4D50-81DC-5C8688BDABAF}"/>
+                <a16:creationId xmlns:a16="http://schemas.microsoft.com/office/drawing/2014/main" id="{A880FF98-9BFF-4CAA-9B9D-85713D107519}"/>
               </a:ext>
             </a:extLst>
           </p:cNvPr>
@@ -12748,7 +12746,7 @@
           <p:cNvPr id="4" name="kicker-04-marker">
             <a:extLst xmlns:a="http://schemas.openxmlformats.org/drawingml/2006/main">
               <a:ext uri="{FF2B5EF4-FFF2-40B4-BE49-F238E27FC236}">
-                <a16:creationId xmlns:a16="http://schemas.microsoft.com/office/drawing/2014/main" id="{4F28EDF9-5E9A-4057-B547-FC4C88B7F342}"/>
+                <a16:creationId xmlns:a16="http://schemas.microsoft.com/office/drawing/2014/main" id="{0278AE9F-9CD5-4ED6-9E06-B506DAF6A796}"/>
               </a:ext>
             </a:extLst>
           </p:cNvPr>
@@ -12783,7 +12781,7 @@
           <p:cNvPr id="5" name="kicker-04-label">
             <a:extLst xmlns:a="http://schemas.openxmlformats.org/drawingml/2006/main">
               <a:ext uri="{FF2B5EF4-FFF2-40B4-BE49-F238E27FC236}">
-                <a16:creationId xmlns:a16="http://schemas.microsoft.com/office/drawing/2014/main" id="{FC11D28B-5052-4BB6-91B5-348D008218EA}"/>
+                <a16:creationId xmlns:a16="http://schemas.microsoft.com/office/drawing/2014/main" id="{B9079BF1-87FC-4B1C-AFB0-2345F4E7A2D4}"/>
               </a:ext>
             </a:extLst>
           </p:cNvPr>
@@ -12847,7 +12845,7 @@
           <p:cNvPr id="6" name="">
             <a:extLst xmlns:a="http://schemas.openxmlformats.org/drawingml/2006/main">
               <a:ext uri="{FF2B5EF4-FFF2-40B4-BE49-F238E27FC236}">
-                <a16:creationId xmlns:a16="http://schemas.microsoft.com/office/drawing/2014/main" id="{9A95E5E3-DA2F-4B3E-9279-B6F809199120}"/>
+                <a16:creationId xmlns:a16="http://schemas.microsoft.com/office/drawing/2014/main" id="{E445D135-D72E-44ED-99F9-A307D7CE2C5F}"/>
               </a:ext>
             </a:extLst>
           </p:cNvPr>
@@ -12911,7 +12909,7 @@
           <p:cNvPr id="7" name="">
             <a:extLst xmlns:a="http://schemas.openxmlformats.org/drawingml/2006/main">
               <a:ext uri="{FF2B5EF4-FFF2-40B4-BE49-F238E27FC236}">
-                <a16:creationId xmlns:a16="http://schemas.microsoft.com/office/drawing/2014/main" id="{9772E578-DCEA-42A8-B277-0081E66D88CB}"/>
+                <a16:creationId xmlns:a16="http://schemas.microsoft.com/office/drawing/2014/main" id="{C03F5064-642B-4048-98C6-25176E065AFD}"/>
               </a:ext>
             </a:extLst>
           </p:cNvPr>
@@ -12975,7 +12973,7 @@
           <p:cNvPr id="8" name="">
             <a:extLst xmlns:a="http://schemas.openxmlformats.org/drawingml/2006/main">
               <a:ext uri="{FF2B5EF4-FFF2-40B4-BE49-F238E27FC236}">
-                <a16:creationId xmlns:a16="http://schemas.microsoft.com/office/drawing/2014/main" id="{8B7498AA-C1BA-4416-861D-6FF56BF9948C}"/>
+                <a16:creationId xmlns:a16="http://schemas.microsoft.com/office/drawing/2014/main" id="{0A1F57FE-8588-4E68-BD48-C60F3D28CA31}"/>
               </a:ext>
             </a:extLst>
           </p:cNvPr>
@@ -13010,7 +13008,7 @@
           <p:cNvPr id="9" name="">
             <a:extLst xmlns:a="http://schemas.openxmlformats.org/drawingml/2006/main">
               <a:ext uri="{FF2B5EF4-FFF2-40B4-BE49-F238E27FC236}">
-                <a16:creationId xmlns:a16="http://schemas.microsoft.com/office/drawing/2014/main" id="{6E956D61-2CD2-487B-B7F9-D282AC39523D}"/>
+                <a16:creationId xmlns:a16="http://schemas.microsoft.com/office/drawing/2014/main" id="{357416E4-8829-4778-A286-082943DCCE16}"/>
               </a:ext>
             </a:extLst>
           </p:cNvPr>
@@ -13074,7 +13072,7 @@
           <p:cNvPr id="10" name="">
             <a:extLst xmlns:a="http://schemas.openxmlformats.org/drawingml/2006/main">
               <a:ext uri="{FF2B5EF4-FFF2-40B4-BE49-F238E27FC236}">
-                <a16:creationId xmlns:a16="http://schemas.microsoft.com/office/drawing/2014/main" id="{9CC761EB-BEA6-4DBB-B4ED-8E7B1DCB6092}"/>
+                <a16:creationId xmlns:a16="http://schemas.microsoft.com/office/drawing/2014/main" id="{135F5F0B-91E2-4FCC-9F4D-4562817132C0}"/>
               </a:ext>
             </a:extLst>
           </p:cNvPr>
@@ -13138,7 +13136,7 @@
           <p:cNvPr id="11" name="">
             <a:extLst xmlns:a="http://schemas.openxmlformats.org/drawingml/2006/main">
               <a:ext uri="{FF2B5EF4-FFF2-40B4-BE49-F238E27FC236}">
-                <a16:creationId xmlns:a16="http://schemas.microsoft.com/office/drawing/2014/main" id="{B85AA3AB-A79F-4A3E-A581-C87BF239976E}"/>
+                <a16:creationId xmlns:a16="http://schemas.microsoft.com/office/drawing/2014/main" id="{97C50B39-D44F-4D5A-8E2D-0ADA50D5EDF2}"/>
               </a:ext>
             </a:extLst>
           </p:cNvPr>
@@ -13202,7 +13200,7 @@
           <p:cNvPr id="12" name="">
             <a:extLst xmlns:a="http://schemas.openxmlformats.org/drawingml/2006/main">
               <a:ext uri="{FF2B5EF4-FFF2-40B4-BE49-F238E27FC236}">
-                <a16:creationId xmlns:a16="http://schemas.microsoft.com/office/drawing/2014/main" id="{275EAAC0-4C47-4F0E-AD58-176FAE426D78}"/>
+                <a16:creationId xmlns:a16="http://schemas.microsoft.com/office/drawing/2014/main" id="{FDD250E1-5883-4BA0-A9C4-3A9811DBF083}"/>
               </a:ext>
             </a:extLst>
           </p:cNvPr>
@@ -13237,7 +13235,7 @@
           <p:cNvPr id="13" name="">
             <a:extLst xmlns:a="http://schemas.openxmlformats.org/drawingml/2006/main">
               <a:ext uri="{FF2B5EF4-FFF2-40B4-BE49-F238E27FC236}">
-                <a16:creationId xmlns:a16="http://schemas.microsoft.com/office/drawing/2014/main" id="{6A7B82BE-FB84-4F27-BD1A-39E817B57799}"/>
+                <a16:creationId xmlns:a16="http://schemas.microsoft.com/office/drawing/2014/main" id="{09942C7F-19D1-4344-B421-A58D78967E85}"/>
               </a:ext>
             </a:extLst>
           </p:cNvPr>
@@ -13270,7 +13268,7 @@
           <p:cNvPr id="14" name="">
             <a:extLst xmlns:a="http://schemas.openxmlformats.org/drawingml/2006/main">
               <a:ext uri="{FF2B5EF4-FFF2-40B4-BE49-F238E27FC236}">
-                <a16:creationId xmlns:a16="http://schemas.microsoft.com/office/drawing/2014/main" id="{6353305F-D4F4-400A-BAF5-CDD21E1F78D8}"/>
+                <a16:creationId xmlns:a16="http://schemas.microsoft.com/office/drawing/2014/main" id="{A87A05AB-6630-4D84-B2B9-8033A0ABD4C4}"/>
               </a:ext>
             </a:extLst>
           </p:cNvPr>
@@ -13305,7 +13303,7 @@
           <p:cNvPr id="15" name="">
             <a:extLst xmlns:a="http://schemas.openxmlformats.org/drawingml/2006/main">
               <a:ext uri="{FF2B5EF4-FFF2-40B4-BE49-F238E27FC236}">
-                <a16:creationId xmlns:a16="http://schemas.microsoft.com/office/drawing/2014/main" id="{D04EA71D-C78C-4832-9950-F812A26EAF49}"/>
+                <a16:creationId xmlns:a16="http://schemas.microsoft.com/office/drawing/2014/main" id="{B3D8BFF5-8903-4E7A-BECC-01551B77BA8F}"/>
               </a:ext>
             </a:extLst>
           </p:cNvPr>
@@ -13369,7 +13367,7 @@
           <p:cNvPr id="16" name="">
             <a:extLst xmlns:a="http://schemas.openxmlformats.org/drawingml/2006/main">
               <a:ext uri="{FF2B5EF4-FFF2-40B4-BE49-F238E27FC236}">
-                <a16:creationId xmlns:a16="http://schemas.microsoft.com/office/drawing/2014/main" id="{3F5D5F82-7147-4BF3-AE25-05D9AFCEF4FE}"/>
+                <a16:creationId xmlns:a16="http://schemas.microsoft.com/office/drawing/2014/main" id="{67E5F6EC-6BF4-4566-9A01-D514EAA70593}"/>
               </a:ext>
             </a:extLst>
           </p:cNvPr>
@@ -13404,7 +13402,7 @@
           <p:cNvPr id="17" name="">
             <a:extLst xmlns:a="http://schemas.openxmlformats.org/drawingml/2006/main">
               <a:ext uri="{FF2B5EF4-FFF2-40B4-BE49-F238E27FC236}">
-                <a16:creationId xmlns:a16="http://schemas.microsoft.com/office/drawing/2014/main" id="{1092F08E-77ED-4BB9-937D-89C3F783A0BA}"/>
+                <a16:creationId xmlns:a16="http://schemas.microsoft.com/office/drawing/2014/main" id="{C60D527E-A1B1-403C-9C2F-0AB4840816C0}"/>
               </a:ext>
             </a:extLst>
           </p:cNvPr>
@@ -13468,7 +13466,7 @@
           <p:cNvPr id="18" name="">
             <a:extLst xmlns:a="http://schemas.openxmlformats.org/drawingml/2006/main">
               <a:ext uri="{FF2B5EF4-FFF2-40B4-BE49-F238E27FC236}">
-                <a16:creationId xmlns:a16="http://schemas.microsoft.com/office/drawing/2014/main" id="{C725C77D-C25D-4B22-926F-4BC9C215017E}"/>
+                <a16:creationId xmlns:a16="http://schemas.microsoft.com/office/drawing/2014/main" id="{9075B806-AA15-4704-9B18-B28E1C5C75B1}"/>
               </a:ext>
             </a:extLst>
           </p:cNvPr>
@@ -13503,7 +13501,7 @@
           <p:cNvPr id="19" name="">
             <a:extLst xmlns:a="http://schemas.openxmlformats.org/drawingml/2006/main">
               <a:ext uri="{FF2B5EF4-FFF2-40B4-BE49-F238E27FC236}">
-                <a16:creationId xmlns:a16="http://schemas.microsoft.com/office/drawing/2014/main" id="{E04B3D81-4C34-4719-80E2-040688B518DF}"/>
+                <a16:creationId xmlns:a16="http://schemas.microsoft.com/office/drawing/2014/main" id="{96924D0E-CD47-4685-850B-2B37E82A55D2}"/>
               </a:ext>
             </a:extLst>
           </p:cNvPr>
@@ -13567,7 +13565,7 @@
           <p:cNvPr id="20" name="">
             <a:extLst xmlns:a="http://schemas.openxmlformats.org/drawingml/2006/main">
               <a:ext uri="{FF2B5EF4-FFF2-40B4-BE49-F238E27FC236}">
-                <a16:creationId xmlns:a16="http://schemas.microsoft.com/office/drawing/2014/main" id="{5138BE6D-8AD8-47D6-B6C0-186A71BDE32E}"/>
+                <a16:creationId xmlns:a16="http://schemas.microsoft.com/office/drawing/2014/main" id="{3A0B331D-168E-4A31-A053-DE42C76BC811}"/>
               </a:ext>
             </a:extLst>
           </p:cNvPr>
@@ -13602,7 +13600,7 @@
           <p:cNvPr id="21" name="">
             <a:extLst xmlns:a="http://schemas.openxmlformats.org/drawingml/2006/main">
               <a:ext uri="{FF2B5EF4-FFF2-40B4-BE49-F238E27FC236}">
-                <a16:creationId xmlns:a16="http://schemas.microsoft.com/office/drawing/2014/main" id="{46FD7407-1B88-47D2-A37E-DC6DA92A29D9}"/>
+                <a16:creationId xmlns:a16="http://schemas.microsoft.com/office/drawing/2014/main" id="{1BA493D7-919E-4B95-83BF-3A4AE26398A6}"/>
               </a:ext>
             </a:extLst>
           </p:cNvPr>
@@ -13666,7 +13664,7 @@
           <p:cNvPr id="22" name="">
             <a:extLst xmlns:a="http://schemas.openxmlformats.org/drawingml/2006/main">
               <a:ext uri="{FF2B5EF4-FFF2-40B4-BE49-F238E27FC236}">
-                <a16:creationId xmlns:a16="http://schemas.microsoft.com/office/drawing/2014/main" id="{FACC7C4C-74DA-4963-AF7F-42AFDCD5B4EE}"/>
+                <a16:creationId xmlns:a16="http://schemas.microsoft.com/office/drawing/2014/main" id="{8E344524-7B63-4F6A-B2E1-AE439510AE12}"/>
               </a:ext>
             </a:extLst>
           </p:cNvPr>
@@ -13701,7 +13699,7 @@
           <p:cNvPr id="23" name="">
             <a:extLst xmlns:a="http://schemas.openxmlformats.org/drawingml/2006/main">
               <a:ext uri="{FF2B5EF4-FFF2-40B4-BE49-F238E27FC236}">
-                <a16:creationId xmlns:a16="http://schemas.microsoft.com/office/drawing/2014/main" id="{2B8D1960-07C7-49D7-86BB-9166C0172040}"/>
+                <a16:creationId xmlns:a16="http://schemas.microsoft.com/office/drawing/2014/main" id="{1EA8E227-C375-4A89-B975-C5ED5EB96FC4}"/>
               </a:ext>
             </a:extLst>
           </p:cNvPr>
@@ -13765,7 +13763,7 @@
           <p:cNvPr id="24" name="">
             <a:extLst xmlns:a="http://schemas.openxmlformats.org/drawingml/2006/main">
               <a:ext uri="{FF2B5EF4-FFF2-40B4-BE49-F238E27FC236}">
-                <a16:creationId xmlns:a16="http://schemas.microsoft.com/office/drawing/2014/main" id="{05CAAFBC-D04E-4D02-A9D8-4D28DC62348C}"/>
+                <a16:creationId xmlns:a16="http://schemas.microsoft.com/office/drawing/2014/main" id="{B7269131-E9D5-4199-BEF7-F13E793CBD41}"/>
               </a:ext>
             </a:extLst>
           </p:cNvPr>
@@ -13800,7 +13798,7 @@
           <p:cNvPr id="25" name="">
             <a:extLst xmlns:a="http://schemas.openxmlformats.org/drawingml/2006/main">
               <a:ext uri="{FF2B5EF4-FFF2-40B4-BE49-F238E27FC236}">
-                <a16:creationId xmlns:a16="http://schemas.microsoft.com/office/drawing/2014/main" id="{96404369-960A-4574-A3DA-D906FF003BDE}"/>
+                <a16:creationId xmlns:a16="http://schemas.microsoft.com/office/drawing/2014/main" id="{AF6D398F-E139-4EE6-8635-749B08F3B5E0}"/>
               </a:ext>
             </a:extLst>
           </p:cNvPr>
@@ -13864,7 +13862,7 @@
           <p:cNvPr id="26" name="">
             <a:extLst xmlns:a="http://schemas.openxmlformats.org/drawingml/2006/main">
               <a:ext uri="{FF2B5EF4-FFF2-40B4-BE49-F238E27FC236}">
-                <a16:creationId xmlns:a16="http://schemas.microsoft.com/office/drawing/2014/main" id="{69D2461A-8A44-4FBD-9FEB-254F22AD8D3F}"/>
+                <a16:creationId xmlns:a16="http://schemas.microsoft.com/office/drawing/2014/main" id="{E3BC2CC3-DAEC-4B89-BE9A-897852AE6693}"/>
               </a:ext>
             </a:extLst>
           </p:cNvPr>
@@ -13899,7 +13897,7 @@
           <p:cNvPr id="27" name="">
             <a:extLst xmlns:a="http://schemas.openxmlformats.org/drawingml/2006/main">
               <a:ext uri="{FF2B5EF4-FFF2-40B4-BE49-F238E27FC236}">
-                <a16:creationId xmlns:a16="http://schemas.microsoft.com/office/drawing/2014/main" id="{A39E2385-6D58-4659-AD4E-25911B536033}"/>
+                <a16:creationId xmlns:a16="http://schemas.microsoft.com/office/drawing/2014/main" id="{C7F9E192-DD49-4FD8-9D3F-1A7C062F8DF4}"/>
               </a:ext>
             </a:extLst>
           </p:cNvPr>
@@ -13963,7 +13961,7 @@
           <p:cNvPr id="28" name="">
             <a:extLst xmlns:a="http://schemas.openxmlformats.org/drawingml/2006/main">
               <a:ext uri="{FF2B5EF4-FFF2-40B4-BE49-F238E27FC236}">
-                <a16:creationId xmlns:a16="http://schemas.microsoft.com/office/drawing/2014/main" id="{5407E2CA-5DC1-4301-86E9-C000CBAEDAA4}"/>
+                <a16:creationId xmlns:a16="http://schemas.microsoft.com/office/drawing/2014/main" id="{6B03B687-FCC0-4C12-9143-0EEA79F5A36E}"/>
               </a:ext>
             </a:extLst>
           </p:cNvPr>
@@ -13996,7 +13994,7 @@
           <p:cNvPr id="29" name="">
             <a:extLst xmlns:a="http://schemas.openxmlformats.org/drawingml/2006/main">
               <a:ext uri="{FF2B5EF4-FFF2-40B4-BE49-F238E27FC236}">
-                <a16:creationId xmlns:a16="http://schemas.microsoft.com/office/drawing/2014/main" id="{B051287A-A1D7-4F7E-88D3-A0291D8DE7B4}"/>
+                <a16:creationId xmlns:a16="http://schemas.microsoft.com/office/drawing/2014/main" id="{0AAF8AB9-6745-41A1-A3E3-DC6A4888773A}"/>
               </a:ext>
             </a:extLst>
           </p:cNvPr>
@@ -14031,7 +14029,7 @@
           <p:cNvPr id="30" name="">
             <a:extLst xmlns:a="http://schemas.openxmlformats.org/drawingml/2006/main">
               <a:ext uri="{FF2B5EF4-FFF2-40B4-BE49-F238E27FC236}">
-                <a16:creationId xmlns:a16="http://schemas.microsoft.com/office/drawing/2014/main" id="{1131541B-D81E-4FF8-9680-8F4F281D9B54}"/>
+                <a16:creationId xmlns:a16="http://schemas.microsoft.com/office/drawing/2014/main" id="{FE44E922-3692-4056-BD91-F64E27757949}"/>
               </a:ext>
             </a:extLst>
           </p:cNvPr>
@@ -14095,7 +14093,7 @@
           <p:cNvPr id="31" name="">
             <a:extLst xmlns:a="http://schemas.openxmlformats.org/drawingml/2006/main">
               <a:ext uri="{FF2B5EF4-FFF2-40B4-BE49-F238E27FC236}">
-                <a16:creationId xmlns:a16="http://schemas.microsoft.com/office/drawing/2014/main" id="{A69141AE-9600-4F06-94DF-3329D62CE207}"/>
+                <a16:creationId xmlns:a16="http://schemas.microsoft.com/office/drawing/2014/main" id="{2E53C096-2800-4BA6-9D95-9BB4E7AC76BF}"/>
               </a:ext>
             </a:extLst>
           </p:cNvPr>
@@ -14149,7 +14147,7 @@
                 <a:ea typeface="Aptos Display"/>
                 <a:cs typeface="Aptos Display"/>
               </a:rPr>
-              <a:t>The artifact passes only if sales, marketing, RevOps, leadership, and an AI agent could inspect it and know what to do next.</a:t>
+              <a:t>The artifact passes only if sales, marketing, RevOps, and leadership can inspect it and know what to do next.</a:t>
             </a:r>
           </a:p>
         </p:txBody>
@@ -14159,7 +14157,7 @@
           <p:cNvPr id="32" name="">
             <a:extLst xmlns:a="http://schemas.openxmlformats.org/drawingml/2006/main">
               <a:ext uri="{FF2B5EF4-FFF2-40B4-BE49-F238E27FC236}">
-                <a16:creationId xmlns:a16="http://schemas.microsoft.com/office/drawing/2014/main" id="{F331623B-8F9F-4B74-AB03-DAEFE5F137D5}"/>
+                <a16:creationId xmlns:a16="http://schemas.microsoft.com/office/drawing/2014/main" id="{C012D133-42F0-4B0B-A447-AF9B6FB63962}"/>
               </a:ext>
             </a:extLst>
           </p:cNvPr>
@@ -14223,7 +14221,7 @@
           <p:cNvPr id="33" name="">
             <a:extLst xmlns:a="http://schemas.openxmlformats.org/drawingml/2006/main">
               <a:ext uri="{FF2B5EF4-FFF2-40B4-BE49-F238E27FC236}">
-                <a16:creationId xmlns:a16="http://schemas.microsoft.com/office/drawing/2014/main" id="{C06EDEEC-155E-4D61-9633-52ED6B359D86}"/>
+                <a16:creationId xmlns:a16="http://schemas.microsoft.com/office/drawing/2014/main" id="{A4936EE0-6A9F-4D1A-93D2-7233B916A25B}"/>
               </a:ext>
             </a:extLst>
           </p:cNvPr>
@@ -14258,7 +14256,7 @@
           <p:cNvPr id="34" name="">
             <a:extLst xmlns:a="http://schemas.openxmlformats.org/drawingml/2006/main">
               <a:ext uri="{FF2B5EF4-FFF2-40B4-BE49-F238E27FC236}">
-                <a16:creationId xmlns:a16="http://schemas.microsoft.com/office/drawing/2014/main" id="{4C628770-104E-4E9C-9A83-EB9FECD45794}"/>
+                <a16:creationId xmlns:a16="http://schemas.microsoft.com/office/drawing/2014/main" id="{E4F66B24-B4B7-4DBC-9624-E944E59C9055}"/>
               </a:ext>
             </a:extLst>
           </p:cNvPr>
@@ -14322,7 +14320,7 @@
           <p:cNvPr id="35" name="">
             <a:extLst xmlns:a="http://schemas.openxmlformats.org/drawingml/2006/main">
               <a:ext uri="{FF2B5EF4-FFF2-40B4-BE49-F238E27FC236}">
-                <a16:creationId xmlns:a16="http://schemas.microsoft.com/office/drawing/2014/main" id="{8C8D0923-0121-42D5-9C95-61235BF50D81}"/>
+                <a16:creationId xmlns:a16="http://schemas.microsoft.com/office/drawing/2014/main" id="{7D96A7C5-A390-4835-ADB6-98E2CB32FA39}"/>
               </a:ext>
             </a:extLst>
           </p:cNvPr>
@@ -14386,7 +14384,7 @@
           <p:cNvPr id="36" name="">
             <a:extLst xmlns:a="http://schemas.openxmlformats.org/drawingml/2006/main">
               <a:ext uri="{FF2B5EF4-FFF2-40B4-BE49-F238E27FC236}">
-                <a16:creationId xmlns:a16="http://schemas.microsoft.com/office/drawing/2014/main" id="{333E599F-CE4D-4C17-A3CD-0CD584A4282C}"/>
+                <a16:creationId xmlns:a16="http://schemas.microsoft.com/office/drawing/2014/main" id="{F1F301FB-F0EA-4460-9A6C-711123D8D44C}"/>
               </a:ext>
             </a:extLst>
           </p:cNvPr>
@@ -14450,7 +14448,7 @@
           <p:cNvPr id="37" name="">
             <a:extLst xmlns:a="http://schemas.openxmlformats.org/drawingml/2006/main">
               <a:ext uri="{FF2B5EF4-FFF2-40B4-BE49-F238E27FC236}">
-                <a16:creationId xmlns:a16="http://schemas.microsoft.com/office/drawing/2014/main" id="{270BF923-6441-4AB0-81CF-21781B120BFA}"/>
+                <a16:creationId xmlns:a16="http://schemas.microsoft.com/office/drawing/2014/main" id="{DE0EFBEC-98B8-4BD3-AD3C-208E916C88F1}"/>
               </a:ext>
             </a:extLst>
           </p:cNvPr>
@@ -14485,7 +14483,7 @@
           <p:cNvPr id="38" name="">
             <a:extLst xmlns:a="http://schemas.openxmlformats.org/drawingml/2006/main">
               <a:ext uri="{FF2B5EF4-FFF2-40B4-BE49-F238E27FC236}">
-                <a16:creationId xmlns:a16="http://schemas.microsoft.com/office/drawing/2014/main" id="{DE490053-DA63-4A7E-AE1D-1BC7FD0B0074}"/>
+                <a16:creationId xmlns:a16="http://schemas.microsoft.com/office/drawing/2014/main" id="{3EE5CB98-82C8-4E06-8F5F-F32F97108752}"/>
               </a:ext>
             </a:extLst>
           </p:cNvPr>
@@ -14520,7 +14518,7 @@
           <p:cNvPr id="39" name="">
             <a:extLst xmlns:a="http://schemas.openxmlformats.org/drawingml/2006/main">
               <a:ext uri="{FF2B5EF4-FFF2-40B4-BE49-F238E27FC236}">
-                <a16:creationId xmlns:a16="http://schemas.microsoft.com/office/drawing/2014/main" id="{951451EA-DB08-4B57-BCCD-208D661746CD}"/>
+                <a16:creationId xmlns:a16="http://schemas.microsoft.com/office/drawing/2014/main" id="{62289454-1BF3-4240-84E0-FC817207E57C}"/>
               </a:ext>
             </a:extLst>
           </p:cNvPr>
@@ -14555,7 +14553,7 @@
           <p:cNvPr id="40" name="kicker-04-marker">
             <a:extLst xmlns:a="http://schemas.openxmlformats.org/drawingml/2006/main">
               <a:ext uri="{FF2B5EF4-FFF2-40B4-BE49-F238E27FC236}">
-                <a16:creationId xmlns:a16="http://schemas.microsoft.com/office/drawing/2014/main" id="{55C5433E-F04E-48A5-915D-D635AD898D19}"/>
+                <a16:creationId xmlns:a16="http://schemas.microsoft.com/office/drawing/2014/main" id="{2AFC7A0C-7EC8-4728-B02B-21AD979E5FBA}"/>
               </a:ext>
             </a:extLst>
           </p:cNvPr>
@@ -14590,7 +14588,7 @@
           <p:cNvPr id="41" name="kicker-04-label">
             <a:extLst xmlns:a="http://schemas.openxmlformats.org/drawingml/2006/main">
               <a:ext uri="{FF2B5EF4-FFF2-40B4-BE49-F238E27FC236}">
-                <a16:creationId xmlns:a16="http://schemas.microsoft.com/office/drawing/2014/main" id="{3C6A1F78-5FAD-4831-A3B4-767BE490E9DC}"/>
+                <a16:creationId xmlns:a16="http://schemas.microsoft.com/office/drawing/2014/main" id="{D3CA2DF9-1C2B-427D-96CE-92FD921C2ADB}"/>
               </a:ext>
             </a:extLst>
           </p:cNvPr>
@@ -14654,7 +14652,7 @@
           <p:cNvPr id="42" name="">
             <a:extLst xmlns:a="http://schemas.openxmlformats.org/drawingml/2006/main">
               <a:ext uri="{FF2B5EF4-FFF2-40B4-BE49-F238E27FC236}">
-                <a16:creationId xmlns:a16="http://schemas.microsoft.com/office/drawing/2014/main" id="{F9AC3059-091A-418C-BC8D-99FCF777A727}"/>
+                <a16:creationId xmlns:a16="http://schemas.microsoft.com/office/drawing/2014/main" id="{766D5849-07D5-4510-A38D-5D3260645083}"/>
               </a:ext>
             </a:extLst>
           </p:cNvPr>
@@ -14718,7 +14716,7 @@
           <p:cNvPr id="43" name="">
             <a:extLst xmlns:a="http://schemas.openxmlformats.org/drawingml/2006/main">
               <a:ext uri="{FF2B5EF4-FFF2-40B4-BE49-F238E27FC236}">
-                <a16:creationId xmlns:a16="http://schemas.microsoft.com/office/drawing/2014/main" id="{3B066F67-F2D5-448F-BC2E-482E55DE2500}"/>
+                <a16:creationId xmlns:a16="http://schemas.microsoft.com/office/drawing/2014/main" id="{57F6EAF2-66C3-4975-AC05-49C9482D3D12}"/>
               </a:ext>
             </a:extLst>
           </p:cNvPr>
@@ -14782,7 +14780,7 @@
           <p:cNvPr id="44" name="">
             <a:extLst xmlns:a="http://schemas.openxmlformats.org/drawingml/2006/main">
               <a:ext uri="{FF2B5EF4-FFF2-40B4-BE49-F238E27FC236}">
-                <a16:creationId xmlns:a16="http://schemas.microsoft.com/office/drawing/2014/main" id="{22E43048-164B-41D8-A0CD-3412ACB5D499}"/>
+                <a16:creationId xmlns:a16="http://schemas.microsoft.com/office/drawing/2014/main" id="{A62CA007-96E3-4A50-92C4-7D99B8A61DEC}"/>
               </a:ext>
             </a:extLst>
           </p:cNvPr>
@@ -14817,7 +14815,7 @@
           <p:cNvPr id="45" name="">
             <a:extLst xmlns:a="http://schemas.openxmlformats.org/drawingml/2006/main">
               <a:ext uri="{FF2B5EF4-FFF2-40B4-BE49-F238E27FC236}">
-                <a16:creationId xmlns:a16="http://schemas.microsoft.com/office/drawing/2014/main" id="{E52942F2-06CB-4A2F-A8B1-BCC2CD28FBB4}"/>
+                <a16:creationId xmlns:a16="http://schemas.microsoft.com/office/drawing/2014/main" id="{9E856FBF-BA8E-49F6-9698-9C9260BCFDD8}"/>
               </a:ext>
             </a:extLst>
           </p:cNvPr>
@@ -14852,7 +14850,7 @@
           <p:cNvPr id="46" name="">
             <a:extLst xmlns:a="http://schemas.openxmlformats.org/drawingml/2006/main">
               <a:ext uri="{FF2B5EF4-FFF2-40B4-BE49-F238E27FC236}">
-                <a16:creationId xmlns:a16="http://schemas.microsoft.com/office/drawing/2014/main" id="{F85186B9-B864-4D3E-9636-2FEF5B72123C}"/>
+                <a16:creationId xmlns:a16="http://schemas.microsoft.com/office/drawing/2014/main" id="{C01C151E-C708-4D1B-B1C1-C76063DC5B0A}"/>
               </a:ext>
             </a:extLst>
           </p:cNvPr>
@@ -14887,7 +14885,7 @@
           <p:cNvPr id="47" name="">
             <a:extLst xmlns:a="http://schemas.openxmlformats.org/drawingml/2006/main">
               <a:ext uri="{FF2B5EF4-FFF2-40B4-BE49-F238E27FC236}">
-                <a16:creationId xmlns:a16="http://schemas.microsoft.com/office/drawing/2014/main" id="{92CB5E64-71E9-461A-8CAC-E90E01566647}"/>
+                <a16:creationId xmlns:a16="http://schemas.microsoft.com/office/drawing/2014/main" id="{E66AB79A-8F14-4C8D-B895-742A28ED303E}"/>
               </a:ext>
             </a:extLst>
           </p:cNvPr>
@@ -14922,7 +14920,7 @@
           <p:cNvPr id="48" name="">
             <a:extLst xmlns:a="http://schemas.openxmlformats.org/drawingml/2006/main">
               <a:ext uri="{FF2B5EF4-FFF2-40B4-BE49-F238E27FC236}">
-                <a16:creationId xmlns:a16="http://schemas.microsoft.com/office/drawing/2014/main" id="{EC12C32C-2BEB-4B37-AA31-CB7C8C551A01}"/>
+                <a16:creationId xmlns:a16="http://schemas.microsoft.com/office/drawing/2014/main" id="{9BEAAB31-1BEF-4CC6-BA60-CBEC64B192E1}"/>
               </a:ext>
             </a:extLst>
           </p:cNvPr>
@@ -14986,7 +14984,7 @@
           <p:cNvPr id="49" name="">
             <a:extLst xmlns:a="http://schemas.openxmlformats.org/drawingml/2006/main">
               <a:ext uri="{FF2B5EF4-FFF2-40B4-BE49-F238E27FC236}">
-                <a16:creationId xmlns:a16="http://schemas.microsoft.com/office/drawing/2014/main" id="{A478D294-54FF-43A0-ACF3-4765A2994C67}"/>
+                <a16:creationId xmlns:a16="http://schemas.microsoft.com/office/drawing/2014/main" id="{4CD10CD8-6CA2-4B82-89F0-DCC5217C1E8D}"/>
               </a:ext>
             </a:extLst>
           </p:cNvPr>
@@ -15050,7 +15048,7 @@
           <p:cNvPr id="50" name="">
             <a:extLst xmlns:a="http://schemas.openxmlformats.org/drawingml/2006/main">
               <a:ext uri="{FF2B5EF4-FFF2-40B4-BE49-F238E27FC236}">
-                <a16:creationId xmlns:a16="http://schemas.microsoft.com/office/drawing/2014/main" id="{75B3C10A-77B3-45D2-B1E3-A9E20ECC5A86}"/>
+                <a16:creationId xmlns:a16="http://schemas.microsoft.com/office/drawing/2014/main" id="{F2349666-0C48-4B84-B6CF-5BC88BDF15C2}"/>
               </a:ext>
             </a:extLst>
           </p:cNvPr>
@@ -15112,7 +15110,7 @@
     </p:spTree>
     <p:extLst>
       <p:ext uri="{BB962C8B-B14F-4D97-AF65-F5344CB8AC3E}">
-        <p14:creationId xmlns:p14="http://schemas.microsoft.com/office/powerpoint/2010/main" val="1678231034"/>
+        <p14:creationId xmlns:p14="http://schemas.microsoft.com/office/powerpoint/2010/main" val="76881646"/>
       </p:ext>
     </p:extLst>
   </p:cSld>
@@ -15136,7 +15134,7 @@
           <p:cNvPr id="1" name="">
             <a:extLst xmlns:a="http://schemas.openxmlformats.org/drawingml/2006/main">
               <a:ext uri="{FF2B5EF4-FFF2-40B4-BE49-F238E27FC236}">
-                <a16:creationId xmlns:a16="http://schemas.microsoft.com/office/drawing/2014/main" id="{5427E8FD-DDFD-491F-967B-65FA1B6D8FCE}"/>
+                <a16:creationId xmlns:a16="http://schemas.microsoft.com/office/drawing/2014/main" id="{9CCB3DD9-574D-43C4-9747-E783B9F30643}"/>
               </a:ext>
             </a:extLst>
           </p:cNvPr>
@@ -15171,7 +15169,7 @@
           <p:cNvPr id="2" name="">
             <a:extLst xmlns:a="http://schemas.openxmlformats.org/drawingml/2006/main">
               <a:ext uri="{FF2B5EF4-FFF2-40B4-BE49-F238E27FC236}">
-                <a16:creationId xmlns:a16="http://schemas.microsoft.com/office/drawing/2014/main" id="{278A66B0-3AD1-4A77-86DA-04E24D4DD68F}"/>
+                <a16:creationId xmlns:a16="http://schemas.microsoft.com/office/drawing/2014/main" id="{6DECCAD6-A2F4-4D27-AE9C-C64F1CAB565C}"/>
               </a:ext>
             </a:extLst>
           </p:cNvPr>
@@ -15206,7 +15204,7 @@
           <p:cNvPr id="3" name="">
             <a:extLst xmlns:a="http://schemas.openxmlformats.org/drawingml/2006/main">
               <a:ext uri="{FF2B5EF4-FFF2-40B4-BE49-F238E27FC236}">
-                <a16:creationId xmlns:a16="http://schemas.microsoft.com/office/drawing/2014/main" id="{F238871C-C8E5-41A6-BBF3-2805AB964A16}"/>
+                <a16:creationId xmlns:a16="http://schemas.microsoft.com/office/drawing/2014/main" id="{8F3B682C-829F-4613-8415-873AF607C37B}"/>
               </a:ext>
             </a:extLst>
           </p:cNvPr>
@@ -15241,7 +15239,7 @@
           <p:cNvPr id="4" name="kicker-04-marker">
             <a:extLst xmlns:a="http://schemas.openxmlformats.org/drawingml/2006/main">
               <a:ext uri="{FF2B5EF4-FFF2-40B4-BE49-F238E27FC236}">
-                <a16:creationId xmlns:a16="http://schemas.microsoft.com/office/drawing/2014/main" id="{A631210C-D758-4A06-9E08-50A4E4B77CE4}"/>
+                <a16:creationId xmlns:a16="http://schemas.microsoft.com/office/drawing/2014/main" id="{DEB9A5B1-BFD3-41A1-B175-DE386B391141}"/>
               </a:ext>
             </a:extLst>
           </p:cNvPr>
@@ -15276,7 +15274,7 @@
           <p:cNvPr id="5" name="kicker-04-label">
             <a:extLst xmlns:a="http://schemas.openxmlformats.org/drawingml/2006/main">
               <a:ext uri="{FF2B5EF4-FFF2-40B4-BE49-F238E27FC236}">
-                <a16:creationId xmlns:a16="http://schemas.microsoft.com/office/drawing/2014/main" id="{F50B1EE7-964D-4E0D-B2FA-5B216E88C37E}"/>
+                <a16:creationId xmlns:a16="http://schemas.microsoft.com/office/drawing/2014/main" id="{88C73FFD-4246-4282-86E1-C99DFD2D8178}"/>
               </a:ext>
             </a:extLst>
           </p:cNvPr>
@@ -15340,7 +15338,7 @@
           <p:cNvPr id="6" name="">
             <a:extLst xmlns:a="http://schemas.openxmlformats.org/drawingml/2006/main">
               <a:ext uri="{FF2B5EF4-FFF2-40B4-BE49-F238E27FC236}">
-                <a16:creationId xmlns:a16="http://schemas.microsoft.com/office/drawing/2014/main" id="{42004599-CBC2-43FA-867C-B438507F6E5B}"/>
+                <a16:creationId xmlns:a16="http://schemas.microsoft.com/office/drawing/2014/main" id="{A3A147E0-D1B9-40A1-9A9E-1AC2BE621A59}"/>
               </a:ext>
             </a:extLst>
           </p:cNvPr>
@@ -15404,7 +15402,7 @@
           <p:cNvPr id="7" name="">
             <a:extLst xmlns:a="http://schemas.openxmlformats.org/drawingml/2006/main">
               <a:ext uri="{FF2B5EF4-FFF2-40B4-BE49-F238E27FC236}">
-                <a16:creationId xmlns:a16="http://schemas.microsoft.com/office/drawing/2014/main" id="{C4A92EA9-8138-48E4-8C21-DE2F6D72B382}"/>
+                <a16:creationId xmlns:a16="http://schemas.microsoft.com/office/drawing/2014/main" id="{789430F0-1290-410D-BD06-380BD7108699}"/>
               </a:ext>
             </a:extLst>
           </p:cNvPr>
@@ -15437,7 +15435,7 @@
           <p:cNvPr id="8" name="">
             <a:extLst xmlns:a="http://schemas.openxmlformats.org/drawingml/2006/main">
               <a:ext uri="{FF2B5EF4-FFF2-40B4-BE49-F238E27FC236}">
-                <a16:creationId xmlns:a16="http://schemas.microsoft.com/office/drawing/2014/main" id="{448F4BB7-B585-4053-9742-2F275484FC65}"/>
+                <a16:creationId xmlns:a16="http://schemas.microsoft.com/office/drawing/2014/main" id="{BBAF4672-CE51-4D3B-99A1-7A26203503E1}"/>
               </a:ext>
             </a:extLst>
           </p:cNvPr>
@@ -15472,7 +15470,7 @@
           <p:cNvPr id="9" name="">
             <a:extLst xmlns:a="http://schemas.openxmlformats.org/drawingml/2006/main">
               <a:ext uri="{FF2B5EF4-FFF2-40B4-BE49-F238E27FC236}">
-                <a16:creationId xmlns:a16="http://schemas.microsoft.com/office/drawing/2014/main" id="{D7FEC779-1E76-45F3-B174-609AD0A945AE}"/>
+                <a16:creationId xmlns:a16="http://schemas.microsoft.com/office/drawing/2014/main" id="{FD50DDA3-2D80-4FEF-A003-69D5DDCD6F5E}"/>
               </a:ext>
             </a:extLst>
           </p:cNvPr>
@@ -15536,7 +15534,7 @@
           <p:cNvPr id="10" name="">
             <a:extLst xmlns:a="http://schemas.openxmlformats.org/drawingml/2006/main">
               <a:ext uri="{FF2B5EF4-FFF2-40B4-BE49-F238E27FC236}">
-                <a16:creationId xmlns:a16="http://schemas.microsoft.com/office/drawing/2014/main" id="{E6E2AB88-91E0-4D2C-98A4-89AD440A3D69}"/>
+                <a16:creationId xmlns:a16="http://schemas.microsoft.com/office/drawing/2014/main" id="{4E9F6C51-E22E-4C5B-B03F-26F99D6A8055}"/>
               </a:ext>
             </a:extLst>
           </p:cNvPr>
@@ -15600,7 +15598,7 @@
           <p:cNvPr id="11" name="">
             <a:extLst xmlns:a="http://schemas.openxmlformats.org/drawingml/2006/main">
               <a:ext uri="{FF2B5EF4-FFF2-40B4-BE49-F238E27FC236}">
-                <a16:creationId xmlns:a16="http://schemas.microsoft.com/office/drawing/2014/main" id="{E27BEA96-530E-4752-9A09-9BFD449280F6}"/>
+                <a16:creationId xmlns:a16="http://schemas.microsoft.com/office/drawing/2014/main" id="{812F77FB-3207-4F6E-AF7A-AE85D768D3DE}"/>
               </a:ext>
             </a:extLst>
           </p:cNvPr>
@@ -15633,7 +15631,7 @@
           <p:cNvPr id="12" name="">
             <a:extLst xmlns:a="http://schemas.openxmlformats.org/drawingml/2006/main">
               <a:ext uri="{FF2B5EF4-FFF2-40B4-BE49-F238E27FC236}">
-                <a16:creationId xmlns:a16="http://schemas.microsoft.com/office/drawing/2014/main" id="{5309F986-26FC-4FF5-82B9-C69C86717C80}"/>
+                <a16:creationId xmlns:a16="http://schemas.microsoft.com/office/drawing/2014/main" id="{AD691866-669E-4DA7-B553-DC1E8CB05D68}"/>
               </a:ext>
             </a:extLst>
           </p:cNvPr>
@@ -15668,7 +15666,7 @@
           <p:cNvPr id="13" name="">
             <a:extLst xmlns:a="http://schemas.openxmlformats.org/drawingml/2006/main">
               <a:ext uri="{FF2B5EF4-FFF2-40B4-BE49-F238E27FC236}">
-                <a16:creationId xmlns:a16="http://schemas.microsoft.com/office/drawing/2014/main" id="{BCFF1C1E-84C5-46AF-A002-B13A1669AF8C}"/>
+                <a16:creationId xmlns:a16="http://schemas.microsoft.com/office/drawing/2014/main" id="{B5EFE243-6F58-444F-A36B-84B19BB4849C}"/>
               </a:ext>
             </a:extLst>
           </p:cNvPr>
@@ -15732,7 +15730,7 @@
           <p:cNvPr id="14" name="">
             <a:extLst xmlns:a="http://schemas.openxmlformats.org/drawingml/2006/main">
               <a:ext uri="{FF2B5EF4-FFF2-40B4-BE49-F238E27FC236}">
-                <a16:creationId xmlns:a16="http://schemas.microsoft.com/office/drawing/2014/main" id="{20C0FB9F-246B-4FDC-9BA1-3E8047D957C3}"/>
+                <a16:creationId xmlns:a16="http://schemas.microsoft.com/office/drawing/2014/main" id="{14AFD23C-915B-454D-91B0-978EEF6D8470}"/>
               </a:ext>
             </a:extLst>
           </p:cNvPr>
@@ -15796,7 +15794,7 @@
           <p:cNvPr id="15" name="">
             <a:extLst xmlns:a="http://schemas.openxmlformats.org/drawingml/2006/main">
               <a:ext uri="{FF2B5EF4-FFF2-40B4-BE49-F238E27FC236}">
-                <a16:creationId xmlns:a16="http://schemas.microsoft.com/office/drawing/2014/main" id="{80518280-840F-4D92-9A53-75557AED07C3}"/>
+                <a16:creationId xmlns:a16="http://schemas.microsoft.com/office/drawing/2014/main" id="{230CFEB3-524D-40C5-A191-8FF2E285F963}"/>
               </a:ext>
             </a:extLst>
           </p:cNvPr>
@@ -15829,7 +15827,7 @@
           <p:cNvPr id="16" name="">
             <a:extLst xmlns:a="http://schemas.openxmlformats.org/drawingml/2006/main">
               <a:ext uri="{FF2B5EF4-FFF2-40B4-BE49-F238E27FC236}">
-                <a16:creationId xmlns:a16="http://schemas.microsoft.com/office/drawing/2014/main" id="{9337E24C-F1BE-458A-8399-354FF5338333}"/>
+                <a16:creationId xmlns:a16="http://schemas.microsoft.com/office/drawing/2014/main" id="{94BC0ACE-96E6-415E-8B6D-241D347DBB5A}"/>
               </a:ext>
             </a:extLst>
           </p:cNvPr>
@@ -15883,7 +15881,7 @@
                 <a:ea typeface="Aptos"/>
                 <a:cs typeface="Aptos"/>
               </a:rPr>
-              <a:t>Recurring instructor check: sales impact / signal / RevOps field / buyer content / AI risk / industrial failure mode</a:t>
+              <a:t>Recurring instructor check: sales impact / signal / RevOps field / buyer content / review risk / industrial failure mode</a:t>
             </a:r>
           </a:p>
         </p:txBody>
@@ -15893,7 +15891,7 @@
           <p:cNvPr id="17" name="">
             <a:extLst xmlns:a="http://schemas.openxmlformats.org/drawingml/2006/main">
               <a:ext uri="{FF2B5EF4-FFF2-40B4-BE49-F238E27FC236}">
-                <a16:creationId xmlns:a16="http://schemas.microsoft.com/office/drawing/2014/main" id="{E602A6C3-13AC-4B0A-B67A-38BDF4AC3F74}"/>
+                <a16:creationId xmlns:a16="http://schemas.microsoft.com/office/drawing/2014/main" id="{FC42C695-C8A3-4499-A0E0-AC93E77EA697}"/>
               </a:ext>
             </a:extLst>
           </p:cNvPr>
@@ -15928,7 +15926,7 @@
           <p:cNvPr id="18" name="">
             <a:extLst xmlns:a="http://schemas.openxmlformats.org/drawingml/2006/main">
               <a:ext uri="{FF2B5EF4-FFF2-40B4-BE49-F238E27FC236}">
-                <a16:creationId xmlns:a16="http://schemas.microsoft.com/office/drawing/2014/main" id="{1113C085-3869-4080-9302-FD63546CF5B8}"/>
+                <a16:creationId xmlns:a16="http://schemas.microsoft.com/office/drawing/2014/main" id="{B612A77B-E0A4-4E40-AAC5-472F528760C2}"/>
               </a:ext>
             </a:extLst>
           </p:cNvPr>
@@ -15992,7 +15990,7 @@
           <p:cNvPr id="19" name="">
             <a:extLst xmlns:a="http://schemas.openxmlformats.org/drawingml/2006/main">
               <a:ext uri="{FF2B5EF4-FFF2-40B4-BE49-F238E27FC236}">
-                <a16:creationId xmlns:a16="http://schemas.microsoft.com/office/drawing/2014/main" id="{A5E82D75-4EAD-402F-BF0B-27019F19D461}"/>
+                <a16:creationId xmlns:a16="http://schemas.microsoft.com/office/drawing/2014/main" id="{D56E1AA7-AA15-451A-9D7F-2D7EB8D5E4FF}"/>
               </a:ext>
             </a:extLst>
           </p:cNvPr>
@@ -16056,7 +16054,7 @@
           <p:cNvPr id="20" name="">
             <a:extLst xmlns:a="http://schemas.openxmlformats.org/drawingml/2006/main">
               <a:ext uri="{FF2B5EF4-FFF2-40B4-BE49-F238E27FC236}">
-                <a16:creationId xmlns:a16="http://schemas.microsoft.com/office/drawing/2014/main" id="{29CEB1A8-65BC-4710-ABBE-D4D0BB4C3CFA}"/>
+                <a16:creationId xmlns:a16="http://schemas.microsoft.com/office/drawing/2014/main" id="{C4BA8E0A-8DC4-4726-9450-D0F896E24084}"/>
               </a:ext>
             </a:extLst>
           </p:cNvPr>
@@ -16118,7 +16116,7 @@
     </p:spTree>
     <p:extLst>
       <p:ext uri="{BB962C8B-B14F-4D97-AF65-F5344CB8AC3E}">
-        <p14:creationId xmlns:p14="http://schemas.microsoft.com/office/powerpoint/2010/main" val="1582235464"/>
+        <p14:creationId xmlns:p14="http://schemas.microsoft.com/office/powerpoint/2010/main" val="960238431"/>
       </p:ext>
     </p:extLst>
   </p:cSld>
@@ -16142,7 +16140,7 @@
           <p:cNvPr id="1" name="">
             <a:extLst xmlns:a="http://schemas.openxmlformats.org/drawingml/2006/main">
               <a:ext uri="{FF2B5EF4-FFF2-40B4-BE49-F238E27FC236}">
-                <a16:creationId xmlns:a16="http://schemas.microsoft.com/office/drawing/2014/main" id="{AAAED1D8-A9EA-4F50-9E10-83B314CA9B37}"/>
+                <a16:creationId xmlns:a16="http://schemas.microsoft.com/office/drawing/2014/main" id="{682C6376-AAB8-4FBB-817B-86184AD0A6F9}"/>
               </a:ext>
             </a:extLst>
           </p:cNvPr>
@@ -16177,7 +16175,7 @@
           <p:cNvPr id="2" name="">
             <a:extLst xmlns:a="http://schemas.openxmlformats.org/drawingml/2006/main">
               <a:ext uri="{FF2B5EF4-FFF2-40B4-BE49-F238E27FC236}">
-                <a16:creationId xmlns:a16="http://schemas.microsoft.com/office/drawing/2014/main" id="{F2F74F6B-56EE-4882-BCAC-CBD95F2DC6B9}"/>
+                <a16:creationId xmlns:a16="http://schemas.microsoft.com/office/drawing/2014/main" id="{893B3179-5762-4EFF-9D66-6744B57CE84B}"/>
               </a:ext>
             </a:extLst>
           </p:cNvPr>
@@ -16212,7 +16210,7 @@
           <p:cNvPr id="3" name="">
             <a:extLst xmlns:a="http://schemas.openxmlformats.org/drawingml/2006/main">
               <a:ext uri="{FF2B5EF4-FFF2-40B4-BE49-F238E27FC236}">
-                <a16:creationId xmlns:a16="http://schemas.microsoft.com/office/drawing/2014/main" id="{4A39C7B2-01AE-4DC8-A3BC-01B7AE7E7D73}"/>
+                <a16:creationId xmlns:a16="http://schemas.microsoft.com/office/drawing/2014/main" id="{45264D4E-1AC6-405F-ADE9-542602C5FCC1}"/>
               </a:ext>
             </a:extLst>
           </p:cNvPr>
@@ -16247,7 +16245,7 @@
           <p:cNvPr id="4" name="kicker-04-marker">
             <a:extLst xmlns:a="http://schemas.openxmlformats.org/drawingml/2006/main">
               <a:ext uri="{FF2B5EF4-FFF2-40B4-BE49-F238E27FC236}">
-                <a16:creationId xmlns:a16="http://schemas.microsoft.com/office/drawing/2014/main" id="{A555B892-ED1A-4E11-97C9-D8C028A1C3D4}"/>
+                <a16:creationId xmlns:a16="http://schemas.microsoft.com/office/drawing/2014/main" id="{ED993C84-AD32-4D92-BF1D-4B4EDAE75346}"/>
               </a:ext>
             </a:extLst>
           </p:cNvPr>
@@ -16282,7 +16280,7 @@
           <p:cNvPr id="5" name="kicker-04-label">
             <a:extLst xmlns:a="http://schemas.openxmlformats.org/drawingml/2006/main">
               <a:ext uri="{FF2B5EF4-FFF2-40B4-BE49-F238E27FC236}">
-                <a16:creationId xmlns:a16="http://schemas.microsoft.com/office/drawing/2014/main" id="{1B3D1F07-8393-44E9-ACBF-A48172CFCBB8}"/>
+                <a16:creationId xmlns:a16="http://schemas.microsoft.com/office/drawing/2014/main" id="{0D6BB422-D8BB-45E4-9EB6-421BEA2E45CB}"/>
               </a:ext>
             </a:extLst>
           </p:cNvPr>
@@ -16346,7 +16344,7 @@
           <p:cNvPr id="6" name="">
             <a:extLst xmlns:a="http://schemas.openxmlformats.org/drawingml/2006/main">
               <a:ext uri="{FF2B5EF4-FFF2-40B4-BE49-F238E27FC236}">
-                <a16:creationId xmlns:a16="http://schemas.microsoft.com/office/drawing/2014/main" id="{EB83DCF6-BCA1-44CE-AD8D-2F31B992FE59}"/>
+                <a16:creationId xmlns:a16="http://schemas.microsoft.com/office/drawing/2014/main" id="{3EB56396-CB55-43F7-A303-602499A16008}"/>
               </a:ext>
             </a:extLst>
           </p:cNvPr>
@@ -16410,7 +16408,7 @@
           <p:cNvPr id="7" name="">
             <a:extLst xmlns:a="http://schemas.openxmlformats.org/drawingml/2006/main">
               <a:ext uri="{FF2B5EF4-FFF2-40B4-BE49-F238E27FC236}">
-                <a16:creationId xmlns:a16="http://schemas.microsoft.com/office/drawing/2014/main" id="{36AF5461-A9B9-4B06-A5E8-2BB407438E61}"/>
+                <a16:creationId xmlns:a16="http://schemas.microsoft.com/office/drawing/2014/main" id="{BD8CF28B-6DC5-4B28-90BE-E7E25D13F603}"/>
               </a:ext>
             </a:extLst>
           </p:cNvPr>
@@ -16474,7 +16472,7 @@
           <p:cNvPr id="8" name="">
             <a:extLst xmlns:a="http://schemas.openxmlformats.org/drawingml/2006/main">
               <a:ext uri="{FF2B5EF4-FFF2-40B4-BE49-F238E27FC236}">
-                <a16:creationId xmlns:a16="http://schemas.microsoft.com/office/drawing/2014/main" id="{BECCB424-A75D-4E2F-8A23-6AC282BC3AF1}"/>
+                <a16:creationId xmlns:a16="http://schemas.microsoft.com/office/drawing/2014/main" id="{82130321-8532-4286-8855-5ABD1346A78E}"/>
               </a:ext>
             </a:extLst>
           </p:cNvPr>
@@ -16509,7 +16507,7 @@
           <p:cNvPr id="9" name="">
             <a:extLst xmlns:a="http://schemas.openxmlformats.org/drawingml/2006/main">
               <a:ext uri="{FF2B5EF4-FFF2-40B4-BE49-F238E27FC236}">
-                <a16:creationId xmlns:a16="http://schemas.microsoft.com/office/drawing/2014/main" id="{1F84888E-644C-41FC-AE54-41D7E7A35684}"/>
+                <a16:creationId xmlns:a16="http://schemas.microsoft.com/office/drawing/2014/main" id="{6B4F7209-0781-4B17-82D8-B42A758AB7A7}"/>
               </a:ext>
             </a:extLst>
           </p:cNvPr>
@@ -16573,7 +16571,7 @@
           <p:cNvPr id="10" name="">
             <a:extLst xmlns:a="http://schemas.openxmlformats.org/drawingml/2006/main">
               <a:ext uri="{FF2B5EF4-FFF2-40B4-BE49-F238E27FC236}">
-                <a16:creationId xmlns:a16="http://schemas.microsoft.com/office/drawing/2014/main" id="{EE002261-0674-4BE8-8FAD-E90A610A31F8}"/>
+                <a16:creationId xmlns:a16="http://schemas.microsoft.com/office/drawing/2014/main" id="{2EFD1FC5-4ED1-4D3B-A8DD-39A0DC332CFA}"/>
               </a:ext>
             </a:extLst>
           </p:cNvPr>
@@ -16637,7 +16635,7 @@
           <p:cNvPr id="11" name="">
             <a:extLst xmlns:a="http://schemas.openxmlformats.org/drawingml/2006/main">
               <a:ext uri="{FF2B5EF4-FFF2-40B4-BE49-F238E27FC236}">
-                <a16:creationId xmlns:a16="http://schemas.microsoft.com/office/drawing/2014/main" id="{B584A4BC-3E90-4FAF-9BD4-15684EF9A737}"/>
+                <a16:creationId xmlns:a16="http://schemas.microsoft.com/office/drawing/2014/main" id="{00AA41A2-2298-456A-9129-3BA768698830}"/>
               </a:ext>
             </a:extLst>
           </p:cNvPr>
@@ -16701,7 +16699,7 @@
           <p:cNvPr id="12" name="">
             <a:extLst xmlns:a="http://schemas.openxmlformats.org/drawingml/2006/main">
               <a:ext uri="{FF2B5EF4-FFF2-40B4-BE49-F238E27FC236}">
-                <a16:creationId xmlns:a16="http://schemas.microsoft.com/office/drawing/2014/main" id="{57FAB2FB-4ED2-4C6D-A27F-EE970FBA22BE}"/>
+                <a16:creationId xmlns:a16="http://schemas.microsoft.com/office/drawing/2014/main" id="{B5B71CC1-0144-49A6-9390-AE95BBEB7B6E}"/>
               </a:ext>
             </a:extLst>
           </p:cNvPr>
@@ -16734,7 +16732,7 @@
           <p:cNvPr id="13" name="">
             <a:extLst xmlns:a="http://schemas.openxmlformats.org/drawingml/2006/main">
               <a:ext uri="{FF2B5EF4-FFF2-40B4-BE49-F238E27FC236}">
-                <a16:creationId xmlns:a16="http://schemas.microsoft.com/office/drawing/2014/main" id="{C13005A7-786A-44DB-A231-430834DF3958}"/>
+                <a16:creationId xmlns:a16="http://schemas.microsoft.com/office/drawing/2014/main" id="{C1C0BF27-A101-45D2-A972-A172C5158C9D}"/>
               </a:ext>
             </a:extLst>
           </p:cNvPr>
@@ -16798,7 +16796,7 @@
           <p:cNvPr id="14" name="">
             <a:extLst xmlns:a="http://schemas.openxmlformats.org/drawingml/2006/main">
               <a:ext uri="{FF2B5EF4-FFF2-40B4-BE49-F238E27FC236}">
-                <a16:creationId xmlns:a16="http://schemas.microsoft.com/office/drawing/2014/main" id="{69486317-398F-42CB-B9E9-00555630EF90}"/>
+                <a16:creationId xmlns:a16="http://schemas.microsoft.com/office/drawing/2014/main" id="{961A3BFD-BA06-4E7B-B73F-72794343CB47}"/>
               </a:ext>
             </a:extLst>
           </p:cNvPr>
@@ -16833,7 +16831,7 @@
           <p:cNvPr id="15" name="">
             <a:extLst xmlns:a="http://schemas.openxmlformats.org/drawingml/2006/main">
               <a:ext uri="{FF2B5EF4-FFF2-40B4-BE49-F238E27FC236}">
-                <a16:creationId xmlns:a16="http://schemas.microsoft.com/office/drawing/2014/main" id="{8114BFDD-8C44-4F46-B025-E4A31307D57B}"/>
+                <a16:creationId xmlns:a16="http://schemas.microsoft.com/office/drawing/2014/main" id="{A315BDA4-BE29-4950-8A49-CF6D8E7FB2DB}"/>
               </a:ext>
             </a:extLst>
           </p:cNvPr>
@@ -16897,7 +16895,7 @@
           <p:cNvPr id="16" name="">
             <a:extLst xmlns:a="http://schemas.openxmlformats.org/drawingml/2006/main">
               <a:ext uri="{FF2B5EF4-FFF2-40B4-BE49-F238E27FC236}">
-                <a16:creationId xmlns:a16="http://schemas.microsoft.com/office/drawing/2014/main" id="{C8E0241B-747F-4C5B-830D-FD532BA6273D}"/>
+                <a16:creationId xmlns:a16="http://schemas.microsoft.com/office/drawing/2014/main" id="{F18548B0-B139-4DFE-823B-2269B4F7FA6D}"/>
               </a:ext>
             </a:extLst>
           </p:cNvPr>
@@ -16930,7 +16928,7 @@
           <p:cNvPr id="17" name="">
             <a:extLst xmlns:a="http://schemas.openxmlformats.org/drawingml/2006/main">
               <a:ext uri="{FF2B5EF4-FFF2-40B4-BE49-F238E27FC236}">
-                <a16:creationId xmlns:a16="http://schemas.microsoft.com/office/drawing/2014/main" id="{EFD630DF-5DAC-43FC-A640-2192B6581D69}"/>
+                <a16:creationId xmlns:a16="http://schemas.microsoft.com/office/drawing/2014/main" id="{8E5EE514-33E4-412C-A172-00544B4AEBA8}"/>
               </a:ext>
             </a:extLst>
           </p:cNvPr>
@@ -16965,7 +16963,7 @@
           <p:cNvPr id="18" name="">
             <a:extLst xmlns:a="http://schemas.openxmlformats.org/drawingml/2006/main">
               <a:ext uri="{FF2B5EF4-FFF2-40B4-BE49-F238E27FC236}">
-                <a16:creationId xmlns:a16="http://schemas.microsoft.com/office/drawing/2014/main" id="{F3C666C0-3AA6-4273-B71A-669863FDA302}"/>
+                <a16:creationId xmlns:a16="http://schemas.microsoft.com/office/drawing/2014/main" id="{CEF10704-F02C-43A0-8E99-8BA947F5807D}"/>
               </a:ext>
             </a:extLst>
           </p:cNvPr>
@@ -17029,7 +17027,7 @@
           <p:cNvPr id="19" name="">
             <a:extLst xmlns:a="http://schemas.openxmlformats.org/drawingml/2006/main">
               <a:ext uri="{FF2B5EF4-FFF2-40B4-BE49-F238E27FC236}">
-                <a16:creationId xmlns:a16="http://schemas.microsoft.com/office/drawing/2014/main" id="{582CA631-EAB5-41D6-BB31-76762EB2C939}"/>
+                <a16:creationId xmlns:a16="http://schemas.microsoft.com/office/drawing/2014/main" id="{DE7F5087-7277-409D-A642-51AF6711F07E}"/>
               </a:ext>
             </a:extLst>
           </p:cNvPr>
@@ -17064,7 +17062,7 @@
           <p:cNvPr id="20" name="">
             <a:extLst xmlns:a="http://schemas.openxmlformats.org/drawingml/2006/main">
               <a:ext uri="{FF2B5EF4-FFF2-40B4-BE49-F238E27FC236}">
-                <a16:creationId xmlns:a16="http://schemas.microsoft.com/office/drawing/2014/main" id="{82F9E0A7-9569-44E4-A7F6-7274C3B73AAE}"/>
+                <a16:creationId xmlns:a16="http://schemas.microsoft.com/office/drawing/2014/main" id="{E904A6C1-1D4A-4345-81D5-605E20E17BB3}"/>
               </a:ext>
             </a:extLst>
           </p:cNvPr>
@@ -17128,7 +17126,7 @@
           <p:cNvPr id="21" name="">
             <a:extLst xmlns:a="http://schemas.openxmlformats.org/drawingml/2006/main">
               <a:ext uri="{FF2B5EF4-FFF2-40B4-BE49-F238E27FC236}">
-                <a16:creationId xmlns:a16="http://schemas.microsoft.com/office/drawing/2014/main" id="{28A801AB-4976-418B-B024-4839C8620641}"/>
+                <a16:creationId xmlns:a16="http://schemas.microsoft.com/office/drawing/2014/main" id="{1D1BF1CE-67E0-40F6-8545-7DC9ED793A11}"/>
               </a:ext>
             </a:extLst>
           </p:cNvPr>
@@ -17163,7 +17161,7 @@
           <p:cNvPr id="22" name="">
             <a:extLst xmlns:a="http://schemas.openxmlformats.org/drawingml/2006/main">
               <a:ext uri="{FF2B5EF4-FFF2-40B4-BE49-F238E27FC236}">
-                <a16:creationId xmlns:a16="http://schemas.microsoft.com/office/drawing/2014/main" id="{258DDAA0-8E26-41D5-8ED2-34B6DB4E0B0B}"/>
+                <a16:creationId xmlns:a16="http://schemas.microsoft.com/office/drawing/2014/main" id="{14566C01-AC6C-47DE-A250-D6DD3A9680AA}"/>
               </a:ext>
             </a:extLst>
           </p:cNvPr>
@@ -17227,7 +17225,7 @@
           <p:cNvPr id="23" name="">
             <a:extLst xmlns:a="http://schemas.openxmlformats.org/drawingml/2006/main">
               <a:ext uri="{FF2B5EF4-FFF2-40B4-BE49-F238E27FC236}">
-                <a16:creationId xmlns:a16="http://schemas.microsoft.com/office/drawing/2014/main" id="{1758D58E-D421-4F54-AF91-D89567276397}"/>
+                <a16:creationId xmlns:a16="http://schemas.microsoft.com/office/drawing/2014/main" id="{E0C173DB-9B52-4DB4-A6D6-C4DDB7BA8E81}"/>
               </a:ext>
             </a:extLst>
           </p:cNvPr>
@@ -17262,7 +17260,7 @@
           <p:cNvPr id="24" name="">
             <a:extLst xmlns:a="http://schemas.openxmlformats.org/drawingml/2006/main">
               <a:ext uri="{FF2B5EF4-FFF2-40B4-BE49-F238E27FC236}">
-                <a16:creationId xmlns:a16="http://schemas.microsoft.com/office/drawing/2014/main" id="{3AA2EAE1-C2B3-4C86-9C2B-11D5E814DA87}"/>
+                <a16:creationId xmlns:a16="http://schemas.microsoft.com/office/drawing/2014/main" id="{1EED52B5-3B88-4E63-BE8D-2BC2BE08CFAE}"/>
               </a:ext>
             </a:extLst>
           </p:cNvPr>
@@ -17316,7 +17314,7 @@
                 <a:ea typeface="Aptos"/>
                 <a:cs typeface="Aptos"/>
               </a:rPr>
-              <a:t>Keep AI useful but subordinate to human correction.</a:t>
+              <a:t>Keep first drafts subordinate to human correction.</a:t>
             </a:r>
           </a:p>
         </p:txBody>
@@ -17326,7 +17324,7 @@
           <p:cNvPr id="25" name="">
             <a:extLst xmlns:a="http://schemas.openxmlformats.org/drawingml/2006/main">
               <a:ext uri="{FF2B5EF4-FFF2-40B4-BE49-F238E27FC236}">
-                <a16:creationId xmlns:a16="http://schemas.microsoft.com/office/drawing/2014/main" id="{191263A4-FE25-402D-B054-A97264460150}"/>
+                <a16:creationId xmlns:a16="http://schemas.microsoft.com/office/drawing/2014/main" id="{B1382CA6-B125-464D-BDDD-B63C8AB98C27}"/>
               </a:ext>
             </a:extLst>
           </p:cNvPr>
@@ -17361,7 +17359,7 @@
           <p:cNvPr id="26" name="">
             <a:extLst xmlns:a="http://schemas.openxmlformats.org/drawingml/2006/main">
               <a:ext uri="{FF2B5EF4-FFF2-40B4-BE49-F238E27FC236}">
-                <a16:creationId xmlns:a16="http://schemas.microsoft.com/office/drawing/2014/main" id="{ADEB5D8D-8ED9-4E1B-8670-8CC5237E0046}"/>
+                <a16:creationId xmlns:a16="http://schemas.microsoft.com/office/drawing/2014/main" id="{BB92E1BA-F309-459A-8C75-7A8E6E62D5C9}"/>
               </a:ext>
             </a:extLst>
           </p:cNvPr>
@@ -17425,7 +17423,7 @@
           <p:cNvPr id="27" name="">
             <a:extLst xmlns:a="http://schemas.openxmlformats.org/drawingml/2006/main">
               <a:ext uri="{FF2B5EF4-FFF2-40B4-BE49-F238E27FC236}">
-                <a16:creationId xmlns:a16="http://schemas.microsoft.com/office/drawing/2014/main" id="{64EC0DD1-FE10-4F43-B688-BB8281B9406B}"/>
+                <a16:creationId xmlns:a16="http://schemas.microsoft.com/office/drawing/2014/main" id="{2A1D079D-4853-410B-A56B-FA9AF7A3C8D1}"/>
               </a:ext>
             </a:extLst>
           </p:cNvPr>
@@ -17460,7 +17458,7 @@
           <p:cNvPr id="28" name="">
             <a:extLst xmlns:a="http://schemas.openxmlformats.org/drawingml/2006/main">
               <a:ext uri="{FF2B5EF4-FFF2-40B4-BE49-F238E27FC236}">
-                <a16:creationId xmlns:a16="http://schemas.microsoft.com/office/drawing/2014/main" id="{1E936A8D-AB91-4871-B3B2-88504A3E6B18}"/>
+                <a16:creationId xmlns:a16="http://schemas.microsoft.com/office/drawing/2014/main" id="{5DEEDB41-ABA0-420E-AC82-B95A43ED5B6C}"/>
               </a:ext>
             </a:extLst>
           </p:cNvPr>
@@ -17524,7 +17522,7 @@
           <p:cNvPr id="29" name="">
             <a:extLst xmlns:a="http://schemas.openxmlformats.org/drawingml/2006/main">
               <a:ext uri="{FF2B5EF4-FFF2-40B4-BE49-F238E27FC236}">
-                <a16:creationId xmlns:a16="http://schemas.microsoft.com/office/drawing/2014/main" id="{6BC7CE58-6E25-4C3E-99D2-54A3C77620A3}"/>
+                <a16:creationId xmlns:a16="http://schemas.microsoft.com/office/drawing/2014/main" id="{F696CEE2-0DDF-4AB0-A8A0-B8A5323CFD07}"/>
               </a:ext>
             </a:extLst>
           </p:cNvPr>
@@ -17588,7 +17586,7 @@
           <p:cNvPr id="30" name="">
             <a:extLst xmlns:a="http://schemas.openxmlformats.org/drawingml/2006/main">
               <a:ext uri="{FF2B5EF4-FFF2-40B4-BE49-F238E27FC236}">
-                <a16:creationId xmlns:a16="http://schemas.microsoft.com/office/drawing/2014/main" id="{2EE69CB8-7EB5-4D23-BCD6-D9C24880FAFB}"/>
+                <a16:creationId xmlns:a16="http://schemas.microsoft.com/office/drawing/2014/main" id="{EB323436-D5CD-4E63-895A-89E13B363579}"/>
               </a:ext>
             </a:extLst>
           </p:cNvPr>
@@ -17650,7 +17648,7 @@
     </p:spTree>
     <p:extLst>
       <p:ext uri="{BB962C8B-B14F-4D97-AF65-F5344CB8AC3E}">
-        <p14:creationId xmlns:p14="http://schemas.microsoft.com/office/powerpoint/2010/main" val="1291038661"/>
+        <p14:creationId xmlns:p14="http://schemas.microsoft.com/office/powerpoint/2010/main" val="976450470"/>
       </p:ext>
     </p:extLst>
   </p:cSld>
@@ -17674,7 +17672,7 @@
           <p:cNvPr id="1" name="">
             <a:extLst xmlns:a="http://schemas.openxmlformats.org/drawingml/2006/main">
               <a:ext uri="{FF2B5EF4-FFF2-40B4-BE49-F238E27FC236}">
-                <a16:creationId xmlns:a16="http://schemas.microsoft.com/office/drawing/2014/main" id="{F978314F-98A1-4BDB-BA4E-955A0F879E31}"/>
+                <a16:creationId xmlns:a16="http://schemas.microsoft.com/office/drawing/2014/main" id="{EDED0150-2A21-4229-A149-D30AF6728D34}"/>
               </a:ext>
             </a:extLst>
           </p:cNvPr>
@@ -17709,7 +17707,7 @@
           <p:cNvPr id="2" name="">
             <a:extLst xmlns:a="http://schemas.openxmlformats.org/drawingml/2006/main">
               <a:ext uri="{FF2B5EF4-FFF2-40B4-BE49-F238E27FC236}">
-                <a16:creationId xmlns:a16="http://schemas.microsoft.com/office/drawing/2014/main" id="{B720A4D8-EE07-407C-BF2B-FA24C1D6B731}"/>
+                <a16:creationId xmlns:a16="http://schemas.microsoft.com/office/drawing/2014/main" id="{8A2CAD96-00F5-4CF8-8C5E-B2DE9C94DCF2}"/>
               </a:ext>
             </a:extLst>
           </p:cNvPr>
@@ -17744,7 +17742,7 @@
           <p:cNvPr id="3" name="">
             <a:extLst xmlns:a="http://schemas.openxmlformats.org/drawingml/2006/main">
               <a:ext uri="{FF2B5EF4-FFF2-40B4-BE49-F238E27FC236}">
-                <a16:creationId xmlns:a16="http://schemas.microsoft.com/office/drawing/2014/main" id="{F8B43735-D157-4ECE-898F-7A492AE1C82E}"/>
+                <a16:creationId xmlns:a16="http://schemas.microsoft.com/office/drawing/2014/main" id="{36F1B4F4-33D6-4420-8479-1523E809E10F}"/>
               </a:ext>
             </a:extLst>
           </p:cNvPr>
@@ -17779,7 +17777,7 @@
           <p:cNvPr id="4" name="kicker-04-marker">
             <a:extLst xmlns:a="http://schemas.openxmlformats.org/drawingml/2006/main">
               <a:ext uri="{FF2B5EF4-FFF2-40B4-BE49-F238E27FC236}">
-                <a16:creationId xmlns:a16="http://schemas.microsoft.com/office/drawing/2014/main" id="{979C8859-E56A-4547-A349-63B27FF39FEA}"/>
+                <a16:creationId xmlns:a16="http://schemas.microsoft.com/office/drawing/2014/main" id="{5E2EF11E-FB89-4682-BA05-59AF1E688831}"/>
               </a:ext>
             </a:extLst>
           </p:cNvPr>
@@ -17814,7 +17812,7 @@
           <p:cNvPr id="5" name="kicker-04-label">
             <a:extLst xmlns:a="http://schemas.openxmlformats.org/drawingml/2006/main">
               <a:ext uri="{FF2B5EF4-FFF2-40B4-BE49-F238E27FC236}">
-                <a16:creationId xmlns:a16="http://schemas.microsoft.com/office/drawing/2014/main" id="{CC28E45A-C6C0-4724-AC5E-394A18CF50C6}"/>
+                <a16:creationId xmlns:a16="http://schemas.microsoft.com/office/drawing/2014/main" id="{C43665A5-7C7C-48A7-AB62-667C93C7691A}"/>
               </a:ext>
             </a:extLst>
           </p:cNvPr>
@@ -17878,7 +17876,7 @@
           <p:cNvPr id="6" name="">
             <a:extLst xmlns:a="http://schemas.openxmlformats.org/drawingml/2006/main">
               <a:ext uri="{FF2B5EF4-FFF2-40B4-BE49-F238E27FC236}">
-                <a16:creationId xmlns:a16="http://schemas.microsoft.com/office/drawing/2014/main" id="{DA3ECCF0-211D-49A1-B4A3-AB330F270A1F}"/>
+                <a16:creationId xmlns:a16="http://schemas.microsoft.com/office/drawing/2014/main" id="{18BAD321-533A-4D2C-991A-1066EEAE5497}"/>
               </a:ext>
             </a:extLst>
           </p:cNvPr>
@@ -17942,7 +17940,7 @@
           <p:cNvPr id="7" name="">
             <a:extLst xmlns:a="http://schemas.openxmlformats.org/drawingml/2006/main">
               <a:ext uri="{FF2B5EF4-FFF2-40B4-BE49-F238E27FC236}">
-                <a16:creationId xmlns:a16="http://schemas.microsoft.com/office/drawing/2014/main" id="{CB5D5EE2-4537-43A8-B477-10A8A7DCD550}"/>
+                <a16:creationId xmlns:a16="http://schemas.microsoft.com/office/drawing/2014/main" id="{1406474B-B132-462F-BCFE-EB9FD6A54211}"/>
               </a:ext>
             </a:extLst>
           </p:cNvPr>
@@ -18006,7 +18004,7 @@
           <p:cNvPr id="8" name="">
             <a:extLst xmlns:a="http://schemas.openxmlformats.org/drawingml/2006/main">
               <a:ext uri="{FF2B5EF4-FFF2-40B4-BE49-F238E27FC236}">
-                <a16:creationId xmlns:a16="http://schemas.microsoft.com/office/drawing/2014/main" id="{380BD017-3612-4040-920A-4615A04F2C13}"/>
+                <a16:creationId xmlns:a16="http://schemas.microsoft.com/office/drawing/2014/main" id="{571CD8B6-E149-4AC0-8859-E6F1154CFCE5}"/>
               </a:ext>
             </a:extLst>
           </p:cNvPr>
@@ -18041,7 +18039,7 @@
           <p:cNvPr id="9" name="">
             <a:extLst xmlns:a="http://schemas.openxmlformats.org/drawingml/2006/main">
               <a:ext uri="{FF2B5EF4-FFF2-40B4-BE49-F238E27FC236}">
-                <a16:creationId xmlns:a16="http://schemas.microsoft.com/office/drawing/2014/main" id="{BC4C4E9C-27A8-473F-AC8B-448BFF10DFF3}"/>
+                <a16:creationId xmlns:a16="http://schemas.microsoft.com/office/drawing/2014/main" id="{75500855-CB6C-4CD3-844C-56365DFAFF87}"/>
               </a:ext>
             </a:extLst>
           </p:cNvPr>
@@ -18105,7 +18103,7 @@
           <p:cNvPr id="10" name="">
             <a:extLst xmlns:a="http://schemas.openxmlformats.org/drawingml/2006/main">
               <a:ext uri="{FF2B5EF4-FFF2-40B4-BE49-F238E27FC236}">
-                <a16:creationId xmlns:a16="http://schemas.microsoft.com/office/drawing/2014/main" id="{5E0FD1F8-62B6-42AD-BB16-67C788DCEB5D}"/>
+                <a16:creationId xmlns:a16="http://schemas.microsoft.com/office/drawing/2014/main" id="{DC3392AC-B714-4821-83C9-2E6154186BE8}"/>
               </a:ext>
             </a:extLst>
           </p:cNvPr>
@@ -18169,7 +18167,7 @@
           <p:cNvPr id="11" name="">
             <a:extLst xmlns:a="http://schemas.openxmlformats.org/drawingml/2006/main">
               <a:ext uri="{FF2B5EF4-FFF2-40B4-BE49-F238E27FC236}">
-                <a16:creationId xmlns:a16="http://schemas.microsoft.com/office/drawing/2014/main" id="{C9E4B2C7-F383-49C1-8F0B-80B0DF45E8E1}"/>
+                <a16:creationId xmlns:a16="http://schemas.microsoft.com/office/drawing/2014/main" id="{B91755A5-14ED-456A-AAEC-27A00AD45AE4}"/>
               </a:ext>
             </a:extLst>
           </p:cNvPr>
@@ -18233,7 +18231,7 @@
           <p:cNvPr id="12" name="">
             <a:extLst xmlns:a="http://schemas.openxmlformats.org/drawingml/2006/main">
               <a:ext uri="{FF2B5EF4-FFF2-40B4-BE49-F238E27FC236}">
-                <a16:creationId xmlns:a16="http://schemas.microsoft.com/office/drawing/2014/main" id="{4F64E643-B64D-4319-9537-22520B7F389C}"/>
+                <a16:creationId xmlns:a16="http://schemas.microsoft.com/office/drawing/2014/main" id="{75CCE5F8-B773-4A96-BBA0-FC169A7A9492}"/>
               </a:ext>
             </a:extLst>
           </p:cNvPr>
@@ -18266,7 +18264,7 @@
           <p:cNvPr id="13" name="">
             <a:extLst xmlns:a="http://schemas.openxmlformats.org/drawingml/2006/main">
               <a:ext uri="{FF2B5EF4-FFF2-40B4-BE49-F238E27FC236}">
-                <a16:creationId xmlns:a16="http://schemas.microsoft.com/office/drawing/2014/main" id="{16AE66ED-DFA1-42A6-B647-168EFD94AA24}"/>
+                <a16:creationId xmlns:a16="http://schemas.microsoft.com/office/drawing/2014/main" id="{2E1728AF-30A9-4E74-AA9D-4E4059E496B4}"/>
               </a:ext>
             </a:extLst>
           </p:cNvPr>
@@ -18301,7 +18299,7 @@
           <p:cNvPr id="14" name="">
             <a:extLst xmlns:a="http://schemas.openxmlformats.org/drawingml/2006/main">
               <a:ext uri="{FF2B5EF4-FFF2-40B4-BE49-F238E27FC236}">
-                <a16:creationId xmlns:a16="http://schemas.microsoft.com/office/drawing/2014/main" id="{386C6E5B-5FE1-4F9C-BD66-78D46FA6822B}"/>
+                <a16:creationId xmlns:a16="http://schemas.microsoft.com/office/drawing/2014/main" id="{12402B71-E239-4D22-90E1-642DCBB43565}"/>
               </a:ext>
             </a:extLst>
           </p:cNvPr>
@@ -18365,7 +18363,7 @@
           <p:cNvPr id="15" name="">
             <a:extLst xmlns:a="http://schemas.openxmlformats.org/drawingml/2006/main">
               <a:ext uri="{FF2B5EF4-FFF2-40B4-BE49-F238E27FC236}">
-                <a16:creationId xmlns:a16="http://schemas.microsoft.com/office/drawing/2014/main" id="{2CDCB42A-AAA4-46AB-9CDE-B257CC180366}"/>
+                <a16:creationId xmlns:a16="http://schemas.microsoft.com/office/drawing/2014/main" id="{D45DBCFE-791D-487D-9287-AE87923CA07A}"/>
               </a:ext>
             </a:extLst>
           </p:cNvPr>
@@ -18400,7 +18398,7 @@
           <p:cNvPr id="16" name="">
             <a:extLst xmlns:a="http://schemas.openxmlformats.org/drawingml/2006/main">
               <a:ext uri="{FF2B5EF4-FFF2-40B4-BE49-F238E27FC236}">
-                <a16:creationId xmlns:a16="http://schemas.microsoft.com/office/drawing/2014/main" id="{53DC9A37-2286-4101-A27A-4F6B93149CA8}"/>
+                <a16:creationId xmlns:a16="http://schemas.microsoft.com/office/drawing/2014/main" id="{3A917597-CC63-43BF-905E-8F80AE8F0005}"/>
               </a:ext>
             </a:extLst>
           </p:cNvPr>
@@ -18464,7 +18462,7 @@
           <p:cNvPr id="17" name="">
             <a:extLst xmlns:a="http://schemas.openxmlformats.org/drawingml/2006/main">
               <a:ext uri="{FF2B5EF4-FFF2-40B4-BE49-F238E27FC236}">
-                <a16:creationId xmlns:a16="http://schemas.microsoft.com/office/drawing/2014/main" id="{E7700468-B8B1-41E1-9E5B-F42407671026}"/>
+                <a16:creationId xmlns:a16="http://schemas.microsoft.com/office/drawing/2014/main" id="{1F82B39C-A224-4A14-BC34-492DD920B3B4}"/>
               </a:ext>
             </a:extLst>
           </p:cNvPr>
@@ -18499,7 +18497,7 @@
           <p:cNvPr id="18" name="">
             <a:extLst xmlns:a="http://schemas.openxmlformats.org/drawingml/2006/main">
               <a:ext uri="{FF2B5EF4-FFF2-40B4-BE49-F238E27FC236}">
-                <a16:creationId xmlns:a16="http://schemas.microsoft.com/office/drawing/2014/main" id="{687051B5-D854-482F-B8AC-5DBB18D100E1}"/>
+                <a16:creationId xmlns:a16="http://schemas.microsoft.com/office/drawing/2014/main" id="{593822E0-BCF3-44AD-8762-D8E7BEE91BEE}"/>
               </a:ext>
             </a:extLst>
           </p:cNvPr>
@@ -18563,7 +18561,7 @@
           <p:cNvPr id="19" name="">
             <a:extLst xmlns:a="http://schemas.openxmlformats.org/drawingml/2006/main">
               <a:ext uri="{FF2B5EF4-FFF2-40B4-BE49-F238E27FC236}">
-                <a16:creationId xmlns:a16="http://schemas.microsoft.com/office/drawing/2014/main" id="{95B0562F-2165-4D3C-B7D1-C952D745B911}"/>
+                <a16:creationId xmlns:a16="http://schemas.microsoft.com/office/drawing/2014/main" id="{52BD4F03-3AFC-48BE-A039-86C5E680FB4D}"/>
               </a:ext>
             </a:extLst>
           </p:cNvPr>
@@ -18598,7 +18596,7 @@
           <p:cNvPr id="20" name="">
             <a:extLst xmlns:a="http://schemas.openxmlformats.org/drawingml/2006/main">
               <a:ext uri="{FF2B5EF4-FFF2-40B4-BE49-F238E27FC236}">
-                <a16:creationId xmlns:a16="http://schemas.microsoft.com/office/drawing/2014/main" id="{615C0B73-EBB0-4036-973B-AA64ADA9EEA8}"/>
+                <a16:creationId xmlns:a16="http://schemas.microsoft.com/office/drawing/2014/main" id="{D417F1CA-CA6B-46E1-BCFE-E4993E235A42}"/>
               </a:ext>
             </a:extLst>
           </p:cNvPr>
@@ -18662,7 +18660,7 @@
           <p:cNvPr id="21" name="">
             <a:extLst xmlns:a="http://schemas.openxmlformats.org/drawingml/2006/main">
               <a:ext uri="{FF2B5EF4-FFF2-40B4-BE49-F238E27FC236}">
-                <a16:creationId xmlns:a16="http://schemas.microsoft.com/office/drawing/2014/main" id="{669C2B4B-B522-4B82-916D-5240D3B785E3}"/>
+                <a16:creationId xmlns:a16="http://schemas.microsoft.com/office/drawing/2014/main" id="{EF62BADF-8BF3-4BF9-B5FA-7ECEF18BD0DC}"/>
               </a:ext>
             </a:extLst>
           </p:cNvPr>
@@ -18697,7 +18695,7 @@
           <p:cNvPr id="22" name="">
             <a:extLst xmlns:a="http://schemas.openxmlformats.org/drawingml/2006/main">
               <a:ext uri="{FF2B5EF4-FFF2-40B4-BE49-F238E27FC236}">
-                <a16:creationId xmlns:a16="http://schemas.microsoft.com/office/drawing/2014/main" id="{AEB06171-8009-4C55-B750-0C68102F8319}"/>
+                <a16:creationId xmlns:a16="http://schemas.microsoft.com/office/drawing/2014/main" id="{672C5E9F-BC48-4AB5-9292-CEBB600F1035}"/>
               </a:ext>
             </a:extLst>
           </p:cNvPr>
@@ -18761,7 +18759,7 @@
           <p:cNvPr id="23" name="">
             <a:extLst xmlns:a="http://schemas.openxmlformats.org/drawingml/2006/main">
               <a:ext uri="{FF2B5EF4-FFF2-40B4-BE49-F238E27FC236}">
-                <a16:creationId xmlns:a16="http://schemas.microsoft.com/office/drawing/2014/main" id="{5BBC7F15-046B-445A-8839-CA4602F7659C}"/>
+                <a16:creationId xmlns:a16="http://schemas.microsoft.com/office/drawing/2014/main" id="{F01F1682-506F-4369-AC02-CBF0E205A13C}"/>
               </a:ext>
             </a:extLst>
           </p:cNvPr>
@@ -18794,7 +18792,7 @@
           <p:cNvPr id="24" name="">
             <a:extLst xmlns:a="http://schemas.openxmlformats.org/drawingml/2006/main">
               <a:ext uri="{FF2B5EF4-FFF2-40B4-BE49-F238E27FC236}">
-                <a16:creationId xmlns:a16="http://schemas.microsoft.com/office/drawing/2014/main" id="{35CB67E2-00C3-4D8D-9096-DCB39C6760AA}"/>
+                <a16:creationId xmlns:a16="http://schemas.microsoft.com/office/drawing/2014/main" id="{4E091613-A30E-4A15-AB89-998BD74417E1}"/>
               </a:ext>
             </a:extLst>
           </p:cNvPr>
@@ -18829,7 +18827,7 @@
           <p:cNvPr id="25" name="">
             <a:extLst xmlns:a="http://schemas.openxmlformats.org/drawingml/2006/main">
               <a:ext uri="{FF2B5EF4-FFF2-40B4-BE49-F238E27FC236}">
-                <a16:creationId xmlns:a16="http://schemas.microsoft.com/office/drawing/2014/main" id="{0FF02EDA-0F13-4B55-B9E3-D80D99B28E12}"/>
+                <a16:creationId xmlns:a16="http://schemas.microsoft.com/office/drawing/2014/main" id="{E58BBCA4-D9CB-4394-BD67-730E7DC73B30}"/>
               </a:ext>
             </a:extLst>
           </p:cNvPr>
@@ -18893,7 +18891,7 @@
           <p:cNvPr id="26" name="">
             <a:extLst xmlns:a="http://schemas.openxmlformats.org/drawingml/2006/main">
               <a:ext uri="{FF2B5EF4-FFF2-40B4-BE49-F238E27FC236}">
-                <a16:creationId xmlns:a16="http://schemas.microsoft.com/office/drawing/2014/main" id="{0A4DD4F2-1ECD-41E4-B51C-BDE4E7054DA7}"/>
+                <a16:creationId xmlns:a16="http://schemas.microsoft.com/office/drawing/2014/main" id="{E07DB4BF-3D43-46D7-8FB1-D7CA0BAF60A4}"/>
               </a:ext>
             </a:extLst>
           </p:cNvPr>
@@ -18926,7 +18924,7 @@
           <p:cNvPr id="27" name="">
             <a:extLst xmlns:a="http://schemas.openxmlformats.org/drawingml/2006/main">
               <a:ext uri="{FF2B5EF4-FFF2-40B4-BE49-F238E27FC236}">
-                <a16:creationId xmlns:a16="http://schemas.microsoft.com/office/drawing/2014/main" id="{4168BB3D-ED9D-4391-A5BA-A59C08D5F25E}"/>
+                <a16:creationId xmlns:a16="http://schemas.microsoft.com/office/drawing/2014/main" id="{33F6DC15-4982-4E73-85F2-B3B44521C16B}"/>
               </a:ext>
             </a:extLst>
           </p:cNvPr>
@@ -18990,7 +18988,7 @@
           <p:cNvPr id="28" name="">
             <a:extLst xmlns:a="http://schemas.openxmlformats.org/drawingml/2006/main">
               <a:ext uri="{FF2B5EF4-FFF2-40B4-BE49-F238E27FC236}">
-                <a16:creationId xmlns:a16="http://schemas.microsoft.com/office/drawing/2014/main" id="{C10CB2B3-62D5-4A33-B6C0-E5FBC6ECFF72}"/>
+                <a16:creationId xmlns:a16="http://schemas.microsoft.com/office/drawing/2014/main" id="{C04CF833-438A-4DEC-857D-9D1ADA3FD7CA}"/>
               </a:ext>
             </a:extLst>
           </p:cNvPr>
@@ -19054,7 +19052,7 @@
           <p:cNvPr id="29" name="">
             <a:extLst xmlns:a="http://schemas.openxmlformats.org/drawingml/2006/main">
               <a:ext uri="{FF2B5EF4-FFF2-40B4-BE49-F238E27FC236}">
-                <a16:creationId xmlns:a16="http://schemas.microsoft.com/office/drawing/2014/main" id="{B8150DB0-6A81-410D-B84D-27F3EB66FBAA}"/>
+                <a16:creationId xmlns:a16="http://schemas.microsoft.com/office/drawing/2014/main" id="{36EA0DBD-7BF5-4225-BBAA-4C3AF6589422}"/>
               </a:ext>
             </a:extLst>
           </p:cNvPr>
@@ -19087,7 +19085,7 @@
           <p:cNvPr id="30" name="">
             <a:extLst xmlns:a="http://schemas.openxmlformats.org/drawingml/2006/main">
               <a:ext uri="{FF2B5EF4-FFF2-40B4-BE49-F238E27FC236}">
-                <a16:creationId xmlns:a16="http://schemas.microsoft.com/office/drawing/2014/main" id="{B8164C7A-60E3-4EF8-BDDB-6667866C1300}"/>
+                <a16:creationId xmlns:a16="http://schemas.microsoft.com/office/drawing/2014/main" id="{885D3137-650E-4769-BBA0-8EBDA260B5B1}"/>
               </a:ext>
             </a:extLst>
           </p:cNvPr>
@@ -19151,7 +19149,7 @@
           <p:cNvPr id="31" name="">
             <a:extLst xmlns:a="http://schemas.openxmlformats.org/drawingml/2006/main">
               <a:ext uri="{FF2B5EF4-FFF2-40B4-BE49-F238E27FC236}">
-                <a16:creationId xmlns:a16="http://schemas.microsoft.com/office/drawing/2014/main" id="{51AFED8C-F34E-426B-A0E8-5C582DA29721}"/>
+                <a16:creationId xmlns:a16="http://schemas.microsoft.com/office/drawing/2014/main" id="{EDCD3F2D-F03D-4B07-BD8B-75F4F3278264}"/>
               </a:ext>
             </a:extLst>
           </p:cNvPr>
@@ -19215,7 +19213,7 @@
           <p:cNvPr id="32" name="">
             <a:extLst xmlns:a="http://schemas.openxmlformats.org/drawingml/2006/main">
               <a:ext uri="{FF2B5EF4-FFF2-40B4-BE49-F238E27FC236}">
-                <a16:creationId xmlns:a16="http://schemas.microsoft.com/office/drawing/2014/main" id="{1DAD22A5-6663-474B-9E03-CEF840338E9F}"/>
+                <a16:creationId xmlns:a16="http://schemas.microsoft.com/office/drawing/2014/main" id="{ABD4DAB3-AF8E-4AAC-908C-CF5CF125E094}"/>
               </a:ext>
             </a:extLst>
           </p:cNvPr>
@@ -19248,7 +19246,7 @@
           <p:cNvPr id="33" name="">
             <a:extLst xmlns:a="http://schemas.openxmlformats.org/drawingml/2006/main">
               <a:ext uri="{FF2B5EF4-FFF2-40B4-BE49-F238E27FC236}">
-                <a16:creationId xmlns:a16="http://schemas.microsoft.com/office/drawing/2014/main" id="{989E6A27-F43B-4E07-BE16-EE2E52D78E06}"/>
+                <a16:creationId xmlns:a16="http://schemas.microsoft.com/office/drawing/2014/main" id="{CE700E06-7405-4932-A3CB-5C9F435BF8F2}"/>
               </a:ext>
             </a:extLst>
           </p:cNvPr>
@@ -19312,7 +19310,7 @@
           <p:cNvPr id="34" name="">
             <a:extLst xmlns:a="http://schemas.openxmlformats.org/drawingml/2006/main">
               <a:ext uri="{FF2B5EF4-FFF2-40B4-BE49-F238E27FC236}">
-                <a16:creationId xmlns:a16="http://schemas.microsoft.com/office/drawing/2014/main" id="{21DF2BB0-EB42-41B9-AC04-BE943FFC9AE7}"/>
+                <a16:creationId xmlns:a16="http://schemas.microsoft.com/office/drawing/2014/main" id="{4FA81F09-86D0-4B0A-8A93-E9BF57B373E3}"/>
               </a:ext>
             </a:extLst>
           </p:cNvPr>
@@ -19376,7 +19374,7 @@
           <p:cNvPr id="35" name="">
             <a:extLst xmlns:a="http://schemas.openxmlformats.org/drawingml/2006/main">
               <a:ext uri="{FF2B5EF4-FFF2-40B4-BE49-F238E27FC236}">
-                <a16:creationId xmlns:a16="http://schemas.microsoft.com/office/drawing/2014/main" id="{99865343-3094-4A1E-94AF-3FBCF9F47732}"/>
+                <a16:creationId xmlns:a16="http://schemas.microsoft.com/office/drawing/2014/main" id="{59E808CE-C41C-4D29-A3E3-8D1EEA47AC74}"/>
               </a:ext>
             </a:extLst>
           </p:cNvPr>
@@ -19409,7 +19407,7 @@
           <p:cNvPr id="36" name="">
             <a:extLst xmlns:a="http://schemas.openxmlformats.org/drawingml/2006/main">
               <a:ext uri="{FF2B5EF4-FFF2-40B4-BE49-F238E27FC236}">
-                <a16:creationId xmlns:a16="http://schemas.microsoft.com/office/drawing/2014/main" id="{1F8ACD0C-066D-4D32-B8DF-D298B33961F9}"/>
+                <a16:creationId xmlns:a16="http://schemas.microsoft.com/office/drawing/2014/main" id="{CA45B23A-19FB-49C0-A4C9-652B7A47C9BF}"/>
               </a:ext>
             </a:extLst>
           </p:cNvPr>
@@ -19473,7 +19471,7 @@
           <p:cNvPr id="37" name="">
             <a:extLst xmlns:a="http://schemas.openxmlformats.org/drawingml/2006/main">
               <a:ext uri="{FF2B5EF4-FFF2-40B4-BE49-F238E27FC236}">
-                <a16:creationId xmlns:a16="http://schemas.microsoft.com/office/drawing/2014/main" id="{21E55DFE-EEE4-4460-B4E8-2C8FC50C645B}"/>
+                <a16:creationId xmlns:a16="http://schemas.microsoft.com/office/drawing/2014/main" id="{6ADF5615-02EC-4E69-A2C7-A9D5B523027B}"/>
               </a:ext>
             </a:extLst>
           </p:cNvPr>
@@ -19537,7 +19535,7 @@
           <p:cNvPr id="38" name="">
             <a:extLst xmlns:a="http://schemas.openxmlformats.org/drawingml/2006/main">
               <a:ext uri="{FF2B5EF4-FFF2-40B4-BE49-F238E27FC236}">
-                <a16:creationId xmlns:a16="http://schemas.microsoft.com/office/drawing/2014/main" id="{8B589419-EBA6-4096-92B1-447B564C575A}"/>
+                <a16:creationId xmlns:a16="http://schemas.microsoft.com/office/drawing/2014/main" id="{47305DD5-628E-4D6A-BDFA-39FB2E62BB11}"/>
               </a:ext>
             </a:extLst>
           </p:cNvPr>
@@ -19570,7 +19568,7 @@
           <p:cNvPr id="39" name="">
             <a:extLst xmlns:a="http://schemas.openxmlformats.org/drawingml/2006/main">
               <a:ext uri="{FF2B5EF4-FFF2-40B4-BE49-F238E27FC236}">
-                <a16:creationId xmlns:a16="http://schemas.microsoft.com/office/drawing/2014/main" id="{6576F334-D06D-4CBA-BCB3-43CAF482F41D}"/>
+                <a16:creationId xmlns:a16="http://schemas.microsoft.com/office/drawing/2014/main" id="{CD14A8D9-B50D-4F57-8F58-F01983E157A8}"/>
               </a:ext>
             </a:extLst>
           </p:cNvPr>
@@ -19634,7 +19632,7 @@
           <p:cNvPr id="40" name="">
             <a:extLst xmlns:a="http://schemas.openxmlformats.org/drawingml/2006/main">
               <a:ext uri="{FF2B5EF4-FFF2-40B4-BE49-F238E27FC236}">
-                <a16:creationId xmlns:a16="http://schemas.microsoft.com/office/drawing/2014/main" id="{9288D668-8F7D-47FE-A828-CFC1680887CC}"/>
+                <a16:creationId xmlns:a16="http://schemas.microsoft.com/office/drawing/2014/main" id="{04547201-AB54-455A-866D-19038713FAE6}"/>
               </a:ext>
             </a:extLst>
           </p:cNvPr>
@@ -19698,7 +19696,7 @@
           <p:cNvPr id="41" name="">
             <a:extLst xmlns:a="http://schemas.openxmlformats.org/drawingml/2006/main">
               <a:ext uri="{FF2B5EF4-FFF2-40B4-BE49-F238E27FC236}">
-                <a16:creationId xmlns:a16="http://schemas.microsoft.com/office/drawing/2014/main" id="{8751E968-01EC-4018-B422-0F12828F7683}"/>
+                <a16:creationId xmlns:a16="http://schemas.microsoft.com/office/drawing/2014/main" id="{8370D1B6-5BC2-4E4D-AA3F-8F0BAF1BCCA6}"/>
               </a:ext>
             </a:extLst>
           </p:cNvPr>
@@ -19733,7 +19731,7 @@
           <p:cNvPr id="42" name="">
             <a:extLst xmlns:a="http://schemas.openxmlformats.org/drawingml/2006/main">
               <a:ext uri="{FF2B5EF4-FFF2-40B4-BE49-F238E27FC236}">
-                <a16:creationId xmlns:a16="http://schemas.microsoft.com/office/drawing/2014/main" id="{F1D73505-986E-4FB4-8937-7EAED72D481F}"/>
+                <a16:creationId xmlns:a16="http://schemas.microsoft.com/office/drawing/2014/main" id="{6A876DB1-8B1D-4274-9CDC-521BB66C1EEB}"/>
               </a:ext>
             </a:extLst>
           </p:cNvPr>
@@ -19797,7 +19795,7 @@
           <p:cNvPr id="43" name="">
             <a:extLst xmlns:a="http://schemas.openxmlformats.org/drawingml/2006/main">
               <a:ext uri="{FF2B5EF4-FFF2-40B4-BE49-F238E27FC236}">
-                <a16:creationId xmlns:a16="http://schemas.microsoft.com/office/drawing/2014/main" id="{120173FA-4782-4052-96BD-D2B8737A734C}"/>
+                <a16:creationId xmlns:a16="http://schemas.microsoft.com/office/drawing/2014/main" id="{15E2BEA7-937B-4714-A25B-95B26AF591C5}"/>
               </a:ext>
             </a:extLst>
           </p:cNvPr>
@@ -19861,7 +19859,7 @@
           <p:cNvPr id="44" name="">
             <a:extLst xmlns:a="http://schemas.openxmlformats.org/drawingml/2006/main">
               <a:ext uri="{FF2B5EF4-FFF2-40B4-BE49-F238E27FC236}">
-                <a16:creationId xmlns:a16="http://schemas.microsoft.com/office/drawing/2014/main" id="{3BF85302-28DA-49D8-A6F9-9DE041081F00}"/>
+                <a16:creationId xmlns:a16="http://schemas.microsoft.com/office/drawing/2014/main" id="{B8503B7D-9F89-42C7-A7A3-A8050D9AFBAE}"/>
               </a:ext>
             </a:extLst>
           </p:cNvPr>
@@ -19923,7 +19921,7 @@
     </p:spTree>
     <p:extLst>
       <p:ext uri="{BB962C8B-B14F-4D97-AF65-F5344CB8AC3E}">
-        <p14:creationId xmlns:p14="http://schemas.microsoft.com/office/powerpoint/2010/main" val="12994118"/>
+        <p14:creationId xmlns:p14="http://schemas.microsoft.com/office/powerpoint/2010/main" val="1112362307"/>
       </p:ext>
     </p:extLst>
   </p:cSld>
@@ -19947,7 +19945,7 @@
           <p:cNvPr id="1" name="">
             <a:extLst xmlns:a="http://schemas.openxmlformats.org/drawingml/2006/main">
               <a:ext uri="{FF2B5EF4-FFF2-40B4-BE49-F238E27FC236}">
-                <a16:creationId xmlns:a16="http://schemas.microsoft.com/office/drawing/2014/main" id="{AD901C46-09D0-4736-808C-D1589BE60A67}"/>
+                <a16:creationId xmlns:a16="http://schemas.microsoft.com/office/drawing/2014/main" id="{82D2FD4F-22D2-4D99-9509-F18D5B1A6933}"/>
               </a:ext>
             </a:extLst>
           </p:cNvPr>
@@ -19982,7 +19980,7 @@
           <p:cNvPr id="2" name="">
             <a:extLst xmlns:a="http://schemas.openxmlformats.org/drawingml/2006/main">
               <a:ext uri="{FF2B5EF4-FFF2-40B4-BE49-F238E27FC236}">
-                <a16:creationId xmlns:a16="http://schemas.microsoft.com/office/drawing/2014/main" id="{2B262206-810B-4C60-954D-5592B96FF871}"/>
+                <a16:creationId xmlns:a16="http://schemas.microsoft.com/office/drawing/2014/main" id="{BD6A17CA-3916-4618-9CC3-CC81A02A3921}"/>
               </a:ext>
             </a:extLst>
           </p:cNvPr>
@@ -20017,7 +20015,7 @@
           <p:cNvPr id="3" name="">
             <a:extLst xmlns:a="http://schemas.openxmlformats.org/drawingml/2006/main">
               <a:ext uri="{FF2B5EF4-FFF2-40B4-BE49-F238E27FC236}">
-                <a16:creationId xmlns:a16="http://schemas.microsoft.com/office/drawing/2014/main" id="{4533D0AE-75D4-4237-8F20-4F71B3B41C94}"/>
+                <a16:creationId xmlns:a16="http://schemas.microsoft.com/office/drawing/2014/main" id="{D963DFE4-42FF-4E7A-BDEB-64878F6894FF}"/>
               </a:ext>
             </a:extLst>
           </p:cNvPr>
@@ -20052,7 +20050,7 @@
           <p:cNvPr id="4" name="kicker-04-marker">
             <a:extLst xmlns:a="http://schemas.openxmlformats.org/drawingml/2006/main">
               <a:ext uri="{FF2B5EF4-FFF2-40B4-BE49-F238E27FC236}">
-                <a16:creationId xmlns:a16="http://schemas.microsoft.com/office/drawing/2014/main" id="{E11F20F0-4B35-425D-A6E2-DC9088B2BDBB}"/>
+                <a16:creationId xmlns:a16="http://schemas.microsoft.com/office/drawing/2014/main" id="{EFCB056C-AE61-4F2E-A6D1-39F43DC23D18}"/>
               </a:ext>
             </a:extLst>
           </p:cNvPr>
@@ -20087,7 +20085,7 @@
           <p:cNvPr id="5" name="kicker-04-label">
             <a:extLst xmlns:a="http://schemas.openxmlformats.org/drawingml/2006/main">
               <a:ext uri="{FF2B5EF4-FFF2-40B4-BE49-F238E27FC236}">
-                <a16:creationId xmlns:a16="http://schemas.microsoft.com/office/drawing/2014/main" id="{8958F068-FE68-41F4-9DBB-799C6E45C6CC}"/>
+                <a16:creationId xmlns:a16="http://schemas.microsoft.com/office/drawing/2014/main" id="{891E0C62-E502-4D97-B434-A797B1E85F16}"/>
               </a:ext>
             </a:extLst>
           </p:cNvPr>
@@ -20151,7 +20149,7 @@
           <p:cNvPr id="6" name="">
             <a:extLst xmlns:a="http://schemas.openxmlformats.org/drawingml/2006/main">
               <a:ext uri="{FF2B5EF4-FFF2-40B4-BE49-F238E27FC236}">
-                <a16:creationId xmlns:a16="http://schemas.microsoft.com/office/drawing/2014/main" id="{1A6AA87C-DB75-4FBB-BB7C-7BDEDC6F3BB3}"/>
+                <a16:creationId xmlns:a16="http://schemas.microsoft.com/office/drawing/2014/main" id="{20F91303-07A6-4FFC-AD2D-60403A00B41D}"/>
               </a:ext>
             </a:extLst>
           </p:cNvPr>
@@ -20215,7 +20213,7 @@
           <p:cNvPr id="7" name="">
             <a:extLst xmlns:a="http://schemas.openxmlformats.org/drawingml/2006/main">
               <a:ext uri="{FF2B5EF4-FFF2-40B4-BE49-F238E27FC236}">
-                <a16:creationId xmlns:a16="http://schemas.microsoft.com/office/drawing/2014/main" id="{5768435B-A8E8-4D44-95BC-34ED5C35D7B2}"/>
+                <a16:creationId xmlns:a16="http://schemas.microsoft.com/office/drawing/2014/main" id="{03E3614D-47C7-479D-876B-6ADDC4035389}"/>
               </a:ext>
             </a:extLst>
           </p:cNvPr>
@@ -20279,7 +20277,7 @@
           <p:cNvPr id="8" name="">
             <a:extLst xmlns:a="http://schemas.openxmlformats.org/drawingml/2006/main">
               <a:ext uri="{FF2B5EF4-FFF2-40B4-BE49-F238E27FC236}">
-                <a16:creationId xmlns:a16="http://schemas.microsoft.com/office/drawing/2014/main" id="{4B3D1F5F-3E51-43C1-9A1C-B4823C74C7FF}"/>
+                <a16:creationId xmlns:a16="http://schemas.microsoft.com/office/drawing/2014/main" id="{55889785-EABF-4707-AF7C-7E655EE4CD39}"/>
               </a:ext>
             </a:extLst>
           </p:cNvPr>
@@ -20314,7 +20312,7 @@
           <p:cNvPr id="9" name="">
             <a:extLst xmlns:a="http://schemas.openxmlformats.org/drawingml/2006/main">
               <a:ext uri="{FF2B5EF4-FFF2-40B4-BE49-F238E27FC236}">
-                <a16:creationId xmlns:a16="http://schemas.microsoft.com/office/drawing/2014/main" id="{1AA4EC1D-2AC4-4E14-BA61-47C00F720DB3}"/>
+                <a16:creationId xmlns:a16="http://schemas.microsoft.com/office/drawing/2014/main" id="{7F9B99B2-1303-43B8-97E0-90E36940D7C3}"/>
               </a:ext>
             </a:extLst>
           </p:cNvPr>
@@ -20378,7 +20376,7 @@
           <p:cNvPr id="10" name="">
             <a:extLst xmlns:a="http://schemas.openxmlformats.org/drawingml/2006/main">
               <a:ext uri="{FF2B5EF4-FFF2-40B4-BE49-F238E27FC236}">
-                <a16:creationId xmlns:a16="http://schemas.microsoft.com/office/drawing/2014/main" id="{30CA53AD-FFD3-4B58-B667-20F2301368F3}"/>
+                <a16:creationId xmlns:a16="http://schemas.microsoft.com/office/drawing/2014/main" id="{93DA0AD0-4C8A-4E76-9079-3998459837D5}"/>
               </a:ext>
             </a:extLst>
           </p:cNvPr>
@@ -20442,7 +20440,7 @@
           <p:cNvPr id="11" name="">
             <a:extLst xmlns:a="http://schemas.openxmlformats.org/drawingml/2006/main">
               <a:ext uri="{FF2B5EF4-FFF2-40B4-BE49-F238E27FC236}">
-                <a16:creationId xmlns:a16="http://schemas.microsoft.com/office/drawing/2014/main" id="{50F2EF30-6A85-416F-B730-A3C959D93484}"/>
+                <a16:creationId xmlns:a16="http://schemas.microsoft.com/office/drawing/2014/main" id="{9D6F1F5C-3208-49B0-BE42-D735B7455AAC}"/>
               </a:ext>
             </a:extLst>
           </p:cNvPr>
@@ -20506,7 +20504,7 @@
           <p:cNvPr id="12" name="">
             <a:extLst xmlns:a="http://schemas.openxmlformats.org/drawingml/2006/main">
               <a:ext uri="{FF2B5EF4-FFF2-40B4-BE49-F238E27FC236}">
-                <a16:creationId xmlns:a16="http://schemas.microsoft.com/office/drawing/2014/main" id="{028E85AC-A910-4879-AFC1-88B8B32F10DA}"/>
+                <a16:creationId xmlns:a16="http://schemas.microsoft.com/office/drawing/2014/main" id="{3FC7050E-D8B6-4EEF-98AA-5C133B2E89D3}"/>
               </a:ext>
             </a:extLst>
           </p:cNvPr>
@@ -20541,7 +20539,7 @@
           <p:cNvPr id="13" name="">
             <a:extLst xmlns:a="http://schemas.openxmlformats.org/drawingml/2006/main">
               <a:ext uri="{FF2B5EF4-FFF2-40B4-BE49-F238E27FC236}">
-                <a16:creationId xmlns:a16="http://schemas.microsoft.com/office/drawing/2014/main" id="{69890973-E64B-4882-A9B6-1217A887B6B0}"/>
+                <a16:creationId xmlns:a16="http://schemas.microsoft.com/office/drawing/2014/main" id="{E6707351-625A-45BA-BFBF-F113131B30D4}"/>
               </a:ext>
             </a:extLst>
           </p:cNvPr>
@@ -20574,7 +20572,7 @@
           <p:cNvPr id="14" name="">
             <a:extLst xmlns:a="http://schemas.openxmlformats.org/drawingml/2006/main">
               <a:ext uri="{FF2B5EF4-FFF2-40B4-BE49-F238E27FC236}">
-                <a16:creationId xmlns:a16="http://schemas.microsoft.com/office/drawing/2014/main" id="{D727B6F6-7661-480A-B217-5A37E321FB21}"/>
+                <a16:creationId xmlns:a16="http://schemas.microsoft.com/office/drawing/2014/main" id="{420A03C5-BFB8-4CBE-B881-96E21F911BD1}"/>
               </a:ext>
             </a:extLst>
           </p:cNvPr>
@@ -20609,7 +20607,7 @@
           <p:cNvPr id="15" name="">
             <a:extLst xmlns:a="http://schemas.openxmlformats.org/drawingml/2006/main">
               <a:ext uri="{FF2B5EF4-FFF2-40B4-BE49-F238E27FC236}">
-                <a16:creationId xmlns:a16="http://schemas.microsoft.com/office/drawing/2014/main" id="{82578E37-FE00-448E-8283-40CFF98FDD41}"/>
+                <a16:creationId xmlns:a16="http://schemas.microsoft.com/office/drawing/2014/main" id="{0336DDC7-BF22-4F33-8CF2-A5409EC21FCB}"/>
               </a:ext>
             </a:extLst>
           </p:cNvPr>
@@ -20673,7 +20671,7 @@
           <p:cNvPr id="16" name="">
             <a:extLst xmlns:a="http://schemas.openxmlformats.org/drawingml/2006/main">
               <a:ext uri="{FF2B5EF4-FFF2-40B4-BE49-F238E27FC236}">
-                <a16:creationId xmlns:a16="http://schemas.microsoft.com/office/drawing/2014/main" id="{29256D26-975E-475F-BA28-EF0298B73E26}"/>
+                <a16:creationId xmlns:a16="http://schemas.microsoft.com/office/drawing/2014/main" id="{9755788C-67FC-4A25-9EA2-FC7D91FB47F3}"/>
               </a:ext>
             </a:extLst>
           </p:cNvPr>
@@ -20706,7 +20704,7 @@
           <p:cNvPr id="17" name="">
             <a:extLst xmlns:a="http://schemas.openxmlformats.org/drawingml/2006/main">
               <a:ext uri="{FF2B5EF4-FFF2-40B4-BE49-F238E27FC236}">
-                <a16:creationId xmlns:a16="http://schemas.microsoft.com/office/drawing/2014/main" id="{AF1775F3-E579-4D39-B41F-60A3DB90733A}"/>
+                <a16:creationId xmlns:a16="http://schemas.microsoft.com/office/drawing/2014/main" id="{93BAA03F-0D4A-4741-A184-B53C8C00D23F}"/>
               </a:ext>
             </a:extLst>
           </p:cNvPr>
@@ -20741,7 +20739,7 @@
           <p:cNvPr id="18" name="">
             <a:extLst xmlns:a="http://schemas.openxmlformats.org/drawingml/2006/main">
               <a:ext uri="{FF2B5EF4-FFF2-40B4-BE49-F238E27FC236}">
-                <a16:creationId xmlns:a16="http://schemas.microsoft.com/office/drawing/2014/main" id="{8AABE6F2-1EE2-4AF8-BC4B-D178DE18138C}"/>
+                <a16:creationId xmlns:a16="http://schemas.microsoft.com/office/drawing/2014/main" id="{4EB3F97D-E2F3-48B6-BE07-AD9CBE52F89B}"/>
               </a:ext>
             </a:extLst>
           </p:cNvPr>
@@ -20805,7 +20803,7 @@
           <p:cNvPr id="19" name="">
             <a:extLst xmlns:a="http://schemas.openxmlformats.org/drawingml/2006/main">
               <a:ext uri="{FF2B5EF4-FFF2-40B4-BE49-F238E27FC236}">
-                <a16:creationId xmlns:a16="http://schemas.microsoft.com/office/drawing/2014/main" id="{97BDF3B0-C9C2-4FD6-BE47-0CF4EC49EE2F}"/>
+                <a16:creationId xmlns:a16="http://schemas.microsoft.com/office/drawing/2014/main" id="{CB1CC871-11D1-42C6-ABF1-2D5371F924A5}"/>
               </a:ext>
             </a:extLst>
           </p:cNvPr>
@@ -20869,7 +20867,7 @@
           <p:cNvPr id="20" name="">
             <a:extLst xmlns:a="http://schemas.openxmlformats.org/drawingml/2006/main">
               <a:ext uri="{FF2B5EF4-FFF2-40B4-BE49-F238E27FC236}">
-                <a16:creationId xmlns:a16="http://schemas.microsoft.com/office/drawing/2014/main" id="{9C774052-CFC0-4FA1-BCAF-30BBC6B82276}"/>
+                <a16:creationId xmlns:a16="http://schemas.microsoft.com/office/drawing/2014/main" id="{49B024C4-DE99-4034-93AC-CB75299CD2EE}"/>
               </a:ext>
             </a:extLst>
           </p:cNvPr>
@@ -20904,7 +20902,7 @@
           <p:cNvPr id="21" name="">
             <a:extLst xmlns:a="http://schemas.openxmlformats.org/drawingml/2006/main">
               <a:ext uri="{FF2B5EF4-FFF2-40B4-BE49-F238E27FC236}">
-                <a16:creationId xmlns:a16="http://schemas.microsoft.com/office/drawing/2014/main" id="{0622B7DF-CFFC-4C70-A385-4D3016E318E6}"/>
+                <a16:creationId xmlns:a16="http://schemas.microsoft.com/office/drawing/2014/main" id="{CF8B4B5E-6545-4B46-A590-4F2ABA2A8C79}"/>
               </a:ext>
             </a:extLst>
           </p:cNvPr>
@@ -20937,7 +20935,7 @@
           <p:cNvPr id="22" name="">
             <a:extLst xmlns:a="http://schemas.openxmlformats.org/drawingml/2006/main">
               <a:ext uri="{FF2B5EF4-FFF2-40B4-BE49-F238E27FC236}">
-                <a16:creationId xmlns:a16="http://schemas.microsoft.com/office/drawing/2014/main" id="{B5DA3059-6D69-410C-8726-B61B862EE890}"/>
+                <a16:creationId xmlns:a16="http://schemas.microsoft.com/office/drawing/2014/main" id="{A18D7B45-9F02-4E06-9847-29B52AD95CDB}"/>
               </a:ext>
             </a:extLst>
           </p:cNvPr>
@@ -20972,7 +20970,7 @@
           <p:cNvPr id="23" name="">
             <a:extLst xmlns:a="http://schemas.openxmlformats.org/drawingml/2006/main">
               <a:ext uri="{FF2B5EF4-FFF2-40B4-BE49-F238E27FC236}">
-                <a16:creationId xmlns:a16="http://schemas.microsoft.com/office/drawing/2014/main" id="{E306C989-FB5B-40AE-805E-453DE7436C8E}"/>
+                <a16:creationId xmlns:a16="http://schemas.microsoft.com/office/drawing/2014/main" id="{292CC704-ECA8-4B15-ACC2-94CB6166EDD9}"/>
               </a:ext>
             </a:extLst>
           </p:cNvPr>
@@ -21036,7 +21034,7 @@
           <p:cNvPr id="24" name="">
             <a:extLst xmlns:a="http://schemas.openxmlformats.org/drawingml/2006/main">
               <a:ext uri="{FF2B5EF4-FFF2-40B4-BE49-F238E27FC236}">
-                <a16:creationId xmlns:a16="http://schemas.microsoft.com/office/drawing/2014/main" id="{DCACDB40-3B05-4737-A081-7C77B0F2B3EA}"/>
+                <a16:creationId xmlns:a16="http://schemas.microsoft.com/office/drawing/2014/main" id="{CFC8CB91-30A1-470F-A807-87B48B0B5F92}"/>
               </a:ext>
             </a:extLst>
           </p:cNvPr>
@@ -21100,7 +21098,7 @@
           <p:cNvPr id="25" name="">
             <a:extLst xmlns:a="http://schemas.openxmlformats.org/drawingml/2006/main">
               <a:ext uri="{FF2B5EF4-FFF2-40B4-BE49-F238E27FC236}">
-                <a16:creationId xmlns:a16="http://schemas.microsoft.com/office/drawing/2014/main" id="{E107EED5-3794-483F-B457-00F9E51C1793}"/>
+                <a16:creationId xmlns:a16="http://schemas.microsoft.com/office/drawing/2014/main" id="{95FB9122-87B1-4E4D-8094-8353F9416507}"/>
               </a:ext>
             </a:extLst>
           </p:cNvPr>
@@ -21135,7 +21133,7 @@
           <p:cNvPr id="26" name="">
             <a:extLst xmlns:a="http://schemas.openxmlformats.org/drawingml/2006/main">
               <a:ext uri="{FF2B5EF4-FFF2-40B4-BE49-F238E27FC236}">
-                <a16:creationId xmlns:a16="http://schemas.microsoft.com/office/drawing/2014/main" id="{DA086EB9-47A0-4E75-9359-D4352C41CDF8}"/>
+                <a16:creationId xmlns:a16="http://schemas.microsoft.com/office/drawing/2014/main" id="{23D13798-FA30-48E4-887B-ABA3B11468CD}"/>
               </a:ext>
             </a:extLst>
           </p:cNvPr>
@@ -21168,7 +21166,7 @@
           <p:cNvPr id="27" name="">
             <a:extLst xmlns:a="http://schemas.openxmlformats.org/drawingml/2006/main">
               <a:ext uri="{FF2B5EF4-FFF2-40B4-BE49-F238E27FC236}">
-                <a16:creationId xmlns:a16="http://schemas.microsoft.com/office/drawing/2014/main" id="{88411B23-908B-4C42-91A6-7902CC751141}"/>
+                <a16:creationId xmlns:a16="http://schemas.microsoft.com/office/drawing/2014/main" id="{3CBF7166-D411-4446-84B4-DD9CF3ED95F8}"/>
               </a:ext>
             </a:extLst>
           </p:cNvPr>
@@ -21203,7 +21201,7 @@
           <p:cNvPr id="28" name="">
             <a:extLst xmlns:a="http://schemas.openxmlformats.org/drawingml/2006/main">
               <a:ext uri="{FF2B5EF4-FFF2-40B4-BE49-F238E27FC236}">
-                <a16:creationId xmlns:a16="http://schemas.microsoft.com/office/drawing/2014/main" id="{E38F46CD-FD9B-4145-BF0C-7DEAF5375CE5}"/>
+                <a16:creationId xmlns:a16="http://schemas.microsoft.com/office/drawing/2014/main" id="{0DC48D8B-04E2-474A-BC9E-D9B54AC4D94F}"/>
               </a:ext>
             </a:extLst>
           </p:cNvPr>
@@ -21267,7 +21265,7 @@
           <p:cNvPr id="29" name="">
             <a:extLst xmlns:a="http://schemas.openxmlformats.org/drawingml/2006/main">
               <a:ext uri="{FF2B5EF4-FFF2-40B4-BE49-F238E27FC236}">
-                <a16:creationId xmlns:a16="http://schemas.microsoft.com/office/drawing/2014/main" id="{398DA07F-6864-4CBC-A003-BFDC48FD6733}"/>
+                <a16:creationId xmlns:a16="http://schemas.microsoft.com/office/drawing/2014/main" id="{4102F653-A4A8-4591-AED1-6163561ABDE7}"/>
               </a:ext>
             </a:extLst>
           </p:cNvPr>
@@ -21331,7 +21329,7 @@
           <p:cNvPr id="30" name="">
             <a:extLst xmlns:a="http://schemas.openxmlformats.org/drawingml/2006/main">
               <a:ext uri="{FF2B5EF4-FFF2-40B4-BE49-F238E27FC236}">
-                <a16:creationId xmlns:a16="http://schemas.microsoft.com/office/drawing/2014/main" id="{D373F099-CC09-439F-8E22-8EDCFD3E764C}"/>
+                <a16:creationId xmlns:a16="http://schemas.microsoft.com/office/drawing/2014/main" id="{69AA8958-BF53-4CBF-9C98-C0F6616F9905}"/>
               </a:ext>
             </a:extLst>
           </p:cNvPr>
@@ -21366,7 +21364,7 @@
           <p:cNvPr id="31" name="">
             <a:extLst xmlns:a="http://schemas.openxmlformats.org/drawingml/2006/main">
               <a:ext uri="{FF2B5EF4-FFF2-40B4-BE49-F238E27FC236}">
-                <a16:creationId xmlns:a16="http://schemas.microsoft.com/office/drawing/2014/main" id="{4765362E-1819-4A5F-96B7-C7FA8F73AF5F}"/>
+                <a16:creationId xmlns:a16="http://schemas.microsoft.com/office/drawing/2014/main" id="{97A22369-408B-4F92-9887-1A1FC8D245E2}"/>
               </a:ext>
             </a:extLst>
           </p:cNvPr>
@@ -21399,7 +21397,7 @@
           <p:cNvPr id="32" name="">
             <a:extLst xmlns:a="http://schemas.openxmlformats.org/drawingml/2006/main">
               <a:ext uri="{FF2B5EF4-FFF2-40B4-BE49-F238E27FC236}">
-                <a16:creationId xmlns:a16="http://schemas.microsoft.com/office/drawing/2014/main" id="{72235A3F-DC8C-4F31-B634-0AE2D2670243}"/>
+                <a16:creationId xmlns:a16="http://schemas.microsoft.com/office/drawing/2014/main" id="{260277F6-EE5F-4913-8885-ACA022E9562E}"/>
               </a:ext>
             </a:extLst>
           </p:cNvPr>
@@ -21434,7 +21432,7 @@
           <p:cNvPr id="33" name="">
             <a:extLst xmlns:a="http://schemas.openxmlformats.org/drawingml/2006/main">
               <a:ext uri="{FF2B5EF4-FFF2-40B4-BE49-F238E27FC236}">
-                <a16:creationId xmlns:a16="http://schemas.microsoft.com/office/drawing/2014/main" id="{599F890F-FD11-4C27-8C1D-A207A3394431}"/>
+                <a16:creationId xmlns:a16="http://schemas.microsoft.com/office/drawing/2014/main" id="{463DE36C-DF18-49E8-909C-E5A9EF5D4DDF}"/>
               </a:ext>
             </a:extLst>
           </p:cNvPr>
@@ -21498,7 +21496,7 @@
           <p:cNvPr id="34" name="">
             <a:extLst xmlns:a="http://schemas.openxmlformats.org/drawingml/2006/main">
               <a:ext uri="{FF2B5EF4-FFF2-40B4-BE49-F238E27FC236}">
-                <a16:creationId xmlns:a16="http://schemas.microsoft.com/office/drawing/2014/main" id="{0C4BFA70-790C-4742-96C9-D6F1EDD21875}"/>
+                <a16:creationId xmlns:a16="http://schemas.microsoft.com/office/drawing/2014/main" id="{A3BA4FF3-E533-44C7-B7C9-9386BFE4123B}"/>
               </a:ext>
             </a:extLst>
           </p:cNvPr>
@@ -21562,7 +21560,7 @@
           <p:cNvPr id="35" name="">
             <a:extLst xmlns:a="http://schemas.openxmlformats.org/drawingml/2006/main">
               <a:ext uri="{FF2B5EF4-FFF2-40B4-BE49-F238E27FC236}">
-                <a16:creationId xmlns:a16="http://schemas.microsoft.com/office/drawing/2014/main" id="{E433287C-68DF-4EC9-93B2-9E05F92005E1}"/>
+                <a16:creationId xmlns:a16="http://schemas.microsoft.com/office/drawing/2014/main" id="{CA63F83D-660A-41DD-8646-C2B7248A5F0D}"/>
               </a:ext>
             </a:extLst>
           </p:cNvPr>
@@ -21595,7 +21593,7 @@
           <p:cNvPr id="36" name="">
             <a:extLst xmlns:a="http://schemas.openxmlformats.org/drawingml/2006/main">
               <a:ext uri="{FF2B5EF4-FFF2-40B4-BE49-F238E27FC236}">
-                <a16:creationId xmlns:a16="http://schemas.microsoft.com/office/drawing/2014/main" id="{573B6505-1AB1-42AA-AB89-A3757BE7DC56}"/>
+                <a16:creationId xmlns:a16="http://schemas.microsoft.com/office/drawing/2014/main" id="{E133E0CA-C311-4569-84D6-5FEC430EB3E6}"/>
               </a:ext>
             </a:extLst>
           </p:cNvPr>
@@ -21630,7 +21628,7 @@
           <p:cNvPr id="37" name="">
             <a:extLst xmlns:a="http://schemas.openxmlformats.org/drawingml/2006/main">
               <a:ext uri="{FF2B5EF4-FFF2-40B4-BE49-F238E27FC236}">
-                <a16:creationId xmlns:a16="http://schemas.microsoft.com/office/drawing/2014/main" id="{A82A93DE-D1EE-4870-9881-0F0B68D230D1}"/>
+                <a16:creationId xmlns:a16="http://schemas.microsoft.com/office/drawing/2014/main" id="{CDF14A1A-F6A4-4991-B579-5D39864D12B0}"/>
               </a:ext>
             </a:extLst>
           </p:cNvPr>
@@ -21694,7 +21692,7 @@
           <p:cNvPr id="38" name="">
             <a:extLst xmlns:a="http://schemas.openxmlformats.org/drawingml/2006/main">
               <a:ext uri="{FF2B5EF4-FFF2-40B4-BE49-F238E27FC236}">
-                <a16:creationId xmlns:a16="http://schemas.microsoft.com/office/drawing/2014/main" id="{393808E9-50DD-42D7-A011-112BE7BFAA61}"/>
+                <a16:creationId xmlns:a16="http://schemas.microsoft.com/office/drawing/2014/main" id="{1A4CB365-7E36-42D1-8B4B-F267FF3331FC}"/>
               </a:ext>
             </a:extLst>
           </p:cNvPr>
@@ -21758,7 +21756,7 @@
           <p:cNvPr id="39" name="">
             <a:extLst xmlns:a="http://schemas.openxmlformats.org/drawingml/2006/main">
               <a:ext uri="{FF2B5EF4-FFF2-40B4-BE49-F238E27FC236}">
-                <a16:creationId xmlns:a16="http://schemas.microsoft.com/office/drawing/2014/main" id="{C97EFDF9-5537-4E32-970D-1FE717CC54A2}"/>
+                <a16:creationId xmlns:a16="http://schemas.microsoft.com/office/drawing/2014/main" id="{16A7C459-72B7-41B9-9A38-823AA6CC3A6E}"/>
               </a:ext>
             </a:extLst>
           </p:cNvPr>
@@ -21793,7 +21791,7 @@
           <p:cNvPr id="40" name="">
             <a:extLst xmlns:a="http://schemas.openxmlformats.org/drawingml/2006/main">
               <a:ext uri="{FF2B5EF4-FFF2-40B4-BE49-F238E27FC236}">
-                <a16:creationId xmlns:a16="http://schemas.microsoft.com/office/drawing/2014/main" id="{ECFE9DA0-0B2B-4B25-AC66-675BB511FF8A}"/>
+                <a16:creationId xmlns:a16="http://schemas.microsoft.com/office/drawing/2014/main" id="{AF54C32E-EE20-4677-8DFA-2ED05B2D8AFF}"/>
               </a:ext>
             </a:extLst>
           </p:cNvPr>
@@ -21826,7 +21824,7 @@
           <p:cNvPr id="41" name="">
             <a:extLst xmlns:a="http://schemas.openxmlformats.org/drawingml/2006/main">
               <a:ext uri="{FF2B5EF4-FFF2-40B4-BE49-F238E27FC236}">
-                <a16:creationId xmlns:a16="http://schemas.microsoft.com/office/drawing/2014/main" id="{BEAD9A60-347D-4027-8E6E-C3611D0B27BA}"/>
+                <a16:creationId xmlns:a16="http://schemas.microsoft.com/office/drawing/2014/main" id="{7C61513E-7575-4CBC-A90C-0C6932CBF2E6}"/>
               </a:ext>
             </a:extLst>
           </p:cNvPr>
@@ -21861,7 +21859,7 @@
           <p:cNvPr id="42" name="">
             <a:extLst xmlns:a="http://schemas.openxmlformats.org/drawingml/2006/main">
               <a:ext uri="{FF2B5EF4-FFF2-40B4-BE49-F238E27FC236}">
-                <a16:creationId xmlns:a16="http://schemas.microsoft.com/office/drawing/2014/main" id="{5A81CFA9-046A-4D98-B212-D1ECCDA102CB}"/>
+                <a16:creationId xmlns:a16="http://schemas.microsoft.com/office/drawing/2014/main" id="{6C50D521-4D63-480D-8943-E66BAABFA0E9}"/>
               </a:ext>
             </a:extLst>
           </p:cNvPr>
@@ -21925,7 +21923,7 @@
           <p:cNvPr id="43" name="">
             <a:extLst xmlns:a="http://schemas.openxmlformats.org/drawingml/2006/main">
               <a:ext uri="{FF2B5EF4-FFF2-40B4-BE49-F238E27FC236}">
-                <a16:creationId xmlns:a16="http://schemas.microsoft.com/office/drawing/2014/main" id="{8169F406-7053-47CF-9C7E-2A5FB3AF57B4}"/>
+                <a16:creationId xmlns:a16="http://schemas.microsoft.com/office/drawing/2014/main" id="{7099B3B4-40E5-4E0B-A68B-790D972595B6}"/>
               </a:ext>
             </a:extLst>
           </p:cNvPr>
@@ -21989,7 +21987,7 @@
           <p:cNvPr id="44" name="">
             <a:extLst xmlns:a="http://schemas.openxmlformats.org/drawingml/2006/main">
               <a:ext uri="{FF2B5EF4-FFF2-40B4-BE49-F238E27FC236}">
-                <a16:creationId xmlns:a16="http://schemas.microsoft.com/office/drawing/2014/main" id="{4DBCBB8B-182E-43F7-BFF1-9B97AFF45924}"/>
+                <a16:creationId xmlns:a16="http://schemas.microsoft.com/office/drawing/2014/main" id="{7A7A185C-0443-43C4-A1D2-D16978C010D8}"/>
               </a:ext>
             </a:extLst>
           </p:cNvPr>
@@ -22024,7 +22022,7 @@
           <p:cNvPr id="45" name="">
             <a:extLst xmlns:a="http://schemas.openxmlformats.org/drawingml/2006/main">
               <a:ext uri="{FF2B5EF4-FFF2-40B4-BE49-F238E27FC236}">
-                <a16:creationId xmlns:a16="http://schemas.microsoft.com/office/drawing/2014/main" id="{BF3AA8A7-6CBC-4357-B20C-E6C8890285BC}"/>
+                <a16:creationId xmlns:a16="http://schemas.microsoft.com/office/drawing/2014/main" id="{C8B29084-8D7E-4536-A5F5-157D183AB7D2}"/>
               </a:ext>
             </a:extLst>
           </p:cNvPr>
@@ -22057,7 +22055,7 @@
           <p:cNvPr id="46" name="">
             <a:extLst xmlns:a="http://schemas.openxmlformats.org/drawingml/2006/main">
               <a:ext uri="{FF2B5EF4-FFF2-40B4-BE49-F238E27FC236}">
-                <a16:creationId xmlns:a16="http://schemas.microsoft.com/office/drawing/2014/main" id="{08E53AB6-37B5-409B-AA88-4BA2EAED3609}"/>
+                <a16:creationId xmlns:a16="http://schemas.microsoft.com/office/drawing/2014/main" id="{89ACD784-ACA4-4FC2-8EF7-C85A9B50F080}"/>
               </a:ext>
             </a:extLst>
           </p:cNvPr>
@@ -22092,7 +22090,7 @@
           <p:cNvPr id="47" name="">
             <a:extLst xmlns:a="http://schemas.openxmlformats.org/drawingml/2006/main">
               <a:ext uri="{FF2B5EF4-FFF2-40B4-BE49-F238E27FC236}">
-                <a16:creationId xmlns:a16="http://schemas.microsoft.com/office/drawing/2014/main" id="{3B820AF2-A5FE-4E01-B58E-2A5A1750C7F4}"/>
+                <a16:creationId xmlns:a16="http://schemas.microsoft.com/office/drawing/2014/main" id="{4F045CAD-ED62-402C-B84C-C60DCE704707}"/>
               </a:ext>
             </a:extLst>
           </p:cNvPr>
@@ -22156,7 +22154,7 @@
           <p:cNvPr id="48" name="">
             <a:extLst xmlns:a="http://schemas.openxmlformats.org/drawingml/2006/main">
               <a:ext uri="{FF2B5EF4-FFF2-40B4-BE49-F238E27FC236}">
-                <a16:creationId xmlns:a16="http://schemas.microsoft.com/office/drawing/2014/main" id="{2358AE53-17E4-4E5C-8620-5C613D51416E}"/>
+                <a16:creationId xmlns:a16="http://schemas.microsoft.com/office/drawing/2014/main" id="{EC308545-3799-41EE-B79D-CC813C15A5EE}"/>
               </a:ext>
             </a:extLst>
           </p:cNvPr>
@@ -22220,7 +22218,7 @@
           <p:cNvPr id="49" name="">
             <a:extLst xmlns:a="http://schemas.openxmlformats.org/drawingml/2006/main">
               <a:ext uri="{FF2B5EF4-FFF2-40B4-BE49-F238E27FC236}">
-                <a16:creationId xmlns:a16="http://schemas.microsoft.com/office/drawing/2014/main" id="{B5379A3B-66AB-40E1-BE0E-CAB7EA6ED2AE}"/>
+                <a16:creationId xmlns:a16="http://schemas.microsoft.com/office/drawing/2014/main" id="{B53F6F8A-8281-4548-8493-6ADE1DF98B03}"/>
               </a:ext>
             </a:extLst>
           </p:cNvPr>
@@ -22253,7 +22251,7 @@
           <p:cNvPr id="50" name="">
             <a:extLst xmlns:a="http://schemas.openxmlformats.org/drawingml/2006/main">
               <a:ext uri="{FF2B5EF4-FFF2-40B4-BE49-F238E27FC236}">
-                <a16:creationId xmlns:a16="http://schemas.microsoft.com/office/drawing/2014/main" id="{D3914892-60F2-4189-B775-C33E16261CC3}"/>
+                <a16:creationId xmlns:a16="http://schemas.microsoft.com/office/drawing/2014/main" id="{FA958832-6233-43A9-931E-1758367E37D5}"/>
               </a:ext>
             </a:extLst>
           </p:cNvPr>
@@ -22317,7 +22315,7 @@
           <p:cNvPr id="51" name="">
             <a:extLst xmlns:a="http://schemas.openxmlformats.org/drawingml/2006/main">
               <a:ext uri="{FF2B5EF4-FFF2-40B4-BE49-F238E27FC236}">
-                <a16:creationId xmlns:a16="http://schemas.microsoft.com/office/drawing/2014/main" id="{921480FE-36EB-4DE1-B440-F7B45A80FD19}"/>
+                <a16:creationId xmlns:a16="http://schemas.microsoft.com/office/drawing/2014/main" id="{BC80B4D2-F9A5-4D91-885F-948EC19701EF}"/>
               </a:ext>
             </a:extLst>
           </p:cNvPr>
@@ -22352,7 +22350,7 @@
           <p:cNvPr id="52" name="">
             <a:extLst xmlns:a="http://schemas.openxmlformats.org/drawingml/2006/main">
               <a:ext uri="{FF2B5EF4-FFF2-40B4-BE49-F238E27FC236}">
-                <a16:creationId xmlns:a16="http://schemas.microsoft.com/office/drawing/2014/main" id="{6342065F-F06D-44CB-B2FF-17B02B65BAFA}"/>
+                <a16:creationId xmlns:a16="http://schemas.microsoft.com/office/drawing/2014/main" id="{D4056A31-1C37-4804-9D8A-66DB9F2DB7D6}"/>
               </a:ext>
             </a:extLst>
           </p:cNvPr>
@@ -22416,7 +22414,7 @@
           <p:cNvPr id="53" name="">
             <a:extLst xmlns:a="http://schemas.openxmlformats.org/drawingml/2006/main">
               <a:ext uri="{FF2B5EF4-FFF2-40B4-BE49-F238E27FC236}">
-                <a16:creationId xmlns:a16="http://schemas.microsoft.com/office/drawing/2014/main" id="{842DCBC1-B891-4AB3-A775-E47F5ABD9CB6}"/>
+                <a16:creationId xmlns:a16="http://schemas.microsoft.com/office/drawing/2014/main" id="{96F7F99A-6CB8-4BA8-84A9-7195C36F1066}"/>
               </a:ext>
             </a:extLst>
           </p:cNvPr>
@@ -22480,7 +22478,7 @@
           <p:cNvPr id="54" name="">
             <a:extLst xmlns:a="http://schemas.openxmlformats.org/drawingml/2006/main">
               <a:ext uri="{FF2B5EF4-FFF2-40B4-BE49-F238E27FC236}">
-                <a16:creationId xmlns:a16="http://schemas.microsoft.com/office/drawing/2014/main" id="{F84B06D8-1CDD-4CF0-9327-2B28C21FE652}"/>
+                <a16:creationId xmlns:a16="http://schemas.microsoft.com/office/drawing/2014/main" id="{96CD5F42-9720-46FD-A5B5-4F026D13AAF9}"/>
               </a:ext>
             </a:extLst>
           </p:cNvPr>
@@ -22544,7 +22542,7 @@
           <p:cNvPr id="55" name="">
             <a:extLst xmlns:a="http://schemas.openxmlformats.org/drawingml/2006/main">
               <a:ext uri="{FF2B5EF4-FFF2-40B4-BE49-F238E27FC236}">
-                <a16:creationId xmlns:a16="http://schemas.microsoft.com/office/drawing/2014/main" id="{931925CD-908A-4F9C-B179-F42AD8CB65FF}"/>
+                <a16:creationId xmlns:a16="http://schemas.microsoft.com/office/drawing/2014/main" id="{38C43A95-4DA4-4182-81CB-13C169254E68}"/>
               </a:ext>
             </a:extLst>
           </p:cNvPr>
@@ -22579,7 +22577,7 @@
           <p:cNvPr id="56" name="">
             <a:extLst xmlns:a="http://schemas.openxmlformats.org/drawingml/2006/main">
               <a:ext uri="{FF2B5EF4-FFF2-40B4-BE49-F238E27FC236}">
-                <a16:creationId xmlns:a16="http://schemas.microsoft.com/office/drawing/2014/main" id="{6C36B413-6250-4FFE-B4E4-AE3AF84F7683}"/>
+                <a16:creationId xmlns:a16="http://schemas.microsoft.com/office/drawing/2014/main" id="{81750F4D-5F86-43E0-9522-CE4CF780CE4F}"/>
               </a:ext>
             </a:extLst>
           </p:cNvPr>
@@ -22614,7 +22612,7 @@
           <p:cNvPr id="57" name="">
             <a:extLst xmlns:a="http://schemas.openxmlformats.org/drawingml/2006/main">
               <a:ext uri="{FF2B5EF4-FFF2-40B4-BE49-F238E27FC236}">
-                <a16:creationId xmlns:a16="http://schemas.microsoft.com/office/drawing/2014/main" id="{ADFA0672-F36B-4831-8BFF-1E5C1646BACC}"/>
+                <a16:creationId xmlns:a16="http://schemas.microsoft.com/office/drawing/2014/main" id="{7C5015DA-08CA-4601-A181-288C13A4488D}"/>
               </a:ext>
             </a:extLst>
           </p:cNvPr>
@@ -22649,7 +22647,7 @@
           <p:cNvPr id="58" name="kicker-04-marker">
             <a:extLst xmlns:a="http://schemas.openxmlformats.org/drawingml/2006/main">
               <a:ext uri="{FF2B5EF4-FFF2-40B4-BE49-F238E27FC236}">
-                <a16:creationId xmlns:a16="http://schemas.microsoft.com/office/drawing/2014/main" id="{5F86795E-1E51-4B2C-886F-346A98AFD3C3}"/>
+                <a16:creationId xmlns:a16="http://schemas.microsoft.com/office/drawing/2014/main" id="{A6BE8717-3773-4ECB-96B7-54C340BFD3CC}"/>
               </a:ext>
             </a:extLst>
           </p:cNvPr>
@@ -22684,7 +22682,7 @@
           <p:cNvPr id="59" name="kicker-04-label">
             <a:extLst xmlns:a="http://schemas.openxmlformats.org/drawingml/2006/main">
               <a:ext uri="{FF2B5EF4-FFF2-40B4-BE49-F238E27FC236}">
-                <a16:creationId xmlns:a16="http://schemas.microsoft.com/office/drawing/2014/main" id="{47E93023-BCF7-4059-96F0-96F81FF7B3E4}"/>
+                <a16:creationId xmlns:a16="http://schemas.microsoft.com/office/drawing/2014/main" id="{2B603FEF-5764-43E6-9483-FDBE3F75C5E7}"/>
               </a:ext>
             </a:extLst>
           </p:cNvPr>
@@ -22748,7 +22746,7 @@
           <p:cNvPr id="60" name="">
             <a:extLst xmlns:a="http://schemas.openxmlformats.org/drawingml/2006/main">
               <a:ext uri="{FF2B5EF4-FFF2-40B4-BE49-F238E27FC236}">
-                <a16:creationId xmlns:a16="http://schemas.microsoft.com/office/drawing/2014/main" id="{E363CF86-E71F-4C9E-8D46-7B3EC1BE763C}"/>
+                <a16:creationId xmlns:a16="http://schemas.microsoft.com/office/drawing/2014/main" id="{F5051ECB-A9D9-4049-A38F-C959CB81DA9E}"/>
               </a:ext>
             </a:extLst>
           </p:cNvPr>
@@ -22812,7 +22810,7 @@
           <p:cNvPr id="61" name="">
             <a:extLst xmlns:a="http://schemas.openxmlformats.org/drawingml/2006/main">
               <a:ext uri="{FF2B5EF4-FFF2-40B4-BE49-F238E27FC236}">
-                <a16:creationId xmlns:a16="http://schemas.microsoft.com/office/drawing/2014/main" id="{825206F6-D080-4444-88CA-5BC2885A5FD8}"/>
+                <a16:creationId xmlns:a16="http://schemas.microsoft.com/office/drawing/2014/main" id="{C08EBF18-C1B4-453A-AE36-25BCE2EEE971}"/>
               </a:ext>
             </a:extLst>
           </p:cNvPr>
@@ -22876,7 +22874,7 @@
           <p:cNvPr id="62" name="">
             <a:extLst xmlns:a="http://schemas.openxmlformats.org/drawingml/2006/main">
               <a:ext uri="{FF2B5EF4-FFF2-40B4-BE49-F238E27FC236}">
-                <a16:creationId xmlns:a16="http://schemas.microsoft.com/office/drawing/2014/main" id="{C9B5BB14-8EF9-4B7E-AA92-15D1C310379A}"/>
+                <a16:creationId xmlns:a16="http://schemas.microsoft.com/office/drawing/2014/main" id="{98E945A5-77B3-4E74-A3FB-824886109CAF}"/>
               </a:ext>
             </a:extLst>
           </p:cNvPr>
@@ -22911,7 +22909,7 @@
           <p:cNvPr id="63" name="">
             <a:extLst xmlns:a="http://schemas.openxmlformats.org/drawingml/2006/main">
               <a:ext uri="{FF2B5EF4-FFF2-40B4-BE49-F238E27FC236}">
-                <a16:creationId xmlns:a16="http://schemas.microsoft.com/office/drawing/2014/main" id="{F5099B5A-A365-4B78-A810-DAE9B53C0F1D}"/>
+                <a16:creationId xmlns:a16="http://schemas.microsoft.com/office/drawing/2014/main" id="{5ACEBE6A-FBD6-4777-AF83-EE3B51F1956F}"/>
               </a:ext>
             </a:extLst>
           </p:cNvPr>
@@ -22946,7 +22944,7 @@
           <p:cNvPr id="64" name="">
             <a:extLst xmlns:a="http://schemas.openxmlformats.org/drawingml/2006/main">
               <a:ext uri="{FF2B5EF4-FFF2-40B4-BE49-F238E27FC236}">
-                <a16:creationId xmlns:a16="http://schemas.microsoft.com/office/drawing/2014/main" id="{A3FCC92D-1559-4151-8CBE-3BAEF7780AB8}"/>
+                <a16:creationId xmlns:a16="http://schemas.microsoft.com/office/drawing/2014/main" id="{53054EF3-2FAA-4782-9CAC-9B1214CAC397}"/>
               </a:ext>
             </a:extLst>
           </p:cNvPr>
@@ -22981,7 +22979,7 @@
           <p:cNvPr id="65" name="">
             <a:extLst xmlns:a="http://schemas.openxmlformats.org/drawingml/2006/main">
               <a:ext uri="{FF2B5EF4-FFF2-40B4-BE49-F238E27FC236}">
-                <a16:creationId xmlns:a16="http://schemas.microsoft.com/office/drawing/2014/main" id="{F1285AE4-260A-4D25-977E-2E74CE425F76}"/>
+                <a16:creationId xmlns:a16="http://schemas.microsoft.com/office/drawing/2014/main" id="{46767127-A13E-425F-A85B-B172FBF0D952}"/>
               </a:ext>
             </a:extLst>
           </p:cNvPr>
@@ -23016,7 +23014,7 @@
           <p:cNvPr id="66" name="">
             <a:extLst xmlns:a="http://schemas.openxmlformats.org/drawingml/2006/main">
               <a:ext uri="{FF2B5EF4-FFF2-40B4-BE49-F238E27FC236}">
-                <a16:creationId xmlns:a16="http://schemas.microsoft.com/office/drawing/2014/main" id="{7E3E4D06-5594-4413-9695-55021834B3B7}"/>
+                <a16:creationId xmlns:a16="http://schemas.microsoft.com/office/drawing/2014/main" id="{129BE728-CA9B-4345-BB62-F2BC8CD2D006}"/>
               </a:ext>
             </a:extLst>
           </p:cNvPr>
@@ -23080,7 +23078,7 @@
           <p:cNvPr id="67" name="">
             <a:extLst xmlns:a="http://schemas.openxmlformats.org/drawingml/2006/main">
               <a:ext uri="{FF2B5EF4-FFF2-40B4-BE49-F238E27FC236}">
-                <a16:creationId xmlns:a16="http://schemas.microsoft.com/office/drawing/2014/main" id="{AA144164-9BCA-41DD-A35C-1D2806FDFE5C}"/>
+                <a16:creationId xmlns:a16="http://schemas.microsoft.com/office/drawing/2014/main" id="{E3A00315-E6A7-4EB5-A941-D987780FD8F8}"/>
               </a:ext>
             </a:extLst>
           </p:cNvPr>
@@ -23144,7 +23142,7 @@
           <p:cNvPr id="68" name="">
             <a:extLst xmlns:a="http://schemas.openxmlformats.org/drawingml/2006/main">
               <a:ext uri="{FF2B5EF4-FFF2-40B4-BE49-F238E27FC236}">
-                <a16:creationId xmlns:a16="http://schemas.microsoft.com/office/drawing/2014/main" id="{DE0AD854-D87B-49D6-8086-E3E504AD906E}"/>
+                <a16:creationId xmlns:a16="http://schemas.microsoft.com/office/drawing/2014/main" id="{D4E9FA3D-1D0C-4148-88D6-D2834EFD8C31}"/>
               </a:ext>
             </a:extLst>
           </p:cNvPr>
@@ -23206,7 +23204,7 @@
     </p:spTree>
     <p:extLst>
       <p:ext uri="{BB962C8B-B14F-4D97-AF65-F5344CB8AC3E}">
-        <p14:creationId xmlns:p14="http://schemas.microsoft.com/office/powerpoint/2010/main" val="1588679972"/>
+        <p14:creationId xmlns:p14="http://schemas.microsoft.com/office/powerpoint/2010/main" val="1802382885"/>
       </p:ext>
     </p:extLst>
   </p:cSld>
@@ -23230,7 +23228,7 @@
           <p:cNvPr id="1" name="">
             <a:extLst xmlns:a="http://schemas.openxmlformats.org/drawingml/2006/main">
               <a:ext uri="{FF2B5EF4-FFF2-40B4-BE49-F238E27FC236}">
-                <a16:creationId xmlns:a16="http://schemas.microsoft.com/office/drawing/2014/main" id="{E829B760-CA81-4B10-88C9-F0BE7AA8FA8E}"/>
+                <a16:creationId xmlns:a16="http://schemas.microsoft.com/office/drawing/2014/main" id="{819EC5F0-D873-45AB-9B12-040A3C0A9AC5}"/>
               </a:ext>
             </a:extLst>
           </p:cNvPr>
@@ -23265,7 +23263,7 @@
           <p:cNvPr id="2" name="">
             <a:extLst xmlns:a="http://schemas.openxmlformats.org/drawingml/2006/main">
               <a:ext uri="{FF2B5EF4-FFF2-40B4-BE49-F238E27FC236}">
-                <a16:creationId xmlns:a16="http://schemas.microsoft.com/office/drawing/2014/main" id="{6516CD8B-5AEB-45AD-991D-6C806D5D860D}"/>
+                <a16:creationId xmlns:a16="http://schemas.microsoft.com/office/drawing/2014/main" id="{1B388787-B922-4B19-92FE-26E9734DF055}"/>
               </a:ext>
             </a:extLst>
           </p:cNvPr>
@@ -23300,7 +23298,7 @@
           <p:cNvPr id="3" name="">
             <a:extLst xmlns:a="http://schemas.openxmlformats.org/drawingml/2006/main">
               <a:ext uri="{FF2B5EF4-FFF2-40B4-BE49-F238E27FC236}">
-                <a16:creationId xmlns:a16="http://schemas.microsoft.com/office/drawing/2014/main" id="{05C5B360-05FB-4327-BD2B-A8177AA226F1}"/>
+                <a16:creationId xmlns:a16="http://schemas.microsoft.com/office/drawing/2014/main" id="{A475AC3F-3DF1-4282-B7EA-D0CA0D21B609}"/>
               </a:ext>
             </a:extLst>
           </p:cNvPr>
@@ -23335,7 +23333,7 @@
           <p:cNvPr id="4" name="kicker-04-marker">
             <a:extLst xmlns:a="http://schemas.openxmlformats.org/drawingml/2006/main">
               <a:ext uri="{FF2B5EF4-FFF2-40B4-BE49-F238E27FC236}">
-                <a16:creationId xmlns:a16="http://schemas.microsoft.com/office/drawing/2014/main" id="{609E5FCB-F379-4244-BED1-E8D0E251B72E}"/>
+                <a16:creationId xmlns:a16="http://schemas.microsoft.com/office/drawing/2014/main" id="{A496ADB5-F372-47F3-9276-96589393F0DE}"/>
               </a:ext>
             </a:extLst>
           </p:cNvPr>
@@ -23370,7 +23368,7 @@
           <p:cNvPr id="5" name="kicker-04-label">
             <a:extLst xmlns:a="http://schemas.openxmlformats.org/drawingml/2006/main">
               <a:ext uri="{FF2B5EF4-FFF2-40B4-BE49-F238E27FC236}">
-                <a16:creationId xmlns:a16="http://schemas.microsoft.com/office/drawing/2014/main" id="{15BAB363-D484-43A7-8B59-DB7429A0EECC}"/>
+                <a16:creationId xmlns:a16="http://schemas.microsoft.com/office/drawing/2014/main" id="{73DAC2BB-C7DB-47B7-AA39-4FF16C15723F}"/>
               </a:ext>
             </a:extLst>
           </p:cNvPr>
@@ -23434,7 +23432,7 @@
           <p:cNvPr id="6" name="">
             <a:extLst xmlns:a="http://schemas.openxmlformats.org/drawingml/2006/main">
               <a:ext uri="{FF2B5EF4-FFF2-40B4-BE49-F238E27FC236}">
-                <a16:creationId xmlns:a16="http://schemas.microsoft.com/office/drawing/2014/main" id="{7146C703-0A6A-41AF-B81E-E279AF96F09E}"/>
+                <a16:creationId xmlns:a16="http://schemas.microsoft.com/office/drawing/2014/main" id="{9342B5B3-699C-4A4A-815B-556D0762755E}"/>
               </a:ext>
             </a:extLst>
           </p:cNvPr>
@@ -23498,7 +23496,7 @@
           <p:cNvPr id="7" name="">
             <a:extLst xmlns:a="http://schemas.openxmlformats.org/drawingml/2006/main">
               <a:ext uri="{FF2B5EF4-FFF2-40B4-BE49-F238E27FC236}">
-                <a16:creationId xmlns:a16="http://schemas.microsoft.com/office/drawing/2014/main" id="{260C22FE-8BF0-4D67-A362-65B56EB2634D}"/>
+                <a16:creationId xmlns:a16="http://schemas.microsoft.com/office/drawing/2014/main" id="{306D2CFC-0D2E-4999-BF3F-537DA7BD66A8}"/>
               </a:ext>
             </a:extLst>
           </p:cNvPr>
@@ -23562,7 +23560,7 @@
           <p:cNvPr id="8" name="">
             <a:extLst xmlns:a="http://schemas.openxmlformats.org/drawingml/2006/main">
               <a:ext uri="{FF2B5EF4-FFF2-40B4-BE49-F238E27FC236}">
-                <a16:creationId xmlns:a16="http://schemas.microsoft.com/office/drawing/2014/main" id="{20A09879-4E14-43D6-9F36-F3EAA13DB04A}"/>
+                <a16:creationId xmlns:a16="http://schemas.microsoft.com/office/drawing/2014/main" id="{69BEE4B3-6EAF-44E6-BF4F-52FC0DC7FE02}"/>
               </a:ext>
             </a:extLst>
           </p:cNvPr>
@@ -23597,7 +23595,7 @@
           <p:cNvPr id="9" name="">
             <a:extLst xmlns:a="http://schemas.openxmlformats.org/drawingml/2006/main">
               <a:ext uri="{FF2B5EF4-FFF2-40B4-BE49-F238E27FC236}">
-                <a16:creationId xmlns:a16="http://schemas.microsoft.com/office/drawing/2014/main" id="{2CAD2547-37DE-467C-90E9-2EB6DFBDCDDC}"/>
+                <a16:creationId xmlns:a16="http://schemas.microsoft.com/office/drawing/2014/main" id="{7C2B2BAE-2C3E-4069-8EC9-6400D8FEB901}"/>
               </a:ext>
             </a:extLst>
           </p:cNvPr>
@@ -23661,7 +23659,7 @@
           <p:cNvPr id="10" name="">
             <a:extLst xmlns:a="http://schemas.openxmlformats.org/drawingml/2006/main">
               <a:ext uri="{FF2B5EF4-FFF2-40B4-BE49-F238E27FC236}">
-                <a16:creationId xmlns:a16="http://schemas.microsoft.com/office/drawing/2014/main" id="{C306A0B0-3CC3-41A3-9712-421D9B528256}"/>
+                <a16:creationId xmlns:a16="http://schemas.microsoft.com/office/drawing/2014/main" id="{F6A7780F-8B24-4A71-8D5C-324F6510811C}"/>
               </a:ext>
             </a:extLst>
           </p:cNvPr>
@@ -23725,7 +23723,7 @@
           <p:cNvPr id="11" name="">
             <a:extLst xmlns:a="http://schemas.openxmlformats.org/drawingml/2006/main">
               <a:ext uri="{FF2B5EF4-FFF2-40B4-BE49-F238E27FC236}">
-                <a16:creationId xmlns:a16="http://schemas.microsoft.com/office/drawing/2014/main" id="{8A91D03D-16C6-4B1F-AAE6-897384F5644E}"/>
+                <a16:creationId xmlns:a16="http://schemas.microsoft.com/office/drawing/2014/main" id="{2EC8DAE3-9235-4B7E-89DD-D6476CAA16B3}"/>
               </a:ext>
             </a:extLst>
           </p:cNvPr>
@@ -23789,7 +23787,7 @@
           <p:cNvPr id="12" name="">
             <a:extLst xmlns:a="http://schemas.openxmlformats.org/drawingml/2006/main">
               <a:ext uri="{FF2B5EF4-FFF2-40B4-BE49-F238E27FC236}">
-                <a16:creationId xmlns:a16="http://schemas.microsoft.com/office/drawing/2014/main" id="{CB019512-A571-4314-87F3-5CF9003DB8CD}"/>
+                <a16:creationId xmlns:a16="http://schemas.microsoft.com/office/drawing/2014/main" id="{EE997E6E-169F-4DFC-A9A9-EA3BB547A43B}"/>
               </a:ext>
             </a:extLst>
           </p:cNvPr>
@@ -23822,7 +23820,7 @@
           <p:cNvPr id="13" name="">
             <a:extLst xmlns:a="http://schemas.openxmlformats.org/drawingml/2006/main">
               <a:ext uri="{FF2B5EF4-FFF2-40B4-BE49-F238E27FC236}">
-                <a16:creationId xmlns:a16="http://schemas.microsoft.com/office/drawing/2014/main" id="{E17749F5-453F-449E-AA5C-43DA798DC9C3}"/>
+                <a16:creationId xmlns:a16="http://schemas.microsoft.com/office/drawing/2014/main" id="{479F78B5-9414-44F6-B830-22658C40454E}"/>
               </a:ext>
             </a:extLst>
           </p:cNvPr>
@@ -23857,7 +23855,7 @@
           <p:cNvPr id="14" name="">
             <a:extLst xmlns:a="http://schemas.openxmlformats.org/drawingml/2006/main">
               <a:ext uri="{FF2B5EF4-FFF2-40B4-BE49-F238E27FC236}">
-                <a16:creationId xmlns:a16="http://schemas.microsoft.com/office/drawing/2014/main" id="{89DD5F15-ABDB-42BA-9F26-690A308CDE5A}"/>
+                <a16:creationId xmlns:a16="http://schemas.microsoft.com/office/drawing/2014/main" id="{161C0490-F955-4E17-AF8E-1335FFB589AA}"/>
               </a:ext>
             </a:extLst>
           </p:cNvPr>
@@ -23921,7 +23919,7 @@
           <p:cNvPr id="15" name="">
             <a:extLst xmlns:a="http://schemas.openxmlformats.org/drawingml/2006/main">
               <a:ext uri="{FF2B5EF4-FFF2-40B4-BE49-F238E27FC236}">
-                <a16:creationId xmlns:a16="http://schemas.microsoft.com/office/drawing/2014/main" id="{03E15FDF-1DFE-402C-A8B5-8FEF91FCD2F8}"/>
+                <a16:creationId xmlns:a16="http://schemas.microsoft.com/office/drawing/2014/main" id="{3BCD6021-6C30-4D54-8D1D-C97BF9368FAD}"/>
               </a:ext>
             </a:extLst>
           </p:cNvPr>
@@ -23985,7 +23983,7 @@
           <p:cNvPr id="16" name="">
             <a:extLst xmlns:a="http://schemas.openxmlformats.org/drawingml/2006/main">
               <a:ext uri="{FF2B5EF4-FFF2-40B4-BE49-F238E27FC236}">
-                <a16:creationId xmlns:a16="http://schemas.microsoft.com/office/drawing/2014/main" id="{85C2FA16-0CA3-47D9-A7DB-2F1622DC9D19}"/>
+                <a16:creationId xmlns:a16="http://schemas.microsoft.com/office/drawing/2014/main" id="{3223434B-42C2-4690-A210-D9FDA3262F4E}"/>
               </a:ext>
             </a:extLst>
           </p:cNvPr>
@@ -24018,7 +24016,7 @@
           <p:cNvPr id="17" name="">
             <a:extLst xmlns:a="http://schemas.openxmlformats.org/drawingml/2006/main">
               <a:ext uri="{FF2B5EF4-FFF2-40B4-BE49-F238E27FC236}">
-                <a16:creationId xmlns:a16="http://schemas.microsoft.com/office/drawing/2014/main" id="{AB42FA22-22F0-433B-91E5-00A32ECD41BC}"/>
+                <a16:creationId xmlns:a16="http://schemas.microsoft.com/office/drawing/2014/main" id="{5BA7A1E3-5AB6-48B8-A1A3-A2365838E8C2}"/>
               </a:ext>
             </a:extLst>
           </p:cNvPr>
@@ -24053,7 +24051,7 @@
           <p:cNvPr id="18" name="">
             <a:extLst xmlns:a="http://schemas.openxmlformats.org/drawingml/2006/main">
               <a:ext uri="{FF2B5EF4-FFF2-40B4-BE49-F238E27FC236}">
-                <a16:creationId xmlns:a16="http://schemas.microsoft.com/office/drawing/2014/main" id="{D78A9D53-4C84-4A7D-B790-C5DEF449A09F}"/>
+                <a16:creationId xmlns:a16="http://schemas.microsoft.com/office/drawing/2014/main" id="{FAAA9C27-ECAE-4E99-A295-B1EBE600722A}"/>
               </a:ext>
             </a:extLst>
           </p:cNvPr>
@@ -24117,7 +24115,7 @@
           <p:cNvPr id="19" name="">
             <a:extLst xmlns:a="http://schemas.openxmlformats.org/drawingml/2006/main">
               <a:ext uri="{FF2B5EF4-FFF2-40B4-BE49-F238E27FC236}">
-                <a16:creationId xmlns:a16="http://schemas.microsoft.com/office/drawing/2014/main" id="{61F69260-836B-4D45-A9F8-637231BF702A}"/>
+                <a16:creationId xmlns:a16="http://schemas.microsoft.com/office/drawing/2014/main" id="{8CB84DE3-B1F3-4954-BBB7-C7206EC70B9F}"/>
               </a:ext>
             </a:extLst>
           </p:cNvPr>
@@ -24181,7 +24179,7 @@
           <p:cNvPr id="20" name="">
             <a:extLst xmlns:a="http://schemas.openxmlformats.org/drawingml/2006/main">
               <a:ext uri="{FF2B5EF4-FFF2-40B4-BE49-F238E27FC236}">
-                <a16:creationId xmlns:a16="http://schemas.microsoft.com/office/drawing/2014/main" id="{B7D5E3C0-50CB-44E6-B254-8EAE8B631A0C}"/>
+                <a16:creationId xmlns:a16="http://schemas.microsoft.com/office/drawing/2014/main" id="{90906E83-CF29-4570-9C7C-960E93CC190E}"/>
               </a:ext>
             </a:extLst>
           </p:cNvPr>
@@ -24214,7 +24212,7 @@
           <p:cNvPr id="21" name="">
             <a:extLst xmlns:a="http://schemas.openxmlformats.org/drawingml/2006/main">
               <a:ext uri="{FF2B5EF4-FFF2-40B4-BE49-F238E27FC236}">
-                <a16:creationId xmlns:a16="http://schemas.microsoft.com/office/drawing/2014/main" id="{CE118128-C317-4DFE-87EF-39797A276AEE}"/>
+                <a16:creationId xmlns:a16="http://schemas.microsoft.com/office/drawing/2014/main" id="{41802840-79E4-437B-9A08-F81836EFCA1D}"/>
               </a:ext>
             </a:extLst>
           </p:cNvPr>
@@ -24249,7 +24247,7 @@
           <p:cNvPr id="22" name="">
             <a:extLst xmlns:a="http://schemas.openxmlformats.org/drawingml/2006/main">
               <a:ext uri="{FF2B5EF4-FFF2-40B4-BE49-F238E27FC236}">
-                <a16:creationId xmlns:a16="http://schemas.microsoft.com/office/drawing/2014/main" id="{DA4C0EA0-0423-4609-B4E7-9BFE918D3719}"/>
+                <a16:creationId xmlns:a16="http://schemas.microsoft.com/office/drawing/2014/main" id="{2791C22E-2AFF-48BE-8DE9-7199B19C4CBB}"/>
               </a:ext>
             </a:extLst>
           </p:cNvPr>
@@ -24313,7 +24311,7 @@
           <p:cNvPr id="23" name="">
             <a:extLst xmlns:a="http://schemas.openxmlformats.org/drawingml/2006/main">
               <a:ext uri="{FF2B5EF4-FFF2-40B4-BE49-F238E27FC236}">
-                <a16:creationId xmlns:a16="http://schemas.microsoft.com/office/drawing/2014/main" id="{8D5FD829-8BF4-4802-8B4F-783BC6229DAF}"/>
+                <a16:creationId xmlns:a16="http://schemas.microsoft.com/office/drawing/2014/main" id="{AC8ED9CE-C69B-4818-8006-5B21A5E96CA7}"/>
               </a:ext>
             </a:extLst>
           </p:cNvPr>
@@ -24377,7 +24375,7 @@
           <p:cNvPr id="24" name="">
             <a:extLst xmlns:a="http://schemas.openxmlformats.org/drawingml/2006/main">
               <a:ext uri="{FF2B5EF4-FFF2-40B4-BE49-F238E27FC236}">
-                <a16:creationId xmlns:a16="http://schemas.microsoft.com/office/drawing/2014/main" id="{8836C34A-58D4-4826-9C1D-842A0EF777F2}"/>
+                <a16:creationId xmlns:a16="http://schemas.microsoft.com/office/drawing/2014/main" id="{AE84CB26-6F0F-4B06-B588-98AD3340165D}"/>
               </a:ext>
             </a:extLst>
           </p:cNvPr>
@@ -24410,7 +24408,7 @@
           <p:cNvPr id="25" name="">
             <a:extLst xmlns:a="http://schemas.openxmlformats.org/drawingml/2006/main">
               <a:ext uri="{FF2B5EF4-FFF2-40B4-BE49-F238E27FC236}">
-                <a16:creationId xmlns:a16="http://schemas.microsoft.com/office/drawing/2014/main" id="{3FEFC410-2628-4BBC-9DAE-205EA45DCE3E}"/>
+                <a16:creationId xmlns:a16="http://schemas.microsoft.com/office/drawing/2014/main" id="{51754F61-432D-4C74-816C-116A4B027181}"/>
               </a:ext>
             </a:extLst>
           </p:cNvPr>
@@ -24445,7 +24443,7 @@
           <p:cNvPr id="26" name="">
             <a:extLst xmlns:a="http://schemas.openxmlformats.org/drawingml/2006/main">
               <a:ext uri="{FF2B5EF4-FFF2-40B4-BE49-F238E27FC236}">
-                <a16:creationId xmlns:a16="http://schemas.microsoft.com/office/drawing/2014/main" id="{6D59E4E5-78FC-45EB-B53B-6964FC8A5570}"/>
+                <a16:creationId xmlns:a16="http://schemas.microsoft.com/office/drawing/2014/main" id="{2A5BAE0C-2CAE-4AFC-92E1-F35302DD241F}"/>
               </a:ext>
             </a:extLst>
           </p:cNvPr>
@@ -24509,7 +24507,7 @@
           <p:cNvPr id="27" name="">
             <a:extLst xmlns:a="http://schemas.openxmlformats.org/drawingml/2006/main">
               <a:ext uri="{FF2B5EF4-FFF2-40B4-BE49-F238E27FC236}">
-                <a16:creationId xmlns:a16="http://schemas.microsoft.com/office/drawing/2014/main" id="{06DCBB98-A1F7-44B6-B52E-9667334D257E}"/>
+                <a16:creationId xmlns:a16="http://schemas.microsoft.com/office/drawing/2014/main" id="{A1A9EBDA-7EE7-41CC-ABAC-9B24B7DC4937}"/>
               </a:ext>
             </a:extLst>
           </p:cNvPr>
@@ -24573,7 +24571,7 @@
           <p:cNvPr id="28" name="">
             <a:extLst xmlns:a="http://schemas.openxmlformats.org/drawingml/2006/main">
               <a:ext uri="{FF2B5EF4-FFF2-40B4-BE49-F238E27FC236}">
-                <a16:creationId xmlns:a16="http://schemas.microsoft.com/office/drawing/2014/main" id="{A93509B6-A5E1-4400-B5A4-1CF94A422992}"/>
+                <a16:creationId xmlns:a16="http://schemas.microsoft.com/office/drawing/2014/main" id="{42172B1D-64CA-4668-BF9D-19156818B7EB}"/>
               </a:ext>
             </a:extLst>
           </p:cNvPr>
@@ -24606,7 +24604,7 @@
           <p:cNvPr id="29" name="">
             <a:extLst xmlns:a="http://schemas.openxmlformats.org/drawingml/2006/main">
               <a:ext uri="{FF2B5EF4-FFF2-40B4-BE49-F238E27FC236}">
-                <a16:creationId xmlns:a16="http://schemas.microsoft.com/office/drawing/2014/main" id="{2E03BA3F-6DA1-4552-8580-426832565985}"/>
+                <a16:creationId xmlns:a16="http://schemas.microsoft.com/office/drawing/2014/main" id="{5073578D-C24A-4927-8259-279E60B247BF}"/>
               </a:ext>
             </a:extLst>
           </p:cNvPr>
@@ -24670,7 +24668,7 @@
           <p:cNvPr id="30" name="">
             <a:extLst xmlns:a="http://schemas.openxmlformats.org/drawingml/2006/main">
               <a:ext uri="{FF2B5EF4-FFF2-40B4-BE49-F238E27FC236}">
-                <a16:creationId xmlns:a16="http://schemas.microsoft.com/office/drawing/2014/main" id="{75BE06D7-EB0B-4D26-AF9D-5091AA84C54B}"/>
+                <a16:creationId xmlns:a16="http://schemas.microsoft.com/office/drawing/2014/main" id="{FBE36A51-9E25-4B12-BEDE-A5AAE0065C31}"/>
               </a:ext>
             </a:extLst>
           </p:cNvPr>
@@ -24734,7 +24732,7 @@
           <p:cNvPr id="31" name="">
             <a:extLst xmlns:a="http://schemas.openxmlformats.org/drawingml/2006/main">
               <a:ext uri="{FF2B5EF4-FFF2-40B4-BE49-F238E27FC236}">
-                <a16:creationId xmlns:a16="http://schemas.microsoft.com/office/drawing/2014/main" id="{328B9435-E69A-4B2E-9F2A-425EB7A2C7A5}"/>
+                <a16:creationId xmlns:a16="http://schemas.microsoft.com/office/drawing/2014/main" id="{5BA83452-2032-45F4-8AEF-54B607835A31}"/>
               </a:ext>
             </a:extLst>
           </p:cNvPr>
@@ -24769,7 +24767,7 @@
           <p:cNvPr id="32" name="">
             <a:extLst xmlns:a="http://schemas.openxmlformats.org/drawingml/2006/main">
               <a:ext uri="{FF2B5EF4-FFF2-40B4-BE49-F238E27FC236}">
-                <a16:creationId xmlns:a16="http://schemas.microsoft.com/office/drawing/2014/main" id="{38B73158-8CF3-44E8-B2C9-0FA471FAA318}"/>
+                <a16:creationId xmlns:a16="http://schemas.microsoft.com/office/drawing/2014/main" id="{A6D05787-389C-45FE-8FA4-70A3CC033FC1}"/>
               </a:ext>
             </a:extLst>
           </p:cNvPr>
@@ -24833,7 +24831,7 @@
           <p:cNvPr id="33" name="">
             <a:extLst xmlns:a="http://schemas.openxmlformats.org/drawingml/2006/main">
               <a:ext uri="{FF2B5EF4-FFF2-40B4-BE49-F238E27FC236}">
-                <a16:creationId xmlns:a16="http://schemas.microsoft.com/office/drawing/2014/main" id="{C286241B-A52E-47F3-82B8-6FE0FBDCCC81}"/>
+                <a16:creationId xmlns:a16="http://schemas.microsoft.com/office/drawing/2014/main" id="{ED774FAC-F343-464C-B2BE-33792E7FA81D}"/>
               </a:ext>
             </a:extLst>
           </p:cNvPr>
@@ -24897,7 +24895,7 @@
           <p:cNvPr id="34" name="">
             <a:extLst xmlns:a="http://schemas.openxmlformats.org/drawingml/2006/main">
               <a:ext uri="{FF2B5EF4-FFF2-40B4-BE49-F238E27FC236}">
-                <a16:creationId xmlns:a16="http://schemas.microsoft.com/office/drawing/2014/main" id="{C3B5A108-C7D8-41FE-BA99-F0DB35256E1C}"/>
+                <a16:creationId xmlns:a16="http://schemas.microsoft.com/office/drawing/2014/main" id="{8F553B70-B08E-419B-A45A-F48BCC4D15FC}"/>
               </a:ext>
             </a:extLst>
           </p:cNvPr>
@@ -24959,7 +24957,7 @@
     </p:spTree>
     <p:extLst>
       <p:ext uri="{BB962C8B-B14F-4D97-AF65-F5344CB8AC3E}">
-        <p14:creationId xmlns:p14="http://schemas.microsoft.com/office/powerpoint/2010/main" val="961179342"/>
+        <p14:creationId xmlns:p14="http://schemas.microsoft.com/office/powerpoint/2010/main" val="307420022"/>
       </p:ext>
     </p:extLst>
   </p:cSld>
@@ -24983,7 +24981,7 @@
           <p:cNvPr id="1" name="">
             <a:extLst xmlns:a="http://schemas.openxmlformats.org/drawingml/2006/main">
               <a:ext uri="{FF2B5EF4-FFF2-40B4-BE49-F238E27FC236}">
-                <a16:creationId xmlns:a16="http://schemas.microsoft.com/office/drawing/2014/main" id="{A15E3BD3-708D-4E01-B5AF-A737D01C5979}"/>
+                <a16:creationId xmlns:a16="http://schemas.microsoft.com/office/drawing/2014/main" id="{B4D4273E-E5FD-43CF-9B97-B4F6F679FB37}"/>
               </a:ext>
             </a:extLst>
           </p:cNvPr>
@@ -25018,7 +25016,7 @@
           <p:cNvPr id="2" name="">
             <a:extLst xmlns:a="http://schemas.openxmlformats.org/drawingml/2006/main">
               <a:ext uri="{FF2B5EF4-FFF2-40B4-BE49-F238E27FC236}">
-                <a16:creationId xmlns:a16="http://schemas.microsoft.com/office/drawing/2014/main" id="{DFC0F2F0-4CF4-47FF-BBA1-439EAEFF7F90}"/>
+                <a16:creationId xmlns:a16="http://schemas.microsoft.com/office/drawing/2014/main" id="{73D08978-A714-4144-9F7B-E804E68691CC}"/>
               </a:ext>
             </a:extLst>
           </p:cNvPr>
@@ -25053,7 +25051,7 @@
           <p:cNvPr id="3" name="">
             <a:extLst xmlns:a="http://schemas.openxmlformats.org/drawingml/2006/main">
               <a:ext uri="{FF2B5EF4-FFF2-40B4-BE49-F238E27FC236}">
-                <a16:creationId xmlns:a16="http://schemas.microsoft.com/office/drawing/2014/main" id="{6C26B209-5C5B-43D5-9238-837994634499}"/>
+                <a16:creationId xmlns:a16="http://schemas.microsoft.com/office/drawing/2014/main" id="{844460F4-F038-47E0-B218-8059B207A794}"/>
               </a:ext>
             </a:extLst>
           </p:cNvPr>
@@ -25088,7 +25086,7 @@
           <p:cNvPr id="4" name="kicker-04-marker">
             <a:extLst xmlns:a="http://schemas.openxmlformats.org/drawingml/2006/main">
               <a:ext uri="{FF2B5EF4-FFF2-40B4-BE49-F238E27FC236}">
-                <a16:creationId xmlns:a16="http://schemas.microsoft.com/office/drawing/2014/main" id="{C349684A-2517-4160-AEFF-62F329C3303F}"/>
+                <a16:creationId xmlns:a16="http://schemas.microsoft.com/office/drawing/2014/main" id="{2D0EA7EA-2E84-4392-8E62-2DBA569E4CBB}"/>
               </a:ext>
             </a:extLst>
           </p:cNvPr>
@@ -25123,7 +25121,7 @@
           <p:cNvPr id="5" name="kicker-04-label">
             <a:extLst xmlns:a="http://schemas.openxmlformats.org/drawingml/2006/main">
               <a:ext uri="{FF2B5EF4-FFF2-40B4-BE49-F238E27FC236}">
-                <a16:creationId xmlns:a16="http://schemas.microsoft.com/office/drawing/2014/main" id="{A618F60C-3CC5-4021-9CD5-4F82C16FD529}"/>
+                <a16:creationId xmlns:a16="http://schemas.microsoft.com/office/drawing/2014/main" id="{77A4C447-6C04-48BC-B364-D52E7CCCBCAF}"/>
               </a:ext>
             </a:extLst>
           </p:cNvPr>
@@ -25187,7 +25185,7 @@
           <p:cNvPr id="6" name="">
             <a:extLst xmlns:a="http://schemas.openxmlformats.org/drawingml/2006/main">
               <a:ext uri="{FF2B5EF4-FFF2-40B4-BE49-F238E27FC236}">
-                <a16:creationId xmlns:a16="http://schemas.microsoft.com/office/drawing/2014/main" id="{66E467E4-0EA5-4420-8F14-1F948ED0FA33}"/>
+                <a16:creationId xmlns:a16="http://schemas.microsoft.com/office/drawing/2014/main" id="{6773B9BC-B5F6-4193-916E-4891EB170DC2}"/>
               </a:ext>
             </a:extLst>
           </p:cNvPr>
@@ -25251,7 +25249,7 @@
           <p:cNvPr id="7" name="">
             <a:extLst xmlns:a="http://schemas.openxmlformats.org/drawingml/2006/main">
               <a:ext uri="{FF2B5EF4-FFF2-40B4-BE49-F238E27FC236}">
-                <a16:creationId xmlns:a16="http://schemas.microsoft.com/office/drawing/2014/main" id="{8397D81C-9052-45DC-A6FA-3B27DCD1B61B}"/>
+                <a16:creationId xmlns:a16="http://schemas.microsoft.com/office/drawing/2014/main" id="{B7883A42-132E-4836-ACF9-91DD47590D5C}"/>
               </a:ext>
             </a:extLst>
           </p:cNvPr>
@@ -25315,7 +25313,7 @@
           <p:cNvPr id="8" name="">
             <a:extLst xmlns:a="http://schemas.openxmlformats.org/drawingml/2006/main">
               <a:ext uri="{FF2B5EF4-FFF2-40B4-BE49-F238E27FC236}">
-                <a16:creationId xmlns:a16="http://schemas.microsoft.com/office/drawing/2014/main" id="{8E032147-1B45-4B42-9A2C-7830CB2DD6BB}"/>
+                <a16:creationId xmlns:a16="http://schemas.microsoft.com/office/drawing/2014/main" id="{71364292-B574-4B36-B35B-045E33780270}"/>
               </a:ext>
             </a:extLst>
           </p:cNvPr>
@@ -25350,7 +25348,7 @@
           <p:cNvPr id="9" name="">
             <a:extLst xmlns:a="http://schemas.openxmlformats.org/drawingml/2006/main">
               <a:ext uri="{FF2B5EF4-FFF2-40B4-BE49-F238E27FC236}">
-                <a16:creationId xmlns:a16="http://schemas.microsoft.com/office/drawing/2014/main" id="{8B527710-5841-4628-B930-89E10A2AA9B8}"/>
+                <a16:creationId xmlns:a16="http://schemas.microsoft.com/office/drawing/2014/main" id="{BD25BC85-A3DA-482B-906A-A7E33FF3C9EA}"/>
               </a:ext>
             </a:extLst>
           </p:cNvPr>
@@ -25414,7 +25412,7 @@
           <p:cNvPr id="10" name="">
             <a:extLst xmlns:a="http://schemas.openxmlformats.org/drawingml/2006/main">
               <a:ext uri="{FF2B5EF4-FFF2-40B4-BE49-F238E27FC236}">
-                <a16:creationId xmlns:a16="http://schemas.microsoft.com/office/drawing/2014/main" id="{04C36C6B-4870-4B26-A7FF-9E7A5030203F}"/>
+                <a16:creationId xmlns:a16="http://schemas.microsoft.com/office/drawing/2014/main" id="{5B6628DD-055B-4EFA-8077-CBBEE9C233CA}"/>
               </a:ext>
             </a:extLst>
           </p:cNvPr>
@@ -25478,7 +25476,7 @@
           <p:cNvPr id="11" name="">
             <a:extLst xmlns:a="http://schemas.openxmlformats.org/drawingml/2006/main">
               <a:ext uri="{FF2B5EF4-FFF2-40B4-BE49-F238E27FC236}">
-                <a16:creationId xmlns:a16="http://schemas.microsoft.com/office/drawing/2014/main" id="{1F4DECE1-A387-4024-A279-3BDEFAAA02E5}"/>
+                <a16:creationId xmlns:a16="http://schemas.microsoft.com/office/drawing/2014/main" id="{23CC5351-0D33-473C-8671-A7B7549C79EB}"/>
               </a:ext>
             </a:extLst>
           </p:cNvPr>
@@ -25542,7 +25540,7 @@
           <p:cNvPr id="12" name="">
             <a:extLst xmlns:a="http://schemas.openxmlformats.org/drawingml/2006/main">
               <a:ext uri="{FF2B5EF4-FFF2-40B4-BE49-F238E27FC236}">
-                <a16:creationId xmlns:a16="http://schemas.microsoft.com/office/drawing/2014/main" id="{EC8B8484-A24E-495F-86E2-CC35FBC1479E}"/>
+                <a16:creationId xmlns:a16="http://schemas.microsoft.com/office/drawing/2014/main" id="{A1D250B2-BA8F-4E20-843E-D389D1362DAC}"/>
               </a:ext>
             </a:extLst>
           </p:cNvPr>
@@ -25577,7 +25575,7 @@
           <p:cNvPr id="13" name="">
             <a:extLst xmlns:a="http://schemas.openxmlformats.org/drawingml/2006/main">
               <a:ext uri="{FF2B5EF4-FFF2-40B4-BE49-F238E27FC236}">
-                <a16:creationId xmlns:a16="http://schemas.microsoft.com/office/drawing/2014/main" id="{E821D2A6-D1BE-4828-84E1-7C4FC04CC13A}"/>
+                <a16:creationId xmlns:a16="http://schemas.microsoft.com/office/drawing/2014/main" id="{CF77E944-C0BF-4478-BD9C-1F3E5109F61D}"/>
               </a:ext>
             </a:extLst>
           </p:cNvPr>
@@ -25610,7 +25608,7 @@
           <p:cNvPr id="14" name="">
             <a:extLst xmlns:a="http://schemas.openxmlformats.org/drawingml/2006/main">
               <a:ext uri="{FF2B5EF4-FFF2-40B4-BE49-F238E27FC236}">
-                <a16:creationId xmlns:a16="http://schemas.microsoft.com/office/drawing/2014/main" id="{B736B482-0AA2-4218-BF7C-8CAD595A08B7}"/>
+                <a16:creationId xmlns:a16="http://schemas.microsoft.com/office/drawing/2014/main" id="{A9EBFF1C-AA32-43BD-8877-1F2F4DEF0971}"/>
               </a:ext>
             </a:extLst>
           </p:cNvPr>
@@ -25645,7 +25643,7 @@
           <p:cNvPr id="15" name="">
             <a:extLst xmlns:a="http://schemas.openxmlformats.org/drawingml/2006/main">
               <a:ext uri="{FF2B5EF4-FFF2-40B4-BE49-F238E27FC236}">
-                <a16:creationId xmlns:a16="http://schemas.microsoft.com/office/drawing/2014/main" id="{13284CD8-6225-4FC3-848A-7BB3B643B084}"/>
+                <a16:creationId xmlns:a16="http://schemas.microsoft.com/office/drawing/2014/main" id="{0EAAD8AD-AFB2-4172-9DA5-9872F127ECC5}"/>
               </a:ext>
             </a:extLst>
           </p:cNvPr>
@@ -25709,7 +25707,7 @@
           <p:cNvPr id="16" name="">
             <a:extLst xmlns:a="http://schemas.openxmlformats.org/drawingml/2006/main">
               <a:ext uri="{FF2B5EF4-FFF2-40B4-BE49-F238E27FC236}">
-                <a16:creationId xmlns:a16="http://schemas.microsoft.com/office/drawing/2014/main" id="{339B5765-0C45-44A5-9960-8C6A3E90CF05}"/>
+                <a16:creationId xmlns:a16="http://schemas.microsoft.com/office/drawing/2014/main" id="{CD909ED3-977F-4BDC-A81B-686EF4DC428D}"/>
               </a:ext>
             </a:extLst>
           </p:cNvPr>
@@ -25744,7 +25742,7 @@
           <p:cNvPr id="17" name="">
             <a:extLst xmlns:a="http://schemas.openxmlformats.org/drawingml/2006/main">
               <a:ext uri="{FF2B5EF4-FFF2-40B4-BE49-F238E27FC236}">
-                <a16:creationId xmlns:a16="http://schemas.microsoft.com/office/drawing/2014/main" id="{56028690-731A-4829-A894-DE41EA42BBB0}"/>
+                <a16:creationId xmlns:a16="http://schemas.microsoft.com/office/drawing/2014/main" id="{3E202980-43C3-48D1-A312-774521F7F1B2}"/>
               </a:ext>
             </a:extLst>
           </p:cNvPr>
@@ -25808,7 +25806,7 @@
           <p:cNvPr id="18" name="">
             <a:extLst xmlns:a="http://schemas.openxmlformats.org/drawingml/2006/main">
               <a:ext uri="{FF2B5EF4-FFF2-40B4-BE49-F238E27FC236}">
-                <a16:creationId xmlns:a16="http://schemas.microsoft.com/office/drawing/2014/main" id="{0B32845B-4AB4-4AB0-A8A9-0318DCF02B5A}"/>
+                <a16:creationId xmlns:a16="http://schemas.microsoft.com/office/drawing/2014/main" id="{8A0338D8-1962-4824-9918-D4790BFDE62D}"/>
               </a:ext>
             </a:extLst>
           </p:cNvPr>
@@ -25843,7 +25841,7 @@
           <p:cNvPr id="19" name="">
             <a:extLst xmlns:a="http://schemas.openxmlformats.org/drawingml/2006/main">
               <a:ext uri="{FF2B5EF4-FFF2-40B4-BE49-F238E27FC236}">
-                <a16:creationId xmlns:a16="http://schemas.microsoft.com/office/drawing/2014/main" id="{4743D4F9-96F3-4631-A09E-EE7AD0D335F0}"/>
+                <a16:creationId xmlns:a16="http://schemas.microsoft.com/office/drawing/2014/main" id="{282E53C7-2CB2-41EF-9830-EE5CEF41760F}"/>
               </a:ext>
             </a:extLst>
           </p:cNvPr>
@@ -25907,7 +25905,7 @@
           <p:cNvPr id="20" name="">
             <a:extLst xmlns:a="http://schemas.openxmlformats.org/drawingml/2006/main">
               <a:ext uri="{FF2B5EF4-FFF2-40B4-BE49-F238E27FC236}">
-                <a16:creationId xmlns:a16="http://schemas.microsoft.com/office/drawing/2014/main" id="{840C5FEF-6F15-4203-A02F-10818FF894AB}"/>
+                <a16:creationId xmlns:a16="http://schemas.microsoft.com/office/drawing/2014/main" id="{9D14DABA-F427-4734-A1E7-B175A4DF9490}"/>
               </a:ext>
             </a:extLst>
           </p:cNvPr>
@@ -25942,7 +25940,7 @@
           <p:cNvPr id="21" name="">
             <a:extLst xmlns:a="http://schemas.openxmlformats.org/drawingml/2006/main">
               <a:ext uri="{FF2B5EF4-FFF2-40B4-BE49-F238E27FC236}">
-                <a16:creationId xmlns:a16="http://schemas.microsoft.com/office/drawing/2014/main" id="{14543AF2-39F0-4C8E-A14E-3248AFF646EA}"/>
+                <a16:creationId xmlns:a16="http://schemas.microsoft.com/office/drawing/2014/main" id="{7F79B4E5-0DE7-47D9-A057-BDEEC643F98D}"/>
               </a:ext>
             </a:extLst>
           </p:cNvPr>
@@ -26006,7 +26004,7 @@
           <p:cNvPr id="22" name="">
             <a:extLst xmlns:a="http://schemas.openxmlformats.org/drawingml/2006/main">
               <a:ext uri="{FF2B5EF4-FFF2-40B4-BE49-F238E27FC236}">
-                <a16:creationId xmlns:a16="http://schemas.microsoft.com/office/drawing/2014/main" id="{DF1FDCAE-BFF9-4E3B-AC9B-5464F07C0708}"/>
+                <a16:creationId xmlns:a16="http://schemas.microsoft.com/office/drawing/2014/main" id="{7F0FD9B3-A131-4D3F-BEA6-F1587670F104}"/>
               </a:ext>
             </a:extLst>
           </p:cNvPr>
@@ -26041,7 +26039,7 @@
           <p:cNvPr id="23" name="">
             <a:extLst xmlns:a="http://schemas.openxmlformats.org/drawingml/2006/main">
               <a:ext uri="{FF2B5EF4-FFF2-40B4-BE49-F238E27FC236}">
-                <a16:creationId xmlns:a16="http://schemas.microsoft.com/office/drawing/2014/main" id="{0BA3A4C2-BDA2-472C-9DFE-EE93BF91B257}"/>
+                <a16:creationId xmlns:a16="http://schemas.microsoft.com/office/drawing/2014/main" id="{BBA1AE59-F738-467E-B0E5-2DF844909B38}"/>
               </a:ext>
             </a:extLst>
           </p:cNvPr>
@@ -26105,7 +26103,7 @@
           <p:cNvPr id="24" name="">
             <a:extLst xmlns:a="http://schemas.openxmlformats.org/drawingml/2006/main">
               <a:ext uri="{FF2B5EF4-FFF2-40B4-BE49-F238E27FC236}">
-                <a16:creationId xmlns:a16="http://schemas.microsoft.com/office/drawing/2014/main" id="{CA9C446C-EB00-41F1-A8D4-CB527167DF33}"/>
+                <a16:creationId xmlns:a16="http://schemas.microsoft.com/office/drawing/2014/main" id="{C1BB6CEA-8BB5-4937-B44D-E3202B3DA709}"/>
               </a:ext>
             </a:extLst>
           </p:cNvPr>
@@ -26140,7 +26138,7 @@
           <p:cNvPr id="25" name="">
             <a:extLst xmlns:a="http://schemas.openxmlformats.org/drawingml/2006/main">
               <a:ext uri="{FF2B5EF4-FFF2-40B4-BE49-F238E27FC236}">
-                <a16:creationId xmlns:a16="http://schemas.microsoft.com/office/drawing/2014/main" id="{642CDCC2-ABB0-4922-98A2-3F76EF2C241D}"/>
+                <a16:creationId xmlns:a16="http://schemas.microsoft.com/office/drawing/2014/main" id="{2E15DCC0-BD6A-4937-878F-D84D8E3891BE}"/>
               </a:ext>
             </a:extLst>
           </p:cNvPr>
@@ -26204,7 +26202,7 @@
           <p:cNvPr id="26" name="">
             <a:extLst xmlns:a="http://schemas.openxmlformats.org/drawingml/2006/main">
               <a:ext uri="{FF2B5EF4-FFF2-40B4-BE49-F238E27FC236}">
-                <a16:creationId xmlns:a16="http://schemas.microsoft.com/office/drawing/2014/main" id="{96BEF404-7C51-41ED-BE5C-C076E84DAD2F}"/>
+                <a16:creationId xmlns:a16="http://schemas.microsoft.com/office/drawing/2014/main" id="{CFC53024-D7A6-48BD-8EE1-9C7A8BC3676D}"/>
               </a:ext>
             </a:extLst>
           </p:cNvPr>
@@ -26268,7 +26266,7 @@
           <p:cNvPr id="27" name="">
             <a:extLst xmlns:a="http://schemas.openxmlformats.org/drawingml/2006/main">
               <a:ext uri="{FF2B5EF4-FFF2-40B4-BE49-F238E27FC236}">
-                <a16:creationId xmlns:a16="http://schemas.microsoft.com/office/drawing/2014/main" id="{C7F7F729-6FAE-44DE-B365-0F02A64320FF}"/>
+                <a16:creationId xmlns:a16="http://schemas.microsoft.com/office/drawing/2014/main" id="{C410FC04-C47A-46C9-8F8E-40127DB8C2E1}"/>
               </a:ext>
             </a:extLst>
           </p:cNvPr>
@@ -26332,7 +26330,7 @@
           <p:cNvPr id="28" name="">
             <a:extLst xmlns:a="http://schemas.openxmlformats.org/drawingml/2006/main">
               <a:ext uri="{FF2B5EF4-FFF2-40B4-BE49-F238E27FC236}">
-                <a16:creationId xmlns:a16="http://schemas.microsoft.com/office/drawing/2014/main" id="{50C96D42-3958-4421-B59E-F355689C2E41}"/>
+                <a16:creationId xmlns:a16="http://schemas.microsoft.com/office/drawing/2014/main" id="{03FFA878-E271-4E6B-B687-16ECF7F289CA}"/>
               </a:ext>
             </a:extLst>
           </p:cNvPr>
@@ -26367,7 +26365,7 @@
           <p:cNvPr id="29" name="">
             <a:extLst xmlns:a="http://schemas.openxmlformats.org/drawingml/2006/main">
               <a:ext uri="{FF2B5EF4-FFF2-40B4-BE49-F238E27FC236}">
-                <a16:creationId xmlns:a16="http://schemas.microsoft.com/office/drawing/2014/main" id="{A168BD6C-853D-4FA4-9F21-B7B77CA60A6D}"/>
+                <a16:creationId xmlns:a16="http://schemas.microsoft.com/office/drawing/2014/main" id="{0958F246-CC0C-4A30-8472-07B39C9AFE20}"/>
               </a:ext>
             </a:extLst>
           </p:cNvPr>
@@ -26402,7 +26400,7 @@
           <p:cNvPr id="30" name="">
             <a:extLst xmlns:a="http://schemas.openxmlformats.org/drawingml/2006/main">
               <a:ext uri="{FF2B5EF4-FFF2-40B4-BE49-F238E27FC236}">
-                <a16:creationId xmlns:a16="http://schemas.microsoft.com/office/drawing/2014/main" id="{9C2BA305-042F-4CBF-913B-EC572037C00E}"/>
+                <a16:creationId xmlns:a16="http://schemas.microsoft.com/office/drawing/2014/main" id="{649C12D3-8F52-478E-8F1E-2B88A3688948}"/>
               </a:ext>
             </a:extLst>
           </p:cNvPr>
@@ -26437,7 +26435,7 @@
           <p:cNvPr id="31" name="kicker-04-marker">
             <a:extLst xmlns:a="http://schemas.openxmlformats.org/drawingml/2006/main">
               <a:ext uri="{FF2B5EF4-FFF2-40B4-BE49-F238E27FC236}">
-                <a16:creationId xmlns:a16="http://schemas.microsoft.com/office/drawing/2014/main" id="{6FDA611E-9DC7-4A43-8D5D-4E2FB713D931}"/>
+                <a16:creationId xmlns:a16="http://schemas.microsoft.com/office/drawing/2014/main" id="{192074CB-7F99-4E6C-ACCA-98CBC86EC715}"/>
               </a:ext>
             </a:extLst>
           </p:cNvPr>
@@ -26472,7 +26470,7 @@
           <p:cNvPr id="32" name="kicker-04-label">
             <a:extLst xmlns:a="http://schemas.openxmlformats.org/drawingml/2006/main">
               <a:ext uri="{FF2B5EF4-FFF2-40B4-BE49-F238E27FC236}">
-                <a16:creationId xmlns:a16="http://schemas.microsoft.com/office/drawing/2014/main" id="{FCF2FC08-B936-4C90-AA72-6F1CB6D1A4F1}"/>
+                <a16:creationId xmlns:a16="http://schemas.microsoft.com/office/drawing/2014/main" id="{9C4CFF85-C919-4776-873B-90B312540D9D}"/>
               </a:ext>
             </a:extLst>
           </p:cNvPr>
@@ -26536,7 +26534,7 @@
           <p:cNvPr id="33" name="">
             <a:extLst xmlns:a="http://schemas.openxmlformats.org/drawingml/2006/main">
               <a:ext uri="{FF2B5EF4-FFF2-40B4-BE49-F238E27FC236}">
-                <a16:creationId xmlns:a16="http://schemas.microsoft.com/office/drawing/2014/main" id="{C435A5C7-5D58-4406-978E-98C6175BC3A2}"/>
+                <a16:creationId xmlns:a16="http://schemas.microsoft.com/office/drawing/2014/main" id="{167F5619-EB46-4753-A208-38C292D1F233}"/>
               </a:ext>
             </a:extLst>
           </p:cNvPr>
@@ -26600,7 +26598,7 @@
           <p:cNvPr id="34" name="">
             <a:extLst xmlns:a="http://schemas.openxmlformats.org/drawingml/2006/main">
               <a:ext uri="{FF2B5EF4-FFF2-40B4-BE49-F238E27FC236}">
-                <a16:creationId xmlns:a16="http://schemas.microsoft.com/office/drawing/2014/main" id="{FDA492AE-C133-45D3-B060-BC335565B42E}"/>
+                <a16:creationId xmlns:a16="http://schemas.microsoft.com/office/drawing/2014/main" id="{33D13AD1-45CD-47B1-BCA2-6A1638C81136}"/>
               </a:ext>
             </a:extLst>
           </p:cNvPr>
@@ -26664,7 +26662,7 @@
           <p:cNvPr id="35" name="">
             <a:extLst xmlns:a="http://schemas.openxmlformats.org/drawingml/2006/main">
               <a:ext uri="{FF2B5EF4-FFF2-40B4-BE49-F238E27FC236}">
-                <a16:creationId xmlns:a16="http://schemas.microsoft.com/office/drawing/2014/main" id="{2C593DE4-22A2-4C68-A9E3-EA2F1B7F7C5D}"/>
+                <a16:creationId xmlns:a16="http://schemas.microsoft.com/office/drawing/2014/main" id="{7E146C89-6547-499D-9821-4BC73C19C471}"/>
               </a:ext>
             </a:extLst>
           </p:cNvPr>
@@ -26699,7 +26697,7 @@
           <p:cNvPr id="36" name="">
             <a:extLst xmlns:a="http://schemas.openxmlformats.org/drawingml/2006/main">
               <a:ext uri="{FF2B5EF4-FFF2-40B4-BE49-F238E27FC236}">
-                <a16:creationId xmlns:a16="http://schemas.microsoft.com/office/drawing/2014/main" id="{DE9B08FA-D617-4564-A14A-E37C3BA116BB}"/>
+                <a16:creationId xmlns:a16="http://schemas.microsoft.com/office/drawing/2014/main" id="{264F7731-F924-4977-8A26-4C09BC49B822}"/>
               </a:ext>
             </a:extLst>
           </p:cNvPr>
@@ -26734,7 +26732,7 @@
           <p:cNvPr id="37" name="">
             <a:extLst xmlns:a="http://schemas.openxmlformats.org/drawingml/2006/main">
               <a:ext uri="{FF2B5EF4-FFF2-40B4-BE49-F238E27FC236}">
-                <a16:creationId xmlns:a16="http://schemas.microsoft.com/office/drawing/2014/main" id="{A5F2F7D2-D570-459F-88E2-59B65E49289F}"/>
+                <a16:creationId xmlns:a16="http://schemas.microsoft.com/office/drawing/2014/main" id="{CB20601A-75FD-46E8-993C-D2944A67C3EF}"/>
               </a:ext>
             </a:extLst>
           </p:cNvPr>
@@ -26769,7 +26767,7 @@
           <p:cNvPr id="38" name="">
             <a:extLst xmlns:a="http://schemas.openxmlformats.org/drawingml/2006/main">
               <a:ext uri="{FF2B5EF4-FFF2-40B4-BE49-F238E27FC236}">
-                <a16:creationId xmlns:a16="http://schemas.microsoft.com/office/drawing/2014/main" id="{2D08923C-2801-4985-933E-0A888D84F038}"/>
+                <a16:creationId xmlns:a16="http://schemas.microsoft.com/office/drawing/2014/main" id="{C0B76449-1179-4D88-A431-680BD6776B1A}"/>
               </a:ext>
             </a:extLst>
           </p:cNvPr>
@@ -26804,7 +26802,7 @@
           <p:cNvPr id="39" name="">
             <a:extLst xmlns:a="http://schemas.openxmlformats.org/drawingml/2006/main">
               <a:ext uri="{FF2B5EF4-FFF2-40B4-BE49-F238E27FC236}">
-                <a16:creationId xmlns:a16="http://schemas.microsoft.com/office/drawing/2014/main" id="{1FC9CFC4-D964-4492-9ABF-E8F7CB1107A1}"/>
+                <a16:creationId xmlns:a16="http://schemas.microsoft.com/office/drawing/2014/main" id="{3444FBC1-3EC7-4543-8F38-C2370C950FB0}"/>
               </a:ext>
             </a:extLst>
           </p:cNvPr>
@@ -26868,7 +26866,7 @@
           <p:cNvPr id="40" name="">
             <a:extLst xmlns:a="http://schemas.openxmlformats.org/drawingml/2006/main">
               <a:ext uri="{FF2B5EF4-FFF2-40B4-BE49-F238E27FC236}">
-                <a16:creationId xmlns:a16="http://schemas.microsoft.com/office/drawing/2014/main" id="{9BD1C8CE-9118-4DB6-8311-D64F4F8A1B1B}"/>
+                <a16:creationId xmlns:a16="http://schemas.microsoft.com/office/drawing/2014/main" id="{CE24B7AF-3E78-4977-8450-3CD9C5BFFAE4}"/>
               </a:ext>
             </a:extLst>
           </p:cNvPr>
@@ -26932,7 +26930,7 @@
           <p:cNvPr id="41" name="">
             <a:extLst xmlns:a="http://schemas.openxmlformats.org/drawingml/2006/main">
               <a:ext uri="{FF2B5EF4-FFF2-40B4-BE49-F238E27FC236}">
-                <a16:creationId xmlns:a16="http://schemas.microsoft.com/office/drawing/2014/main" id="{10E1D3C7-96B0-4AEC-A28E-A9CED86E63E9}"/>
+                <a16:creationId xmlns:a16="http://schemas.microsoft.com/office/drawing/2014/main" id="{27ABFC9E-7491-4BF7-9AB9-B6E53EFF404D}"/>
               </a:ext>
             </a:extLst>
           </p:cNvPr>
@@ -26994,7 +26992,7 @@
     </p:spTree>
     <p:extLst>
       <p:ext uri="{BB962C8B-B14F-4D97-AF65-F5344CB8AC3E}">
-        <p14:creationId xmlns:p14="http://schemas.microsoft.com/office/powerpoint/2010/main" val="216558550"/>
+        <p14:creationId xmlns:p14="http://schemas.microsoft.com/office/powerpoint/2010/main" val="1469005916"/>
       </p:ext>
     </p:extLst>
   </p:cSld>
@@ -27018,7 +27016,7 @@
           <p:cNvPr id="1" name="">
             <a:extLst xmlns:a="http://schemas.openxmlformats.org/drawingml/2006/main">
               <a:ext uri="{FF2B5EF4-FFF2-40B4-BE49-F238E27FC236}">
-                <a16:creationId xmlns:a16="http://schemas.microsoft.com/office/drawing/2014/main" id="{C3E3B603-ECDF-4471-B1DD-BF5663B35A62}"/>
+                <a16:creationId xmlns:a16="http://schemas.microsoft.com/office/drawing/2014/main" id="{FB9FC8B8-179D-49B6-8C60-E6DFC6A39E23}"/>
               </a:ext>
             </a:extLst>
           </p:cNvPr>
@@ -27053,7 +27051,7 @@
           <p:cNvPr id="2" name="">
             <a:extLst xmlns:a="http://schemas.openxmlformats.org/drawingml/2006/main">
               <a:ext uri="{FF2B5EF4-FFF2-40B4-BE49-F238E27FC236}">
-                <a16:creationId xmlns:a16="http://schemas.microsoft.com/office/drawing/2014/main" id="{D7537730-70F7-4A4C-A09E-AEBFD731DB16}"/>
+                <a16:creationId xmlns:a16="http://schemas.microsoft.com/office/drawing/2014/main" id="{0C587DF6-97DF-4624-8726-26BD73D56CE7}"/>
               </a:ext>
             </a:extLst>
           </p:cNvPr>
@@ -27088,7 +27086,7 @@
           <p:cNvPr id="3" name="">
             <a:extLst xmlns:a="http://schemas.openxmlformats.org/drawingml/2006/main">
               <a:ext uri="{FF2B5EF4-FFF2-40B4-BE49-F238E27FC236}">
-                <a16:creationId xmlns:a16="http://schemas.microsoft.com/office/drawing/2014/main" id="{DBB302F7-5FCF-40C5-8137-73A4DFC78CCE}"/>
+                <a16:creationId xmlns:a16="http://schemas.microsoft.com/office/drawing/2014/main" id="{25C6C00B-87CD-4EFB-8D44-81AE2A81BB85}"/>
               </a:ext>
             </a:extLst>
           </p:cNvPr>
@@ -27123,7 +27121,7 @@
           <p:cNvPr id="4" name="kicker-04-marker">
             <a:extLst xmlns:a="http://schemas.openxmlformats.org/drawingml/2006/main">
               <a:ext uri="{FF2B5EF4-FFF2-40B4-BE49-F238E27FC236}">
-                <a16:creationId xmlns:a16="http://schemas.microsoft.com/office/drawing/2014/main" id="{236D44DF-499C-4867-BF1A-617B8964AA0D}"/>
+                <a16:creationId xmlns:a16="http://schemas.microsoft.com/office/drawing/2014/main" id="{4E50B2C5-217E-4ED9-B422-89A86EC02804}"/>
               </a:ext>
             </a:extLst>
           </p:cNvPr>
@@ -27158,7 +27156,7 @@
           <p:cNvPr id="5" name="kicker-04-label">
             <a:extLst xmlns:a="http://schemas.openxmlformats.org/drawingml/2006/main">
               <a:ext uri="{FF2B5EF4-FFF2-40B4-BE49-F238E27FC236}">
-                <a16:creationId xmlns:a16="http://schemas.microsoft.com/office/drawing/2014/main" id="{04AA200B-738E-4630-AEDD-93AEF3CA9414}"/>
+                <a16:creationId xmlns:a16="http://schemas.microsoft.com/office/drawing/2014/main" id="{C5093242-02C1-4B6B-B9B8-06AD852F1065}"/>
               </a:ext>
             </a:extLst>
           </p:cNvPr>
@@ -27222,7 +27220,7 @@
           <p:cNvPr id="6" name="">
             <a:extLst xmlns:a="http://schemas.openxmlformats.org/drawingml/2006/main">
               <a:ext uri="{FF2B5EF4-FFF2-40B4-BE49-F238E27FC236}">
-                <a16:creationId xmlns:a16="http://schemas.microsoft.com/office/drawing/2014/main" id="{B32953DF-03D2-4471-BA4E-E98F7543A63D}"/>
+                <a16:creationId xmlns:a16="http://schemas.microsoft.com/office/drawing/2014/main" id="{AE2D731B-7036-40BF-9C33-1B11EBC8FA2A}"/>
               </a:ext>
             </a:extLst>
           </p:cNvPr>
@@ -27286,7 +27284,7 @@
           <p:cNvPr id="7" name="">
             <a:extLst xmlns:a="http://schemas.openxmlformats.org/drawingml/2006/main">
               <a:ext uri="{FF2B5EF4-FFF2-40B4-BE49-F238E27FC236}">
-                <a16:creationId xmlns:a16="http://schemas.microsoft.com/office/drawing/2014/main" id="{A65AA247-8063-4E90-94FB-9427E010800E}"/>
+                <a16:creationId xmlns:a16="http://schemas.microsoft.com/office/drawing/2014/main" id="{8182BC03-983D-4ABE-8F9C-7486378B8F17}"/>
               </a:ext>
             </a:extLst>
           </p:cNvPr>
@@ -27350,7 +27348,7 @@
           <p:cNvPr id="8" name="">
             <a:extLst xmlns:a="http://schemas.openxmlformats.org/drawingml/2006/main">
               <a:ext uri="{FF2B5EF4-FFF2-40B4-BE49-F238E27FC236}">
-                <a16:creationId xmlns:a16="http://schemas.microsoft.com/office/drawing/2014/main" id="{1EA41634-30F0-4197-8ED5-6C1BD31749E2}"/>
+                <a16:creationId xmlns:a16="http://schemas.microsoft.com/office/drawing/2014/main" id="{B1059E9F-A3D4-40DD-BB41-5B0B67B87F8D}"/>
               </a:ext>
             </a:extLst>
           </p:cNvPr>
@@ -27385,7 +27383,7 @@
           <p:cNvPr id="9" name="">
             <a:extLst xmlns:a="http://schemas.openxmlformats.org/drawingml/2006/main">
               <a:ext uri="{FF2B5EF4-FFF2-40B4-BE49-F238E27FC236}">
-                <a16:creationId xmlns:a16="http://schemas.microsoft.com/office/drawing/2014/main" id="{B2C31538-7454-423C-95BD-734057145BEB}"/>
+                <a16:creationId xmlns:a16="http://schemas.microsoft.com/office/drawing/2014/main" id="{71D77C33-34E5-4C51-944F-4320E29FE039}"/>
               </a:ext>
             </a:extLst>
           </p:cNvPr>
@@ -27449,7 +27447,7 @@
           <p:cNvPr id="10" name="">
             <a:extLst xmlns:a="http://schemas.openxmlformats.org/drawingml/2006/main">
               <a:ext uri="{FF2B5EF4-FFF2-40B4-BE49-F238E27FC236}">
-                <a16:creationId xmlns:a16="http://schemas.microsoft.com/office/drawing/2014/main" id="{E9AAC7A1-4FD2-4FC7-BB58-6EC0D3FACB24}"/>
+                <a16:creationId xmlns:a16="http://schemas.microsoft.com/office/drawing/2014/main" id="{88660D7A-C4C3-4677-B2D5-2758630C5869}"/>
               </a:ext>
             </a:extLst>
           </p:cNvPr>
@@ -27513,7 +27511,7 @@
           <p:cNvPr id="11" name="">
             <a:extLst xmlns:a="http://schemas.openxmlformats.org/drawingml/2006/main">
               <a:ext uri="{FF2B5EF4-FFF2-40B4-BE49-F238E27FC236}">
-                <a16:creationId xmlns:a16="http://schemas.microsoft.com/office/drawing/2014/main" id="{A6DFACE8-1868-4C32-B3BC-79EDFC822E71}"/>
+                <a16:creationId xmlns:a16="http://schemas.microsoft.com/office/drawing/2014/main" id="{D2FED7C0-7E69-4A0E-93DD-1D4DEA603731}"/>
               </a:ext>
             </a:extLst>
           </p:cNvPr>
@@ -27577,7 +27575,7 @@
           <p:cNvPr id="12" name="">
             <a:extLst xmlns:a="http://schemas.openxmlformats.org/drawingml/2006/main">
               <a:ext uri="{FF2B5EF4-FFF2-40B4-BE49-F238E27FC236}">
-                <a16:creationId xmlns:a16="http://schemas.microsoft.com/office/drawing/2014/main" id="{303B4AE2-D34A-4F5D-ABF7-5E8DB9151152}"/>
+                <a16:creationId xmlns:a16="http://schemas.microsoft.com/office/drawing/2014/main" id="{91404F87-9D69-49FD-A6A8-86155463263A}"/>
               </a:ext>
             </a:extLst>
           </p:cNvPr>
@@ -27610,7 +27608,7 @@
           <p:cNvPr id="13" name="">
             <a:extLst xmlns:a="http://schemas.openxmlformats.org/drawingml/2006/main">
               <a:ext uri="{FF2B5EF4-FFF2-40B4-BE49-F238E27FC236}">
-                <a16:creationId xmlns:a16="http://schemas.microsoft.com/office/drawing/2014/main" id="{7E903968-47AA-4619-9E5F-0DDE6E5767C4}"/>
+                <a16:creationId xmlns:a16="http://schemas.microsoft.com/office/drawing/2014/main" id="{BE9F1F75-4635-4DD5-8AF6-C23C0D661D62}"/>
               </a:ext>
             </a:extLst>
           </p:cNvPr>
@@ -27674,7 +27672,7 @@
           <p:cNvPr id="14" name="">
             <a:extLst xmlns:a="http://schemas.openxmlformats.org/drawingml/2006/main">
               <a:ext uri="{FF2B5EF4-FFF2-40B4-BE49-F238E27FC236}">
-                <a16:creationId xmlns:a16="http://schemas.microsoft.com/office/drawing/2014/main" id="{33ADCD7C-7CEB-4337-91BD-9F2046F3654A}"/>
+                <a16:creationId xmlns:a16="http://schemas.microsoft.com/office/drawing/2014/main" id="{3990FDDA-E2F0-4F1C-BAC1-AE9BB2762230}"/>
               </a:ext>
             </a:extLst>
           </p:cNvPr>
@@ -27709,7 +27707,7 @@
           <p:cNvPr id="15" name="">
             <a:extLst xmlns:a="http://schemas.openxmlformats.org/drawingml/2006/main">
               <a:ext uri="{FF2B5EF4-FFF2-40B4-BE49-F238E27FC236}">
-                <a16:creationId xmlns:a16="http://schemas.microsoft.com/office/drawing/2014/main" id="{DB91EB2E-B39F-414A-862A-561E7CD7E33E}"/>
+                <a16:creationId xmlns:a16="http://schemas.microsoft.com/office/drawing/2014/main" id="{E0AC083C-2D99-449A-A298-1F2FC55F9E0F}"/>
               </a:ext>
             </a:extLst>
           </p:cNvPr>
@@ -27763,7 +27761,7 @@
                 <a:ea typeface="Aptos"/>
                 <a:cs typeface="Aptos"/>
               </a:rPr>
-              <a:t>PROMPT STACK</a:t>
+              <a:t>QUESTION STACK</a:t>
             </a:r>
           </a:p>
         </p:txBody>
@@ -27773,7 +27771,7 @@
           <p:cNvPr id="16" name="">
             <a:extLst xmlns:a="http://schemas.openxmlformats.org/drawingml/2006/main">
               <a:ext uri="{FF2B5EF4-FFF2-40B4-BE49-F238E27FC236}">
-                <a16:creationId xmlns:a16="http://schemas.microsoft.com/office/drawing/2014/main" id="{C17B410D-6D7B-4DF6-BC37-B721184E3DA4}"/>
+                <a16:creationId xmlns:a16="http://schemas.microsoft.com/office/drawing/2014/main" id="{B581C0B2-8C87-4594-BCAE-6CB1AB232845}"/>
               </a:ext>
             </a:extLst>
           </p:cNvPr>
@@ -27808,7 +27806,7 @@
           <p:cNvPr id="17" name="">
             <a:extLst xmlns:a="http://schemas.openxmlformats.org/drawingml/2006/main">
               <a:ext uri="{FF2B5EF4-FFF2-40B4-BE49-F238E27FC236}">
-                <a16:creationId xmlns:a16="http://schemas.microsoft.com/office/drawing/2014/main" id="{78C809C5-6376-40D9-A63A-3959BEE34F62}"/>
+                <a16:creationId xmlns:a16="http://schemas.microsoft.com/office/drawing/2014/main" id="{367E2534-A013-4380-8906-9530296C34BA}"/>
               </a:ext>
             </a:extLst>
           </p:cNvPr>
@@ -27872,7 +27870,7 @@
           <p:cNvPr id="18" name="">
             <a:extLst xmlns:a="http://schemas.openxmlformats.org/drawingml/2006/main">
               <a:ext uri="{FF2B5EF4-FFF2-40B4-BE49-F238E27FC236}">
-                <a16:creationId xmlns:a16="http://schemas.microsoft.com/office/drawing/2014/main" id="{19D9CD9F-8A93-4BC8-BB55-63B948891868}"/>
+                <a16:creationId xmlns:a16="http://schemas.microsoft.com/office/drawing/2014/main" id="{7A7504DF-DB00-4FD0-A086-D0DFE89D452A}"/>
               </a:ext>
             </a:extLst>
           </p:cNvPr>
@@ -27907,7 +27905,7 @@
           <p:cNvPr id="19" name="">
             <a:extLst xmlns:a="http://schemas.openxmlformats.org/drawingml/2006/main">
               <a:ext uri="{FF2B5EF4-FFF2-40B4-BE49-F238E27FC236}">
-                <a16:creationId xmlns:a16="http://schemas.microsoft.com/office/drawing/2014/main" id="{D36F8A3A-CF32-4912-9B23-1A86C5D595FA}"/>
+                <a16:creationId xmlns:a16="http://schemas.microsoft.com/office/drawing/2014/main" id="{803B9E5A-98BE-4D75-8782-2465B313CD48}"/>
               </a:ext>
             </a:extLst>
           </p:cNvPr>
@@ -27971,7 +27969,7 @@
           <p:cNvPr id="20" name="">
             <a:extLst xmlns:a="http://schemas.openxmlformats.org/drawingml/2006/main">
               <a:ext uri="{FF2B5EF4-FFF2-40B4-BE49-F238E27FC236}">
-                <a16:creationId xmlns:a16="http://schemas.microsoft.com/office/drawing/2014/main" id="{E7CD4707-D1CB-42A7-9E85-E69CDDA558AB}"/>
+                <a16:creationId xmlns:a16="http://schemas.microsoft.com/office/drawing/2014/main" id="{F0AC2441-AF70-4EA3-9D7D-EC11E9A70AF2}"/>
               </a:ext>
             </a:extLst>
           </p:cNvPr>
@@ -28006,7 +28004,7 @@
           <p:cNvPr id="21" name="">
             <a:extLst xmlns:a="http://schemas.openxmlformats.org/drawingml/2006/main">
               <a:ext uri="{FF2B5EF4-FFF2-40B4-BE49-F238E27FC236}">
-                <a16:creationId xmlns:a16="http://schemas.microsoft.com/office/drawing/2014/main" id="{5E2B1365-3177-44D5-B050-838D629D8195}"/>
+                <a16:creationId xmlns:a16="http://schemas.microsoft.com/office/drawing/2014/main" id="{7602A175-D6CC-4D9E-B04D-B3FE37B5A62A}"/>
               </a:ext>
             </a:extLst>
           </p:cNvPr>
@@ -28070,7 +28068,7 @@
           <p:cNvPr id="22" name="">
             <a:extLst xmlns:a="http://schemas.openxmlformats.org/drawingml/2006/main">
               <a:ext uri="{FF2B5EF4-FFF2-40B4-BE49-F238E27FC236}">
-                <a16:creationId xmlns:a16="http://schemas.microsoft.com/office/drawing/2014/main" id="{D4982735-D430-46CB-966C-20E1FE4084F4}"/>
+                <a16:creationId xmlns:a16="http://schemas.microsoft.com/office/drawing/2014/main" id="{277E2F8E-D3D7-43CA-86D2-C8CB28BD6E52}"/>
               </a:ext>
             </a:extLst>
           </p:cNvPr>
@@ -28105,7 +28103,7 @@
           <p:cNvPr id="23" name="">
             <a:extLst xmlns:a="http://schemas.openxmlformats.org/drawingml/2006/main">
               <a:ext uri="{FF2B5EF4-FFF2-40B4-BE49-F238E27FC236}">
-                <a16:creationId xmlns:a16="http://schemas.microsoft.com/office/drawing/2014/main" id="{7356E163-1F34-4898-A5C7-7ECE0F62AFA0}"/>
+                <a16:creationId xmlns:a16="http://schemas.microsoft.com/office/drawing/2014/main" id="{C8CC15B0-44D5-44F8-9F83-0DF589EA5B4E}"/>
               </a:ext>
             </a:extLst>
           </p:cNvPr>
@@ -28169,7 +28167,7 @@
           <p:cNvPr id="24" name="">
             <a:extLst xmlns:a="http://schemas.openxmlformats.org/drawingml/2006/main">
               <a:ext uri="{FF2B5EF4-FFF2-40B4-BE49-F238E27FC236}">
-                <a16:creationId xmlns:a16="http://schemas.microsoft.com/office/drawing/2014/main" id="{47E4A818-F9EF-4C6C-8896-BBB859A9F099}"/>
+                <a16:creationId xmlns:a16="http://schemas.microsoft.com/office/drawing/2014/main" id="{C1481E8A-4A84-4AB2-8E99-4719133BB449}"/>
               </a:ext>
             </a:extLst>
           </p:cNvPr>
@@ -28204,7 +28202,7 @@
           <p:cNvPr id="25" name="">
             <a:extLst xmlns:a="http://schemas.openxmlformats.org/drawingml/2006/main">
               <a:ext uri="{FF2B5EF4-FFF2-40B4-BE49-F238E27FC236}">
-                <a16:creationId xmlns:a16="http://schemas.microsoft.com/office/drawing/2014/main" id="{BAC3B6EE-1AF0-4104-9DAF-16C86D640EE7}"/>
+                <a16:creationId xmlns:a16="http://schemas.microsoft.com/office/drawing/2014/main" id="{9698AEAE-0C7A-4D75-8FF8-4249706A23EF}"/>
               </a:ext>
             </a:extLst>
           </p:cNvPr>
@@ -28268,7 +28266,7 @@
           <p:cNvPr id="26" name="">
             <a:extLst xmlns:a="http://schemas.openxmlformats.org/drawingml/2006/main">
               <a:ext uri="{FF2B5EF4-FFF2-40B4-BE49-F238E27FC236}">
-                <a16:creationId xmlns:a16="http://schemas.microsoft.com/office/drawing/2014/main" id="{76DFA3CE-5FBD-4D41-B650-000107D6B260}"/>
+                <a16:creationId xmlns:a16="http://schemas.microsoft.com/office/drawing/2014/main" id="{26797A56-06B1-4273-97EC-E4FB10AAE814}"/>
               </a:ext>
             </a:extLst>
           </p:cNvPr>
@@ -28303,7 +28301,7 @@
           <p:cNvPr id="27" name="">
             <a:extLst xmlns:a="http://schemas.openxmlformats.org/drawingml/2006/main">
               <a:ext uri="{FF2B5EF4-FFF2-40B4-BE49-F238E27FC236}">
-                <a16:creationId xmlns:a16="http://schemas.microsoft.com/office/drawing/2014/main" id="{F3B731CD-01CF-43AE-8988-46F2C598B282}"/>
+                <a16:creationId xmlns:a16="http://schemas.microsoft.com/office/drawing/2014/main" id="{F8E3A2F4-C322-49D8-AED5-A8AC32752003}"/>
               </a:ext>
             </a:extLst>
           </p:cNvPr>
@@ -28367,7 +28365,7 @@
           <p:cNvPr id="28" name="">
             <a:extLst xmlns:a="http://schemas.openxmlformats.org/drawingml/2006/main">
               <a:ext uri="{FF2B5EF4-FFF2-40B4-BE49-F238E27FC236}">
-                <a16:creationId xmlns:a16="http://schemas.microsoft.com/office/drawing/2014/main" id="{0F8FEB52-5489-4DB3-84E0-598FDA02B2B2}"/>
+                <a16:creationId xmlns:a16="http://schemas.microsoft.com/office/drawing/2014/main" id="{66A21D84-1DCF-4777-9FAA-C53CFB627519}"/>
               </a:ext>
             </a:extLst>
           </p:cNvPr>
@@ -28402,7 +28400,7 @@
           <p:cNvPr id="29" name="">
             <a:extLst xmlns:a="http://schemas.openxmlformats.org/drawingml/2006/main">
               <a:ext uri="{FF2B5EF4-FFF2-40B4-BE49-F238E27FC236}">
-                <a16:creationId xmlns:a16="http://schemas.microsoft.com/office/drawing/2014/main" id="{9BEB103D-C433-4A7F-B1DC-3E42FDE4BADF}"/>
+                <a16:creationId xmlns:a16="http://schemas.microsoft.com/office/drawing/2014/main" id="{A7E67BE3-6D5B-4C45-9073-2730F6B1C1AB}"/>
               </a:ext>
             </a:extLst>
           </p:cNvPr>
@@ -28466,7 +28464,7 @@
           <p:cNvPr id="30" name="">
             <a:extLst xmlns:a="http://schemas.openxmlformats.org/drawingml/2006/main">
               <a:ext uri="{FF2B5EF4-FFF2-40B4-BE49-F238E27FC236}">
-                <a16:creationId xmlns:a16="http://schemas.microsoft.com/office/drawing/2014/main" id="{C62B6E1D-0D26-43FB-9C1E-82A6FBE42980}"/>
+                <a16:creationId xmlns:a16="http://schemas.microsoft.com/office/drawing/2014/main" id="{9A0916E9-0BC8-4B82-A4D4-625BA90DB61E}"/>
               </a:ext>
             </a:extLst>
           </p:cNvPr>
@@ -28530,7 +28528,7 @@
           <p:cNvPr id="31" name="">
             <a:extLst xmlns:a="http://schemas.openxmlformats.org/drawingml/2006/main">
               <a:ext uri="{FF2B5EF4-FFF2-40B4-BE49-F238E27FC236}">
-                <a16:creationId xmlns:a16="http://schemas.microsoft.com/office/drawing/2014/main" id="{A993B8ED-2816-4397-BB31-EDAF54E8EEB5}"/>
+                <a16:creationId xmlns:a16="http://schemas.microsoft.com/office/drawing/2014/main" id="{6A6FF3B4-C511-4E1D-8733-46D10DA5CDA8}"/>
               </a:ext>
             </a:extLst>
           </p:cNvPr>
@@ -28592,7 +28590,7 @@
     </p:spTree>
     <p:extLst>
       <p:ext uri="{BB962C8B-B14F-4D97-AF65-F5344CB8AC3E}">
-        <p14:creationId xmlns:p14="http://schemas.microsoft.com/office/powerpoint/2010/main" val="122286437"/>
+        <p14:creationId xmlns:p14="http://schemas.microsoft.com/office/powerpoint/2010/main" val="994730236"/>
       </p:ext>
     </p:extLst>
   </p:cSld>
@@ -28616,7 +28614,7 @@
           <p:cNvPr id="1" name="">
             <a:extLst xmlns:a="http://schemas.openxmlformats.org/drawingml/2006/main">
               <a:ext uri="{FF2B5EF4-FFF2-40B4-BE49-F238E27FC236}">
-                <a16:creationId xmlns:a16="http://schemas.microsoft.com/office/drawing/2014/main" id="{6EA2F5A5-6085-4DFB-8708-1900262B4A87}"/>
+                <a16:creationId xmlns:a16="http://schemas.microsoft.com/office/drawing/2014/main" id="{4212DEB8-0E56-4208-AAF8-BB280DE7A4A8}"/>
               </a:ext>
             </a:extLst>
           </p:cNvPr>
@@ -28651,7 +28649,7 @@
           <p:cNvPr id="2" name="">
             <a:extLst xmlns:a="http://schemas.openxmlformats.org/drawingml/2006/main">
               <a:ext uri="{FF2B5EF4-FFF2-40B4-BE49-F238E27FC236}">
-                <a16:creationId xmlns:a16="http://schemas.microsoft.com/office/drawing/2014/main" id="{C9B30809-E9D8-490B-8DCB-EA37948A66CC}"/>
+                <a16:creationId xmlns:a16="http://schemas.microsoft.com/office/drawing/2014/main" id="{DE775EDC-3DC8-4A92-AF31-A00C1B2D792D}"/>
               </a:ext>
             </a:extLst>
           </p:cNvPr>
@@ -28686,7 +28684,7 @@
           <p:cNvPr id="3" name="">
             <a:extLst xmlns:a="http://schemas.openxmlformats.org/drawingml/2006/main">
               <a:ext uri="{FF2B5EF4-FFF2-40B4-BE49-F238E27FC236}">
-                <a16:creationId xmlns:a16="http://schemas.microsoft.com/office/drawing/2014/main" id="{3D00F986-D64C-477C-ABE0-09BB67D5DB35}"/>
+                <a16:creationId xmlns:a16="http://schemas.microsoft.com/office/drawing/2014/main" id="{157B272A-2AE7-4D06-8163-8510ADC05E81}"/>
               </a:ext>
             </a:extLst>
           </p:cNvPr>
@@ -28721,7 +28719,7 @@
           <p:cNvPr id="4" name="kicker-04-marker">
             <a:extLst xmlns:a="http://schemas.openxmlformats.org/drawingml/2006/main">
               <a:ext uri="{FF2B5EF4-FFF2-40B4-BE49-F238E27FC236}">
-                <a16:creationId xmlns:a16="http://schemas.microsoft.com/office/drawing/2014/main" id="{04A39084-8E05-4325-AA13-A0FCC3D2F8B2}"/>
+                <a16:creationId xmlns:a16="http://schemas.microsoft.com/office/drawing/2014/main" id="{03590078-BEB4-4FC1-8E91-7F16F4AECA02}"/>
               </a:ext>
             </a:extLst>
           </p:cNvPr>
@@ -28756,7 +28754,7 @@
           <p:cNvPr id="5" name="kicker-04-label">
             <a:extLst xmlns:a="http://schemas.openxmlformats.org/drawingml/2006/main">
               <a:ext uri="{FF2B5EF4-FFF2-40B4-BE49-F238E27FC236}">
-                <a16:creationId xmlns:a16="http://schemas.microsoft.com/office/drawing/2014/main" id="{FAE7B02F-FDA5-45D4-86F3-785F0BF4E3BE}"/>
+                <a16:creationId xmlns:a16="http://schemas.microsoft.com/office/drawing/2014/main" id="{6A55FE08-F943-46A5-821A-CB13AEEEB6CE}"/>
               </a:ext>
             </a:extLst>
           </p:cNvPr>
@@ -28820,7 +28818,7 @@
           <p:cNvPr id="6" name="">
             <a:extLst xmlns:a="http://schemas.openxmlformats.org/drawingml/2006/main">
               <a:ext uri="{FF2B5EF4-FFF2-40B4-BE49-F238E27FC236}">
-                <a16:creationId xmlns:a16="http://schemas.microsoft.com/office/drawing/2014/main" id="{FB6001A3-3A8F-4707-92EC-6794E801FC3E}"/>
+                <a16:creationId xmlns:a16="http://schemas.microsoft.com/office/drawing/2014/main" id="{82D507FA-C44B-4AEC-BFD7-FF9AEFE17AE0}"/>
               </a:ext>
             </a:extLst>
           </p:cNvPr>
@@ -28884,7 +28882,7 @@
           <p:cNvPr id="7" name="">
             <a:extLst xmlns:a="http://schemas.openxmlformats.org/drawingml/2006/main">
               <a:ext uri="{FF2B5EF4-FFF2-40B4-BE49-F238E27FC236}">
-                <a16:creationId xmlns:a16="http://schemas.microsoft.com/office/drawing/2014/main" id="{DCD623AE-3598-47C6-B9BD-AA0E84C310B7}"/>
+                <a16:creationId xmlns:a16="http://schemas.microsoft.com/office/drawing/2014/main" id="{A89F668D-F9A0-4AA0-BA65-417A769FEB2E}"/>
               </a:ext>
             </a:extLst>
           </p:cNvPr>
@@ -28948,7 +28946,7 @@
           <p:cNvPr id="8" name="">
             <a:extLst xmlns:a="http://schemas.openxmlformats.org/drawingml/2006/main">
               <a:ext uri="{FF2B5EF4-FFF2-40B4-BE49-F238E27FC236}">
-                <a16:creationId xmlns:a16="http://schemas.microsoft.com/office/drawing/2014/main" id="{AF723D81-932E-4E2B-8AED-47EA972AE4CB}"/>
+                <a16:creationId xmlns:a16="http://schemas.microsoft.com/office/drawing/2014/main" id="{72098636-42B0-4370-A9F2-9ADD2F1495BA}"/>
               </a:ext>
             </a:extLst>
           </p:cNvPr>
@@ -28983,7 +28981,7 @@
           <p:cNvPr id="9" name="">
             <a:extLst xmlns:a="http://schemas.openxmlformats.org/drawingml/2006/main">
               <a:ext uri="{FF2B5EF4-FFF2-40B4-BE49-F238E27FC236}">
-                <a16:creationId xmlns:a16="http://schemas.microsoft.com/office/drawing/2014/main" id="{A6F3983E-3004-4D0E-BD05-459C72E55310}"/>
+                <a16:creationId xmlns:a16="http://schemas.microsoft.com/office/drawing/2014/main" id="{EAFEC43B-FD1A-4835-A41D-6088D13EB74E}"/>
               </a:ext>
             </a:extLst>
           </p:cNvPr>
@@ -29047,7 +29045,7 @@
           <p:cNvPr id="10" name="">
             <a:extLst xmlns:a="http://schemas.openxmlformats.org/drawingml/2006/main">
               <a:ext uri="{FF2B5EF4-FFF2-40B4-BE49-F238E27FC236}">
-                <a16:creationId xmlns:a16="http://schemas.microsoft.com/office/drawing/2014/main" id="{5C16D352-170E-4913-96CF-F6C4236B8C5A}"/>
+                <a16:creationId xmlns:a16="http://schemas.microsoft.com/office/drawing/2014/main" id="{70E116D5-7A9F-4E00-A621-C18217B3F590}"/>
               </a:ext>
             </a:extLst>
           </p:cNvPr>
@@ -29111,7 +29109,7 @@
           <p:cNvPr id="11" name="">
             <a:extLst xmlns:a="http://schemas.openxmlformats.org/drawingml/2006/main">
               <a:ext uri="{FF2B5EF4-FFF2-40B4-BE49-F238E27FC236}">
-                <a16:creationId xmlns:a16="http://schemas.microsoft.com/office/drawing/2014/main" id="{512F96A4-81BF-4537-8529-D1DDEE7F8EAB}"/>
+                <a16:creationId xmlns:a16="http://schemas.microsoft.com/office/drawing/2014/main" id="{F06B906C-400E-4396-8F5E-C4D1A567EBD6}"/>
               </a:ext>
             </a:extLst>
           </p:cNvPr>
@@ -29175,7 +29173,7 @@
           <p:cNvPr id="12" name="">
             <a:extLst xmlns:a="http://schemas.openxmlformats.org/drawingml/2006/main">
               <a:ext uri="{FF2B5EF4-FFF2-40B4-BE49-F238E27FC236}">
-                <a16:creationId xmlns:a16="http://schemas.microsoft.com/office/drawing/2014/main" id="{0CE4029F-BBF8-4B17-8C0A-4B1BB3540BF9}"/>
+                <a16:creationId xmlns:a16="http://schemas.microsoft.com/office/drawing/2014/main" id="{2F17D390-8499-4445-A5B5-538FED4B2120}"/>
               </a:ext>
             </a:extLst>
           </p:cNvPr>
@@ -29208,7 +29206,7 @@
           <p:cNvPr id="13" name="">
             <a:extLst xmlns:a="http://schemas.openxmlformats.org/drawingml/2006/main">
               <a:ext uri="{FF2B5EF4-FFF2-40B4-BE49-F238E27FC236}">
-                <a16:creationId xmlns:a16="http://schemas.microsoft.com/office/drawing/2014/main" id="{35E0E5D3-C445-4A5F-81E9-51DB2D877B52}"/>
+                <a16:creationId xmlns:a16="http://schemas.microsoft.com/office/drawing/2014/main" id="{269A151C-0174-47A0-9441-5A98442FAF04}"/>
               </a:ext>
             </a:extLst>
           </p:cNvPr>
@@ -29243,7 +29241,7 @@
           <p:cNvPr id="14" name="">
             <a:extLst xmlns:a="http://schemas.openxmlformats.org/drawingml/2006/main">
               <a:ext uri="{FF2B5EF4-FFF2-40B4-BE49-F238E27FC236}">
-                <a16:creationId xmlns:a16="http://schemas.microsoft.com/office/drawing/2014/main" id="{C7FECFFC-0C5F-45A8-A1E7-D27509FCA2C5}"/>
+                <a16:creationId xmlns:a16="http://schemas.microsoft.com/office/drawing/2014/main" id="{8FF2BB32-D096-4825-BF8D-D7CF25FCF9B8}"/>
               </a:ext>
             </a:extLst>
           </p:cNvPr>
@@ -29307,7 +29305,7 @@
           <p:cNvPr id="15" name="">
             <a:extLst xmlns:a="http://schemas.openxmlformats.org/drawingml/2006/main">
               <a:ext uri="{FF2B5EF4-FFF2-40B4-BE49-F238E27FC236}">
-                <a16:creationId xmlns:a16="http://schemas.microsoft.com/office/drawing/2014/main" id="{B297930E-DA4B-4193-A3CA-063087820C67}"/>
+                <a16:creationId xmlns:a16="http://schemas.microsoft.com/office/drawing/2014/main" id="{395C6742-6C31-463B-BE42-77DDEE4E36D7}"/>
               </a:ext>
             </a:extLst>
           </p:cNvPr>
@@ -29371,7 +29369,7 @@
           <p:cNvPr id="16" name="">
             <a:extLst xmlns:a="http://schemas.openxmlformats.org/drawingml/2006/main">
               <a:ext uri="{FF2B5EF4-FFF2-40B4-BE49-F238E27FC236}">
-                <a16:creationId xmlns:a16="http://schemas.microsoft.com/office/drawing/2014/main" id="{049DE472-D65A-45A4-B1F2-35FC0AE39750}"/>
+                <a16:creationId xmlns:a16="http://schemas.microsoft.com/office/drawing/2014/main" id="{95EE3AE9-6DCC-4C9E-8D57-E128F1918AC4}"/>
               </a:ext>
             </a:extLst>
           </p:cNvPr>
@@ -29406,7 +29404,7 @@
           <p:cNvPr id="17" name="">
             <a:extLst xmlns:a="http://schemas.openxmlformats.org/drawingml/2006/main">
               <a:ext uri="{FF2B5EF4-FFF2-40B4-BE49-F238E27FC236}">
-                <a16:creationId xmlns:a16="http://schemas.microsoft.com/office/drawing/2014/main" id="{E902E2D0-A2F8-4BCA-B89E-B1F0A9E0365C}"/>
+                <a16:creationId xmlns:a16="http://schemas.microsoft.com/office/drawing/2014/main" id="{022698BB-22F4-44A7-BEFC-3F01623D54D8}"/>
               </a:ext>
             </a:extLst>
           </p:cNvPr>
@@ -29470,7 +29468,7 @@
           <p:cNvPr id="18" name="">
             <a:extLst xmlns:a="http://schemas.openxmlformats.org/drawingml/2006/main">
               <a:ext uri="{FF2B5EF4-FFF2-40B4-BE49-F238E27FC236}">
-                <a16:creationId xmlns:a16="http://schemas.microsoft.com/office/drawing/2014/main" id="{B79FA952-1FE3-4F3C-964A-B510F6A59275}"/>
+                <a16:creationId xmlns:a16="http://schemas.microsoft.com/office/drawing/2014/main" id="{05060063-5A9B-477D-ABBA-57CFB1861EB2}"/>
               </a:ext>
             </a:extLst>
           </p:cNvPr>
@@ -29534,7 +29532,7 @@
           <p:cNvPr id="19" name="">
             <a:extLst xmlns:a="http://schemas.openxmlformats.org/drawingml/2006/main">
               <a:ext uri="{FF2B5EF4-FFF2-40B4-BE49-F238E27FC236}">
-                <a16:creationId xmlns:a16="http://schemas.microsoft.com/office/drawing/2014/main" id="{3B868014-1F2B-49FD-83D8-C8AD5E5ED93C}"/>
+                <a16:creationId xmlns:a16="http://schemas.microsoft.com/office/drawing/2014/main" id="{A1255863-8564-4141-889E-1A1E62A80D7D}"/>
               </a:ext>
             </a:extLst>
           </p:cNvPr>
@@ -29567,7 +29565,7 @@
           <p:cNvPr id="20" name="">
             <a:extLst xmlns:a="http://schemas.openxmlformats.org/drawingml/2006/main">
               <a:ext uri="{FF2B5EF4-FFF2-40B4-BE49-F238E27FC236}">
-                <a16:creationId xmlns:a16="http://schemas.microsoft.com/office/drawing/2014/main" id="{6F53C985-AE27-40FC-A066-47E5F62D6665}"/>
+                <a16:creationId xmlns:a16="http://schemas.microsoft.com/office/drawing/2014/main" id="{11F7C6D5-F6CE-41B7-923A-61D24074A94D}"/>
               </a:ext>
             </a:extLst>
           </p:cNvPr>
@@ -29602,7 +29600,7 @@
           <p:cNvPr id="21" name="">
             <a:extLst xmlns:a="http://schemas.openxmlformats.org/drawingml/2006/main">
               <a:ext uri="{FF2B5EF4-FFF2-40B4-BE49-F238E27FC236}">
-                <a16:creationId xmlns:a16="http://schemas.microsoft.com/office/drawing/2014/main" id="{26786943-1DF2-4843-BDA3-258BEE972C98}"/>
+                <a16:creationId xmlns:a16="http://schemas.microsoft.com/office/drawing/2014/main" id="{B290A390-E84A-427E-AC56-E7FCF6B6AFAE}"/>
               </a:ext>
             </a:extLst>
           </p:cNvPr>
@@ -29666,7 +29664,7 @@
           <p:cNvPr id="22" name="">
             <a:extLst xmlns:a="http://schemas.openxmlformats.org/drawingml/2006/main">
               <a:ext uri="{FF2B5EF4-FFF2-40B4-BE49-F238E27FC236}">
-                <a16:creationId xmlns:a16="http://schemas.microsoft.com/office/drawing/2014/main" id="{D3068759-ABFB-4D7F-9FF4-C777B1817675}"/>
+                <a16:creationId xmlns:a16="http://schemas.microsoft.com/office/drawing/2014/main" id="{774B5D08-566A-4ECB-965C-38BD5946B1DB}"/>
               </a:ext>
             </a:extLst>
           </p:cNvPr>
@@ -29699,7 +29697,7 @@
           <p:cNvPr id="23" name="">
             <a:extLst xmlns:a="http://schemas.openxmlformats.org/drawingml/2006/main">
               <a:ext uri="{FF2B5EF4-FFF2-40B4-BE49-F238E27FC236}">
-                <a16:creationId xmlns:a16="http://schemas.microsoft.com/office/drawing/2014/main" id="{32D7626E-9B3C-4707-A30D-7656B88C9D6A}"/>
+                <a16:creationId xmlns:a16="http://schemas.microsoft.com/office/drawing/2014/main" id="{16610F36-310C-410A-B32E-4F04BE9158F4}"/>
               </a:ext>
             </a:extLst>
           </p:cNvPr>
@@ -29763,7 +29761,7 @@
           <p:cNvPr id="24" name="">
             <a:extLst xmlns:a="http://schemas.openxmlformats.org/drawingml/2006/main">
               <a:ext uri="{FF2B5EF4-FFF2-40B4-BE49-F238E27FC236}">
-                <a16:creationId xmlns:a16="http://schemas.microsoft.com/office/drawing/2014/main" id="{D737F974-777A-4B69-B78E-C592B4EB3C9C}"/>
+                <a16:creationId xmlns:a16="http://schemas.microsoft.com/office/drawing/2014/main" id="{BF0390F1-EF13-481F-8D73-82523A4DA066}"/>
               </a:ext>
             </a:extLst>
           </p:cNvPr>
@@ -29827,7 +29825,7 @@
           <p:cNvPr id="25" name="">
             <a:extLst xmlns:a="http://schemas.openxmlformats.org/drawingml/2006/main">
               <a:ext uri="{FF2B5EF4-FFF2-40B4-BE49-F238E27FC236}">
-                <a16:creationId xmlns:a16="http://schemas.microsoft.com/office/drawing/2014/main" id="{A23B3637-0F19-42B5-950E-1D8A7EFD4FD7}"/>
+                <a16:creationId xmlns:a16="http://schemas.microsoft.com/office/drawing/2014/main" id="{0E5C0A73-E208-4A33-8489-77132E6E4D9B}"/>
               </a:ext>
             </a:extLst>
           </p:cNvPr>
@@ -29860,7 +29858,7 @@
           <p:cNvPr id="26" name="">
             <a:extLst xmlns:a="http://schemas.openxmlformats.org/drawingml/2006/main">
               <a:ext uri="{FF2B5EF4-FFF2-40B4-BE49-F238E27FC236}">
-                <a16:creationId xmlns:a16="http://schemas.microsoft.com/office/drawing/2014/main" id="{95C22488-CA22-41D7-BA76-AE8018978A4D}"/>
+                <a16:creationId xmlns:a16="http://schemas.microsoft.com/office/drawing/2014/main" id="{AEC7D6DF-96A1-4B17-98E9-875AEAF9F7D1}"/>
               </a:ext>
             </a:extLst>
           </p:cNvPr>
@@ -29924,7 +29922,7 @@
           <p:cNvPr id="27" name="">
             <a:extLst xmlns:a="http://schemas.openxmlformats.org/drawingml/2006/main">
               <a:ext uri="{FF2B5EF4-FFF2-40B4-BE49-F238E27FC236}">
-                <a16:creationId xmlns:a16="http://schemas.microsoft.com/office/drawing/2014/main" id="{7390B6BF-5557-4419-A4D6-BA3862366280}"/>
+                <a16:creationId xmlns:a16="http://schemas.microsoft.com/office/drawing/2014/main" id="{72DB0226-DB3B-4553-97EB-80772C7C3D36}"/>
               </a:ext>
             </a:extLst>
           </p:cNvPr>
@@ -29988,7 +29986,7 @@
           <p:cNvPr id="28" name="">
             <a:extLst xmlns:a="http://schemas.openxmlformats.org/drawingml/2006/main">
               <a:ext uri="{FF2B5EF4-FFF2-40B4-BE49-F238E27FC236}">
-                <a16:creationId xmlns:a16="http://schemas.microsoft.com/office/drawing/2014/main" id="{9B700087-FBBA-4FF5-A0F7-7E4999B2A2B3}"/>
+                <a16:creationId xmlns:a16="http://schemas.microsoft.com/office/drawing/2014/main" id="{B633E428-B02C-4976-B6C1-DF5B86CE39FB}"/>
               </a:ext>
             </a:extLst>
           </p:cNvPr>
@@ -30021,7 +30019,7 @@
           <p:cNvPr id="29" name="">
             <a:extLst xmlns:a="http://schemas.openxmlformats.org/drawingml/2006/main">
               <a:ext uri="{FF2B5EF4-FFF2-40B4-BE49-F238E27FC236}">
-                <a16:creationId xmlns:a16="http://schemas.microsoft.com/office/drawing/2014/main" id="{1DA80AE7-1612-4979-A1AA-04EC50C59DC0}"/>
+                <a16:creationId xmlns:a16="http://schemas.microsoft.com/office/drawing/2014/main" id="{9E4026C0-A57E-4011-8887-8DD9B8BE2F00}"/>
               </a:ext>
             </a:extLst>
           </p:cNvPr>
@@ -30085,7 +30083,7 @@
           <p:cNvPr id="30" name="">
             <a:extLst xmlns:a="http://schemas.openxmlformats.org/drawingml/2006/main">
               <a:ext uri="{FF2B5EF4-FFF2-40B4-BE49-F238E27FC236}">
-                <a16:creationId xmlns:a16="http://schemas.microsoft.com/office/drawing/2014/main" id="{4CCC03A4-5EB5-4C5E-AA9A-5D75868E18EA}"/>
+                <a16:creationId xmlns:a16="http://schemas.microsoft.com/office/drawing/2014/main" id="{38A18293-3979-4A11-BD2F-1DE063FBEDF0}"/>
               </a:ext>
             </a:extLst>
           </p:cNvPr>
@@ -30149,7 +30147,7 @@
           <p:cNvPr id="31" name="">
             <a:extLst xmlns:a="http://schemas.openxmlformats.org/drawingml/2006/main">
               <a:ext uri="{FF2B5EF4-FFF2-40B4-BE49-F238E27FC236}">
-                <a16:creationId xmlns:a16="http://schemas.microsoft.com/office/drawing/2014/main" id="{2B80F608-DECD-4EC0-8CF8-A6199936D902}"/>
+                <a16:creationId xmlns:a16="http://schemas.microsoft.com/office/drawing/2014/main" id="{E950B025-076E-4F5D-A3E8-3205037BF9B6}"/>
               </a:ext>
             </a:extLst>
           </p:cNvPr>
@@ -30182,7 +30180,7 @@
           <p:cNvPr id="32" name="">
             <a:extLst xmlns:a="http://schemas.openxmlformats.org/drawingml/2006/main">
               <a:ext uri="{FF2B5EF4-FFF2-40B4-BE49-F238E27FC236}">
-                <a16:creationId xmlns:a16="http://schemas.microsoft.com/office/drawing/2014/main" id="{1D9D974A-C35E-4A38-8F5C-FFDB036B3E71}"/>
+                <a16:creationId xmlns:a16="http://schemas.microsoft.com/office/drawing/2014/main" id="{EDAB6FDD-732C-412F-9AEB-E94296D9541A}"/>
               </a:ext>
             </a:extLst>
           </p:cNvPr>
@@ -30246,7 +30244,7 @@
           <p:cNvPr id="33" name="">
             <a:extLst xmlns:a="http://schemas.openxmlformats.org/drawingml/2006/main">
               <a:ext uri="{FF2B5EF4-FFF2-40B4-BE49-F238E27FC236}">
-                <a16:creationId xmlns:a16="http://schemas.microsoft.com/office/drawing/2014/main" id="{C79472FE-D317-4EB2-BEC2-40CFD556578C}"/>
+                <a16:creationId xmlns:a16="http://schemas.microsoft.com/office/drawing/2014/main" id="{EAF8AFDE-7BF7-4063-AA29-4457DE9DE8A5}"/>
               </a:ext>
             </a:extLst>
           </p:cNvPr>
@@ -30310,7 +30308,7 @@
           <p:cNvPr id="34" name="">
             <a:extLst xmlns:a="http://schemas.openxmlformats.org/drawingml/2006/main">
               <a:ext uri="{FF2B5EF4-FFF2-40B4-BE49-F238E27FC236}">
-                <a16:creationId xmlns:a16="http://schemas.microsoft.com/office/drawing/2014/main" id="{C1367178-E128-4573-B4E5-99D23FB7AFB4}"/>
+                <a16:creationId xmlns:a16="http://schemas.microsoft.com/office/drawing/2014/main" id="{DE664B1F-D31C-4217-AD25-D979AA54BE77}"/>
               </a:ext>
             </a:extLst>
           </p:cNvPr>
@@ -30345,7 +30343,7 @@
           <p:cNvPr id="35" name="">
             <a:extLst xmlns:a="http://schemas.openxmlformats.org/drawingml/2006/main">
               <a:ext uri="{FF2B5EF4-FFF2-40B4-BE49-F238E27FC236}">
-                <a16:creationId xmlns:a16="http://schemas.microsoft.com/office/drawing/2014/main" id="{6B4FFD29-3FD9-4BD1-BCC7-2B01B74042C6}"/>
+                <a16:creationId xmlns:a16="http://schemas.microsoft.com/office/drawing/2014/main" id="{B48D89F3-B9AF-4B83-B6BA-E852A86A3F36}"/>
               </a:ext>
             </a:extLst>
           </p:cNvPr>
@@ -30409,7 +30407,7 @@
           <p:cNvPr id="36" name="">
             <a:extLst xmlns:a="http://schemas.openxmlformats.org/drawingml/2006/main">
               <a:ext uri="{FF2B5EF4-FFF2-40B4-BE49-F238E27FC236}">
-                <a16:creationId xmlns:a16="http://schemas.microsoft.com/office/drawing/2014/main" id="{6E708CED-9A0E-42DB-A441-A1F530D477BF}"/>
+                <a16:creationId xmlns:a16="http://schemas.microsoft.com/office/drawing/2014/main" id="{A7C89771-410D-41F8-AF57-BED47666793F}"/>
               </a:ext>
             </a:extLst>
           </p:cNvPr>
@@ -30473,7 +30471,7 @@
           <p:cNvPr id="37" name="">
             <a:extLst xmlns:a="http://schemas.openxmlformats.org/drawingml/2006/main">
               <a:ext uri="{FF2B5EF4-FFF2-40B4-BE49-F238E27FC236}">
-                <a16:creationId xmlns:a16="http://schemas.microsoft.com/office/drawing/2014/main" id="{2EAE97DE-0FDB-46BF-A322-20A1B52680DD}"/>
+                <a16:creationId xmlns:a16="http://schemas.microsoft.com/office/drawing/2014/main" id="{D0F87923-F212-4DF7-A488-4C37EB002995}"/>
               </a:ext>
             </a:extLst>
           </p:cNvPr>
@@ -30535,7 +30533,7 @@
     </p:spTree>
     <p:extLst>
       <p:ext uri="{BB962C8B-B14F-4D97-AF65-F5344CB8AC3E}">
-        <p14:creationId xmlns:p14="http://schemas.microsoft.com/office/powerpoint/2010/main" val="1099871379"/>
+        <p14:creationId xmlns:p14="http://schemas.microsoft.com/office/powerpoint/2010/main" val="1515518316"/>
       </p:ext>
     </p:extLst>
   </p:cSld>
@@ -30559,7 +30557,7 @@
           <p:cNvPr id="1" name="">
             <a:extLst xmlns:a="http://schemas.openxmlformats.org/drawingml/2006/main">
               <a:ext uri="{FF2B5EF4-FFF2-40B4-BE49-F238E27FC236}">
-                <a16:creationId xmlns:a16="http://schemas.microsoft.com/office/drawing/2014/main" id="{B518404D-2774-4C6B-901E-210480C6A13F}"/>
+                <a16:creationId xmlns:a16="http://schemas.microsoft.com/office/drawing/2014/main" id="{62055D4B-ED32-4DFB-B290-D66CC9FF9C7A}"/>
               </a:ext>
             </a:extLst>
           </p:cNvPr>
@@ -30594,7 +30592,7 @@
           <p:cNvPr id="2" name="">
             <a:extLst xmlns:a="http://schemas.openxmlformats.org/drawingml/2006/main">
               <a:ext uri="{FF2B5EF4-FFF2-40B4-BE49-F238E27FC236}">
-                <a16:creationId xmlns:a16="http://schemas.microsoft.com/office/drawing/2014/main" id="{EF7A8D13-69FE-4BE1-AA86-A8B5153D70F1}"/>
+                <a16:creationId xmlns:a16="http://schemas.microsoft.com/office/drawing/2014/main" id="{3B2074A6-EE5A-4E0C-BC93-202F6DBF7D65}"/>
               </a:ext>
             </a:extLst>
           </p:cNvPr>
@@ -30629,7 +30627,7 @@
           <p:cNvPr id="3" name="">
             <a:extLst xmlns:a="http://schemas.openxmlformats.org/drawingml/2006/main">
               <a:ext uri="{FF2B5EF4-FFF2-40B4-BE49-F238E27FC236}">
-                <a16:creationId xmlns:a16="http://schemas.microsoft.com/office/drawing/2014/main" id="{29C81031-9370-4D02-8E98-EB66D83A1CAB}"/>
+                <a16:creationId xmlns:a16="http://schemas.microsoft.com/office/drawing/2014/main" id="{2AC4EA0A-72CB-4014-9EEB-E24F38460361}"/>
               </a:ext>
             </a:extLst>
           </p:cNvPr>
@@ -30664,7 +30662,7 @@
           <p:cNvPr id="4" name="kicker-04-marker">
             <a:extLst xmlns:a="http://schemas.openxmlformats.org/drawingml/2006/main">
               <a:ext uri="{FF2B5EF4-FFF2-40B4-BE49-F238E27FC236}">
-                <a16:creationId xmlns:a16="http://schemas.microsoft.com/office/drawing/2014/main" id="{FB4EB531-90DB-4FD6-9373-49A9E718DE29}"/>
+                <a16:creationId xmlns:a16="http://schemas.microsoft.com/office/drawing/2014/main" id="{ADBC2BBD-7133-4779-B6D5-77D89C3D519C}"/>
               </a:ext>
             </a:extLst>
           </p:cNvPr>
@@ -30699,7 +30697,7 @@
           <p:cNvPr id="5" name="kicker-04-label">
             <a:extLst xmlns:a="http://schemas.openxmlformats.org/drawingml/2006/main">
               <a:ext uri="{FF2B5EF4-FFF2-40B4-BE49-F238E27FC236}">
-                <a16:creationId xmlns:a16="http://schemas.microsoft.com/office/drawing/2014/main" id="{917FEEBA-29ED-4B7D-808E-EB296EED1CCF}"/>
+                <a16:creationId xmlns:a16="http://schemas.microsoft.com/office/drawing/2014/main" id="{C131535D-EA59-481A-AFDD-C80BFC6EDA54}"/>
               </a:ext>
             </a:extLst>
           </p:cNvPr>
@@ -30763,7 +30761,7 @@
           <p:cNvPr id="6" name="">
             <a:extLst xmlns:a="http://schemas.openxmlformats.org/drawingml/2006/main">
               <a:ext uri="{FF2B5EF4-FFF2-40B4-BE49-F238E27FC236}">
-                <a16:creationId xmlns:a16="http://schemas.microsoft.com/office/drawing/2014/main" id="{89385867-63CE-4B51-97EA-4D04652AA48B}"/>
+                <a16:creationId xmlns:a16="http://schemas.microsoft.com/office/drawing/2014/main" id="{762594F5-9FB0-4C51-8DB0-6AE5180CC065}"/>
               </a:ext>
             </a:extLst>
           </p:cNvPr>
@@ -30827,7 +30825,7 @@
           <p:cNvPr id="7" name="">
             <a:extLst xmlns:a="http://schemas.openxmlformats.org/drawingml/2006/main">
               <a:ext uri="{FF2B5EF4-FFF2-40B4-BE49-F238E27FC236}">
-                <a16:creationId xmlns:a16="http://schemas.microsoft.com/office/drawing/2014/main" id="{665191DB-31D4-4B8B-AD23-84D95DD746D0}"/>
+                <a16:creationId xmlns:a16="http://schemas.microsoft.com/office/drawing/2014/main" id="{537E86CF-F7E8-49B3-9303-DA98251FF95B}"/>
               </a:ext>
             </a:extLst>
           </p:cNvPr>
@@ -30891,7 +30889,7 @@
           <p:cNvPr id="8" name="">
             <a:extLst xmlns:a="http://schemas.openxmlformats.org/drawingml/2006/main">
               <a:ext uri="{FF2B5EF4-FFF2-40B4-BE49-F238E27FC236}">
-                <a16:creationId xmlns:a16="http://schemas.microsoft.com/office/drawing/2014/main" id="{6FF4EE35-61D5-40FF-AB88-174C31E1CA76}"/>
+                <a16:creationId xmlns:a16="http://schemas.microsoft.com/office/drawing/2014/main" id="{687A3394-8A05-4AC7-B1F9-016E61C1E23A}"/>
               </a:ext>
             </a:extLst>
           </p:cNvPr>
@@ -30926,7 +30924,7 @@
           <p:cNvPr id="9" name="">
             <a:extLst xmlns:a="http://schemas.openxmlformats.org/drawingml/2006/main">
               <a:ext uri="{FF2B5EF4-FFF2-40B4-BE49-F238E27FC236}">
-                <a16:creationId xmlns:a16="http://schemas.microsoft.com/office/drawing/2014/main" id="{F10B42E8-7D8A-4046-B1AF-5737103516C3}"/>
+                <a16:creationId xmlns:a16="http://schemas.microsoft.com/office/drawing/2014/main" id="{2A5B3425-FF47-4592-9AF4-A4465912866A}"/>
               </a:ext>
             </a:extLst>
           </p:cNvPr>
@@ -30990,7 +30988,7 @@
           <p:cNvPr id="10" name="">
             <a:extLst xmlns:a="http://schemas.openxmlformats.org/drawingml/2006/main">
               <a:ext uri="{FF2B5EF4-FFF2-40B4-BE49-F238E27FC236}">
-                <a16:creationId xmlns:a16="http://schemas.microsoft.com/office/drawing/2014/main" id="{83901DEA-386D-4049-9D94-C437A23258BB}"/>
+                <a16:creationId xmlns:a16="http://schemas.microsoft.com/office/drawing/2014/main" id="{A7C304D1-F3CB-4E25-8DB1-D81453422E5D}"/>
               </a:ext>
             </a:extLst>
           </p:cNvPr>
@@ -31054,7 +31052,7 @@
           <p:cNvPr id="11" name="">
             <a:extLst xmlns:a="http://schemas.openxmlformats.org/drawingml/2006/main">
               <a:ext uri="{FF2B5EF4-FFF2-40B4-BE49-F238E27FC236}">
-                <a16:creationId xmlns:a16="http://schemas.microsoft.com/office/drawing/2014/main" id="{100BA5E0-865A-4E4B-A3A0-F913E0F42CA4}"/>
+                <a16:creationId xmlns:a16="http://schemas.microsoft.com/office/drawing/2014/main" id="{642E009D-46B4-43B2-A249-FB96A0BAFABB}"/>
               </a:ext>
             </a:extLst>
           </p:cNvPr>
@@ -31118,7 +31116,7 @@
           <p:cNvPr id="12" name="">
             <a:extLst xmlns:a="http://schemas.openxmlformats.org/drawingml/2006/main">
               <a:ext uri="{FF2B5EF4-FFF2-40B4-BE49-F238E27FC236}">
-                <a16:creationId xmlns:a16="http://schemas.microsoft.com/office/drawing/2014/main" id="{0A101280-614E-4EDB-8576-4EAA9B671B06}"/>
+                <a16:creationId xmlns:a16="http://schemas.microsoft.com/office/drawing/2014/main" id="{DE033BC0-7053-4114-A8A5-7C409FFDD5B8}"/>
               </a:ext>
             </a:extLst>
           </p:cNvPr>
@@ -31153,7 +31151,7 @@
           <p:cNvPr id="13" name="">
             <a:extLst xmlns:a="http://schemas.openxmlformats.org/drawingml/2006/main">
               <a:ext uri="{FF2B5EF4-FFF2-40B4-BE49-F238E27FC236}">
-                <a16:creationId xmlns:a16="http://schemas.microsoft.com/office/drawing/2014/main" id="{0048D5E7-959E-4470-AC48-00FEA0B97CF2}"/>
+                <a16:creationId xmlns:a16="http://schemas.microsoft.com/office/drawing/2014/main" id="{D5E912FE-9B93-4167-A15B-13D4CFCD31A6}"/>
               </a:ext>
             </a:extLst>
           </p:cNvPr>
@@ -31186,7 +31184,7 @@
           <p:cNvPr id="14" name="">
             <a:extLst xmlns:a="http://schemas.openxmlformats.org/drawingml/2006/main">
               <a:ext uri="{FF2B5EF4-FFF2-40B4-BE49-F238E27FC236}">
-                <a16:creationId xmlns:a16="http://schemas.microsoft.com/office/drawing/2014/main" id="{32C904DA-BAB3-4A62-8D50-11AC79ED4651}"/>
+                <a16:creationId xmlns:a16="http://schemas.microsoft.com/office/drawing/2014/main" id="{B313CCA2-6040-4779-8C35-48B4FEBFA562}"/>
               </a:ext>
             </a:extLst>
           </p:cNvPr>
@@ -31221,7 +31219,7 @@
           <p:cNvPr id="15" name="">
             <a:extLst xmlns:a="http://schemas.openxmlformats.org/drawingml/2006/main">
               <a:ext uri="{FF2B5EF4-FFF2-40B4-BE49-F238E27FC236}">
-                <a16:creationId xmlns:a16="http://schemas.microsoft.com/office/drawing/2014/main" id="{2DBB475B-B967-4FCE-945E-AA5121D1F32F}"/>
+                <a16:creationId xmlns:a16="http://schemas.microsoft.com/office/drawing/2014/main" id="{7398A6DC-6654-4870-BDBA-F9ADC503EAD4}"/>
               </a:ext>
             </a:extLst>
           </p:cNvPr>
@@ -31285,7 +31283,7 @@
           <p:cNvPr id="16" name="">
             <a:extLst xmlns:a="http://schemas.openxmlformats.org/drawingml/2006/main">
               <a:ext uri="{FF2B5EF4-FFF2-40B4-BE49-F238E27FC236}">
-                <a16:creationId xmlns:a16="http://schemas.microsoft.com/office/drawing/2014/main" id="{C22F4CBA-CE58-42C8-9AE0-8BFCB1B75F62}"/>
+                <a16:creationId xmlns:a16="http://schemas.microsoft.com/office/drawing/2014/main" id="{5E53DD07-4316-46F7-9D99-F3307111F704}"/>
               </a:ext>
             </a:extLst>
           </p:cNvPr>
@@ -31318,7 +31316,7 @@
           <p:cNvPr id="17" name="">
             <a:extLst xmlns:a="http://schemas.openxmlformats.org/drawingml/2006/main">
               <a:ext uri="{FF2B5EF4-FFF2-40B4-BE49-F238E27FC236}">
-                <a16:creationId xmlns:a16="http://schemas.microsoft.com/office/drawing/2014/main" id="{7B8202DC-26F4-411E-AC59-CF48EF264ED1}"/>
+                <a16:creationId xmlns:a16="http://schemas.microsoft.com/office/drawing/2014/main" id="{330C70B7-AB5E-477E-898C-130D123CC572}"/>
               </a:ext>
             </a:extLst>
           </p:cNvPr>
@@ -31382,7 +31380,7 @@
           <p:cNvPr id="18" name="">
             <a:extLst xmlns:a="http://schemas.openxmlformats.org/drawingml/2006/main">
               <a:ext uri="{FF2B5EF4-FFF2-40B4-BE49-F238E27FC236}">
-                <a16:creationId xmlns:a16="http://schemas.microsoft.com/office/drawing/2014/main" id="{1DEF8370-5126-4527-A675-42F72C8DA6A2}"/>
+                <a16:creationId xmlns:a16="http://schemas.microsoft.com/office/drawing/2014/main" id="{194A8230-99F3-491C-94C6-ACFFD5ECD9F8}"/>
               </a:ext>
             </a:extLst>
           </p:cNvPr>
@@ -31446,7 +31444,7 @@
           <p:cNvPr id="19" name="">
             <a:extLst xmlns:a="http://schemas.openxmlformats.org/drawingml/2006/main">
               <a:ext uri="{FF2B5EF4-FFF2-40B4-BE49-F238E27FC236}">
-                <a16:creationId xmlns:a16="http://schemas.microsoft.com/office/drawing/2014/main" id="{612A7095-B101-46D5-AE72-8126457CA532}"/>
+                <a16:creationId xmlns:a16="http://schemas.microsoft.com/office/drawing/2014/main" id="{1AF18D47-7290-4CA6-9DAE-64BC6BA7927B}"/>
               </a:ext>
             </a:extLst>
           </p:cNvPr>
@@ -31479,7 +31477,7 @@
           <p:cNvPr id="20" name="">
             <a:extLst xmlns:a="http://schemas.openxmlformats.org/drawingml/2006/main">
               <a:ext uri="{FF2B5EF4-FFF2-40B4-BE49-F238E27FC236}">
-                <a16:creationId xmlns:a16="http://schemas.microsoft.com/office/drawing/2014/main" id="{BB93302B-1C44-4B75-8BDA-2EF4DCB64322}"/>
+                <a16:creationId xmlns:a16="http://schemas.microsoft.com/office/drawing/2014/main" id="{FA0DA0F6-9D72-4F08-ADB4-D7EB53732AC2}"/>
               </a:ext>
             </a:extLst>
           </p:cNvPr>
@@ -31543,7 +31541,7 @@
           <p:cNvPr id="21" name="">
             <a:extLst xmlns:a="http://schemas.openxmlformats.org/drawingml/2006/main">
               <a:ext uri="{FF2B5EF4-FFF2-40B4-BE49-F238E27FC236}">
-                <a16:creationId xmlns:a16="http://schemas.microsoft.com/office/drawing/2014/main" id="{380091A1-A7F9-47E8-B41A-3B7E89C61F3B}"/>
+                <a16:creationId xmlns:a16="http://schemas.microsoft.com/office/drawing/2014/main" id="{06F538B4-9CFC-4993-A91F-25CE071B62A4}"/>
               </a:ext>
             </a:extLst>
           </p:cNvPr>
@@ -31607,7 +31605,7 @@
           <p:cNvPr id="22" name="">
             <a:extLst xmlns:a="http://schemas.openxmlformats.org/drawingml/2006/main">
               <a:ext uri="{FF2B5EF4-FFF2-40B4-BE49-F238E27FC236}">
-                <a16:creationId xmlns:a16="http://schemas.microsoft.com/office/drawing/2014/main" id="{06903531-1F1B-45D8-95FC-77CF7AF2EB12}"/>
+                <a16:creationId xmlns:a16="http://schemas.microsoft.com/office/drawing/2014/main" id="{FBABB27D-1047-4B80-9C1D-1671F025A5D4}"/>
               </a:ext>
             </a:extLst>
           </p:cNvPr>
@@ -31640,7 +31638,7 @@
           <p:cNvPr id="23" name="">
             <a:extLst xmlns:a="http://schemas.openxmlformats.org/drawingml/2006/main">
               <a:ext uri="{FF2B5EF4-FFF2-40B4-BE49-F238E27FC236}">
-                <a16:creationId xmlns:a16="http://schemas.microsoft.com/office/drawing/2014/main" id="{6BEEEE5C-F683-43F7-ACF4-63207255C193}"/>
+                <a16:creationId xmlns:a16="http://schemas.microsoft.com/office/drawing/2014/main" id="{3DAE3831-B492-4FAC-B8D4-2AB5DBC0BF85}"/>
               </a:ext>
             </a:extLst>
           </p:cNvPr>
@@ -31704,7 +31702,7 @@
           <p:cNvPr id="24" name="">
             <a:extLst xmlns:a="http://schemas.openxmlformats.org/drawingml/2006/main">
               <a:ext uri="{FF2B5EF4-FFF2-40B4-BE49-F238E27FC236}">
-                <a16:creationId xmlns:a16="http://schemas.microsoft.com/office/drawing/2014/main" id="{8E1D474A-AB63-4E59-B921-A55287D20C61}"/>
+                <a16:creationId xmlns:a16="http://schemas.microsoft.com/office/drawing/2014/main" id="{360FB332-A8A0-41A2-9174-29D90845126D}"/>
               </a:ext>
             </a:extLst>
           </p:cNvPr>
@@ -31768,7 +31766,7 @@
           <p:cNvPr id="25" name="">
             <a:extLst xmlns:a="http://schemas.openxmlformats.org/drawingml/2006/main">
               <a:ext uri="{FF2B5EF4-FFF2-40B4-BE49-F238E27FC236}">
-                <a16:creationId xmlns:a16="http://schemas.microsoft.com/office/drawing/2014/main" id="{28937173-1B5C-4A70-8349-EC74C975BCD9}"/>
+                <a16:creationId xmlns:a16="http://schemas.microsoft.com/office/drawing/2014/main" id="{1F88DC16-CBFB-4A3C-9E02-177951AFCB34}"/>
               </a:ext>
             </a:extLst>
           </p:cNvPr>
@@ -31803,7 +31801,7 @@
           <p:cNvPr id="26" name="">
             <a:extLst xmlns:a="http://schemas.openxmlformats.org/drawingml/2006/main">
               <a:ext uri="{FF2B5EF4-FFF2-40B4-BE49-F238E27FC236}">
-                <a16:creationId xmlns:a16="http://schemas.microsoft.com/office/drawing/2014/main" id="{04B62507-806F-4878-9A2C-591B03CA4944}"/>
+                <a16:creationId xmlns:a16="http://schemas.microsoft.com/office/drawing/2014/main" id="{4D5E2C86-F09E-4EE9-9D37-642FFC82CB48}"/>
               </a:ext>
             </a:extLst>
           </p:cNvPr>
@@ -31867,7 +31865,7 @@
           <p:cNvPr id="27" name="">
             <a:extLst xmlns:a="http://schemas.openxmlformats.org/drawingml/2006/main">
               <a:ext uri="{FF2B5EF4-FFF2-40B4-BE49-F238E27FC236}">
-                <a16:creationId xmlns:a16="http://schemas.microsoft.com/office/drawing/2014/main" id="{21C9382E-8775-42A3-8CA9-A573F292BEDC}"/>
+                <a16:creationId xmlns:a16="http://schemas.microsoft.com/office/drawing/2014/main" id="{E98EEA1C-488A-40AF-9488-8D8E5C1C4861}"/>
               </a:ext>
             </a:extLst>
           </p:cNvPr>
@@ -31900,7 +31898,7 @@
           <p:cNvPr id="28" name="">
             <a:extLst xmlns:a="http://schemas.openxmlformats.org/drawingml/2006/main">
               <a:ext uri="{FF2B5EF4-FFF2-40B4-BE49-F238E27FC236}">
-                <a16:creationId xmlns:a16="http://schemas.microsoft.com/office/drawing/2014/main" id="{354B1393-990C-42DA-A854-4EAF0BDF80F0}"/>
+                <a16:creationId xmlns:a16="http://schemas.microsoft.com/office/drawing/2014/main" id="{F4675FEB-0C66-4A49-9CFA-32CB1BC212A7}"/>
               </a:ext>
             </a:extLst>
           </p:cNvPr>
@@ -31964,7 +31962,7 @@
           <p:cNvPr id="29" name="">
             <a:extLst xmlns:a="http://schemas.openxmlformats.org/drawingml/2006/main">
               <a:ext uri="{FF2B5EF4-FFF2-40B4-BE49-F238E27FC236}">
-                <a16:creationId xmlns:a16="http://schemas.microsoft.com/office/drawing/2014/main" id="{87E2B050-4330-40FB-9889-913CEDBB6979}"/>
+                <a16:creationId xmlns:a16="http://schemas.microsoft.com/office/drawing/2014/main" id="{56863266-E8EB-4CC2-B69A-6C1DE19513AC}"/>
               </a:ext>
             </a:extLst>
           </p:cNvPr>
@@ -32028,7 +32026,7 @@
           <p:cNvPr id="30" name="">
             <a:extLst xmlns:a="http://schemas.openxmlformats.org/drawingml/2006/main">
               <a:ext uri="{FF2B5EF4-FFF2-40B4-BE49-F238E27FC236}">
-                <a16:creationId xmlns:a16="http://schemas.microsoft.com/office/drawing/2014/main" id="{2F1DD78D-7F62-4180-A1B5-A67EFE907896}"/>
+                <a16:creationId xmlns:a16="http://schemas.microsoft.com/office/drawing/2014/main" id="{8CB8D371-DC57-4615-A709-CF285D4C3098}"/>
               </a:ext>
             </a:extLst>
           </p:cNvPr>
@@ -32061,7 +32059,7 @@
           <p:cNvPr id="31" name="">
             <a:extLst xmlns:a="http://schemas.openxmlformats.org/drawingml/2006/main">
               <a:ext uri="{FF2B5EF4-FFF2-40B4-BE49-F238E27FC236}">
-                <a16:creationId xmlns:a16="http://schemas.microsoft.com/office/drawing/2014/main" id="{0AB65B71-800F-429B-945A-052CCDA88B0A}"/>
+                <a16:creationId xmlns:a16="http://schemas.microsoft.com/office/drawing/2014/main" id="{01003536-7ABB-44E3-8557-14F60FEA886D}"/>
               </a:ext>
             </a:extLst>
           </p:cNvPr>
@@ -32125,7 +32123,7 @@
           <p:cNvPr id="32" name="">
             <a:extLst xmlns:a="http://schemas.openxmlformats.org/drawingml/2006/main">
               <a:ext uri="{FF2B5EF4-FFF2-40B4-BE49-F238E27FC236}">
-                <a16:creationId xmlns:a16="http://schemas.microsoft.com/office/drawing/2014/main" id="{A0F0833B-5B0B-46B5-8C9C-E5D0AA6E6FFF}"/>
+                <a16:creationId xmlns:a16="http://schemas.microsoft.com/office/drawing/2014/main" id="{27BA3637-7BAB-4980-A43B-FE7AE26F0589}"/>
               </a:ext>
             </a:extLst>
           </p:cNvPr>
@@ -32189,7 +32187,7 @@
           <p:cNvPr id="33" name="">
             <a:extLst xmlns:a="http://schemas.openxmlformats.org/drawingml/2006/main">
               <a:ext uri="{FF2B5EF4-FFF2-40B4-BE49-F238E27FC236}">
-                <a16:creationId xmlns:a16="http://schemas.microsoft.com/office/drawing/2014/main" id="{AE308593-45E3-4495-BB10-838C79EC2C20}"/>
+                <a16:creationId xmlns:a16="http://schemas.microsoft.com/office/drawing/2014/main" id="{E26BDCF1-99BA-40EE-A8E2-FF25D9F86479}"/>
               </a:ext>
             </a:extLst>
           </p:cNvPr>
@@ -32222,7 +32220,7 @@
           <p:cNvPr id="34" name="">
             <a:extLst xmlns:a="http://schemas.openxmlformats.org/drawingml/2006/main">
               <a:ext uri="{FF2B5EF4-FFF2-40B4-BE49-F238E27FC236}">
-                <a16:creationId xmlns:a16="http://schemas.microsoft.com/office/drawing/2014/main" id="{0411D5BD-21D5-4E27-97CE-5EAA5DC9FB3F}"/>
+                <a16:creationId xmlns:a16="http://schemas.microsoft.com/office/drawing/2014/main" id="{446A5CB6-B6F8-4FFD-A87C-DEBBC800FCB5}"/>
               </a:ext>
             </a:extLst>
           </p:cNvPr>
@@ -32286,7 +32284,7 @@
           <p:cNvPr id="35" name="">
             <a:extLst xmlns:a="http://schemas.openxmlformats.org/drawingml/2006/main">
               <a:ext uri="{FF2B5EF4-FFF2-40B4-BE49-F238E27FC236}">
-                <a16:creationId xmlns:a16="http://schemas.microsoft.com/office/drawing/2014/main" id="{E8780749-49FD-457D-8ADF-9E5226599E6A}"/>
+                <a16:creationId xmlns:a16="http://schemas.microsoft.com/office/drawing/2014/main" id="{4CD578E5-CCAC-4EF8-AFFC-49E255D4077B}"/>
               </a:ext>
             </a:extLst>
           </p:cNvPr>
@@ -32350,7 +32348,7 @@
           <p:cNvPr id="36" name="">
             <a:extLst xmlns:a="http://schemas.openxmlformats.org/drawingml/2006/main">
               <a:ext uri="{FF2B5EF4-FFF2-40B4-BE49-F238E27FC236}">
-                <a16:creationId xmlns:a16="http://schemas.microsoft.com/office/drawing/2014/main" id="{41B74123-AEEC-4E26-A3B3-4E1D3E412421}"/>
+                <a16:creationId xmlns:a16="http://schemas.microsoft.com/office/drawing/2014/main" id="{6A3A1CF5-9087-4C48-859B-27288373DA6E}"/>
               </a:ext>
             </a:extLst>
           </p:cNvPr>
@@ -32385,7 +32383,7 @@
           <p:cNvPr id="37" name="">
             <a:extLst xmlns:a="http://schemas.openxmlformats.org/drawingml/2006/main">
               <a:ext uri="{FF2B5EF4-FFF2-40B4-BE49-F238E27FC236}">
-                <a16:creationId xmlns:a16="http://schemas.microsoft.com/office/drawing/2014/main" id="{899F912E-9535-40A8-AD34-74C10410005E}"/>
+                <a16:creationId xmlns:a16="http://schemas.microsoft.com/office/drawing/2014/main" id="{AE9FFF4B-B851-49F7-9E9A-2A059B29773D}"/>
               </a:ext>
             </a:extLst>
           </p:cNvPr>
@@ -32449,7 +32447,7 @@
           <p:cNvPr id="38" name="">
             <a:extLst xmlns:a="http://schemas.openxmlformats.org/drawingml/2006/main">
               <a:ext uri="{FF2B5EF4-FFF2-40B4-BE49-F238E27FC236}">
-                <a16:creationId xmlns:a16="http://schemas.microsoft.com/office/drawing/2014/main" id="{DEB64669-2317-4D75-946B-576E6EE8A9D0}"/>
+                <a16:creationId xmlns:a16="http://schemas.microsoft.com/office/drawing/2014/main" id="{403C1D6D-D351-4676-8656-696558CD5434}"/>
               </a:ext>
             </a:extLst>
           </p:cNvPr>
@@ -32513,7 +32511,7 @@
           <p:cNvPr id="39" name="">
             <a:extLst xmlns:a="http://schemas.openxmlformats.org/drawingml/2006/main">
               <a:ext uri="{FF2B5EF4-FFF2-40B4-BE49-F238E27FC236}">
-                <a16:creationId xmlns:a16="http://schemas.microsoft.com/office/drawing/2014/main" id="{F88F6AA7-A091-4D74-9041-EE71B08DDE16}"/>
+                <a16:creationId xmlns:a16="http://schemas.microsoft.com/office/drawing/2014/main" id="{D172AC77-4AE3-45D7-AE0C-A80694C9C05E}"/>
               </a:ext>
             </a:extLst>
           </p:cNvPr>
@@ -32577,7 +32575,7 @@
           <p:cNvPr id="40" name="">
             <a:extLst xmlns:a="http://schemas.openxmlformats.org/drawingml/2006/main">
               <a:ext uri="{FF2B5EF4-FFF2-40B4-BE49-F238E27FC236}">
-                <a16:creationId xmlns:a16="http://schemas.microsoft.com/office/drawing/2014/main" id="{56394C31-2C4C-4A01-8496-F76044F4510E}"/>
+                <a16:creationId xmlns:a16="http://schemas.microsoft.com/office/drawing/2014/main" id="{E7D1743C-0DE8-48EF-A498-C2D3338D107F}"/>
               </a:ext>
             </a:extLst>
           </p:cNvPr>
@@ -32612,7 +32610,7 @@
           <p:cNvPr id="41" name="">
             <a:extLst xmlns:a="http://schemas.openxmlformats.org/drawingml/2006/main">
               <a:ext uri="{FF2B5EF4-FFF2-40B4-BE49-F238E27FC236}">
-                <a16:creationId xmlns:a16="http://schemas.microsoft.com/office/drawing/2014/main" id="{5D137907-BFA6-48C9-BF8B-5A28D5D7375F}"/>
+                <a16:creationId xmlns:a16="http://schemas.microsoft.com/office/drawing/2014/main" id="{70A3F12F-4C32-4C61-BFA7-6AFBBB825557}"/>
               </a:ext>
             </a:extLst>
           </p:cNvPr>
@@ -32647,7 +32645,7 @@
           <p:cNvPr id="42" name="">
             <a:extLst xmlns:a="http://schemas.openxmlformats.org/drawingml/2006/main">
               <a:ext uri="{FF2B5EF4-FFF2-40B4-BE49-F238E27FC236}">
-                <a16:creationId xmlns:a16="http://schemas.microsoft.com/office/drawing/2014/main" id="{DD6FC0B7-9DDA-43A0-B784-6CB39A2898F1}"/>
+                <a16:creationId xmlns:a16="http://schemas.microsoft.com/office/drawing/2014/main" id="{90B479DE-371C-476B-B142-A5C2089D191B}"/>
               </a:ext>
             </a:extLst>
           </p:cNvPr>
@@ -32682,7 +32680,7 @@
           <p:cNvPr id="43" name="kicker-04-marker">
             <a:extLst xmlns:a="http://schemas.openxmlformats.org/drawingml/2006/main">
               <a:ext uri="{FF2B5EF4-FFF2-40B4-BE49-F238E27FC236}">
-                <a16:creationId xmlns:a16="http://schemas.microsoft.com/office/drawing/2014/main" id="{0F01E2F9-8418-4AF4-9B93-6B40D49CEF0A}"/>
+                <a16:creationId xmlns:a16="http://schemas.microsoft.com/office/drawing/2014/main" id="{CB78A478-9E29-4291-96B7-6A2D8F9D3821}"/>
               </a:ext>
             </a:extLst>
           </p:cNvPr>
@@ -32717,7 +32715,7 @@
           <p:cNvPr id="44" name="kicker-04-label">
             <a:extLst xmlns:a="http://schemas.openxmlformats.org/drawingml/2006/main">
               <a:ext uri="{FF2B5EF4-FFF2-40B4-BE49-F238E27FC236}">
-                <a16:creationId xmlns:a16="http://schemas.microsoft.com/office/drawing/2014/main" id="{B166748F-B271-4211-BB66-AF2718EDE302}"/>
+                <a16:creationId xmlns:a16="http://schemas.microsoft.com/office/drawing/2014/main" id="{7F4553DE-3F47-46DF-A8A7-EF5114EADEC0}"/>
               </a:ext>
             </a:extLst>
           </p:cNvPr>
@@ -32781,7 +32779,7 @@
           <p:cNvPr id="45" name="">
             <a:extLst xmlns:a="http://schemas.openxmlformats.org/drawingml/2006/main">
               <a:ext uri="{FF2B5EF4-FFF2-40B4-BE49-F238E27FC236}">
-                <a16:creationId xmlns:a16="http://schemas.microsoft.com/office/drawing/2014/main" id="{7E20DF26-9336-4CF8-BBE2-137D7FB37B2D}"/>
+                <a16:creationId xmlns:a16="http://schemas.microsoft.com/office/drawing/2014/main" id="{F6EB4AC3-149F-4CDF-8368-028262911638}"/>
               </a:ext>
             </a:extLst>
           </p:cNvPr>
@@ -32845,7 +32843,7 @@
           <p:cNvPr id="46" name="">
             <a:extLst xmlns:a="http://schemas.openxmlformats.org/drawingml/2006/main">
               <a:ext uri="{FF2B5EF4-FFF2-40B4-BE49-F238E27FC236}">
-                <a16:creationId xmlns:a16="http://schemas.microsoft.com/office/drawing/2014/main" id="{B2658F3D-FB93-4892-9F2E-B8838CA9FCE9}"/>
+                <a16:creationId xmlns:a16="http://schemas.microsoft.com/office/drawing/2014/main" id="{4B93865D-F7BB-4FD4-8A8D-C7C6956E2684}"/>
               </a:ext>
             </a:extLst>
           </p:cNvPr>
@@ -32909,7 +32907,7 @@
           <p:cNvPr id="47" name="">
             <a:extLst xmlns:a="http://schemas.openxmlformats.org/drawingml/2006/main">
               <a:ext uri="{FF2B5EF4-FFF2-40B4-BE49-F238E27FC236}">
-                <a16:creationId xmlns:a16="http://schemas.microsoft.com/office/drawing/2014/main" id="{FA314F3C-A538-4824-8B13-FDACB3D31313}"/>
+                <a16:creationId xmlns:a16="http://schemas.microsoft.com/office/drawing/2014/main" id="{DD159306-E02D-424A-B0C8-81E51D26103F}"/>
               </a:ext>
             </a:extLst>
           </p:cNvPr>
@@ -32944,7 +32942,7 @@
           <p:cNvPr id="48" name="">
             <a:extLst xmlns:a="http://schemas.openxmlformats.org/drawingml/2006/main">
               <a:ext uri="{FF2B5EF4-FFF2-40B4-BE49-F238E27FC236}">
-                <a16:creationId xmlns:a16="http://schemas.microsoft.com/office/drawing/2014/main" id="{B6B32EC5-EE3E-4D1A-9BD3-BC79E0E25B21}"/>
+                <a16:creationId xmlns:a16="http://schemas.microsoft.com/office/drawing/2014/main" id="{333C2964-4041-472D-8B63-D2C6A16D3C30}"/>
               </a:ext>
             </a:extLst>
           </p:cNvPr>
@@ -32979,7 +32977,7 @@
           <p:cNvPr id="49" name="">
             <a:extLst xmlns:a="http://schemas.openxmlformats.org/drawingml/2006/main">
               <a:ext uri="{FF2B5EF4-FFF2-40B4-BE49-F238E27FC236}">
-                <a16:creationId xmlns:a16="http://schemas.microsoft.com/office/drawing/2014/main" id="{5390A979-0039-49AA-9488-69AB3211A7FB}"/>
+                <a16:creationId xmlns:a16="http://schemas.microsoft.com/office/drawing/2014/main" id="{E6F567A0-983C-4401-82E9-E7604AC6D34A}"/>
               </a:ext>
             </a:extLst>
           </p:cNvPr>
@@ -33014,7 +33012,7 @@
           <p:cNvPr id="50" name="">
             <a:extLst xmlns:a="http://schemas.openxmlformats.org/drawingml/2006/main">
               <a:ext uri="{FF2B5EF4-FFF2-40B4-BE49-F238E27FC236}">
-                <a16:creationId xmlns:a16="http://schemas.microsoft.com/office/drawing/2014/main" id="{5A23DB0A-EE17-4913-8E1D-CDE8DD1B295F}"/>
+                <a16:creationId xmlns:a16="http://schemas.microsoft.com/office/drawing/2014/main" id="{2BECE049-71A4-4894-B258-479FD4EADEF6}"/>
               </a:ext>
             </a:extLst>
           </p:cNvPr>
@@ -33049,7 +33047,7 @@
           <p:cNvPr id="51" name="">
             <a:extLst xmlns:a="http://schemas.openxmlformats.org/drawingml/2006/main">
               <a:ext uri="{FF2B5EF4-FFF2-40B4-BE49-F238E27FC236}">
-                <a16:creationId xmlns:a16="http://schemas.microsoft.com/office/drawing/2014/main" id="{62648D89-D97F-49B0-8FD7-89AC3FD7A6B1}"/>
+                <a16:creationId xmlns:a16="http://schemas.microsoft.com/office/drawing/2014/main" id="{E59B75BA-6E00-4F49-B5D2-38811D693CD3}"/>
               </a:ext>
             </a:extLst>
           </p:cNvPr>
@@ -33113,7 +33111,7 @@
           <p:cNvPr id="52" name="">
             <a:extLst xmlns:a="http://schemas.openxmlformats.org/drawingml/2006/main">
               <a:ext uri="{FF2B5EF4-FFF2-40B4-BE49-F238E27FC236}">
-                <a16:creationId xmlns:a16="http://schemas.microsoft.com/office/drawing/2014/main" id="{BCAC9DEE-9CCE-4F79-92DB-C7F312E4F07A}"/>
+                <a16:creationId xmlns:a16="http://schemas.microsoft.com/office/drawing/2014/main" id="{5A37D74A-256C-4F55-8B54-C0CD867E77C0}"/>
               </a:ext>
             </a:extLst>
           </p:cNvPr>
@@ -33177,7 +33175,7 @@
           <p:cNvPr id="53" name="">
             <a:extLst xmlns:a="http://schemas.openxmlformats.org/drawingml/2006/main">
               <a:ext uri="{FF2B5EF4-FFF2-40B4-BE49-F238E27FC236}">
-                <a16:creationId xmlns:a16="http://schemas.microsoft.com/office/drawing/2014/main" id="{3958A2A7-FB15-427C-BE5D-FF8CFF203B1A}"/>
+                <a16:creationId xmlns:a16="http://schemas.microsoft.com/office/drawing/2014/main" id="{DEBD9510-164C-4DBB-9007-9A03B73A831F}"/>
               </a:ext>
             </a:extLst>
           </p:cNvPr>
@@ -33239,7 +33237,7 @@
     </p:spTree>
     <p:extLst>
       <p:ext uri="{BB962C8B-B14F-4D97-AF65-F5344CB8AC3E}">
-        <p14:creationId xmlns:p14="http://schemas.microsoft.com/office/powerpoint/2010/main" val="688166367"/>
+        <p14:creationId xmlns:p14="http://schemas.microsoft.com/office/powerpoint/2010/main" val="214147803"/>
       </p:ext>
     </p:extLst>
   </p:cSld>
